--- a/mat_did/Material GIT/Apresentação do GIT.pptx
+++ b/mat_did/Material GIT/Apresentação do GIT.pptx
@@ -6,25 +6,25 @@
   </p:sldMasterIdLst>
   <p:sldIdLst>
     <p:sldId id="256" r:id="rId2"/>
-    <p:sldId id="269" r:id="rId3"/>
-    <p:sldId id="257" r:id="rId4"/>
-    <p:sldId id="258" r:id="rId5"/>
-    <p:sldId id="259" r:id="rId6"/>
-    <p:sldId id="263" r:id="rId7"/>
-    <p:sldId id="260" r:id="rId8"/>
-    <p:sldId id="264" r:id="rId9"/>
-    <p:sldId id="265" r:id="rId10"/>
-    <p:sldId id="267" r:id="rId11"/>
-    <p:sldId id="268" r:id="rId12"/>
-    <p:sldId id="261" r:id="rId13"/>
-    <p:sldId id="262" r:id="rId14"/>
-    <p:sldId id="270" r:id="rId15"/>
-    <p:sldId id="271" r:id="rId16"/>
-    <p:sldId id="272" r:id="rId17"/>
-    <p:sldId id="273" r:id="rId18"/>
-    <p:sldId id="275" r:id="rId19"/>
-    <p:sldId id="276" r:id="rId20"/>
-    <p:sldId id="277" r:id="rId21"/>
+    <p:sldId id="257" r:id="rId3"/>
+    <p:sldId id="258" r:id="rId4"/>
+    <p:sldId id="259" r:id="rId5"/>
+    <p:sldId id="263" r:id="rId6"/>
+    <p:sldId id="260" r:id="rId7"/>
+    <p:sldId id="264" r:id="rId8"/>
+    <p:sldId id="265" r:id="rId9"/>
+    <p:sldId id="267" r:id="rId10"/>
+    <p:sldId id="268" r:id="rId11"/>
+    <p:sldId id="261" r:id="rId12"/>
+    <p:sldId id="273" r:id="rId13"/>
+    <p:sldId id="275" r:id="rId14"/>
+    <p:sldId id="276" r:id="rId15"/>
+    <p:sldId id="277" r:id="rId16"/>
+    <p:sldId id="269" r:id="rId17"/>
+    <p:sldId id="262" r:id="rId18"/>
+    <p:sldId id="270" r:id="rId19"/>
+    <p:sldId id="271" r:id="rId20"/>
+    <p:sldId id="272" r:id="rId21"/>
     <p:sldId id="266" r:id="rId22"/>
   </p:sldIdLst>
   <p:sldSz cx="12192000" cy="6858000"/>
@@ -135,7 +135,7 @@
 <file path=ppt/revisionInfo.xml><?xml version="1.0" encoding="utf-8"?>
 <p1510:revInfo xmlns:a="http://schemas.openxmlformats.org/drawingml/2006/main" xmlns:r="http://schemas.openxmlformats.org/officeDocument/2006/relationships" xmlns:p1510="http://schemas.microsoft.com/office/powerpoint/2015/10/main">
   <p1510:revLst>
-    <p1510:client id="{28FAA37B-992D-4FF8-B296-436558A1F2C8}" v="15" dt="2026-04-28T15:42:15.675"/>
+    <p1510:client id="{28FAA37B-992D-4FF8-B296-436558A1F2C8}" v="225" dt="2026-04-28T16:25:58.359"/>
     <p1510:client id="{610849D6-C85D-4B35-99CD-8522A345350E}" v="2279" dt="2026-04-27T15:07:06.276"/>
     <p1510:client id="{8E7718AC-2879-46FD-AC97-422BF3633D83}" v="329" dt="2026-04-27T15:57:17.213"/>
     <p1510:client id="{F774D46D-85C0-4673-8C61-ACC0FE538728}" v="464" dt="2026-04-28T15:33:08.594"/>
@@ -7757,7 +7757,7 @@
           <p:cNvPr id="2" name="Título 1">
             <a:extLst>
               <a:ext uri="{FF2B5EF4-FFF2-40B4-BE49-F238E27FC236}">
-                <a16:creationId xmlns:a16="http://schemas.microsoft.com/office/drawing/2014/main" id="{9646584F-2CC3-22FF-0F7E-DCE89C6BCCFC}"/>
+                <a16:creationId xmlns:a16="http://schemas.microsoft.com/office/drawing/2014/main" id="{0DEF8084-7A69-D88B-DD92-AD8F7B6757DE}"/>
               </a:ext>
             </a:extLst>
           </p:cNvPr>
@@ -7774,17 +7774,9 @@
           <a:lstStyle/>
           <a:p>
             <a:r>
-              <a:rPr lang="pt-BR" sz="3600" b="0" i="0" u="none" strike="noStrike" baseline="0">
-                <a:solidFill>
-                  <a:srgbClr val="FFFFFF"/>
-                </a:solidFill>
-                <a:latin typeface="Century Gothic"/>
-                <a:ea typeface="Century Gothic"/>
-                <a:cs typeface="Century Gothic"/>
-              </a:rPr>
+              <a:rPr lang="pt-BR"/>
               <a:t>Alguns comandos </a:t>
             </a:r>
-            <a:endParaRPr lang="pt-BR"/>
           </a:p>
         </p:txBody>
       </p:sp>
@@ -7793,7 +7785,7 @@
           <p:cNvPr id="3" name="Espaço Reservado para Conteúdo 2">
             <a:extLst>
               <a:ext uri="{FF2B5EF4-FFF2-40B4-BE49-F238E27FC236}">
-                <a16:creationId xmlns:a16="http://schemas.microsoft.com/office/drawing/2014/main" id="{DD305F9A-3AAB-9049-CB5F-02F98746F5FC}"/>
+                <a16:creationId xmlns:a16="http://schemas.microsoft.com/office/drawing/2014/main" id="{D312AA97-8EE4-FED2-B27E-BBB3F58BC66A}"/>
               </a:ext>
             </a:extLst>
           </p:cNvPr>
@@ -7807,7 +7799,7 @@
         <p:spPr>
           <a:xfrm>
             <a:off x="2589212" y="2133600"/>
-            <a:ext cx="8915400" cy="3650622"/>
+            <a:ext cx="8915400" cy="2830007"/>
           </a:xfrm>
           <a:solidFill>
             <a:schemeClr val="tx1">
@@ -7822,7 +7814,7 @@
         </p:spPr>
         <p:txBody>
           <a:bodyPr vert="horz" lIns="91440" tIns="45720" rIns="91440" bIns="45720" rtlCol="0" anchor="t">
-            <a:normAutofit lnSpcReduction="10000"/>
+            <a:normAutofit/>
           </a:bodyPr>
           <a:lstStyle/>
           <a:p>
@@ -7831,12 +7823,46 @@
               <a:buChar char="v"/>
             </a:pPr>
             <a:r>
+              <a:rPr lang="pt-BR" sz="1600" b="1" dirty="0" err="1">
+                <a:solidFill>
+                  <a:srgbClr val="FFC000"/>
+                </a:solidFill>
+                <a:latin typeface="Consolas"/>
+              </a:rPr>
+              <a:t>git</a:t>
+            </a:r>
+            <a:r>
+              <a:rPr lang="pt-BR" sz="1600" b="1" dirty="0">
+                <a:solidFill>
+                  <a:srgbClr val="FFC000"/>
+                </a:solidFill>
+                <a:latin typeface="Consolas"/>
+              </a:rPr>
+              <a:t> reset –hard</a:t>
+            </a:r>
+            <a:r>
+              <a:rPr lang="pt-BR" b="1" i="1" dirty="0">
+                <a:solidFill>
+                  <a:schemeClr val="bg1"/>
+                </a:solidFill>
+              </a:rPr>
+              <a:t>:</a:t>
+            </a:r>
+            <a:r>
+              <a:rPr lang="pt-BR" b="1" dirty="0">
+                <a:solidFill>
+                  <a:schemeClr val="bg1"/>
+                </a:solidFill>
+              </a:rPr>
+              <a:t> descarta todas as mudanças até o último </a:t>
+            </a:r>
+            <a:r>
               <a:rPr lang="pt-BR" b="1" i="1" dirty="0" err="1">
                 <a:solidFill>
                   <a:schemeClr val="bg1"/>
                 </a:solidFill>
               </a:rPr>
-              <a:t>git</a:t>
+              <a:t>commit</a:t>
             </a:r>
             <a:r>
               <a:rPr lang="pt-BR" b="1" i="1" dirty="0">
@@ -7844,24 +7870,13 @@
                   <a:schemeClr val="bg1"/>
                 </a:solidFill>
               </a:rPr>
-              <a:t> </a:t>
-            </a:r>
-            <a:r>
-              <a:rPr lang="pt-BR" b="1" i="1" dirty="0" err="1">
-                <a:solidFill>
-                  <a:schemeClr val="bg1"/>
-                </a:solidFill>
-              </a:rPr>
-              <a:t>branch</a:t>
-            </a:r>
-            <a:r>
-              <a:rPr lang="pt-BR" b="1" dirty="0">
-                <a:solidFill>
-                  <a:schemeClr val="bg1"/>
-                </a:solidFill>
-              </a:rPr>
-              <a:t>: mostra todas as ramificações locais.</a:t>
-            </a:r>
+              <a:t>.</a:t>
+            </a:r>
+            <a:endParaRPr lang="pt-BR" b="1" dirty="0">
+              <a:solidFill>
+                <a:schemeClr val="bg1"/>
+              </a:solidFill>
+            </a:endParaRPr>
           </a:p>
           <a:p>
             <a:pPr>
@@ -7869,68 +7884,63 @@
               <a:buChar char="v"/>
             </a:pPr>
             <a:r>
+              <a:rPr lang="pt-BR" sz="1600" b="1" dirty="0" err="1">
+                <a:solidFill>
+                  <a:srgbClr val="FFC000"/>
+                </a:solidFill>
+                <a:latin typeface="Consolas"/>
+              </a:rPr>
+              <a:t>Git</a:t>
+            </a:r>
+            <a:r>
+              <a:rPr lang="pt-BR" sz="1600" b="1" dirty="0">
+                <a:solidFill>
+                  <a:srgbClr val="FFC000"/>
+                </a:solidFill>
+                <a:latin typeface="Consolas"/>
+              </a:rPr>
+              <a:t> merge </a:t>
+            </a:r>
+            <a:r>
+              <a:rPr lang="pt-BR" sz="1600" b="1" dirty="0" err="1">
+                <a:solidFill>
+                  <a:srgbClr val="FFC000"/>
+                </a:solidFill>
+                <a:latin typeface="Consolas"/>
+              </a:rPr>
+              <a:t>branch_A</a:t>
+            </a:r>
+            <a:r>
+              <a:rPr lang="pt-BR" b="1" i="1" dirty="0">
+                <a:solidFill>
+                  <a:schemeClr val="bg1"/>
+                </a:solidFill>
+              </a:rPr>
+              <a:t>: </a:t>
+            </a:r>
+            <a:r>
+              <a:rPr lang="pt-BR" b="1" dirty="0">
+                <a:solidFill>
+                  <a:schemeClr val="bg1"/>
+                </a:solidFill>
+              </a:rPr>
+              <a:t>merge as alterações do ramo chamado </a:t>
+            </a:r>
+            <a:r>
               <a:rPr lang="pt-BR" b="1" i="1" dirty="0" err="1">
                 <a:solidFill>
                   <a:schemeClr val="bg1"/>
                 </a:solidFill>
               </a:rPr>
-              <a:t>git</a:t>
-            </a:r>
-            <a:r>
-              <a:rPr lang="pt-BR" b="1" i="1" dirty="0">
+              <a:t>branch_A</a:t>
+            </a:r>
+            <a:r>
+              <a:rPr lang="pt-BR" b="1" dirty="0">
                 <a:solidFill>
                   <a:schemeClr val="bg1"/>
                 </a:solidFill>
               </a:rPr>
-              <a:t> </a:t>
-            </a:r>
-            <a:r>
-              <a:rPr lang="pt-BR" b="1" i="1" dirty="0" err="1">
-                <a:solidFill>
-                  <a:schemeClr val="bg1"/>
-                </a:solidFill>
-              </a:rPr>
-              <a:t>branch</a:t>
-            </a:r>
-            <a:r>
-              <a:rPr lang="pt-BR" b="1" i="1" dirty="0">
-                <a:solidFill>
-                  <a:schemeClr val="bg1"/>
-                </a:solidFill>
-              </a:rPr>
-              <a:t> (</a:t>
-            </a:r>
-            <a:r>
-              <a:rPr lang="pt-BR" b="1" i="1" dirty="0" err="1">
-                <a:solidFill>
-                  <a:schemeClr val="bg1"/>
-                </a:solidFill>
-              </a:rPr>
-              <a:t>new_branch</a:t>
-            </a:r>
-            <a:r>
-              <a:rPr lang="pt-BR" b="1" dirty="0">
-                <a:solidFill>
-                  <a:schemeClr val="bg1"/>
-                </a:solidFill>
-              </a:rPr>
-              <a:t>): cria uma nova ramificação do projeto chamada </a:t>
-            </a:r>
-            <a:r>
-              <a:rPr lang="pt-BR" b="1" i="1" dirty="0" err="1">
-                <a:solidFill>
-                  <a:schemeClr val="bg1"/>
-                </a:solidFill>
-              </a:rPr>
-              <a:t>new_branch</a:t>
-            </a:r>
-            <a:r>
-              <a:rPr lang="pt-BR" b="1" i="1" dirty="0">
-                <a:solidFill>
-                  <a:schemeClr val="bg1"/>
-                </a:solidFill>
-              </a:rPr>
-              <a:t>.</a:t>
+              <a:t> no ramo principal ou o ramo que se está visualizando. </a:t>
             </a:r>
           </a:p>
           <a:p>
@@ -7939,44 +7949,39 @@
               <a:buChar char="v"/>
             </a:pPr>
             <a:r>
-              <a:rPr lang="pt-BR" b="1" i="1" dirty="0" err="1">
+              <a:rPr lang="pt-BR" sz="1600" b="1" dirty="0" err="1">
+                <a:solidFill>
+                  <a:srgbClr val="FFC000"/>
+                </a:solidFill>
+                <a:latin typeface="Consolas"/>
+              </a:rPr>
+              <a:t>git</a:t>
+            </a:r>
+            <a:r>
+              <a:rPr lang="pt-BR" sz="1600" b="1" dirty="0">
+                <a:solidFill>
+                  <a:srgbClr val="FFC000"/>
+                </a:solidFill>
+                <a:latin typeface="Consolas"/>
+              </a:rPr>
+              <a:t> </a:t>
+            </a:r>
+            <a:r>
+              <a:rPr lang="pt-BR" sz="1600" b="1" dirty="0" err="1">
+                <a:solidFill>
+                  <a:srgbClr val="FFC000"/>
+                </a:solidFill>
+                <a:latin typeface="Consolas"/>
+              </a:rPr>
+              <a:t>pull</a:t>
+            </a:r>
+            <a:r>
+              <a:rPr lang="pt-BR" b="1" dirty="0">
                 <a:solidFill>
                   <a:schemeClr val="bg1"/>
                 </a:solidFill>
               </a:rPr>
-              <a:t>git</a:t>
-            </a:r>
-            <a:r>
-              <a:rPr lang="pt-BR" b="1" i="1" dirty="0">
-                <a:solidFill>
-                  <a:schemeClr val="bg1"/>
-                </a:solidFill>
-              </a:rPr>
-              <a:t> checkout </a:t>
-            </a:r>
-            <a:r>
-              <a:rPr lang="pt-BR" b="1" i="1" dirty="0" err="1">
-                <a:solidFill>
-                  <a:schemeClr val="bg1"/>
-                </a:solidFill>
-              </a:rPr>
-              <a:t>branch_A</a:t>
-            </a:r>
-            <a:r>
-              <a:rPr lang="pt-BR" b="1" i="1" dirty="0">
-                <a:solidFill>
-                  <a:schemeClr val="bg1"/>
-                </a:solidFill>
-              </a:rPr>
-              <a:t>: </a:t>
-            </a:r>
-            <a:r>
-              <a:rPr lang="pt-BR" b="1" dirty="0">
-                <a:solidFill>
-                  <a:schemeClr val="bg1"/>
-                </a:solidFill>
-              </a:rPr>
-              <a:t>muda para uma versão diferente do projeto podendo visualizar também uma versão anterior.</a:t>
+              <a:t>: pega as alterações da versão de origem de um arquivo e merge com a versão local.</a:t>
             </a:r>
           </a:p>
           <a:p>
@@ -7985,76 +7990,39 @@
               <a:buChar char="v"/>
             </a:pPr>
             <a:r>
-              <a:rPr lang="pt-BR" b="1" i="1" dirty="0" err="1">
+              <a:rPr lang="pt-BR" sz="1600" b="1" dirty="0" err="1">
+                <a:solidFill>
+                  <a:srgbClr val="FFC000"/>
+                </a:solidFill>
+                <a:latin typeface="Consolas"/>
+              </a:rPr>
+              <a:t>Git</a:t>
+            </a:r>
+            <a:r>
+              <a:rPr lang="pt-BR" sz="1600" b="1" dirty="0">
+                <a:solidFill>
+                  <a:srgbClr val="FFC000"/>
+                </a:solidFill>
+                <a:latin typeface="Consolas"/>
+              </a:rPr>
+              <a:t> </a:t>
+            </a:r>
+            <a:r>
+              <a:rPr lang="pt-BR" sz="1600" b="1" dirty="0" err="1">
+                <a:solidFill>
+                  <a:srgbClr val="FFC000"/>
+                </a:solidFill>
+                <a:latin typeface="Consolas"/>
+              </a:rPr>
+              <a:t>push</a:t>
+            </a:r>
+            <a:r>
+              <a:rPr lang="pt-BR" b="1" dirty="0">
                 <a:solidFill>
                   <a:schemeClr val="bg1"/>
                 </a:solidFill>
               </a:rPr>
-              <a:t>git</a:t>
-            </a:r>
-            <a:r>
-              <a:rPr lang="pt-BR" b="1" i="1" dirty="0">
-                <a:solidFill>
-                  <a:schemeClr val="bg1"/>
-                </a:solidFill>
-              </a:rPr>
-              <a:t> </a:t>
-            </a:r>
-            <a:r>
-              <a:rPr lang="pt-BR" b="1" i="1" dirty="0" err="1">
-                <a:solidFill>
-                  <a:schemeClr val="bg1"/>
-                </a:solidFill>
-              </a:rPr>
-              <a:t>tag</a:t>
-            </a:r>
-            <a:r>
-              <a:rPr lang="pt-BR" b="1" i="1" dirty="0">
-                <a:solidFill>
-                  <a:schemeClr val="bg1"/>
-                </a:solidFill>
-              </a:rPr>
-              <a:t> </a:t>
-            </a:r>
-            <a:r>
-              <a:rPr lang="pt-BR" b="1" i="1" dirty="0" err="1">
-                <a:solidFill>
-                  <a:schemeClr val="bg1"/>
-                </a:solidFill>
-              </a:rPr>
-              <a:t>new_tag</a:t>
-            </a:r>
-            <a:r>
-              <a:rPr lang="pt-BR" b="1" i="1" dirty="0">
-                <a:solidFill>
-                  <a:schemeClr val="bg1"/>
-                </a:solidFill>
-              </a:rPr>
-              <a:t>: </a:t>
-            </a:r>
-            <a:r>
-              <a:rPr lang="pt-BR" b="1" dirty="0">
-                <a:solidFill>
-                  <a:schemeClr val="bg1"/>
-                </a:solidFill>
-              </a:rPr>
-              <a:t>cria uma 'etiqueta' para a versão em que se está visualizando chamada </a:t>
-            </a:r>
-            <a:r>
-              <a:rPr lang="pt-BR" b="1" i="1" dirty="0" err="1">
-                <a:solidFill>
-                  <a:schemeClr val="bg1"/>
-                </a:solidFill>
-              </a:rPr>
-              <a:t>new_tag</a:t>
-            </a:r>
-            <a:r>
-              <a:rPr lang="pt-BR" b="1" i="1" dirty="0">
-                <a:solidFill>
-                  <a:schemeClr val="bg1"/>
-                </a:solidFill>
-              </a:rPr>
-              <a:t>.</a:t>
+              <a:t>: merge as alterações locais na versão de origem de um arquivo.</a:t>
             </a:r>
           </a:p>
           <a:p>
@@ -8063,20 +8031,64 @@
               <a:buChar char="v"/>
             </a:pPr>
             <a:r>
-              <a:rPr lang="pt-BR" b="1" i="1" dirty="0" err="1">
+              <a:rPr lang="pt-BR" sz="1600" b="1" dirty="0" err="1">
+                <a:solidFill>
+                  <a:srgbClr val="FFC000"/>
+                </a:solidFill>
+                <a:latin typeface="Consolas"/>
+              </a:rPr>
+              <a:t>Git</a:t>
+            </a:r>
+            <a:r>
+              <a:rPr lang="pt-BR" sz="1600" b="1" dirty="0">
+                <a:solidFill>
+                  <a:srgbClr val="FFC000"/>
+                </a:solidFill>
+                <a:latin typeface="Consolas"/>
+              </a:rPr>
+              <a:t> </a:t>
+            </a:r>
+            <a:r>
+              <a:rPr lang="pt-BR" sz="1600" b="1" dirty="0" err="1">
+                <a:solidFill>
+                  <a:srgbClr val="FFC000"/>
+                </a:solidFill>
+                <a:latin typeface="Consolas"/>
+              </a:rPr>
+              <a:t>command</a:t>
+            </a:r>
+            <a:r>
+              <a:rPr lang="pt-BR" sz="1600" b="1" dirty="0">
+                <a:solidFill>
+                  <a:srgbClr val="FFC000"/>
+                </a:solidFill>
+                <a:latin typeface="Consolas"/>
+              </a:rPr>
+              <a:t> –help</a:t>
+            </a:r>
+            <a:r>
+              <a:rPr lang="pt-BR" b="1" i="1" dirty="0">
                 <a:solidFill>
                   <a:schemeClr val="bg1"/>
                 </a:solidFill>
               </a:rPr>
-              <a:t>git</a:t>
-            </a:r>
-            <a:r>
-              <a:rPr lang="pt-BR" b="1" i="1" dirty="0">
+              <a:t>: </a:t>
+            </a:r>
+            <a:r>
+              <a:rPr lang="pt-BR" b="1" dirty="0">
                 <a:solidFill>
                   <a:schemeClr val="bg1"/>
                 </a:solidFill>
               </a:rPr>
-              <a:t> log: </a:t>
+              <a:t>mostra uma ajuda para caso não se saiba um comando ou queira </a:t>
+            </a:r>
+            <a:r>
+              <a:rPr lang="pt-BR" b="1" dirty="0" err="1">
+                <a:solidFill>
+                  <a:schemeClr val="bg1"/>
+                </a:solidFill>
+              </a:rPr>
+              <a:t>sa</a:t>
             </a:r>
             <a:r>
               <a:rPr lang="pt-BR" b="1" dirty="0">
@@ -8084,97 +8096,37 @@
                   <a:schemeClr val="bg1"/>
                 </a:solidFill>
               </a:rPr>
-              <a:t>mostra todas as alterações feitas em um projeto.</a:t>
-            </a:r>
-          </a:p>
-          <a:p>
-            <a:pPr>
-              <a:buFont typeface="Wingdings" charset="2"/>
-              <a:buChar char="v"/>
-            </a:pPr>
-            <a:r>
-              <a:rPr lang="pt-BR" b="1" i="1" dirty="0" err="1">
+              <a:t>ber o que ele </a:t>
+            </a:r>
+            <a:r>
+              <a:rPr lang="pt-BR" b="1" dirty="0" err="1">
                 <a:solidFill>
                   <a:schemeClr val="bg1"/>
                 </a:solidFill>
               </a:rPr>
-              <a:t>git</a:t>
-            </a:r>
-            <a:r>
-              <a:rPr lang="pt-BR" b="1" i="1" dirty="0">
+              <a:t>fa</a:t>
+            </a:r>
+            <a:r>
+              <a:rPr lang="pt-BR" b="1" dirty="0">
                 <a:solidFill>
                   <a:schemeClr val="bg1"/>
                 </a:solidFill>
               </a:rPr>
-              <a:t> </a:t>
-            </a:r>
-            <a:r>
-              <a:rPr lang="pt-BR" b="1" i="1" dirty="0" err="1">
-                <a:solidFill>
-                  <a:schemeClr val="bg1"/>
-                </a:solidFill>
-              </a:rPr>
-              <a:t>add</a:t>
-            </a:r>
-            <a:r>
-              <a:rPr lang="pt-BR" b="1" i="1" dirty="0">
-                <a:solidFill>
-                  <a:schemeClr val="bg1"/>
-                </a:solidFill>
-              </a:rPr>
-              <a:t>: </a:t>
-            </a:r>
-            <a:r>
-              <a:rPr lang="pt-BR" b="1" dirty="0">
-                <a:solidFill>
-                  <a:schemeClr val="bg1"/>
-                </a:solidFill>
-              </a:rPr>
-              <a:t>envia um arquivo para a área de preparo.</a:t>
-            </a:r>
-          </a:p>
-          <a:p>
-            <a:pPr>
-              <a:buFont typeface="Wingdings" charset="2"/>
-              <a:buChar char="v"/>
-            </a:pPr>
-            <a:r>
-              <a:rPr lang="pt-BR" b="1" i="1" dirty="0" err="1">
-                <a:solidFill>
-                  <a:schemeClr val="bg1"/>
-                </a:solidFill>
-              </a:rPr>
-              <a:t>git</a:t>
-            </a:r>
-            <a:r>
-              <a:rPr lang="pt-BR" b="1" i="1" dirty="0">
-                <a:solidFill>
-                  <a:schemeClr val="bg1"/>
-                </a:solidFill>
-              </a:rPr>
-              <a:t> reset [file]: </a:t>
-            </a:r>
-            <a:r>
-              <a:rPr lang="pt-BR" b="1" dirty="0">
-                <a:solidFill>
-                  <a:schemeClr val="bg1"/>
-                </a:solidFill>
-              </a:rPr>
-              <a:t>retira um arquivo da área de preparação retando todas as mudanças realizadas.</a:t>
+              <a:t>z.</a:t>
             </a:r>
           </a:p>
           <a:p>
             <a:pPr marL="0" indent="0">
               <a:buNone/>
             </a:pPr>
-            <a:endParaRPr lang="pt-BR" i="1" dirty="0"/>
+            <a:endParaRPr lang="pt-BR" dirty="0"/>
           </a:p>
         </p:txBody>
       </p:sp>
     </p:spTree>
     <p:extLst>
       <p:ext uri="{BB962C8B-B14F-4D97-AF65-F5344CB8AC3E}">
-        <p14:creationId xmlns:p14="http://schemas.microsoft.com/office/powerpoint/2010/main" val="874133215"/>
+        <p14:creationId xmlns:p14="http://schemas.microsoft.com/office/powerpoint/2010/main" val="215354822"/>
       </p:ext>
     </p:extLst>
   </p:cSld>
@@ -8206,392 +8158,6 @@
           <p:cNvPr id="2" name="Título 1">
             <a:extLst>
               <a:ext uri="{FF2B5EF4-FFF2-40B4-BE49-F238E27FC236}">
-                <a16:creationId xmlns:a16="http://schemas.microsoft.com/office/drawing/2014/main" id="{0DEF8084-7A69-D88B-DD92-AD8F7B6757DE}"/>
-              </a:ext>
-            </a:extLst>
-          </p:cNvPr>
-          <p:cNvSpPr>
-            <a:spLocks noGrp="1"/>
-          </p:cNvSpPr>
-          <p:nvPr>
-            <p:ph type="title"/>
-          </p:nvPr>
-        </p:nvSpPr>
-        <p:spPr/>
-        <p:txBody>
-          <a:bodyPr/>
-          <a:lstStyle/>
-          <a:p>
-            <a:r>
-              <a:rPr lang="pt-BR"/>
-              <a:t>Alguns comandos </a:t>
-            </a:r>
-          </a:p>
-        </p:txBody>
-      </p:sp>
-      <p:sp>
-        <p:nvSpPr>
-          <p:cNvPr id="3" name="Espaço Reservado para Conteúdo 2">
-            <a:extLst>
-              <a:ext uri="{FF2B5EF4-FFF2-40B4-BE49-F238E27FC236}">
-                <a16:creationId xmlns:a16="http://schemas.microsoft.com/office/drawing/2014/main" id="{D312AA97-8EE4-FED2-B27E-BBB3F58BC66A}"/>
-              </a:ext>
-            </a:extLst>
-          </p:cNvPr>
-          <p:cNvSpPr>
-            <a:spLocks noGrp="1"/>
-          </p:cNvSpPr>
-          <p:nvPr>
-            <p:ph idx="1"/>
-          </p:nvPr>
-        </p:nvSpPr>
-        <p:spPr>
-          <a:xfrm>
-            <a:off x="2589212" y="2133600"/>
-            <a:ext cx="8915400" cy="2830007"/>
-          </a:xfrm>
-          <a:solidFill>
-            <a:schemeClr val="tx1">
-              <a:lumMod val="75000"/>
-            </a:schemeClr>
-          </a:solidFill>
-          <a:ln>
-            <a:solidFill>
-              <a:schemeClr val="bg1"/>
-            </a:solidFill>
-          </a:ln>
-        </p:spPr>
-        <p:txBody>
-          <a:bodyPr vert="horz" lIns="91440" tIns="45720" rIns="91440" bIns="45720" rtlCol="0" anchor="t">
-            <a:normAutofit/>
-          </a:bodyPr>
-          <a:lstStyle/>
-          <a:p>
-            <a:pPr>
-              <a:buFont typeface="Wingdings" charset="2"/>
-              <a:buChar char="v"/>
-            </a:pPr>
-            <a:r>
-              <a:rPr lang="pt-BR" b="1" i="1" dirty="0" err="1">
-                <a:solidFill>
-                  <a:schemeClr val="bg1"/>
-                </a:solidFill>
-              </a:rPr>
-              <a:t>git</a:t>
-            </a:r>
-            <a:r>
-              <a:rPr lang="pt-BR" b="1" i="1" dirty="0">
-                <a:solidFill>
-                  <a:schemeClr val="bg1"/>
-                </a:solidFill>
-              </a:rPr>
-              <a:t> reset –hard:</a:t>
-            </a:r>
-            <a:r>
-              <a:rPr lang="pt-BR" b="1" dirty="0">
-                <a:solidFill>
-                  <a:schemeClr val="bg1"/>
-                </a:solidFill>
-              </a:rPr>
-              <a:t> descarta todas as mudanças até o último </a:t>
-            </a:r>
-            <a:r>
-              <a:rPr lang="pt-BR" b="1" i="1" dirty="0" err="1">
-                <a:solidFill>
-                  <a:schemeClr val="bg1"/>
-                </a:solidFill>
-              </a:rPr>
-              <a:t>commit</a:t>
-            </a:r>
-            <a:r>
-              <a:rPr lang="pt-BR" b="1" i="1" dirty="0">
-                <a:solidFill>
-                  <a:schemeClr val="bg1"/>
-                </a:solidFill>
-              </a:rPr>
-              <a:t>.</a:t>
-            </a:r>
-            <a:endParaRPr lang="pt-BR" b="1" dirty="0">
-              <a:solidFill>
-                <a:schemeClr val="bg1"/>
-              </a:solidFill>
-            </a:endParaRPr>
-          </a:p>
-          <a:p>
-            <a:pPr>
-              <a:buFont typeface="Wingdings" charset="2"/>
-              <a:buChar char="v"/>
-            </a:pPr>
-            <a:r>
-              <a:rPr lang="pt-BR" b="1" i="1" dirty="0" err="1">
-                <a:solidFill>
-                  <a:schemeClr val="bg1"/>
-                </a:solidFill>
-              </a:rPr>
-              <a:t>Git</a:t>
-            </a:r>
-            <a:r>
-              <a:rPr lang="pt-BR" b="1" i="1" dirty="0">
-                <a:solidFill>
-                  <a:schemeClr val="bg1"/>
-                </a:solidFill>
-              </a:rPr>
-              <a:t> merge </a:t>
-            </a:r>
-            <a:r>
-              <a:rPr lang="pt-BR" b="1" i="1" dirty="0" err="1">
-                <a:solidFill>
-                  <a:schemeClr val="bg1"/>
-                </a:solidFill>
-              </a:rPr>
-              <a:t>branch_A</a:t>
-            </a:r>
-            <a:r>
-              <a:rPr lang="pt-BR" b="1" i="1" dirty="0">
-                <a:solidFill>
-                  <a:schemeClr val="bg1"/>
-                </a:solidFill>
-              </a:rPr>
-              <a:t>: </a:t>
-            </a:r>
-            <a:r>
-              <a:rPr lang="pt-BR" b="1" dirty="0">
-                <a:solidFill>
-                  <a:schemeClr val="bg1"/>
-                </a:solidFill>
-              </a:rPr>
-              <a:t>merge as alterações do ramo chamado </a:t>
-            </a:r>
-            <a:r>
-              <a:rPr lang="pt-BR" b="1" i="1" dirty="0" err="1">
-                <a:solidFill>
-                  <a:schemeClr val="bg1"/>
-                </a:solidFill>
-              </a:rPr>
-              <a:t>branch_A</a:t>
-            </a:r>
-            <a:r>
-              <a:rPr lang="pt-BR" b="1" dirty="0">
-                <a:solidFill>
-                  <a:schemeClr val="bg1"/>
-                </a:solidFill>
-              </a:rPr>
-              <a:t> no ramo principal ou o ramo que se está visualizando. </a:t>
-            </a:r>
-          </a:p>
-          <a:p>
-            <a:pPr>
-              <a:buFont typeface="Wingdings" charset="2"/>
-              <a:buChar char="v"/>
-            </a:pPr>
-            <a:r>
-              <a:rPr lang="pt-BR" b="1" i="1" dirty="0" err="1">
-                <a:solidFill>
-                  <a:schemeClr val="bg1"/>
-                </a:solidFill>
-              </a:rPr>
-              <a:t>git</a:t>
-            </a:r>
-            <a:r>
-              <a:rPr lang="pt-BR" b="1" i="1" dirty="0">
-                <a:solidFill>
-                  <a:schemeClr val="bg1"/>
-                </a:solidFill>
-              </a:rPr>
-              <a:t> </a:t>
-            </a:r>
-            <a:r>
-              <a:rPr lang="pt-BR" b="1" i="1" dirty="0" err="1">
-                <a:solidFill>
-                  <a:schemeClr val="bg1"/>
-                </a:solidFill>
-              </a:rPr>
-              <a:t>pull</a:t>
-            </a:r>
-            <a:r>
-              <a:rPr lang="pt-BR" b="1" i="1" dirty="0">
-                <a:solidFill>
-                  <a:schemeClr val="bg1"/>
-                </a:solidFill>
-              </a:rPr>
-              <a:t>: </a:t>
-            </a:r>
-            <a:r>
-              <a:rPr lang="pt-BR" b="1" dirty="0">
-                <a:solidFill>
-                  <a:schemeClr val="bg1"/>
-                </a:solidFill>
-              </a:rPr>
-              <a:t>pega as alterações da versão de origem de um arquivo e merge com a versão local.</a:t>
-            </a:r>
-          </a:p>
-          <a:p>
-            <a:pPr>
-              <a:buFont typeface="Wingdings" charset="2"/>
-              <a:buChar char="v"/>
-            </a:pPr>
-            <a:r>
-              <a:rPr lang="pt-BR" b="1" i="1" dirty="0" err="1">
-                <a:solidFill>
-                  <a:schemeClr val="bg1"/>
-                </a:solidFill>
-              </a:rPr>
-              <a:t>Git</a:t>
-            </a:r>
-            <a:r>
-              <a:rPr lang="pt-BR" b="1" i="1" dirty="0">
-                <a:solidFill>
-                  <a:schemeClr val="bg1"/>
-                </a:solidFill>
-              </a:rPr>
-              <a:t> </a:t>
-            </a:r>
-            <a:r>
-              <a:rPr lang="pt-BR" b="1" i="1" dirty="0" err="1">
-                <a:solidFill>
-                  <a:schemeClr val="bg1"/>
-                </a:solidFill>
-              </a:rPr>
-              <a:t>push</a:t>
-            </a:r>
-            <a:r>
-              <a:rPr lang="pt-BR" b="1" i="1" dirty="0">
-                <a:solidFill>
-                  <a:schemeClr val="bg1"/>
-                </a:solidFill>
-              </a:rPr>
-              <a:t>: </a:t>
-            </a:r>
-            <a:r>
-              <a:rPr lang="pt-BR" b="1" dirty="0">
-                <a:solidFill>
-                  <a:schemeClr val="bg1"/>
-                </a:solidFill>
-              </a:rPr>
-              <a:t>merge as alterações locais na versão de origem de um arquivo.</a:t>
-            </a:r>
-          </a:p>
-          <a:p>
-            <a:pPr>
-              <a:buFont typeface="Wingdings" charset="2"/>
-              <a:buChar char="v"/>
-            </a:pPr>
-            <a:r>
-              <a:rPr lang="pt-BR" b="1" i="1" dirty="0" err="1">
-                <a:solidFill>
-                  <a:schemeClr val="bg1"/>
-                </a:solidFill>
-              </a:rPr>
-              <a:t>Git</a:t>
-            </a:r>
-            <a:r>
-              <a:rPr lang="pt-BR" b="1" i="1" dirty="0">
-                <a:solidFill>
-                  <a:schemeClr val="bg1"/>
-                </a:solidFill>
-              </a:rPr>
-              <a:t> </a:t>
-            </a:r>
-            <a:r>
-              <a:rPr lang="pt-BR" b="1" i="1" dirty="0" err="1">
-                <a:solidFill>
-                  <a:schemeClr val="bg1"/>
-                </a:solidFill>
-              </a:rPr>
-              <a:t>command</a:t>
-            </a:r>
-            <a:r>
-              <a:rPr lang="pt-BR" b="1" i="1" dirty="0">
-                <a:solidFill>
-                  <a:schemeClr val="bg1"/>
-                </a:solidFill>
-              </a:rPr>
-              <a:t> –help: </a:t>
-            </a:r>
-            <a:r>
-              <a:rPr lang="pt-BR" b="1" dirty="0">
-                <a:solidFill>
-                  <a:schemeClr val="bg1"/>
-                </a:solidFill>
-              </a:rPr>
-              <a:t>mostra uma ajuda para caso não se saiba um comando ou queira </a:t>
-            </a:r>
-            <a:r>
-              <a:rPr lang="pt-BR" b="1" dirty="0" err="1">
-                <a:solidFill>
-                  <a:schemeClr val="bg1"/>
-                </a:solidFill>
-              </a:rPr>
-              <a:t>sa</a:t>
-            </a:r>
-            <a:r>
-              <a:rPr lang="pt-BR" b="1" dirty="0">
-                <a:solidFill>
-                  <a:schemeClr val="bg1"/>
-                </a:solidFill>
-              </a:rPr>
-              <a:t>ber o que ele </a:t>
-            </a:r>
-            <a:r>
-              <a:rPr lang="pt-BR" b="1" dirty="0" err="1">
-                <a:solidFill>
-                  <a:schemeClr val="bg1"/>
-                </a:solidFill>
-              </a:rPr>
-              <a:t>fa</a:t>
-            </a:r>
-            <a:r>
-              <a:rPr lang="pt-BR" b="1" dirty="0">
-                <a:solidFill>
-                  <a:schemeClr val="bg1"/>
-                </a:solidFill>
-              </a:rPr>
-              <a:t>z.</a:t>
-            </a:r>
-          </a:p>
-          <a:p>
-            <a:pPr marL="0" indent="0">
-              <a:buNone/>
-            </a:pPr>
-            <a:endParaRPr lang="pt-BR" dirty="0"/>
-          </a:p>
-        </p:txBody>
-      </p:sp>
-    </p:spTree>
-    <p:extLst>
-      <p:ext uri="{BB962C8B-B14F-4D97-AF65-F5344CB8AC3E}">
-        <p14:creationId xmlns:p14="http://schemas.microsoft.com/office/powerpoint/2010/main" val="215354822"/>
-      </p:ext>
-    </p:extLst>
-  </p:cSld>
-  <p:clrMapOvr>
-    <a:masterClrMapping/>
-  </p:clrMapOvr>
-</p:sld>
-</file>
-
-<file path=ppt/slides/slide12.xml><?xml version="1.0" encoding="utf-8"?>
-<p:sld xmlns:a="http://schemas.openxmlformats.org/drawingml/2006/main" xmlns:r="http://schemas.openxmlformats.org/officeDocument/2006/relationships" xmlns:p="http://schemas.openxmlformats.org/presentationml/2006/main" show="0">
-  <p:cSld>
-    <p:spTree>
-      <p:nvGrpSpPr>
-        <p:cNvPr id="1" name=""/>
-        <p:cNvGrpSpPr/>
-        <p:nvPr/>
-      </p:nvGrpSpPr>
-      <p:grpSpPr>
-        <a:xfrm>
-          <a:off x="0" y="0"/>
-          <a:ext cx="0" cy="0"/>
-          <a:chOff x="0" y="0"/>
-          <a:chExt cx="0" cy="0"/>
-        </a:xfrm>
-      </p:grpSpPr>
-      <p:sp>
-        <p:nvSpPr>
-          <p:cNvPr id="2" name="Título 1">
-            <a:extLst>
-              <a:ext uri="{FF2B5EF4-FFF2-40B4-BE49-F238E27FC236}">
                 <a16:creationId xmlns:a16="http://schemas.microsoft.com/office/drawing/2014/main" id="{42673094-8968-2572-EC69-76FD66CF08DB}"/>
               </a:ext>
             </a:extLst>
@@ -8719,7 +8285,7 @@
 </p:sld>
 </file>
 
-<file path=ppt/slides/slide13.xml><?xml version="1.0" encoding="utf-8"?>
+<file path=ppt/slides/slide12.xml><?xml version="1.0" encoding="utf-8"?>
 <p:sld xmlns:a="http://schemas.openxmlformats.org/drawingml/2006/main" xmlns:r="http://schemas.openxmlformats.org/officeDocument/2006/relationships" xmlns:p="http://schemas.openxmlformats.org/presentationml/2006/main">
   <p:cSld>
     <p:spTree>
@@ -8741,7 +8307,7 @@
           <p:cNvPr id="2" name="Título 1">
             <a:extLst>
               <a:ext uri="{FF2B5EF4-FFF2-40B4-BE49-F238E27FC236}">
-                <a16:creationId xmlns:a16="http://schemas.microsoft.com/office/drawing/2014/main" id="{C74898F8-305F-289F-ECED-47C00F3A435A}"/>
+                <a16:creationId xmlns:a16="http://schemas.microsoft.com/office/drawing/2014/main" id="{94827F7A-6DF4-3F85-ED36-23C5B749B673}"/>
               </a:ext>
             </a:extLst>
           </p:cNvPr>
@@ -8759,7 +8325,7 @@
           <a:p>
             <a:r>
               <a:rPr lang="pt-BR"/>
-              <a:t>Exemplo prático</a:t>
+              <a:t>Outros exemplos</a:t>
             </a:r>
           </a:p>
         </p:txBody>
@@ -8769,7 +8335,7 @@
           <p:cNvPr id="3" name="Espaço Reservado para Conteúdo 2">
             <a:extLst>
               <a:ext uri="{FF2B5EF4-FFF2-40B4-BE49-F238E27FC236}">
-                <a16:creationId xmlns:a16="http://schemas.microsoft.com/office/drawing/2014/main" id="{3681C089-4161-E596-39A7-053DCC55AC19}"/>
+                <a16:creationId xmlns:a16="http://schemas.microsoft.com/office/drawing/2014/main" id="{4967165F-18B8-8397-8679-CBABFA5272B8}"/>
               </a:ext>
             </a:extLst>
           </p:cNvPr>
@@ -8783,7 +8349,7 @@
         <p:spPr/>
         <p:txBody>
           <a:bodyPr vert="horz" lIns="91440" tIns="45720" rIns="91440" bIns="45720" rtlCol="0" anchor="t">
-            <a:normAutofit fontScale="92500" lnSpcReduction="10000"/>
+            <a:normAutofit/>
           </a:bodyPr>
           <a:lstStyle/>
           <a:p>
@@ -8791,26 +8357,24 @@
               <a:buNone/>
             </a:pPr>
             <a:r>
-              <a:rPr lang="pt-BR" dirty="0" err="1"/>
-              <a:t>Volatando</a:t>
-            </a:r>
-            <a:r>
-              <a:rPr lang="pt-BR" dirty="0"/>
-              <a:t> ao problema do </a:t>
-            </a:r>
-            <a:r>
-              <a:rPr lang="pt-BR" dirty="0" err="1"/>
-              <a:t>inicio</a:t>
-            </a:r>
-            <a:r>
-              <a:rPr lang="pt-BR" dirty="0"/>
-              <a:t> da apresentação:</a:t>
+              <a:rPr lang="pt-BR" sz="2400"/>
+              <a:t>1. Criar um repositório local e clonar da nuvem</a:t>
             </a:r>
           </a:p>
           <a:p>
             <a:pPr marL="0" indent="0">
               <a:buNone/>
             </a:pPr>
+            <a:r>
+              <a:rPr lang="pt-BR" sz="1600"/>
+              <a:t>Este são os primeiros processos que serão realizados em um projeto.</a:t>
+            </a:r>
+            <a:endParaRPr lang="pt-BR" sz="1600" dirty="0"/>
+          </a:p>
+          <a:p>
+            <a:pPr marL="0" indent="0">
+              <a:buNone/>
+            </a:pPr>
             <a:endParaRPr lang="pt-BR" dirty="0"/>
           </a:p>
           <a:p>
@@ -8819,174 +8383,166 @@
             </a:pPr>
             <a:r>
               <a:rPr lang="pt-BR"/>
-              <a:t>Aqui estão os passos que serão seguidos para resolver o problema:</a:t>
-            </a:r>
+              <a:t>Criar repositório local</a:t>
+            </a:r>
+            <a:endParaRPr lang="pt-BR" dirty="0"/>
           </a:p>
           <a:p>
             <a:pPr marL="0" indent="0">
               <a:buNone/>
             </a:pPr>
+            <a:r>
+              <a:rPr lang="pt-BR" sz="1600" b="1" dirty="0" err="1">
+                <a:solidFill>
+                  <a:srgbClr val="FFC000"/>
+                </a:solidFill>
+                <a:latin typeface="Consolas"/>
+              </a:rPr>
+              <a:t>git</a:t>
+            </a:r>
+            <a:r>
+              <a:rPr lang="pt-BR" sz="1600" b="1" dirty="0">
+                <a:solidFill>
+                  <a:srgbClr val="FFC000"/>
+                </a:solidFill>
+                <a:latin typeface="Consolas"/>
+              </a:rPr>
+              <a:t> </a:t>
+            </a:r>
+            <a:r>
+              <a:rPr lang="pt-BR" sz="1600" b="1" dirty="0" err="1">
+                <a:solidFill>
+                  <a:srgbClr val="FFC000"/>
+                </a:solidFill>
+                <a:latin typeface="Consolas"/>
+              </a:rPr>
+              <a:t>init</a:t>
+            </a:r>
+            <a:r>
+              <a:rPr lang="pt-BR" sz="1600" dirty="0"/>
+              <a:t>: Inicializa um repositório </a:t>
+            </a:r>
+            <a:r>
+              <a:rPr lang="pt-BR" sz="1600" dirty="0" err="1"/>
+              <a:t>Git</a:t>
+            </a:r>
+            <a:r>
+              <a:rPr lang="pt-BR" sz="1600" dirty="0"/>
+              <a:t> na pasta atual. A partir </a:t>
+            </a:r>
+            <a:r>
+              <a:rPr lang="pt-BR" sz="1600" dirty="0" err="1"/>
+              <a:t>daqui, o</a:t>
+            </a:r>
+            <a:r>
+              <a:rPr lang="pt-BR" sz="1600" dirty="0"/>
+              <a:t> </a:t>
+            </a:r>
+            <a:r>
+              <a:rPr lang="pt-BR" sz="1600" dirty="0" err="1"/>
+              <a:t>Git</a:t>
+            </a:r>
+            <a:r>
+              <a:rPr lang="pt-BR" sz="1600" dirty="0"/>
+              <a:t> começa a rastrear alterações.</a:t>
+            </a:r>
+            <a:endParaRPr lang="pt-BR" sz="1600"/>
+          </a:p>
+          <a:p>
+            <a:pPr marL="0" indent="0">
+              <a:buNone/>
+            </a:pPr>
             <a:endParaRPr lang="pt-BR" dirty="0"/>
           </a:p>
           <a:p>
-            <a:pPr marL="0" indent="0">
-              <a:buNone/>
-            </a:pPr>
-            <a:r>
-              <a:rPr lang="pt-BR" sz="1900"/>
-              <a:t>1. Salvar temporariamente o que você está fazendo</a:t>
-            </a:r>
-          </a:p>
-          <a:p>
             <a:pPr>
               <a:buNone/>
             </a:pPr>
             <a:r>
-              <a:rPr lang="pt-BR" sz="1700" dirty="0" err="1">
+              <a:rPr lang="pt-BR"/>
+              <a:t>Clonar um repositório remoto</a:t>
+            </a:r>
+            <a:endParaRPr lang="pt-BR" dirty="0"/>
+          </a:p>
+          <a:p>
+            <a:pPr marL="0">
+              <a:buNone/>
+            </a:pPr>
+            <a:r>
+              <a:rPr lang="pt-BR" sz="1600" b="1" dirty="0" err="1">
+                <a:solidFill>
+                  <a:srgbClr val="FFC000"/>
+                </a:solidFill>
+                <a:latin typeface="Consolas"/>
+              </a:rPr>
+              <a:t>git</a:t>
+            </a:r>
+            <a:r>
+              <a:rPr lang="pt-BR" sz="1600" b="1" dirty="0">
+                <a:solidFill>
+                  <a:srgbClr val="FFC000"/>
+                </a:solidFill>
+                <a:latin typeface="Consolas"/>
+              </a:rPr>
+              <a:t> clone</a:t>
+            </a:r>
+            <a:r>
+              <a:rPr lang="pt-BR" sz="1600" dirty="0">
+                <a:solidFill>
+                  <a:srgbClr val="FFFFFF"/>
+                </a:solidFill>
                 <a:latin typeface="Century Gothic"/>
               </a:rPr>
-              <a:t>git</a:t>
-            </a:r>
-            <a:r>
-              <a:rPr lang="pt-BR" sz="1700" dirty="0">
+              <a:t> </a:t>
+            </a:r>
+            <a:r>
+              <a:rPr lang="pt-BR" sz="1600" dirty="0">
+                <a:solidFill>
+                  <a:schemeClr val="accent1">
+                    <a:lumMod val="60000"/>
+                    <a:lumOff val="40000"/>
+                  </a:schemeClr>
+                </a:solidFill>
                 <a:latin typeface="Century Gothic"/>
-              </a:rPr>
-              <a:t> </a:t>
-            </a:r>
-            <a:r>
-              <a:rPr lang="pt-BR" sz="1700" dirty="0" err="1">
+                <a:hlinkClick r:id="rId2">
+                  <a:extLst>
+                    <a:ext uri="{A12FA001-AC4F-418D-AE19-62706E023703}">
+                      <ahyp:hlinkClr xmlns:ahyp="http://schemas.microsoft.com/office/drawing/2018/hyperlinkcolor" val="tx"/>
+                    </a:ext>
+                  </a:extLst>
+                </a:hlinkClick>
+              </a:rPr>
+              <a:t>https://github.com/usuario/projeto.git</a:t>
+            </a:r>
+            <a:r>
+              <a:rPr lang="pt-BR" sz="1600" dirty="0">
+                <a:solidFill>
+                  <a:schemeClr val="tx1"/>
+                </a:solidFill>
                 <a:latin typeface="Century Gothic"/>
               </a:rPr>
-              <a:t>stash</a:t>
-            </a:r>
-            <a:r>
-              <a:rPr lang="pt-BR" sz="1700" dirty="0">
+              <a:t>: </a:t>
+            </a:r>
+            <a:r>
+              <a:rPr lang="pt-BR" sz="1600" dirty="0">
+                <a:solidFill>
+                  <a:srgbClr val="FFFFFF"/>
+                </a:solidFill>
+                <a:latin typeface="Century Gothic"/>
+              </a:rPr>
+              <a:t>Baixa</a:t>
+            </a:r>
+            <a:r>
+              <a:rPr lang="pt-BR" sz="1600" dirty="0">
                 <a:ea typeface="+mn-lt"/>
                 <a:cs typeface="+mn-lt"/>
               </a:rPr>
-              <a:t> </a:t>
-            </a:r>
-            <a:r>
-              <a:rPr lang="pt-BR" sz="1700" b="1" dirty="0">
-                <a:ea typeface="+mn-lt"/>
-                <a:cs typeface="+mn-lt"/>
-              </a:rPr>
-              <a:t>: </a:t>
-            </a:r>
-            <a:r>
-              <a:rPr lang="pt-BR" sz="1700" dirty="0">
-                <a:ea typeface="+mn-lt"/>
-                <a:cs typeface="+mn-lt"/>
-              </a:rPr>
-              <a:t>Guarda temporariamente suas alterações não </a:t>
-            </a:r>
-            <a:r>
-              <a:rPr lang="pt-BR" sz="1700" dirty="0" err="1">
-                <a:ea typeface="+mn-lt"/>
-                <a:cs typeface="+mn-lt"/>
-              </a:rPr>
-              <a:t>commitadas</a:t>
-            </a:r>
-            <a:r>
-              <a:rPr lang="pt-BR" sz="1700" dirty="0">
-                <a:ea typeface="+mn-lt"/>
-                <a:cs typeface="+mn-lt"/>
-              </a:rPr>
-              <a:t> e limpa o diretório de trabalho, permitindo mudar de contexto sem perder nada.</a:t>
-            </a:r>
-            <a:endParaRPr lang="pt-BR" sz="1700"/>
-          </a:p>
-          <a:p>
-            <a:pPr>
-              <a:buNone/>
-            </a:pPr>
-            <a:endParaRPr lang="pt-BR" dirty="0"/>
-          </a:p>
-          <a:p>
-            <a:pPr>
-              <a:buNone/>
-            </a:pPr>
-            <a:r>
-              <a:rPr lang="pt-BR" sz="1900" dirty="0"/>
-              <a:t>2. Voltar para a </a:t>
-            </a:r>
-            <a:r>
-              <a:rPr lang="pt-BR" sz="1900" dirty="0" err="1"/>
-              <a:t>branch</a:t>
-            </a:r>
-            <a:r>
-              <a:rPr lang="pt-BR" sz="1900" dirty="0"/>
-              <a:t> principal</a:t>
-            </a:r>
-          </a:p>
-          <a:p>
-            <a:pPr>
-              <a:buNone/>
-            </a:pPr>
-            <a:r>
-              <a:rPr lang="pt-BR" sz="1700" dirty="0" err="1">
-                <a:latin typeface="Century Gothic"/>
-              </a:rPr>
-              <a:t>git</a:t>
-            </a:r>
-            <a:r>
-              <a:rPr lang="pt-BR" sz="1700" dirty="0">
-                <a:latin typeface="Century Gothic"/>
-              </a:rPr>
-              <a:t> checkout </a:t>
-            </a:r>
-            <a:r>
-              <a:rPr lang="pt-BR" sz="1700" dirty="0" err="1">
-                <a:latin typeface="Century Gothic"/>
-              </a:rPr>
-              <a:t>main</a:t>
-            </a:r>
-            <a:r>
-              <a:rPr lang="pt-BR" sz="1700" b="1" dirty="0">
-                <a:ea typeface="+mn-lt"/>
-                <a:cs typeface="+mn-lt"/>
-              </a:rPr>
-              <a:t>: </a:t>
-            </a:r>
-            <a:r>
-              <a:rPr lang="pt-BR" sz="1700" dirty="0">
-                <a:ea typeface="+mn-lt"/>
-                <a:cs typeface="+mn-lt"/>
-              </a:rPr>
-              <a:t>Muda para a </a:t>
-            </a:r>
-            <a:r>
-              <a:rPr lang="pt-BR" sz="1700" dirty="0" err="1">
-                <a:ea typeface="+mn-lt"/>
-                <a:cs typeface="+mn-lt"/>
-              </a:rPr>
-              <a:t>branch</a:t>
-            </a:r>
-            <a:r>
-              <a:rPr lang="pt-BR" sz="1700" dirty="0">
-                <a:ea typeface="+mn-lt"/>
-                <a:cs typeface="+mn-lt"/>
-              </a:rPr>
-              <a:t> principal do projeto, onde está o </a:t>
-            </a:r>
-            <a:r>
-              <a:rPr lang="pt-BR" sz="1700" dirty="0" err="1">
-                <a:ea typeface="+mn-lt"/>
-                <a:cs typeface="+mn-lt"/>
-              </a:rPr>
-              <a:t>código“oficial</a:t>
-            </a:r>
-            <a:r>
-              <a:rPr lang="pt-BR" sz="1700" dirty="0">
-                <a:ea typeface="+mn-lt"/>
-                <a:cs typeface="+mn-lt"/>
-              </a:rPr>
-              <a:t>”.</a:t>
-            </a:r>
-            <a:endParaRPr lang="pt-BR" sz="1700" dirty="0"/>
-          </a:p>
-          <a:p>
-            <a:pPr>
+              <a:t> um repositório da nuvem (por exemplo, do GitHub) para sua máquina, incluindo todo o histórico.</a:t>
+            </a:r>
+            <a:endParaRPr lang="pt-BR" sz="1600" dirty="0"/>
+          </a:p>
+          <a:p>
+            <a:pPr marL="0" indent="0">
               <a:buNone/>
             </a:pPr>
             <a:endParaRPr lang="pt-BR" dirty="0"/>
@@ -8996,7 +8552,284 @@
     </p:spTree>
     <p:extLst>
       <p:ext uri="{BB962C8B-B14F-4D97-AF65-F5344CB8AC3E}">
-        <p14:creationId xmlns:p14="http://schemas.microsoft.com/office/powerpoint/2010/main" val="2204593060"/>
+        <p14:creationId xmlns:p14="http://schemas.microsoft.com/office/powerpoint/2010/main" val="3784171948"/>
+      </p:ext>
+    </p:extLst>
+  </p:cSld>
+  <p:clrMapOvr>
+    <a:masterClrMapping/>
+  </p:clrMapOvr>
+</p:sld>
+</file>
+
+<file path=ppt/slides/slide13.xml><?xml version="1.0" encoding="utf-8"?>
+<p:sld xmlns:a="http://schemas.openxmlformats.org/drawingml/2006/main" xmlns:r="http://schemas.openxmlformats.org/officeDocument/2006/relationships" xmlns:p="http://schemas.openxmlformats.org/presentationml/2006/main">
+  <p:cSld>
+    <p:spTree>
+      <p:nvGrpSpPr>
+        <p:cNvPr id="1" name="">
+          <a:extLst>
+            <a:ext uri="{FF2B5EF4-FFF2-40B4-BE49-F238E27FC236}">
+              <a16:creationId xmlns:a16="http://schemas.microsoft.com/office/drawing/2014/main" id="{450D3844-1091-E3ED-93F0-8521E7CFCAE6}"/>
+            </a:ext>
+          </a:extLst>
+        </p:cNvPr>
+        <p:cNvGrpSpPr/>
+        <p:nvPr/>
+      </p:nvGrpSpPr>
+      <p:grpSpPr>
+        <a:xfrm>
+          <a:off x="0" y="0"/>
+          <a:ext cx="0" cy="0"/>
+          <a:chOff x="0" y="0"/>
+          <a:chExt cx="0" cy="0"/>
+        </a:xfrm>
+      </p:grpSpPr>
+      <p:sp>
+        <p:nvSpPr>
+          <p:cNvPr id="2" name="Título 1">
+            <a:extLst>
+              <a:ext uri="{FF2B5EF4-FFF2-40B4-BE49-F238E27FC236}">
+                <a16:creationId xmlns:a16="http://schemas.microsoft.com/office/drawing/2014/main" id="{A3B2369A-D185-50CB-F229-91ACA8DAC281}"/>
+              </a:ext>
+            </a:extLst>
+          </p:cNvPr>
+          <p:cNvSpPr>
+            <a:spLocks noGrp="1"/>
+          </p:cNvSpPr>
+          <p:nvPr>
+            <p:ph type="title"/>
+          </p:nvPr>
+        </p:nvSpPr>
+        <p:spPr/>
+        <p:txBody>
+          <a:bodyPr/>
+          <a:lstStyle/>
+          <a:p>
+            <a:r>
+              <a:rPr lang="pt-BR"/>
+              <a:t>Outros exemplos</a:t>
+            </a:r>
+          </a:p>
+        </p:txBody>
+      </p:sp>
+      <p:sp>
+        <p:nvSpPr>
+          <p:cNvPr id="3" name="Espaço Reservado para Conteúdo 2">
+            <a:extLst>
+              <a:ext uri="{FF2B5EF4-FFF2-40B4-BE49-F238E27FC236}">
+                <a16:creationId xmlns:a16="http://schemas.microsoft.com/office/drawing/2014/main" id="{0E623F54-A8CB-4C5F-F059-483098C15F89}"/>
+              </a:ext>
+            </a:extLst>
+          </p:cNvPr>
+          <p:cNvSpPr>
+            <a:spLocks noGrp="1"/>
+          </p:cNvSpPr>
+          <p:nvPr>
+            <p:ph idx="1"/>
+          </p:nvPr>
+        </p:nvSpPr>
+        <p:spPr/>
+        <p:txBody>
+          <a:bodyPr vert="horz" lIns="91440" tIns="45720" rIns="91440" bIns="45720" rtlCol="0" anchor="t">
+            <a:normAutofit/>
+          </a:bodyPr>
+          <a:lstStyle/>
+          <a:p>
+            <a:pPr marL="0">
+              <a:buNone/>
+            </a:pPr>
+            <a:r>
+              <a:rPr lang="pt-BR" sz="2400"/>
+              <a:t>2. Colocar um item na área de preparo e confirmar</a:t>
+            </a:r>
+          </a:p>
+          <a:p>
+            <a:pPr marL="0">
+              <a:buNone/>
+            </a:pPr>
+            <a:r>
+              <a:rPr lang="pt-BR" sz="1600" dirty="0">
+                <a:latin typeface="Century Gothic"/>
+              </a:rPr>
+              <a:t>Após o projeto alcançar um desenvolvimento apropriado, se é recomendado realizar </a:t>
+            </a:r>
+            <a:r>
+              <a:rPr lang="pt-BR" sz="1600">
+                <a:latin typeface="Century Gothic"/>
+              </a:rPr>
+              <a:t>um </a:t>
+            </a:r>
+            <a:r>
+              <a:rPr lang="pt-BR" sz="1600" dirty="0" err="1">
+                <a:latin typeface="Century Gothic"/>
+              </a:rPr>
+              <a:t>commit</a:t>
+            </a:r>
+            <a:r>
+              <a:rPr lang="pt-BR" sz="1600" i="1" dirty="0">
+                <a:latin typeface="Century Gothic"/>
+              </a:rPr>
+              <a:t> </a:t>
+            </a:r>
+            <a:r>
+              <a:rPr lang="pt-BR" sz="1600" dirty="0">
+                <a:latin typeface="Century Gothic"/>
+              </a:rPr>
+              <a:t>para que o presente estado do arquivo seja salvo no repositório e antes que isso seja feito é necessário movê-lo para a área de preparo,</a:t>
+            </a:r>
+          </a:p>
+          <a:p>
+            <a:pPr marL="0">
+              <a:buNone/>
+            </a:pPr>
+            <a:endParaRPr lang="pt-BR" sz="2400" dirty="0">
+              <a:latin typeface="Century Gothic"/>
+            </a:endParaRPr>
+          </a:p>
+          <a:p>
+            <a:pPr marL="0">
+              <a:buNone/>
+            </a:pPr>
+            <a:r>
+              <a:rPr lang="pt-BR" sz="1600" b="1" dirty="0" err="1">
+                <a:solidFill>
+                  <a:srgbClr val="FFC000"/>
+                </a:solidFill>
+                <a:latin typeface="Consolas"/>
+              </a:rPr>
+              <a:t>git</a:t>
+            </a:r>
+            <a:r>
+              <a:rPr lang="pt-BR" sz="1600" b="1" dirty="0">
+                <a:solidFill>
+                  <a:srgbClr val="FFC000"/>
+                </a:solidFill>
+                <a:latin typeface="Consolas"/>
+              </a:rPr>
+              <a:t> </a:t>
+            </a:r>
+            <a:r>
+              <a:rPr lang="pt-BR" sz="1600" b="1" dirty="0" err="1">
+                <a:solidFill>
+                  <a:srgbClr val="FFC000"/>
+                </a:solidFill>
+                <a:latin typeface="Consolas"/>
+              </a:rPr>
+              <a:t>add</a:t>
+            </a:r>
+            <a:r>
+              <a:rPr lang="pt-BR" sz="1600" b="1" dirty="0">
+                <a:solidFill>
+                  <a:srgbClr val="FFC000"/>
+                </a:solidFill>
+                <a:latin typeface="Consolas"/>
+              </a:rPr>
+              <a:t> arquivo.txt</a:t>
+            </a:r>
+            <a:r>
+              <a:rPr lang="pt-BR">
+                <a:latin typeface="Century Gothic"/>
+              </a:rPr>
+              <a:t>: envia</a:t>
+            </a:r>
+            <a:r>
+              <a:rPr lang="pt-BR" dirty="0">
+                <a:latin typeface="Century Gothic"/>
+              </a:rPr>
+              <a:t> o arquivo para a </a:t>
+            </a:r>
+            <a:r>
+              <a:rPr lang="pt-BR" i="1" dirty="0" err="1">
+                <a:latin typeface="Century Gothic"/>
+              </a:rPr>
+              <a:t>staging</a:t>
+            </a:r>
+            <a:r>
+              <a:rPr lang="pt-BR" i="1" dirty="0">
+                <a:latin typeface="Century Gothic"/>
+              </a:rPr>
+              <a:t> </a:t>
+            </a:r>
+            <a:r>
+              <a:rPr lang="pt-BR" i="1" dirty="0" err="1">
+                <a:latin typeface="Century Gothic"/>
+              </a:rPr>
+              <a:t>area</a:t>
+            </a:r>
+            <a:r>
+              <a:rPr lang="pt-BR" dirty="0">
+                <a:latin typeface="Century Gothic"/>
+              </a:rPr>
+              <a:t> (área de preparo) </a:t>
+            </a:r>
+          </a:p>
+          <a:p>
+            <a:pPr marL="0">
+              <a:buNone/>
+            </a:pPr>
+            <a:r>
+              <a:rPr lang="pt-BR" sz="1600" b="1" dirty="0" err="1">
+                <a:solidFill>
+                  <a:srgbClr val="FFC000"/>
+                </a:solidFill>
+                <a:latin typeface="Consolas"/>
+              </a:rPr>
+              <a:t>git</a:t>
+            </a:r>
+            <a:r>
+              <a:rPr lang="pt-BR" sz="1600" b="1" dirty="0">
+                <a:solidFill>
+                  <a:srgbClr val="FFC000"/>
+                </a:solidFill>
+                <a:latin typeface="Consolas"/>
+              </a:rPr>
+              <a:t> </a:t>
+            </a:r>
+            <a:r>
+              <a:rPr lang="pt-BR" sz="1600" b="1" dirty="0" err="1">
+                <a:solidFill>
+                  <a:srgbClr val="FFC000"/>
+                </a:solidFill>
+                <a:latin typeface="Consolas"/>
+              </a:rPr>
+              <a:t>commit</a:t>
+            </a:r>
+            <a:r>
+              <a:rPr lang="pt-BR" sz="1600" b="1" dirty="0">
+                <a:solidFill>
+                  <a:srgbClr val="FFC000"/>
+                </a:solidFill>
+                <a:latin typeface="Consolas"/>
+              </a:rPr>
+              <a:t> -m "Adiciona arquivo"</a:t>
+            </a:r>
+            <a:r>
+              <a:rPr lang="pt-BR" dirty="0">
+                <a:latin typeface="Century Gothic"/>
+              </a:rPr>
+              <a:t>: salva definitivamente a alteração no histórico do projeto</a:t>
+            </a:r>
+            <a:endParaRPr lang="pt-BR" dirty="0"/>
+          </a:p>
+          <a:p>
+            <a:pPr marL="0" indent="0">
+              <a:buNone/>
+            </a:pPr>
+            <a:endParaRPr lang="pt-BR" sz="2400" dirty="0"/>
+          </a:p>
+          <a:p>
+            <a:pPr marL="0" indent="0">
+              <a:buNone/>
+            </a:pPr>
+            <a:endParaRPr lang="pt-BR" dirty="0"/>
+          </a:p>
+        </p:txBody>
+      </p:sp>
+    </p:spTree>
+    <p:extLst>
+      <p:ext uri="{BB962C8B-B14F-4D97-AF65-F5344CB8AC3E}">
+        <p14:creationId xmlns:p14="http://schemas.microsoft.com/office/powerpoint/2010/main" val="1179506409"/>
       </p:ext>
     </p:extLst>
   </p:cSld>
@@ -9011,7 +8844,13 @@
   <p:cSld>
     <p:spTree>
       <p:nvGrpSpPr>
-        <p:cNvPr id="1" name=""/>
+        <p:cNvPr id="1" name="">
+          <a:extLst>
+            <a:ext uri="{FF2B5EF4-FFF2-40B4-BE49-F238E27FC236}">
+              <a16:creationId xmlns:a16="http://schemas.microsoft.com/office/drawing/2014/main" id="{B5F17886-88D6-AD8B-D135-3CB9C9101CBD}"/>
+            </a:ext>
+          </a:extLst>
+        </p:cNvPr>
         <p:cNvGrpSpPr/>
         <p:nvPr/>
       </p:nvGrpSpPr>
@@ -9028,7 +8867,7 @@
           <p:cNvPr id="2" name="Título 1">
             <a:extLst>
               <a:ext uri="{FF2B5EF4-FFF2-40B4-BE49-F238E27FC236}">
-                <a16:creationId xmlns:a16="http://schemas.microsoft.com/office/drawing/2014/main" id="{B030202A-434E-C143-E16A-301CE0C409B3}"/>
+                <a16:creationId xmlns:a16="http://schemas.microsoft.com/office/drawing/2014/main" id="{8D9DFA64-0B06-5D68-F02A-C2672C9BCA79}"/>
               </a:ext>
             </a:extLst>
           </p:cNvPr>
@@ -9046,7 +8885,7 @@
           <a:p>
             <a:r>
               <a:rPr lang="pt-BR"/>
-              <a:t>Exemplo prático</a:t>
+              <a:t>Outros exemplos</a:t>
             </a:r>
           </a:p>
         </p:txBody>
@@ -9056,7 +8895,7 @@
           <p:cNvPr id="3" name="Espaço Reservado para Conteúdo 2">
             <a:extLst>
               <a:ext uri="{FF2B5EF4-FFF2-40B4-BE49-F238E27FC236}">
-                <a16:creationId xmlns:a16="http://schemas.microsoft.com/office/drawing/2014/main" id="{90FBAB7E-6A0D-72F8-4557-CF94C58774EF}"/>
+                <a16:creationId xmlns:a16="http://schemas.microsoft.com/office/drawing/2014/main" id="{7DC9B750-9AC6-2C01-4051-B0E74BD19E06}"/>
               </a:ext>
             </a:extLst>
           </p:cNvPr>
@@ -9067,24 +8906,19 @@
             <p:ph idx="1"/>
           </p:nvPr>
         </p:nvSpPr>
-        <p:spPr>
-          <a:xfrm>
-            <a:off x="2589212" y="2133600"/>
-            <a:ext cx="8915400" cy="4217237"/>
-          </a:xfrm>
-        </p:spPr>
+        <p:spPr/>
         <p:txBody>
           <a:bodyPr vert="horz" lIns="91440" tIns="45720" rIns="91440" bIns="45720" rtlCol="0" anchor="t">
-            <a:normAutofit fontScale="85000" lnSpcReduction="10000"/>
+            <a:normAutofit fontScale="85000" lnSpcReduction="20000"/>
           </a:bodyPr>
           <a:lstStyle/>
           <a:p>
-            <a:pPr>
+            <a:pPr marL="0" indent="0">
               <a:buNone/>
             </a:pPr>
             <a:r>
               <a:rPr lang="pt-BR" sz="2600" dirty="0"/>
-              <a:t>3. Criar uma nova </a:t>
+              <a:t>3. Pegar alterações da </a:t>
             </a:r>
             <a:r>
               <a:rPr lang="pt-BR" sz="2600" dirty="0" err="1"/>
@@ -9092,41 +8926,161 @@
             </a:r>
             <a:r>
               <a:rPr lang="pt-BR" sz="2600" dirty="0"/>
-              <a:t> para corrigir o erro</a:t>
-            </a:r>
-            <a:endParaRPr lang="en-US" sz="2600"/>
-          </a:p>
-          <a:p>
-            <a:pPr>
-              <a:buNone/>
-            </a:pPr>
-            <a:r>
-              <a:rPr lang="pt-BR" sz="1900" dirty="0" err="1"/>
+              <a:t> principal e mesclar com outra </a:t>
+            </a:r>
+            <a:r>
+              <a:rPr lang="pt-BR" sz="2600" dirty="0" err="1"/>
+              <a:t>branch</a:t>
+            </a:r>
+            <a:endParaRPr lang="pt-BR" sz="2600" dirty="0"/>
+          </a:p>
+          <a:p>
+            <a:pPr marL="0" indent="0">
+              <a:buNone/>
+            </a:pPr>
+            <a:r>
+              <a:rPr lang="pt-BR" dirty="0"/>
+              <a:t>Quando se faz trabalhos em equipe é previsto que seja necessário pegar alterações feitas </a:t>
+            </a:r>
+            <a:r>
+              <a:rPr lang="pt-BR"/>
+              <a:t>por outros membros do grupo e mesclar as mesmas com as que estão sendo feitas localmente.</a:t>
+            </a:r>
+            <a:endParaRPr lang="pt-BR" dirty="0"/>
+          </a:p>
+          <a:p>
+            <a:pPr marL="0" indent="0">
+              <a:buNone/>
+            </a:pPr>
+            <a:endParaRPr lang="pt-BR" dirty="0"/>
+          </a:p>
+          <a:p>
+            <a:pPr marL="0" indent="0">
+              <a:buNone/>
+            </a:pPr>
+            <a:r>
+              <a:rPr lang="pt-BR" sz="1900"/>
+              <a:t>Atualizar a principal</a:t>
+            </a:r>
+            <a:endParaRPr lang="pt-BR" sz="1900" dirty="0"/>
+          </a:p>
+          <a:p>
+            <a:pPr marL="0" indent="0">
+              <a:buNone/>
+            </a:pPr>
+            <a:r>
+              <a:rPr lang="pt-BR" sz="1900" b="1" dirty="0" err="1">
+                <a:solidFill>
+                  <a:srgbClr val="FFC000"/>
+                </a:solidFill>
+                <a:latin typeface="Consolas"/>
+              </a:rPr>
               <a:t>git</a:t>
             </a:r>
             <a:r>
+              <a:rPr lang="pt-BR" sz="1900" b="1" dirty="0">
+                <a:solidFill>
+                  <a:srgbClr val="FFC000"/>
+                </a:solidFill>
+                <a:latin typeface="Consolas"/>
+              </a:rPr>
+              <a:t> checkout </a:t>
+            </a:r>
+            <a:r>
+              <a:rPr lang="pt-BR" sz="1900" b="1" dirty="0" err="1">
+                <a:solidFill>
+                  <a:srgbClr val="FFC000"/>
+                </a:solidFill>
+                <a:latin typeface="Consolas"/>
+              </a:rPr>
+              <a:t>main</a:t>
+            </a:r>
+            <a:r>
+              <a:rPr lang="pt-BR" sz="1700" dirty="0">
+                <a:latin typeface="Century Gothic"/>
+              </a:rPr>
+              <a:t>: muda para a </a:t>
+            </a:r>
+            <a:r>
+              <a:rPr lang="pt-BR" sz="1700" dirty="0" err="1">
+                <a:latin typeface="Century Gothic"/>
+              </a:rPr>
+              <a:t>branch</a:t>
+            </a:r>
+            <a:r>
+              <a:rPr lang="pt-BR" sz="1700" dirty="0">
+                <a:latin typeface="Century Gothic"/>
+              </a:rPr>
+              <a:t> principal </a:t>
+            </a:r>
+            <a:br>
+              <a:rPr lang="pt-BR" sz="1700" dirty="0">
+                <a:latin typeface="Century Gothic"/>
+              </a:rPr>
+            </a:br>
+            <a:r>
+              <a:rPr lang="pt-BR" sz="1900" b="1" dirty="0" err="1">
+                <a:solidFill>
+                  <a:srgbClr val="FFC000"/>
+                </a:solidFill>
+                <a:latin typeface="Consolas"/>
+              </a:rPr>
+              <a:t>git</a:t>
+            </a:r>
+            <a:r>
+              <a:rPr lang="pt-BR" sz="1900" b="1" dirty="0">
+                <a:solidFill>
+                  <a:srgbClr val="FFC000"/>
+                </a:solidFill>
+                <a:latin typeface="Consolas"/>
+              </a:rPr>
+              <a:t> </a:t>
+            </a:r>
+            <a:r>
+              <a:rPr lang="pt-BR" sz="1900" b="1" dirty="0" err="1">
+                <a:solidFill>
+                  <a:srgbClr val="FFC000"/>
+                </a:solidFill>
+                <a:latin typeface="Consolas"/>
+              </a:rPr>
+              <a:t>pull</a:t>
+            </a:r>
+            <a:r>
+              <a:rPr lang="pt-BR" sz="1900" b="1" dirty="0">
+                <a:solidFill>
+                  <a:srgbClr val="FFC000"/>
+                </a:solidFill>
+                <a:latin typeface="Consolas"/>
+              </a:rPr>
+              <a:t>:</a:t>
+            </a:r>
+            <a:r>
+              <a:rPr lang="pt-BR" sz="1700" dirty="0">
+                <a:latin typeface="Century Gothic"/>
+              </a:rPr>
+              <a:t> baixa e integra alterações do repositório remoto</a:t>
+            </a:r>
+            <a:r>
+              <a:rPr lang="pt-BR" sz="2400" dirty="0">
+                <a:latin typeface="Century Gothic"/>
+              </a:rPr>
+              <a:t> </a:t>
+            </a:r>
+            <a:endParaRPr lang="pt-BR"/>
+          </a:p>
+          <a:p>
+            <a:pPr marL="0" indent="0">
+              <a:buNone/>
+            </a:pPr>
+            <a:endParaRPr lang="en-US" dirty="0"/>
+          </a:p>
+          <a:p>
+            <a:pPr marL="0" indent="0">
+              <a:buNone/>
+            </a:pPr>
+            <a:r>
               <a:rPr lang="pt-BR" sz="1900" dirty="0"/>
-              <a:t> checkout -b </a:t>
-            </a:r>
-            <a:r>
-              <a:rPr lang="pt-BR" sz="1900" dirty="0" err="1"/>
-              <a:t>hotfix</a:t>
-            </a:r>
-            <a:r>
-              <a:rPr lang="pt-BR" sz="1900" dirty="0"/>
-              <a:t>-erro-</a:t>
-            </a:r>
-            <a:r>
-              <a:rPr lang="pt-BR" sz="1900" dirty="0" err="1"/>
-              <a:t>critico</a:t>
-            </a:r>
-            <a:r>
-              <a:rPr lang="pt-BR" sz="1900" b="1" dirty="0"/>
-              <a:t>: </a:t>
-            </a:r>
-            <a:r>
-              <a:rPr lang="pt-BR" sz="1900" dirty="0"/>
-              <a:t>Cria e já muda para uma nova </a:t>
+              <a:t>Ir para sua </a:t>
             </a:r>
             <a:r>
               <a:rPr lang="pt-BR" sz="1900" dirty="0" err="1"/>
@@ -9134,206 +9088,137 @@
             </a:r>
             <a:r>
               <a:rPr lang="pt-BR" sz="1900" dirty="0"/>
-              <a:t>. Isso isola a correção sem afetar o código principal diretamente.</a:t>
-            </a:r>
-            <a:endParaRPr lang="pt-BR" sz="1900"/>
+              <a:t> e mesclar</a:t>
+            </a:r>
+          </a:p>
+          <a:p>
+            <a:pPr marL="0" indent="0">
+              <a:buNone/>
+            </a:pPr>
+            <a:r>
+              <a:rPr lang="pt-BR" sz="1900" b="1" dirty="0" err="1">
+                <a:solidFill>
+                  <a:srgbClr val="FFC000"/>
+                </a:solidFill>
+                <a:latin typeface="Consolas"/>
+              </a:rPr>
+              <a:t>git</a:t>
+            </a:r>
+            <a:r>
+              <a:rPr lang="pt-BR" sz="1900" b="1" dirty="0">
+                <a:solidFill>
+                  <a:srgbClr val="FFC000"/>
+                </a:solidFill>
+                <a:latin typeface="Consolas"/>
+              </a:rPr>
+              <a:t> checkout minha-</a:t>
+            </a:r>
+            <a:r>
+              <a:rPr lang="pt-BR" sz="1900" b="1" dirty="0" err="1">
+                <a:solidFill>
+                  <a:srgbClr val="FFC000"/>
+                </a:solidFill>
+                <a:latin typeface="Consolas"/>
+              </a:rPr>
+              <a:t>branch</a:t>
+            </a:r>
+            <a:r>
+              <a:rPr lang="pt-BR" sz="1600" dirty="0">
+                <a:latin typeface="Century Gothic"/>
+              </a:rPr>
+              <a:t>: Volta para sua </a:t>
+            </a:r>
+            <a:r>
+              <a:rPr lang="pt-BR" sz="1600" dirty="0" err="1">
+                <a:latin typeface="Century Gothic"/>
+              </a:rPr>
+              <a:t>branch</a:t>
+            </a:r>
+            <a:r>
+              <a:rPr lang="pt-BR" sz="1600" dirty="0">
+                <a:latin typeface="Century Gothic"/>
+              </a:rPr>
+              <a:t> </a:t>
+            </a:r>
+            <a:br>
+              <a:rPr lang="pt-BR" sz="1600" dirty="0">
+                <a:latin typeface="Century Gothic"/>
+              </a:rPr>
+            </a:br>
+            <a:r>
+              <a:rPr lang="pt-BR" sz="1900" b="1" dirty="0" err="1">
+                <a:solidFill>
+                  <a:srgbClr val="FFC000"/>
+                </a:solidFill>
+                <a:latin typeface="Consolas"/>
+              </a:rPr>
+              <a:t>git</a:t>
+            </a:r>
+            <a:r>
+              <a:rPr lang="pt-BR" sz="1900" b="1" dirty="0">
+                <a:solidFill>
+                  <a:srgbClr val="FFC000"/>
+                </a:solidFill>
+                <a:latin typeface="Consolas"/>
+              </a:rPr>
+              <a:t> merge </a:t>
+            </a:r>
+            <a:r>
+              <a:rPr lang="pt-BR" sz="1900" b="1" dirty="0" err="1">
+                <a:solidFill>
+                  <a:srgbClr val="FFC000"/>
+                </a:solidFill>
+                <a:latin typeface="Consolas"/>
+              </a:rPr>
+              <a:t>main</a:t>
+            </a:r>
+            <a:r>
+              <a:rPr lang="pt-BR" sz="1900" b="1" dirty="0">
+                <a:solidFill>
+                  <a:srgbClr val="FFC000"/>
+                </a:solidFill>
+                <a:latin typeface="Consolas"/>
+              </a:rPr>
+              <a:t>:</a:t>
+            </a:r>
+            <a:r>
+              <a:rPr lang="pt-BR" sz="1600" dirty="0">
+                <a:latin typeface="Century Gothic"/>
+              </a:rPr>
+              <a:t> traz as atualizações da principal para sua </a:t>
+            </a:r>
+            <a:r>
+              <a:rPr lang="pt-BR" sz="1600" dirty="0" err="1">
+                <a:latin typeface="Century Gothic"/>
+              </a:rPr>
+              <a:t>branch</a:t>
+            </a:r>
+            <a:endParaRPr lang="pt-BR" sz="1600" dirty="0" err="1"/>
           </a:p>
           <a:p>
             <a:pPr>
               <a:buNone/>
             </a:pPr>
-            <a:endParaRPr lang="pt-BR" sz="2000" dirty="0"/>
-          </a:p>
-          <a:p>
-            <a:pPr>
-              <a:buNone/>
-            </a:pPr>
-            <a:r>
-              <a:rPr lang="pt-BR" sz="2600"/>
-              <a:t>4. Corrigir o erro e salvar</a:t>
-            </a:r>
-            <a:endParaRPr lang="en-US" sz="2600"/>
-          </a:p>
-          <a:p>
-            <a:pPr>
-              <a:buNone/>
-            </a:pPr>
-            <a:r>
-              <a:rPr lang="pt-BR" sz="1900" dirty="0" err="1">
-                <a:latin typeface="Century Gothic"/>
-              </a:rPr>
-              <a:t>git</a:t>
-            </a:r>
-            <a:r>
-              <a:rPr lang="pt-BR" sz="1900" dirty="0">
-                <a:latin typeface="Century Gothic"/>
-              </a:rPr>
-              <a:t> </a:t>
-            </a:r>
-            <a:r>
-              <a:rPr lang="pt-BR" sz="1900" dirty="0" err="1">
-                <a:latin typeface="Century Gothic"/>
-              </a:rPr>
-              <a:t>add</a:t>
-            </a:r>
-            <a:r>
-              <a:rPr lang="pt-BR" sz="1900" dirty="0">
-                <a:latin typeface="Century Gothic"/>
-              </a:rPr>
-              <a:t>: prepara as alterações para </a:t>
-            </a:r>
-            <a:r>
-              <a:rPr lang="pt-BR" sz="1900" dirty="0" err="1">
-                <a:latin typeface="Century Gothic"/>
-              </a:rPr>
-              <a:t>commit</a:t>
-            </a:r>
-            <a:r>
-              <a:rPr lang="pt-BR" sz="1900" dirty="0">
-                <a:latin typeface="Century Gothic"/>
-              </a:rPr>
-              <a:t> </a:t>
-            </a:r>
-          </a:p>
-          <a:p>
-            <a:pPr>
-              <a:buNone/>
-            </a:pPr>
-            <a:r>
-              <a:rPr lang="pt-BR" sz="1900" dirty="0" err="1">
-                <a:latin typeface="Century Gothic"/>
-              </a:rPr>
-              <a:t>git</a:t>
-            </a:r>
-            <a:r>
-              <a:rPr lang="pt-BR" sz="1900" dirty="0">
-                <a:latin typeface="Century Gothic"/>
-              </a:rPr>
-              <a:t> </a:t>
-            </a:r>
-            <a:r>
-              <a:rPr lang="pt-BR" sz="1900" dirty="0" err="1">
-                <a:latin typeface="Century Gothic"/>
-              </a:rPr>
-              <a:t>commit</a:t>
-            </a:r>
-            <a:r>
-              <a:rPr lang="pt-BR" sz="1900" dirty="0">
-                <a:latin typeface="Century Gothic"/>
-              </a:rPr>
-              <a:t> -m "Corrige erro crítico": salva a correção no histórico </a:t>
-            </a:r>
-          </a:p>
-          <a:p>
-            <a:pPr indent="0">
-              <a:buNone/>
-            </a:pPr>
-            <a:endParaRPr lang="en-US" sz="3400" dirty="0"/>
-          </a:p>
-          <a:p>
-            <a:pPr>
-              <a:buNone/>
-            </a:pPr>
-            <a:r>
-              <a:rPr lang="pt-BR" sz="2600" dirty="0"/>
-              <a:t>5. Aplicar a correção na </a:t>
-            </a:r>
-            <a:r>
-              <a:rPr lang="pt-BR" sz="2600" dirty="0" err="1"/>
-              <a:t>branch</a:t>
-            </a:r>
-            <a:r>
-              <a:rPr lang="pt-BR" sz="2600" dirty="0"/>
-              <a:t> principal</a:t>
-            </a:r>
-            <a:endParaRPr lang="en-US" sz="2600" dirty="0"/>
-          </a:p>
-          <a:p>
-            <a:pPr>
-              <a:buNone/>
-            </a:pPr>
-            <a:r>
-              <a:rPr lang="pt-BR" sz="1900" dirty="0" err="1"/>
-              <a:t>git</a:t>
-            </a:r>
-            <a:r>
-              <a:rPr lang="pt-BR" sz="1900" dirty="0"/>
-              <a:t> checkout </a:t>
-            </a:r>
-            <a:r>
-              <a:rPr lang="pt-BR" sz="1900" dirty="0" err="1"/>
-              <a:t>main</a:t>
-            </a:r>
-            <a:r>
-              <a:rPr lang="pt-BR" sz="1900" dirty="0"/>
-              <a:t>: Volta para a </a:t>
-            </a:r>
-            <a:r>
-              <a:rPr lang="pt-BR" sz="1900" dirty="0" err="1"/>
-              <a:t>branch</a:t>
-            </a:r>
-            <a:r>
-              <a:rPr lang="pt-BR" sz="1900" dirty="0"/>
-              <a:t> principal</a:t>
-            </a:r>
-            <a:endParaRPr lang="en-US" sz="1900"/>
-          </a:p>
-          <a:p>
-            <a:pPr>
-              <a:buNone/>
-            </a:pPr>
-            <a:r>
-              <a:rPr lang="pt-BR" sz="1900" dirty="0" err="1"/>
-              <a:t>git</a:t>
-            </a:r>
-            <a:r>
-              <a:rPr lang="pt-BR" sz="1900" dirty="0"/>
-              <a:t> merge </a:t>
-            </a:r>
-            <a:r>
-              <a:rPr lang="pt-BR" sz="1900" dirty="0" err="1"/>
-              <a:t>hotfix</a:t>
-            </a:r>
-            <a:r>
-              <a:rPr lang="pt-BR" sz="1900" dirty="0"/>
-              <a:t>-erro-</a:t>
-            </a:r>
-            <a:r>
-              <a:rPr lang="pt-BR" sz="1900" dirty="0" err="1"/>
-              <a:t>critico</a:t>
-            </a:r>
-            <a:r>
-              <a:rPr lang="pt-BR" sz="1900" dirty="0"/>
-              <a:t>: Junta (</a:t>
-            </a:r>
-            <a:r>
-              <a:rPr lang="pt-BR" sz="1900" i="1" dirty="0"/>
-              <a:t>merge</a:t>
-            </a:r>
-            <a:r>
-              <a:rPr lang="pt-BR" sz="1900" dirty="0"/>
-              <a:t>) a correção feita na </a:t>
-            </a:r>
-            <a:r>
-              <a:rPr lang="pt-BR" sz="1900" dirty="0" err="1"/>
-              <a:t>branch</a:t>
-            </a:r>
-            <a:r>
-              <a:rPr lang="pt-BR" sz="1900" dirty="0"/>
-              <a:t> de </a:t>
-            </a:r>
-            <a:r>
-              <a:rPr lang="pt-BR" sz="1900" dirty="0" err="1"/>
-              <a:t>hotfix</a:t>
-            </a:r>
-            <a:endParaRPr lang="pt-BR" sz="1900" dirty="0"/>
+            <a:endParaRPr lang="pt-BR" sz="2400" dirty="0"/>
+          </a:p>
+          <a:p>
+            <a:pPr marL="0" indent="0">
+              <a:buNone/>
+            </a:pPr>
+            <a:endParaRPr lang="pt-BR" sz="2400" dirty="0"/>
+          </a:p>
+          <a:p>
+            <a:pPr marL="0" indent="0">
+              <a:buNone/>
+            </a:pPr>
+            <a:endParaRPr lang="pt-BR" dirty="0"/>
           </a:p>
         </p:txBody>
       </p:sp>
     </p:spTree>
     <p:extLst>
       <p:ext uri="{BB962C8B-B14F-4D97-AF65-F5344CB8AC3E}">
-        <p14:creationId xmlns:p14="http://schemas.microsoft.com/office/powerpoint/2010/main" val="2278136201"/>
+        <p14:creationId xmlns:p14="http://schemas.microsoft.com/office/powerpoint/2010/main" val="3262256541"/>
       </p:ext>
     </p:extLst>
   </p:cSld>
@@ -9348,7 +9233,13 @@
   <p:cSld>
     <p:spTree>
       <p:nvGrpSpPr>
-        <p:cNvPr id="1" name=""/>
+        <p:cNvPr id="1" name="">
+          <a:extLst>
+            <a:ext uri="{FF2B5EF4-FFF2-40B4-BE49-F238E27FC236}">
+              <a16:creationId xmlns:a16="http://schemas.microsoft.com/office/drawing/2014/main" id="{D4AB3DED-282F-9AE8-8184-7C3541E9A401}"/>
+            </a:ext>
+          </a:extLst>
+        </p:cNvPr>
         <p:cNvGrpSpPr/>
         <p:nvPr/>
       </p:nvGrpSpPr>
@@ -9365,7 +9256,7 @@
           <p:cNvPr id="2" name="Título 1">
             <a:extLst>
               <a:ext uri="{FF2B5EF4-FFF2-40B4-BE49-F238E27FC236}">
-                <a16:creationId xmlns:a16="http://schemas.microsoft.com/office/drawing/2014/main" id="{EBA43D66-D1A5-D712-35D2-EC7476137982}"/>
+                <a16:creationId xmlns:a16="http://schemas.microsoft.com/office/drawing/2014/main" id="{B2AA66D1-0471-8680-DC3E-D4C15A05F06E}"/>
               </a:ext>
             </a:extLst>
           </p:cNvPr>
@@ -9383,7 +9274,7 @@
           <a:p>
             <a:r>
               <a:rPr lang="pt-BR"/>
-              <a:t>Exemplo prático</a:t>
+              <a:t>Outros exemplos</a:t>
             </a:r>
           </a:p>
         </p:txBody>
@@ -9393,7 +9284,7 @@
           <p:cNvPr id="3" name="Espaço Reservado para Conteúdo 2">
             <a:extLst>
               <a:ext uri="{FF2B5EF4-FFF2-40B4-BE49-F238E27FC236}">
-                <a16:creationId xmlns:a16="http://schemas.microsoft.com/office/drawing/2014/main" id="{68AE4F73-8AE1-B869-AD7A-6EA2A99A1AA0}"/>
+                <a16:creationId xmlns:a16="http://schemas.microsoft.com/office/drawing/2014/main" id="{7EB1AFBF-06F4-0533-47CC-523645976AD7}"/>
               </a:ext>
             </a:extLst>
           </p:cNvPr>
@@ -9407,195 +9298,196 @@
         <p:spPr/>
         <p:txBody>
           <a:bodyPr vert="horz" lIns="91440" tIns="45720" rIns="91440" bIns="45720" rtlCol="0" anchor="t">
-            <a:normAutofit/>
+            <a:normAutofit lnSpcReduction="10000"/>
           </a:bodyPr>
           <a:lstStyle/>
           <a:p>
-            <a:pPr indent="0">
-              <a:buNone/>
-            </a:pPr>
-            <a:endParaRPr lang="en-US" sz="800" dirty="0"/>
+            <a:pPr marL="0">
+              <a:buNone/>
+            </a:pPr>
+            <a:r>
+              <a:rPr lang="pt-BR" sz="2400"/>
+              <a:t>4. Resetar arquivo sem perder alterações</a:t>
+            </a:r>
+            <a:endParaRPr lang="pt-BR" sz="2400" dirty="0"/>
+          </a:p>
+          <a:p>
+            <a:pPr marL="0">
+              <a:buNone/>
+            </a:pPr>
+            <a:r>
+              <a:rPr lang="pt-BR" sz="1600" dirty="0"/>
+              <a:t>Quando se vê que a </a:t>
+            </a:r>
+            <a:r>
+              <a:rPr lang="pt-BR" sz="1600"/>
+              <a:t>ideia</a:t>
+            </a:r>
+            <a:r>
+              <a:rPr lang="pt-BR" sz="1600" dirty="0"/>
+              <a:t> testada em um ramo</a:t>
+            </a:r>
+            <a:r>
+              <a:rPr lang="pt-BR" sz="1600" i="1" dirty="0"/>
+              <a:t> não dará frutos imediatos, é as vezes necessário momentaneamente guardar aquele ramo e voltar ao trabalho principal.</a:t>
+            </a:r>
+          </a:p>
+          <a:p>
+            <a:pPr marL="0">
+              <a:buNone/>
+            </a:pPr>
+            <a:endParaRPr lang="pt-BR" sz="1600" dirty="0"/>
+          </a:p>
+          <a:p>
+            <a:pPr marL="0">
+              <a:buNone/>
+            </a:pPr>
+            <a:r>
+              <a:rPr lang="pt-BR"/>
+              <a:t>Opção segura para guardar alterações</a:t>
+            </a:r>
+          </a:p>
+          <a:p>
+            <a:pPr marL="0">
+              <a:buNone/>
+            </a:pPr>
+            <a:r>
+              <a:rPr lang="pt-BR" sz="1600" b="1" dirty="0" err="1">
+                <a:solidFill>
+                  <a:srgbClr val="FFC000"/>
+                </a:solidFill>
+                <a:latin typeface="Consolas"/>
+              </a:rPr>
+              <a:t>git</a:t>
+            </a:r>
+            <a:r>
+              <a:rPr lang="pt-BR" sz="1600" b="1" dirty="0">
+                <a:solidFill>
+                  <a:srgbClr val="FFC000"/>
+                </a:solidFill>
+                <a:latin typeface="Consolas"/>
+              </a:rPr>
+              <a:t> </a:t>
+            </a:r>
+            <a:r>
+              <a:rPr lang="pt-BR" sz="1600" b="1" dirty="0" err="1">
+                <a:solidFill>
+                  <a:srgbClr val="FFC000"/>
+                </a:solidFill>
+                <a:latin typeface="Consolas"/>
+              </a:rPr>
+              <a:t>stash</a:t>
+            </a:r>
+            <a:r>
+              <a:rPr lang="pt-BR" sz="1600" dirty="0">
+                <a:ea typeface="+mn-lt"/>
+                <a:cs typeface="+mn-lt"/>
+              </a:rPr>
+              <a:t>: Salva temporariamente todas as suas alterações (como se colocasse numa gaveta).</a:t>
+            </a:r>
+            <a:endParaRPr lang="pt-BR" sz="1600"/>
+          </a:p>
+          <a:p>
+            <a:pPr marL="0">
+              <a:buNone/>
+            </a:pPr>
+            <a:endParaRPr lang="pt-BR" sz="1600" dirty="0"/>
+          </a:p>
+          <a:p>
+            <a:pPr marL="0">
+              <a:buNone/>
+            </a:pPr>
+            <a:r>
+              <a:rPr lang="pt-BR" sz="1900"/>
+              <a:t>Restaurar o arquivo ao estado original</a:t>
+            </a:r>
+            <a:endParaRPr lang="pt-BR" sz="1900" dirty="0"/>
+          </a:p>
+          <a:p>
+            <a:pPr marL="0">
+              <a:buNone/>
+            </a:pPr>
+            <a:r>
+              <a:rPr lang="pt-BR" sz="1600" b="1" dirty="0" err="1">
+                <a:solidFill>
+                  <a:srgbClr val="FFC000"/>
+                </a:solidFill>
+                <a:latin typeface="Consolas"/>
+              </a:rPr>
+              <a:t>git</a:t>
+            </a:r>
+            <a:r>
+              <a:rPr lang="pt-BR" sz="1600" b="1" dirty="0">
+                <a:solidFill>
+                  <a:srgbClr val="FFC000"/>
+                </a:solidFill>
+                <a:latin typeface="Consolas"/>
+              </a:rPr>
+              <a:t> checkout </a:t>
+            </a:r>
+            <a:r>
+              <a:rPr lang="pt-BR" sz="1600" b="1" dirty="0" err="1">
+                <a:solidFill>
+                  <a:srgbClr val="FFC000"/>
+                </a:solidFill>
+                <a:latin typeface="Consolas"/>
+              </a:rPr>
+              <a:t>main</a:t>
+            </a:r>
+            <a:r>
+              <a:rPr lang="pt-BR" sz="1600" b="1" dirty="0">
+                <a:solidFill>
+                  <a:srgbClr val="FFC000"/>
+                </a:solidFill>
+                <a:latin typeface="Consolas"/>
+              </a:rPr>
+              <a:t> -- arquivo.txt</a:t>
+            </a:r>
+            <a:r>
+              <a:rPr lang="pt-BR" sz="1600" dirty="0">
+                <a:ea typeface="+mn-lt"/>
+                <a:cs typeface="+mn-lt"/>
+              </a:rPr>
+              <a:t>: Pega a versão do arquivo da </a:t>
+            </a:r>
+            <a:r>
+              <a:rPr lang="pt-BR" sz="1600" dirty="0" err="1">
+                <a:ea typeface="+mn-lt"/>
+                <a:cs typeface="+mn-lt"/>
+              </a:rPr>
+              <a:t>branch</a:t>
+            </a:r>
+            <a:r>
+              <a:rPr lang="pt-BR" sz="1600" dirty="0">
+                <a:ea typeface="+mn-lt"/>
+                <a:cs typeface="+mn-lt"/>
+              </a:rPr>
+              <a:t> principal e substitui a atual.</a:t>
+            </a:r>
+            <a:endParaRPr lang="pt-BR" sz="1600"/>
           </a:p>
           <a:p>
             <a:pPr marL="0" indent="0">
               <a:buNone/>
             </a:pPr>
-            <a:endParaRPr lang="pt-BR" sz="800" dirty="0"/>
+            <a:endParaRPr lang="pt-BR" sz="2600" dirty="0"/>
           </a:p>
           <a:p>
             <a:pPr>
               <a:buNone/>
             </a:pPr>
-            <a:r>
-              <a:rPr lang="pt-BR" dirty="0"/>
-              <a:t>6.(Opcional) Apagar a </a:t>
-            </a:r>
-            <a:r>
-              <a:rPr lang="pt-BR" dirty="0" err="1"/>
-              <a:t>branch</a:t>
-            </a:r>
-            <a:r>
-              <a:rPr lang="pt-BR" dirty="0"/>
-              <a:t> de correção</a:t>
-            </a:r>
-            <a:endParaRPr lang="en-US"/>
-          </a:p>
-          <a:p>
-            <a:pPr>
-              <a:buNone/>
-            </a:pPr>
-            <a:r>
-              <a:rPr lang="pt-BR" sz="1600" dirty="0" err="1">
-                <a:latin typeface="Century Gothic"/>
-              </a:rPr>
-              <a:t>git</a:t>
-            </a:r>
-            <a:r>
-              <a:rPr lang="pt-BR" sz="1600" dirty="0">
-                <a:latin typeface="Century Gothic"/>
-              </a:rPr>
-              <a:t> </a:t>
-            </a:r>
-            <a:r>
-              <a:rPr lang="pt-BR" sz="1600" dirty="0" err="1">
-                <a:latin typeface="Century Gothic"/>
-              </a:rPr>
-              <a:t>branch</a:t>
-            </a:r>
-            <a:r>
-              <a:rPr lang="pt-BR" sz="1600" dirty="0">
-                <a:latin typeface="Century Gothic"/>
-              </a:rPr>
-              <a:t> -d </a:t>
-            </a:r>
-            <a:r>
-              <a:rPr lang="pt-BR" sz="1600" dirty="0" err="1">
-                <a:latin typeface="Century Gothic"/>
-              </a:rPr>
-              <a:t>hotfix</a:t>
-            </a:r>
-            <a:r>
-              <a:rPr lang="pt-BR" sz="1600" dirty="0">
-                <a:latin typeface="Century Gothic"/>
-              </a:rPr>
-              <a:t>-erro-</a:t>
-            </a:r>
-            <a:r>
-              <a:rPr lang="pt-BR" sz="1600" dirty="0" err="1">
-                <a:latin typeface="Century Gothic"/>
-              </a:rPr>
-              <a:t>critico</a:t>
-            </a:r>
-            <a:r>
-              <a:rPr lang="pt-BR" sz="1600" dirty="0">
-                <a:latin typeface="Century Gothic"/>
-              </a:rPr>
-              <a:t>: Remove</a:t>
-            </a:r>
-            <a:r>
-              <a:rPr lang="pt-BR" sz="1600" dirty="0"/>
-              <a:t> a </a:t>
-            </a:r>
-            <a:r>
-              <a:rPr lang="pt-BR" sz="1600" dirty="0" err="1"/>
-              <a:t>branch</a:t>
-            </a:r>
-            <a:r>
-              <a:rPr lang="pt-BR" sz="1600" dirty="0"/>
-              <a:t> temporária após o uso.</a:t>
-            </a:r>
-            <a:br>
-              <a:rPr lang="en-US" sz="1600" dirty="0"/>
-            </a:br>
-            <a:endParaRPr lang="en-US" sz="1600">
-              <a:latin typeface="Century Gothic"/>
-              <a:ea typeface="Calibri"/>
-              <a:cs typeface="Calibri"/>
-            </a:endParaRPr>
-          </a:p>
-          <a:p>
-            <a:pPr>
-              <a:buNone/>
-            </a:pPr>
-            <a:r>
-              <a:rPr lang="pt-BR" sz="1600" dirty="0"/>
-              <a:t> </a:t>
-            </a:r>
-            <a:r>
-              <a:rPr lang="pt-BR"/>
-              <a:t>7. Voltar ao que você estava fazendo antes</a:t>
-            </a:r>
-            <a:endParaRPr lang="en-US"/>
-          </a:p>
-          <a:p>
-            <a:pPr>
-              <a:buNone/>
-            </a:pPr>
-            <a:r>
-              <a:rPr lang="pt-BR" sz="1600" dirty="0" err="1">
-                <a:latin typeface="Century Gothic"/>
-              </a:rPr>
-              <a:t>git</a:t>
-            </a:r>
-            <a:r>
-              <a:rPr lang="pt-BR" sz="1600" dirty="0">
-                <a:latin typeface="Century Gothic"/>
-              </a:rPr>
-              <a:t> checkout sua-</a:t>
-            </a:r>
-            <a:r>
-              <a:rPr lang="pt-BR" sz="1600" dirty="0" err="1">
-                <a:latin typeface="Century Gothic"/>
-              </a:rPr>
-              <a:t>branch</a:t>
-            </a:r>
-            <a:r>
-              <a:rPr lang="pt-BR" sz="1600" dirty="0">
-                <a:latin typeface="Century Gothic"/>
-              </a:rPr>
-              <a:t>: Retorna para sua </a:t>
-            </a:r>
-            <a:r>
-              <a:rPr lang="pt-BR" sz="1600" dirty="0" err="1">
-                <a:latin typeface="Century Gothic"/>
-              </a:rPr>
-              <a:t>branch</a:t>
-            </a:r>
-            <a:r>
-              <a:rPr lang="pt-BR" sz="1600" dirty="0">
-                <a:latin typeface="Century Gothic"/>
-              </a:rPr>
-              <a:t> de desenvolvimento </a:t>
-            </a:r>
-          </a:p>
-          <a:p>
-            <a:pPr>
-              <a:buNone/>
-            </a:pPr>
-            <a:r>
-              <a:rPr lang="pt-BR" sz="1600" dirty="0" err="1">
-                <a:latin typeface="Century Gothic"/>
-              </a:rPr>
-              <a:t>git</a:t>
-            </a:r>
-            <a:r>
-              <a:rPr lang="pt-BR" sz="1600" dirty="0">
-                <a:latin typeface="Century Gothic"/>
-              </a:rPr>
-              <a:t> </a:t>
-            </a:r>
-            <a:r>
-              <a:rPr lang="pt-BR" sz="1600" dirty="0" err="1">
-                <a:latin typeface="Century Gothic"/>
-              </a:rPr>
-              <a:t>stash</a:t>
-            </a:r>
-            <a:r>
-              <a:rPr lang="pt-BR" sz="1600" dirty="0">
-                <a:latin typeface="Century Gothic"/>
-              </a:rPr>
-              <a:t> pop: recupera o que você estava fazendo antes </a:t>
-            </a:r>
+            <a:endParaRPr lang="pt-BR" sz="2400" dirty="0"/>
+          </a:p>
+          <a:p>
+            <a:pPr marL="0" indent="0">
+              <a:buNone/>
+            </a:pPr>
+            <a:endParaRPr lang="pt-BR" sz="2400" dirty="0"/>
+          </a:p>
+          <a:p>
+            <a:pPr marL="0" indent="0">
+              <a:buNone/>
+            </a:pPr>
             <a:endParaRPr lang="pt-BR" dirty="0"/>
           </a:p>
         </p:txBody>
@@ -9603,7 +9495,7 @@
     </p:spTree>
     <p:extLst>
       <p:ext uri="{BB962C8B-B14F-4D97-AF65-F5344CB8AC3E}">
-        <p14:creationId xmlns:p14="http://schemas.microsoft.com/office/powerpoint/2010/main" val="2842962354"/>
+        <p14:creationId xmlns:p14="http://schemas.microsoft.com/office/powerpoint/2010/main" val="1726710847"/>
       </p:ext>
     </p:extLst>
   </p:cSld>
@@ -9635,7 +9527,7 @@
           <p:cNvPr id="2" name="Título 1">
             <a:extLst>
               <a:ext uri="{FF2B5EF4-FFF2-40B4-BE49-F238E27FC236}">
-                <a16:creationId xmlns:a16="http://schemas.microsoft.com/office/drawing/2014/main" id="{DA848BF1-DF79-8CDA-8CAA-FFFA69DB126C}"/>
+                <a16:creationId xmlns:a16="http://schemas.microsoft.com/office/drawing/2014/main" id="{6F990B24-B6E3-F93B-60B1-B659D1A8F071}"/>
               </a:ext>
             </a:extLst>
           </p:cNvPr>
@@ -9653,9 +9545,8 @@
           <a:p>
             <a:r>
               <a:rPr lang="pt-BR"/>
-              <a:t>O que foi feito</a:t>
-            </a:r>
-            <a:endParaRPr lang="pt-BR" dirty="0"/>
+              <a:t>Considere um problema</a:t>
+            </a:r>
           </a:p>
         </p:txBody>
       </p:sp>
@@ -9664,7 +9555,7 @@
           <p:cNvPr id="3" name="Espaço Reservado para Conteúdo 2">
             <a:extLst>
               <a:ext uri="{FF2B5EF4-FFF2-40B4-BE49-F238E27FC236}">
-                <a16:creationId xmlns:a16="http://schemas.microsoft.com/office/drawing/2014/main" id="{3203C497-A4EB-D0E5-3824-5AFF03903956}"/>
+                <a16:creationId xmlns:a16="http://schemas.microsoft.com/office/drawing/2014/main" id="{156BC2B4-B492-2C97-B95A-4FE075A4AECF}"/>
               </a:ext>
             </a:extLst>
           </p:cNvPr>
@@ -9682,148 +9573,53 @@
           </a:bodyPr>
           <a:lstStyle/>
           <a:p>
-            <a:pPr indent="0">
-              <a:buNone/>
-            </a:pPr>
-            <a:endParaRPr lang="en-US" dirty="0"/>
-          </a:p>
-          <a:p>
-            <a:pPr>
-              <a:buNone/>
-            </a:pPr>
-            <a:r>
-              <a:rPr lang="pt-BR"/>
-              <a:t>Você:</a:t>
-            </a:r>
-            <a:endParaRPr lang="pt-BR" dirty="0"/>
-          </a:p>
-          <a:p>
-            <a:pPr>
-              <a:buNone/>
-            </a:pPr>
-            <a:endParaRPr lang="pt-BR" dirty="0"/>
-          </a:p>
-          <a:p>
-            <a:pPr>
-              <a:buAutoNum type="arabicParenR"/>
-            </a:pPr>
-            <a:r>
-              <a:rPr lang="pt-BR" dirty="0"/>
-              <a:t>Guardou o trabalho atual (</a:t>
-            </a:r>
-            <a:r>
-              <a:rPr lang="pt-BR" i="1" dirty="0" err="1"/>
-              <a:t>stash</a:t>
-            </a:r>
-            <a:r>
-              <a:rPr lang="pt-BR" dirty="0"/>
-              <a:t>) </a:t>
-            </a:r>
-            <a:endParaRPr lang="en-US" dirty="0"/>
-          </a:p>
-          <a:p>
-            <a:pPr>
-              <a:buAutoNum type="arabicParenR"/>
-            </a:pPr>
-            <a:r>
-              <a:rPr lang="pt-BR" dirty="0"/>
-              <a:t>Foi para a ramifi</a:t>
-            </a:r>
-            <a:r>
-              <a:rPr lang="pt-BR"/>
-              <a:t>cação principal</a:t>
-            </a:r>
-            <a:r>
-              <a:rPr lang="pt-BR" dirty="0"/>
-              <a:t> </a:t>
-            </a:r>
-          </a:p>
-          <a:p>
-            <a:pPr>
-              <a:buAutoNum type="arabicParenR"/>
-            </a:pPr>
-            <a:r>
-              <a:rPr lang="pt-BR" dirty="0"/>
-              <a:t>Criou uma </a:t>
-            </a:r>
-            <a:r>
-              <a:rPr lang="pt-BR" i="1" dirty="0" err="1"/>
-              <a:t>branch</a:t>
-            </a:r>
-            <a:r>
-              <a:rPr lang="pt-BR" dirty="0"/>
-              <a:t> de correção </a:t>
-            </a:r>
-            <a:endParaRPr lang="en-US" dirty="0"/>
-          </a:p>
-          <a:p>
-            <a:pPr>
-              <a:buAutoNum type="arabicParenR"/>
-            </a:pPr>
-            <a:r>
-              <a:rPr lang="pt-BR" dirty="0"/>
-              <a:t>Fez a correção e fez um </a:t>
-            </a:r>
-            <a:r>
-              <a:rPr lang="pt-BR" i="1" dirty="0" err="1"/>
-              <a:t>commit</a:t>
-            </a:r>
-            <a:r>
-              <a:rPr lang="pt-BR" i="1" dirty="0"/>
-              <a:t> </a:t>
-            </a:r>
-            <a:endParaRPr lang="en-US" i="1" dirty="0"/>
-          </a:p>
-          <a:p>
-            <a:pPr>
-              <a:buAutoNum type="arabicParenR"/>
-            </a:pPr>
-            <a:r>
-              <a:rPr lang="pt-BR" dirty="0"/>
-              <a:t>Integrou </a:t>
-            </a:r>
-            <a:r>
-              <a:rPr lang="pt-BR"/>
-              <a:t>no arquivo principal</a:t>
-            </a:r>
-            <a:r>
-              <a:rPr lang="pt-BR" dirty="0"/>
-              <a:t> (</a:t>
-            </a:r>
-            <a:r>
-              <a:rPr lang="pt-BR" i="1" dirty="0"/>
-              <a:t>merge</a:t>
-            </a:r>
-            <a:r>
-              <a:rPr lang="pt-BR" dirty="0"/>
-              <a:t>) </a:t>
-            </a:r>
-          </a:p>
-          <a:p>
-            <a:pPr>
-              <a:buAutoNum type="arabicParenR"/>
-            </a:pPr>
-            <a:r>
-              <a:rPr lang="pt-BR"/>
-              <a:t>Excluiu a ramificação de correção do erro</a:t>
-            </a:r>
-            <a:endParaRPr lang="pt-BR" dirty="0"/>
-          </a:p>
-          <a:p>
-            <a:pPr>
-              <a:buAutoNum type="arabicParenR"/>
-            </a:pPr>
-            <a:r>
-              <a:rPr lang="pt-BR"/>
-              <a:t>Voltou ao seu trabalho original</a:t>
-            </a:r>
+            <a:pPr marL="0" indent="0">
+              <a:buNone/>
+            </a:pPr>
+            <a:r>
+              <a:rPr lang="pt-BR" sz="2800" dirty="0">
+                <a:ea typeface="+mn-lt"/>
+                <a:cs typeface="+mn-lt"/>
+              </a:rPr>
+              <a:t>Um erro crítico é descoberto no código principal enquanto se está trabalhando em uma nova versão de um software, tornando necessário voltar ao arquivo principal sem perder o que se está trabalhando e fazer as alterações sem risco de danificar ainda mais o código, </a:t>
+            </a:r>
+            <a:r>
+              <a:rPr lang="pt-BR" sz="2800">
+                <a:ea typeface="+mn-lt"/>
+                <a:cs typeface="+mn-lt"/>
+              </a:rPr>
+              <a:t>isso é</a:t>
+            </a:r>
+            <a:r>
+              <a:rPr lang="pt-BR" sz="2800" dirty="0">
+                <a:ea typeface="+mn-lt"/>
+                <a:cs typeface="+mn-lt"/>
+              </a:rPr>
+              <a:t> possível? </a:t>
+            </a:r>
+          </a:p>
+          <a:p>
+            <a:pPr marL="0" indent="0">
+              <a:buNone/>
+            </a:pPr>
+            <a:endParaRPr lang="pt-BR" sz="2800" dirty="0"/>
+          </a:p>
+          <a:p>
+            <a:pPr marL="0" indent="0">
+              <a:buNone/>
+            </a:pPr>
+            <a:r>
+              <a:rPr lang="pt-BR" sz="2000"/>
+              <a:t>Primeiro, vamos entender a ferramenta que iremos utilizar para resolver o problema.</a:t>
+            </a:r>
+            <a:endParaRPr lang="pt-BR" sz="2000" dirty="0"/>
           </a:p>
         </p:txBody>
       </p:sp>
     </p:spTree>
     <p:extLst>
       <p:ext uri="{BB962C8B-B14F-4D97-AF65-F5344CB8AC3E}">
-        <p14:creationId xmlns:p14="http://schemas.microsoft.com/office/powerpoint/2010/main" val="718378982"/>
+        <p14:creationId xmlns:p14="http://schemas.microsoft.com/office/powerpoint/2010/main" val="965797971"/>
       </p:ext>
     </p:extLst>
   </p:cSld>
@@ -9855,7 +9651,7 @@
           <p:cNvPr id="2" name="Título 1">
             <a:extLst>
               <a:ext uri="{FF2B5EF4-FFF2-40B4-BE49-F238E27FC236}">
-                <a16:creationId xmlns:a16="http://schemas.microsoft.com/office/drawing/2014/main" id="{94827F7A-6DF4-3F85-ED36-23C5B749B673}"/>
+                <a16:creationId xmlns:a16="http://schemas.microsoft.com/office/drawing/2014/main" id="{C74898F8-305F-289F-ECED-47C00F3A435A}"/>
               </a:ext>
             </a:extLst>
           </p:cNvPr>
@@ -9873,7 +9669,7 @@
           <a:p>
             <a:r>
               <a:rPr lang="pt-BR"/>
-              <a:t>Outros exemplos</a:t>
+              <a:t>Exemplo prático</a:t>
             </a:r>
           </a:p>
         </p:txBody>
@@ -9883,7 +9679,7 @@
           <p:cNvPr id="3" name="Espaço Reservado para Conteúdo 2">
             <a:extLst>
               <a:ext uri="{FF2B5EF4-FFF2-40B4-BE49-F238E27FC236}">
-                <a16:creationId xmlns:a16="http://schemas.microsoft.com/office/drawing/2014/main" id="{4967165F-18B8-8397-8679-CBABFA5272B8}"/>
+                <a16:creationId xmlns:a16="http://schemas.microsoft.com/office/drawing/2014/main" id="{3681C089-4161-E596-39A7-053DCC55AC19}"/>
               </a:ext>
             </a:extLst>
           </p:cNvPr>
@@ -9897,7 +9693,7 @@
         <p:spPr/>
         <p:txBody>
           <a:bodyPr vert="horz" lIns="91440" tIns="45720" rIns="91440" bIns="45720" rtlCol="0" anchor="t">
-            <a:normAutofit/>
+            <a:normAutofit fontScale="92500" lnSpcReduction="10000"/>
           </a:bodyPr>
           <a:lstStyle/>
           <a:p>
@@ -9905,24 +9701,37 @@
               <a:buNone/>
             </a:pPr>
             <a:r>
-              <a:rPr lang="pt-BR" sz="2400"/>
-              <a:t>1. Criar um repositório local e clonar da nuvem</a:t>
+              <a:rPr lang="pt-BR" dirty="0"/>
+              <a:t>Voltando ao problema do </a:t>
+            </a:r>
+            <a:r>
+              <a:rPr lang="pt-BR"/>
+              <a:t>início</a:t>
+            </a:r>
+            <a:r>
+              <a:rPr lang="pt-BR" dirty="0"/>
+              <a:t> da apresentação:</a:t>
             </a:r>
           </a:p>
           <a:p>
             <a:pPr marL="0" indent="0">
               <a:buNone/>
             </a:pPr>
-            <a:r>
-              <a:rPr lang="pt-BR" sz="1600"/>
-              <a:t>Este são os primeiros processos que serão realizados em um projeto.</a:t>
-            </a:r>
-            <a:endParaRPr lang="pt-BR" sz="1600" dirty="0"/>
+            <a:endParaRPr lang="pt-BR" dirty="0"/>
           </a:p>
           <a:p>
             <a:pPr marL="0" indent="0">
               <a:buNone/>
             </a:pPr>
+            <a:r>
+              <a:rPr lang="pt-BR"/>
+              <a:t>Aqui estão os passos que serão seguidos para resolver o problema:</a:t>
+            </a:r>
+          </a:p>
+          <a:p>
+            <a:pPr marL="0" indent="0">
+              <a:buNone/>
+            </a:pPr>
             <a:endParaRPr lang="pt-BR" dirty="0"/>
           </a:p>
           <a:p>
@@ -9930,143 +9739,178 @@
               <a:buNone/>
             </a:pPr>
             <a:r>
-              <a:rPr lang="pt-BR"/>
-              <a:t>Criar repositório local</a:t>
-            </a:r>
-            <a:endParaRPr lang="pt-BR" dirty="0"/>
-          </a:p>
-          <a:p>
-            <a:pPr marL="0" indent="0">
-              <a:buNone/>
-            </a:pPr>
-            <a:r>
-              <a:rPr lang="pt-BR" sz="1600" dirty="0" err="1">
-                <a:latin typeface="Century Gothic"/>
+              <a:rPr lang="pt-BR" sz="1900"/>
+              <a:t>1. Salvar temporariamente o que você está fazendo</a:t>
+            </a:r>
+          </a:p>
+          <a:p>
+            <a:pPr>
+              <a:buNone/>
+            </a:pPr>
+            <a:r>
+              <a:rPr lang="pt-BR" sz="1700" b="1" dirty="0" err="1">
+                <a:solidFill>
+                  <a:srgbClr val="FFC000"/>
+                </a:solidFill>
+                <a:latin typeface="Consolas"/>
               </a:rPr>
               <a:t>git</a:t>
             </a:r>
             <a:r>
-              <a:rPr lang="pt-BR" sz="1600" dirty="0">
-                <a:latin typeface="Century Gothic"/>
+              <a:rPr lang="pt-BR" sz="1700" b="1" dirty="0">
+                <a:solidFill>
+                  <a:srgbClr val="FFC000"/>
+                </a:solidFill>
+                <a:latin typeface="Consolas"/>
               </a:rPr>
               <a:t> </a:t>
             </a:r>
             <a:r>
-              <a:rPr lang="pt-BR" sz="1600" dirty="0" err="1">
-                <a:latin typeface="Century Gothic"/>
-              </a:rPr>
-              <a:t>init</a:t>
-            </a:r>
-            <a:r>
-              <a:rPr lang="pt-BR" sz="1600" dirty="0"/>
-              <a:t>: Inicializa um repositório </a:t>
-            </a:r>
-            <a:r>
-              <a:rPr lang="pt-BR" sz="1600" dirty="0" err="1"/>
-              <a:t>Git</a:t>
-            </a:r>
-            <a:r>
-              <a:rPr lang="pt-BR" sz="1600" dirty="0"/>
-              <a:t> na pasta atual. A partir </a:t>
-            </a:r>
-            <a:r>
-              <a:rPr lang="pt-BR" sz="1600" dirty="0" err="1"/>
-              <a:t>daqui, o</a:t>
-            </a:r>
-            <a:r>
-              <a:rPr lang="pt-BR" sz="1600" dirty="0"/>
-              <a:t> </a:t>
-            </a:r>
-            <a:r>
-              <a:rPr lang="pt-BR" sz="1600" dirty="0" err="1"/>
-              <a:t>Git</a:t>
-            </a:r>
-            <a:r>
-              <a:rPr lang="pt-BR" sz="1600" dirty="0"/>
-              <a:t> começa a rastrear alterações.</a:t>
-            </a:r>
-            <a:endParaRPr lang="pt-BR" sz="1600"/>
-          </a:p>
-          <a:p>
-            <a:pPr marL="0" indent="0">
-              <a:buNone/>
-            </a:pPr>
-            <a:endParaRPr lang="pt-BR" dirty="0"/>
-          </a:p>
-          <a:p>
-            <a:pPr>
-              <a:buNone/>
-            </a:pPr>
-            <a:r>
-              <a:rPr lang="pt-BR"/>
-              <a:t>Clonar um repositório remoto</a:t>
-            </a:r>
-            <a:endParaRPr lang="pt-BR" dirty="0"/>
-          </a:p>
-          <a:p>
-            <a:pPr marL="0">
-              <a:buNone/>
-            </a:pPr>
-            <a:r>
-              <a:rPr lang="pt-BR" sz="1600" dirty="0" err="1">
-                <a:latin typeface="Century Gothic"/>
-              </a:rPr>
-              <a:t>git</a:t>
-            </a:r>
-            <a:r>
-              <a:rPr lang="pt-BR" sz="1600" dirty="0">
-                <a:latin typeface="Century Gothic"/>
-              </a:rPr>
-              <a:t> clone </a:t>
-            </a:r>
-            <a:r>
-              <a:rPr lang="pt-BR" sz="1600" dirty="0">
-                <a:solidFill>
-                  <a:schemeClr val="accent1">
-                    <a:lumMod val="60000"/>
-                    <a:lumOff val="40000"/>
-                  </a:schemeClr>
-                </a:solidFill>
-                <a:latin typeface="Century Gothic"/>
-                <a:hlinkClick r:id="rId2">
-                  <a:extLst>
-                    <a:ext uri="{A12FA001-AC4F-418D-AE19-62706E023703}">
-                      <ahyp:hlinkClr xmlns:ahyp="http://schemas.microsoft.com/office/drawing/2018/hyperlinkcolor" val="tx"/>
-                    </a:ext>
-                  </a:extLst>
-                </a:hlinkClick>
-              </a:rPr>
-              <a:t>https://github.com/usuario/projeto.git</a:t>
-            </a:r>
-            <a:r>
-              <a:rPr lang="pt-BR" sz="1600" dirty="0">
-                <a:solidFill>
-                  <a:schemeClr val="tx1"/>
-                </a:solidFill>
-                <a:latin typeface="Century Gothic"/>
-              </a:rPr>
-              <a:t>: </a:t>
-            </a:r>
-            <a:r>
-              <a:rPr lang="pt-BR" sz="1600" dirty="0">
-                <a:solidFill>
-                  <a:srgbClr val="FFFFFF"/>
-                </a:solidFill>
-                <a:latin typeface="Century Gothic"/>
-              </a:rPr>
-              <a:t>Baixa</a:t>
-            </a:r>
-            <a:r>
-              <a:rPr lang="pt-BR" sz="1600" dirty="0">
+              <a:rPr lang="pt-BR" sz="1700" b="1" dirty="0" err="1">
+                <a:solidFill>
+                  <a:srgbClr val="FFC000"/>
+                </a:solidFill>
+                <a:latin typeface="Consolas"/>
+              </a:rPr>
+              <a:t>stash</a:t>
+            </a:r>
+            <a:r>
+              <a:rPr lang="pt-BR" sz="1700" dirty="0">
                 <a:ea typeface="+mn-lt"/>
                 <a:cs typeface="+mn-lt"/>
               </a:rPr>
-              <a:t> um repositório da nuvem (por exemplo, do GitHub) para sua máquina, incluindo todo o histórico.</a:t>
-            </a:r>
-            <a:endParaRPr lang="pt-BR" sz="1600" dirty="0"/>
-          </a:p>
-          <a:p>
-            <a:pPr marL="0" indent="0">
+              <a:t> </a:t>
+            </a:r>
+            <a:r>
+              <a:rPr lang="pt-BR" sz="1700" b="1" dirty="0">
+                <a:ea typeface="+mn-lt"/>
+                <a:cs typeface="+mn-lt"/>
+              </a:rPr>
+              <a:t>: </a:t>
+            </a:r>
+            <a:r>
+              <a:rPr lang="pt-BR" sz="1700" dirty="0">
+                <a:ea typeface="+mn-lt"/>
+                <a:cs typeface="+mn-lt"/>
+              </a:rPr>
+              <a:t>Guarda temporariamente suas alterações não </a:t>
+            </a:r>
+            <a:r>
+              <a:rPr lang="pt-BR" sz="1700" dirty="0" err="1">
+                <a:ea typeface="+mn-lt"/>
+                <a:cs typeface="+mn-lt"/>
+              </a:rPr>
+              <a:t>confirmadas  e</a:t>
+            </a:r>
+            <a:r>
+              <a:rPr lang="pt-BR" sz="1700" dirty="0">
+                <a:ea typeface="+mn-lt"/>
+                <a:cs typeface="+mn-lt"/>
+              </a:rPr>
+              <a:t> limpa o diretório de trabalho, permitindo mudar de contexto sem perder nada.</a:t>
+            </a:r>
+            <a:endParaRPr lang="pt-BR" sz="1700"/>
+          </a:p>
+          <a:p>
+            <a:pPr>
+              <a:buNone/>
+            </a:pPr>
+            <a:endParaRPr lang="pt-BR" dirty="0"/>
+          </a:p>
+          <a:p>
+            <a:pPr>
+              <a:buNone/>
+            </a:pPr>
+            <a:r>
+              <a:rPr lang="pt-BR" sz="1900" dirty="0"/>
+              <a:t>2. Voltar para a </a:t>
+            </a:r>
+            <a:r>
+              <a:rPr lang="pt-BR" sz="1900" dirty="0" err="1"/>
+              <a:t>branch</a:t>
+            </a:r>
+            <a:r>
+              <a:rPr lang="pt-BR" sz="1900" dirty="0"/>
+              <a:t> principal</a:t>
+            </a:r>
+          </a:p>
+          <a:p>
+            <a:pPr>
+              <a:buNone/>
+            </a:pPr>
+            <a:r>
+              <a:rPr lang="pt-BR" sz="1700" b="1" err="1">
+                <a:solidFill>
+                  <a:srgbClr val="FFC000"/>
+                </a:solidFill>
+                <a:latin typeface="Consolas"/>
+              </a:rPr>
+              <a:t>git</a:t>
+            </a:r>
+            <a:r>
+              <a:rPr lang="pt-BR" sz="1700" b="1" dirty="0">
+                <a:solidFill>
+                  <a:srgbClr val="FFC000"/>
+                </a:solidFill>
+                <a:latin typeface="Consolas"/>
+              </a:rPr>
+              <a:t> checkout </a:t>
+            </a:r>
+            <a:r>
+              <a:rPr lang="pt-BR" sz="1700" b="1" err="1">
+                <a:solidFill>
+                  <a:srgbClr val="FFC000"/>
+                </a:solidFill>
+                <a:latin typeface="Consolas"/>
+              </a:rPr>
+              <a:t>main</a:t>
+            </a:r>
+            <a:r>
+              <a:rPr lang="pt-BR" sz="1700" b="1" dirty="0">
+                <a:ea typeface="+mn-lt"/>
+                <a:cs typeface="+mn-lt"/>
+              </a:rPr>
+              <a:t>: </a:t>
+            </a:r>
+            <a:r>
+              <a:rPr lang="pt-BR" sz="1700" dirty="0">
+                <a:ea typeface="+mn-lt"/>
+                <a:cs typeface="+mn-lt"/>
+              </a:rPr>
+              <a:t>Muda para a </a:t>
+            </a:r>
+            <a:r>
+              <a:rPr lang="pt-BR" sz="1700" err="1">
+                <a:ea typeface="+mn-lt"/>
+                <a:cs typeface="+mn-lt"/>
+              </a:rPr>
+              <a:t>branch</a:t>
+            </a:r>
+            <a:r>
+              <a:rPr lang="pt-BR" sz="1700" dirty="0">
+                <a:ea typeface="+mn-lt"/>
+                <a:cs typeface="+mn-lt"/>
+              </a:rPr>
+              <a:t> principal do projeto, onde está o </a:t>
+            </a:r>
+            <a:r>
+              <a:rPr lang="pt-BR" sz="1700">
+                <a:ea typeface="+mn-lt"/>
+                <a:cs typeface="+mn-lt"/>
+              </a:rPr>
+              <a:t>código “oficial</a:t>
+            </a:r>
+            <a:r>
+              <a:rPr lang="pt-BR" sz="1700" dirty="0">
+                <a:ea typeface="+mn-lt"/>
+                <a:cs typeface="+mn-lt"/>
+              </a:rPr>
+              <a:t>”.</a:t>
+            </a:r>
+            <a:endParaRPr lang="pt-BR" sz="1700" dirty="0"/>
+          </a:p>
+          <a:p>
+            <a:pPr>
               <a:buNone/>
             </a:pPr>
             <a:endParaRPr lang="pt-BR" dirty="0"/>
@@ -10076,7 +9920,7 @@
     </p:spTree>
     <p:extLst>
       <p:ext uri="{BB962C8B-B14F-4D97-AF65-F5344CB8AC3E}">
-        <p14:creationId xmlns:p14="http://schemas.microsoft.com/office/powerpoint/2010/main" val="3784171948"/>
+        <p14:creationId xmlns:p14="http://schemas.microsoft.com/office/powerpoint/2010/main" val="2204593060"/>
       </p:ext>
     </p:extLst>
   </p:cSld>
@@ -10087,587 +9931,6 @@
 </file>
 
 <file path=ppt/slides/slide18.xml><?xml version="1.0" encoding="utf-8"?>
-<p:sld xmlns:a="http://schemas.openxmlformats.org/drawingml/2006/main" xmlns:r="http://schemas.openxmlformats.org/officeDocument/2006/relationships" xmlns:p="http://schemas.openxmlformats.org/presentationml/2006/main">
-  <p:cSld>
-    <p:spTree>
-      <p:nvGrpSpPr>
-        <p:cNvPr id="1" name="">
-          <a:extLst>
-            <a:ext uri="{FF2B5EF4-FFF2-40B4-BE49-F238E27FC236}">
-              <a16:creationId xmlns:a16="http://schemas.microsoft.com/office/drawing/2014/main" id="{450D3844-1091-E3ED-93F0-8521E7CFCAE6}"/>
-            </a:ext>
-          </a:extLst>
-        </p:cNvPr>
-        <p:cNvGrpSpPr/>
-        <p:nvPr/>
-      </p:nvGrpSpPr>
-      <p:grpSpPr>
-        <a:xfrm>
-          <a:off x="0" y="0"/>
-          <a:ext cx="0" cy="0"/>
-          <a:chOff x="0" y="0"/>
-          <a:chExt cx="0" cy="0"/>
-        </a:xfrm>
-      </p:grpSpPr>
-      <p:sp>
-        <p:nvSpPr>
-          <p:cNvPr id="2" name="Título 1">
-            <a:extLst>
-              <a:ext uri="{FF2B5EF4-FFF2-40B4-BE49-F238E27FC236}">
-                <a16:creationId xmlns:a16="http://schemas.microsoft.com/office/drawing/2014/main" id="{A3B2369A-D185-50CB-F229-91ACA8DAC281}"/>
-              </a:ext>
-            </a:extLst>
-          </p:cNvPr>
-          <p:cNvSpPr>
-            <a:spLocks noGrp="1"/>
-          </p:cNvSpPr>
-          <p:nvPr>
-            <p:ph type="title"/>
-          </p:nvPr>
-        </p:nvSpPr>
-        <p:spPr/>
-        <p:txBody>
-          <a:bodyPr/>
-          <a:lstStyle/>
-          <a:p>
-            <a:r>
-              <a:rPr lang="pt-BR"/>
-              <a:t>Outros exemplos</a:t>
-            </a:r>
-          </a:p>
-        </p:txBody>
-      </p:sp>
-      <p:sp>
-        <p:nvSpPr>
-          <p:cNvPr id="3" name="Espaço Reservado para Conteúdo 2">
-            <a:extLst>
-              <a:ext uri="{FF2B5EF4-FFF2-40B4-BE49-F238E27FC236}">
-                <a16:creationId xmlns:a16="http://schemas.microsoft.com/office/drawing/2014/main" id="{0E623F54-A8CB-4C5F-F059-483098C15F89}"/>
-              </a:ext>
-            </a:extLst>
-          </p:cNvPr>
-          <p:cNvSpPr>
-            <a:spLocks noGrp="1"/>
-          </p:cNvSpPr>
-          <p:nvPr>
-            <p:ph idx="1"/>
-          </p:nvPr>
-        </p:nvSpPr>
-        <p:spPr/>
-        <p:txBody>
-          <a:bodyPr vert="horz" lIns="91440" tIns="45720" rIns="91440" bIns="45720" rtlCol="0" anchor="t">
-            <a:normAutofit/>
-          </a:bodyPr>
-          <a:lstStyle/>
-          <a:p>
-            <a:pPr marL="0">
-              <a:buNone/>
-            </a:pPr>
-            <a:r>
-              <a:rPr lang="pt-BR" sz="2400" dirty="0"/>
-              <a:t>2. Colocar um item na área de preparo e fazer </a:t>
-            </a:r>
-            <a:r>
-              <a:rPr lang="pt-BR" sz="2400" dirty="0" err="1"/>
-              <a:t>commit</a:t>
-            </a:r>
-            <a:endParaRPr lang="pt-BR" sz="2400"/>
-          </a:p>
-          <a:p>
-            <a:pPr marL="0">
-              <a:buNone/>
-            </a:pPr>
-            <a:r>
-              <a:rPr lang="pt-BR" sz="1600" dirty="0">
-                <a:latin typeface="Century Gothic"/>
-              </a:rPr>
-              <a:t>Após o projeto alcançar um desenvolvimento apropriado, se é recomendado realizar um </a:t>
-            </a:r>
-            <a:r>
-              <a:rPr lang="pt-BR" sz="1600" i="1" dirty="0" err="1">
-                <a:latin typeface="Century Gothic"/>
-              </a:rPr>
-              <a:t>commit</a:t>
-            </a:r>
-            <a:r>
-              <a:rPr lang="pt-BR" sz="1600" i="1" dirty="0">
-                <a:latin typeface="Century Gothic"/>
-              </a:rPr>
-              <a:t> </a:t>
-            </a:r>
-            <a:r>
-              <a:rPr lang="pt-BR" sz="1600" dirty="0">
-                <a:latin typeface="Century Gothic"/>
-              </a:rPr>
-              <a:t>para que o presente estado do arquivo seja salvo no repositório e antes que isso seja feito é necessário movê-lo para a área de preparo,</a:t>
-            </a:r>
-          </a:p>
-          <a:p>
-            <a:pPr marL="0">
-              <a:buNone/>
-            </a:pPr>
-            <a:endParaRPr lang="pt-BR" sz="2400" dirty="0">
-              <a:latin typeface="Century Gothic"/>
-            </a:endParaRPr>
-          </a:p>
-          <a:p>
-            <a:pPr marL="0">
-              <a:buNone/>
-            </a:pPr>
-            <a:r>
-              <a:rPr lang="pt-BR" dirty="0" err="1">
-                <a:latin typeface="Century Gothic"/>
-              </a:rPr>
-              <a:t>git</a:t>
-            </a:r>
-            <a:r>
-              <a:rPr lang="pt-BR" dirty="0">
-                <a:latin typeface="Century Gothic"/>
-              </a:rPr>
-              <a:t> </a:t>
-            </a:r>
-            <a:r>
-              <a:rPr lang="pt-BR" dirty="0" err="1">
-                <a:latin typeface="Century Gothic"/>
-              </a:rPr>
-              <a:t>add</a:t>
-            </a:r>
-            <a:r>
-              <a:rPr lang="pt-BR" dirty="0">
-                <a:latin typeface="Century Gothic"/>
-              </a:rPr>
-              <a:t> </a:t>
-            </a:r>
-            <a:r>
-              <a:rPr lang="pt-BR" dirty="0" err="1">
-                <a:latin typeface="Century Gothic"/>
-              </a:rPr>
-              <a:t>arquivo.txt:envia</a:t>
-            </a:r>
-            <a:r>
-              <a:rPr lang="pt-BR" dirty="0">
-                <a:latin typeface="Century Gothic"/>
-              </a:rPr>
-              <a:t> o arquivo para a </a:t>
-            </a:r>
-            <a:r>
-              <a:rPr lang="pt-BR" i="1" dirty="0" err="1">
-                <a:latin typeface="Century Gothic"/>
-              </a:rPr>
-              <a:t>staging</a:t>
-            </a:r>
-            <a:r>
-              <a:rPr lang="pt-BR" i="1" dirty="0">
-                <a:latin typeface="Century Gothic"/>
-              </a:rPr>
-              <a:t> </a:t>
-            </a:r>
-            <a:r>
-              <a:rPr lang="pt-BR" i="1" dirty="0" err="1">
-                <a:latin typeface="Century Gothic"/>
-              </a:rPr>
-              <a:t>area</a:t>
-            </a:r>
-            <a:r>
-              <a:rPr lang="pt-BR" dirty="0">
-                <a:latin typeface="Century Gothic"/>
-              </a:rPr>
-              <a:t> (área de preparo) </a:t>
-            </a:r>
-          </a:p>
-          <a:p>
-            <a:pPr marL="0">
-              <a:buNone/>
-            </a:pPr>
-            <a:r>
-              <a:rPr lang="pt-BR" dirty="0" err="1">
-                <a:latin typeface="Century Gothic"/>
-              </a:rPr>
-              <a:t>git</a:t>
-            </a:r>
-            <a:r>
-              <a:rPr lang="pt-BR" dirty="0">
-                <a:latin typeface="Century Gothic"/>
-              </a:rPr>
-              <a:t> </a:t>
-            </a:r>
-            <a:r>
-              <a:rPr lang="pt-BR" dirty="0" err="1">
-                <a:latin typeface="Century Gothic"/>
-              </a:rPr>
-              <a:t>commit</a:t>
-            </a:r>
-            <a:r>
-              <a:rPr lang="pt-BR" dirty="0">
-                <a:latin typeface="Century Gothic"/>
-              </a:rPr>
-              <a:t> -m "Adiciona arquivo": salva definitivamente a alteração no histórico do projeto</a:t>
-            </a:r>
-            <a:endParaRPr lang="pt-BR" dirty="0"/>
-          </a:p>
-          <a:p>
-            <a:pPr marL="0" indent="0">
-              <a:buNone/>
-            </a:pPr>
-            <a:endParaRPr lang="pt-BR" sz="2400" dirty="0"/>
-          </a:p>
-          <a:p>
-            <a:pPr marL="0" indent="0">
-              <a:buNone/>
-            </a:pPr>
-            <a:endParaRPr lang="pt-BR" dirty="0"/>
-          </a:p>
-        </p:txBody>
-      </p:sp>
-    </p:spTree>
-    <p:extLst>
-      <p:ext uri="{BB962C8B-B14F-4D97-AF65-F5344CB8AC3E}">
-        <p14:creationId xmlns:p14="http://schemas.microsoft.com/office/powerpoint/2010/main" val="1179506409"/>
-      </p:ext>
-    </p:extLst>
-  </p:cSld>
-  <p:clrMapOvr>
-    <a:masterClrMapping/>
-  </p:clrMapOvr>
-</p:sld>
-</file>
-
-<file path=ppt/slides/slide19.xml><?xml version="1.0" encoding="utf-8"?>
-<p:sld xmlns:a="http://schemas.openxmlformats.org/drawingml/2006/main" xmlns:r="http://schemas.openxmlformats.org/officeDocument/2006/relationships" xmlns:p="http://schemas.openxmlformats.org/presentationml/2006/main">
-  <p:cSld>
-    <p:spTree>
-      <p:nvGrpSpPr>
-        <p:cNvPr id="1" name="">
-          <a:extLst>
-            <a:ext uri="{FF2B5EF4-FFF2-40B4-BE49-F238E27FC236}">
-              <a16:creationId xmlns:a16="http://schemas.microsoft.com/office/drawing/2014/main" id="{B5F17886-88D6-AD8B-D135-3CB9C9101CBD}"/>
-            </a:ext>
-          </a:extLst>
-        </p:cNvPr>
-        <p:cNvGrpSpPr/>
-        <p:nvPr/>
-      </p:nvGrpSpPr>
-      <p:grpSpPr>
-        <a:xfrm>
-          <a:off x="0" y="0"/>
-          <a:ext cx="0" cy="0"/>
-          <a:chOff x="0" y="0"/>
-          <a:chExt cx="0" cy="0"/>
-        </a:xfrm>
-      </p:grpSpPr>
-      <p:sp>
-        <p:nvSpPr>
-          <p:cNvPr id="2" name="Título 1">
-            <a:extLst>
-              <a:ext uri="{FF2B5EF4-FFF2-40B4-BE49-F238E27FC236}">
-                <a16:creationId xmlns:a16="http://schemas.microsoft.com/office/drawing/2014/main" id="{8D9DFA64-0B06-5D68-F02A-C2672C9BCA79}"/>
-              </a:ext>
-            </a:extLst>
-          </p:cNvPr>
-          <p:cNvSpPr>
-            <a:spLocks noGrp="1"/>
-          </p:cNvSpPr>
-          <p:nvPr>
-            <p:ph type="title"/>
-          </p:nvPr>
-        </p:nvSpPr>
-        <p:spPr/>
-        <p:txBody>
-          <a:bodyPr/>
-          <a:lstStyle/>
-          <a:p>
-            <a:r>
-              <a:rPr lang="pt-BR"/>
-              <a:t>Outros exemplos</a:t>
-            </a:r>
-          </a:p>
-        </p:txBody>
-      </p:sp>
-      <p:sp>
-        <p:nvSpPr>
-          <p:cNvPr id="3" name="Espaço Reservado para Conteúdo 2">
-            <a:extLst>
-              <a:ext uri="{FF2B5EF4-FFF2-40B4-BE49-F238E27FC236}">
-                <a16:creationId xmlns:a16="http://schemas.microsoft.com/office/drawing/2014/main" id="{7DC9B750-9AC6-2C01-4051-B0E74BD19E06}"/>
-              </a:ext>
-            </a:extLst>
-          </p:cNvPr>
-          <p:cNvSpPr>
-            <a:spLocks noGrp="1"/>
-          </p:cNvSpPr>
-          <p:nvPr>
-            <p:ph idx="1"/>
-          </p:nvPr>
-        </p:nvSpPr>
-        <p:spPr/>
-        <p:txBody>
-          <a:bodyPr vert="horz" lIns="91440" tIns="45720" rIns="91440" bIns="45720" rtlCol="0" anchor="t">
-            <a:normAutofit fontScale="85000" lnSpcReduction="20000"/>
-          </a:bodyPr>
-          <a:lstStyle/>
-          <a:p>
-            <a:pPr marL="0" indent="0">
-              <a:buNone/>
-            </a:pPr>
-            <a:r>
-              <a:rPr lang="pt-BR" sz="2600" dirty="0"/>
-              <a:t>3. Pegar alterações da </a:t>
-            </a:r>
-            <a:r>
-              <a:rPr lang="pt-BR" sz="2600" dirty="0" err="1"/>
-              <a:t>branch</a:t>
-            </a:r>
-            <a:r>
-              <a:rPr lang="pt-BR" sz="2600" dirty="0"/>
-              <a:t> principal e mesclar com outra </a:t>
-            </a:r>
-            <a:r>
-              <a:rPr lang="pt-BR" sz="2600" dirty="0" err="1"/>
-              <a:t>branch</a:t>
-            </a:r>
-            <a:endParaRPr lang="pt-BR" sz="2600" dirty="0"/>
-          </a:p>
-          <a:p>
-            <a:pPr marL="0" indent="0">
-              <a:buNone/>
-            </a:pPr>
-            <a:r>
-              <a:rPr lang="pt-BR" dirty="0"/>
-              <a:t>Quando se faz trabalhos em equipe é previsto que seja necessário pegar alterações feitas </a:t>
-            </a:r>
-            <a:r>
-              <a:rPr lang="pt-BR"/>
-              <a:t>por outros membros do grupo e mesclar as mesmas com as que estão sendo feitas localmente.</a:t>
-            </a:r>
-            <a:endParaRPr lang="pt-BR" dirty="0"/>
-          </a:p>
-          <a:p>
-            <a:pPr marL="0" indent="0">
-              <a:buNone/>
-            </a:pPr>
-            <a:endParaRPr lang="pt-BR" dirty="0"/>
-          </a:p>
-          <a:p>
-            <a:pPr marL="0" indent="0">
-              <a:buNone/>
-            </a:pPr>
-            <a:r>
-              <a:rPr lang="pt-BR" sz="1900"/>
-              <a:t>Atualizar a principal</a:t>
-            </a:r>
-            <a:endParaRPr lang="pt-BR" sz="1900" dirty="0"/>
-          </a:p>
-          <a:p>
-            <a:pPr marL="0" indent="0">
-              <a:buNone/>
-            </a:pPr>
-            <a:r>
-              <a:rPr lang="pt-BR" sz="1700" dirty="0" err="1">
-                <a:latin typeface="Century Gothic"/>
-              </a:rPr>
-              <a:t>git</a:t>
-            </a:r>
-            <a:r>
-              <a:rPr lang="pt-BR" sz="1700" dirty="0">
-                <a:latin typeface="Century Gothic"/>
-              </a:rPr>
-              <a:t> checkout </a:t>
-            </a:r>
-            <a:r>
-              <a:rPr lang="pt-BR" sz="1700" dirty="0" err="1">
-                <a:latin typeface="Century Gothic"/>
-              </a:rPr>
-              <a:t>main</a:t>
-            </a:r>
-            <a:r>
-              <a:rPr lang="pt-BR" sz="1700" dirty="0">
-                <a:latin typeface="Century Gothic"/>
-              </a:rPr>
-              <a:t>: muda para a </a:t>
-            </a:r>
-            <a:r>
-              <a:rPr lang="pt-BR" sz="1700" dirty="0" err="1">
-                <a:latin typeface="Century Gothic"/>
-              </a:rPr>
-              <a:t>branch</a:t>
-            </a:r>
-            <a:r>
-              <a:rPr lang="pt-BR" sz="1700" dirty="0">
-                <a:latin typeface="Century Gothic"/>
-              </a:rPr>
-              <a:t> principal </a:t>
-            </a:r>
-            <a:br>
-              <a:rPr lang="pt-BR" sz="1700" dirty="0">
-                <a:latin typeface="Century Gothic"/>
-              </a:rPr>
-            </a:br>
-            <a:r>
-              <a:rPr lang="pt-BR" sz="1700" dirty="0" err="1">
-                <a:latin typeface="Century Gothic"/>
-              </a:rPr>
-              <a:t>git</a:t>
-            </a:r>
-            <a:r>
-              <a:rPr lang="pt-BR" sz="1700" dirty="0">
-                <a:latin typeface="Century Gothic"/>
-              </a:rPr>
-              <a:t> </a:t>
-            </a:r>
-            <a:r>
-              <a:rPr lang="pt-BR" sz="1700" dirty="0" err="1">
-                <a:latin typeface="Century Gothic"/>
-              </a:rPr>
-              <a:t>pull</a:t>
-            </a:r>
-            <a:r>
-              <a:rPr lang="pt-BR" sz="1700" dirty="0">
-                <a:latin typeface="Century Gothic"/>
-              </a:rPr>
-              <a:t>: baixa e integra alterações do repositório remoto</a:t>
-            </a:r>
-            <a:r>
-              <a:rPr lang="pt-BR" sz="2400" dirty="0">
-                <a:latin typeface="Century Gothic"/>
-              </a:rPr>
-              <a:t> </a:t>
-            </a:r>
-            <a:endParaRPr lang="pt-BR"/>
-          </a:p>
-          <a:p>
-            <a:pPr marL="0" indent="0">
-              <a:buNone/>
-            </a:pPr>
-            <a:endParaRPr lang="en-US" dirty="0"/>
-          </a:p>
-          <a:p>
-            <a:pPr marL="0" indent="0">
-              <a:buNone/>
-            </a:pPr>
-            <a:r>
-              <a:rPr lang="pt-BR" sz="1900" dirty="0"/>
-              <a:t>Ir para sua </a:t>
-            </a:r>
-            <a:r>
-              <a:rPr lang="pt-BR" sz="1900" dirty="0" err="1"/>
-              <a:t>branch</a:t>
-            </a:r>
-            <a:r>
-              <a:rPr lang="pt-BR" sz="1900" dirty="0"/>
-              <a:t> e mesclar</a:t>
-            </a:r>
-          </a:p>
-          <a:p>
-            <a:pPr marL="0" indent="0">
-              <a:buNone/>
-            </a:pPr>
-            <a:r>
-              <a:rPr lang="pt-BR" sz="1600" dirty="0" err="1">
-                <a:latin typeface="Century Gothic"/>
-              </a:rPr>
-              <a:t>git</a:t>
-            </a:r>
-            <a:r>
-              <a:rPr lang="pt-BR" sz="1600" dirty="0">
-                <a:latin typeface="Century Gothic"/>
-              </a:rPr>
-              <a:t> checkout minha-</a:t>
-            </a:r>
-            <a:r>
-              <a:rPr lang="pt-BR" sz="1600" dirty="0" err="1">
-                <a:latin typeface="Century Gothic"/>
-              </a:rPr>
-              <a:t>branch</a:t>
-            </a:r>
-            <a:r>
-              <a:rPr lang="pt-BR" sz="1600" dirty="0">
-                <a:latin typeface="Century Gothic"/>
-              </a:rPr>
-              <a:t>: Volta para sua </a:t>
-            </a:r>
-            <a:r>
-              <a:rPr lang="pt-BR" sz="1600" dirty="0" err="1">
-                <a:latin typeface="Century Gothic"/>
-              </a:rPr>
-              <a:t>branch</a:t>
-            </a:r>
-            <a:r>
-              <a:rPr lang="pt-BR" sz="1600" dirty="0">
-                <a:latin typeface="Century Gothic"/>
-              </a:rPr>
-              <a:t> </a:t>
-            </a:r>
-            <a:br>
-              <a:rPr lang="pt-BR" sz="1600" dirty="0">
-                <a:latin typeface="Century Gothic"/>
-              </a:rPr>
-            </a:br>
-            <a:r>
-              <a:rPr lang="pt-BR" sz="1600" dirty="0" err="1">
-                <a:latin typeface="Century Gothic"/>
-              </a:rPr>
-              <a:t>git</a:t>
-            </a:r>
-            <a:r>
-              <a:rPr lang="pt-BR" sz="1600" dirty="0">
-                <a:latin typeface="Century Gothic"/>
-              </a:rPr>
-              <a:t> merge </a:t>
-            </a:r>
-            <a:r>
-              <a:rPr lang="pt-BR" sz="1600" dirty="0" err="1">
-                <a:latin typeface="Century Gothic"/>
-              </a:rPr>
-              <a:t>main</a:t>
-            </a:r>
-            <a:r>
-              <a:rPr lang="pt-BR" sz="1600" dirty="0">
-                <a:latin typeface="Century Gothic"/>
-              </a:rPr>
-              <a:t>: traz as atualizações da principal para sua </a:t>
-            </a:r>
-            <a:r>
-              <a:rPr lang="pt-BR" sz="1600" dirty="0" err="1">
-                <a:latin typeface="Century Gothic"/>
-              </a:rPr>
-              <a:t>branch</a:t>
-            </a:r>
-            <a:endParaRPr lang="pt-BR" sz="1600" dirty="0" err="1"/>
-          </a:p>
-          <a:p>
-            <a:pPr>
-              <a:buNone/>
-            </a:pPr>
-            <a:endParaRPr lang="pt-BR" sz="2400" dirty="0"/>
-          </a:p>
-          <a:p>
-            <a:pPr marL="0" indent="0">
-              <a:buNone/>
-            </a:pPr>
-            <a:endParaRPr lang="pt-BR" sz="2400" dirty="0"/>
-          </a:p>
-          <a:p>
-            <a:pPr marL="0" indent="0">
-              <a:buNone/>
-            </a:pPr>
-            <a:endParaRPr lang="pt-BR" dirty="0"/>
-          </a:p>
-        </p:txBody>
-      </p:sp>
-    </p:spTree>
-    <p:extLst>
-      <p:ext uri="{BB962C8B-B14F-4D97-AF65-F5344CB8AC3E}">
-        <p14:creationId xmlns:p14="http://schemas.microsoft.com/office/powerpoint/2010/main" val="3262256541"/>
-      </p:ext>
-    </p:extLst>
-  </p:cSld>
-  <p:clrMapOvr>
-    <a:masterClrMapping/>
-  </p:clrMapOvr>
-</p:sld>
-</file>
-
-<file path=ppt/slides/slide2.xml><?xml version="1.0" encoding="utf-8"?>
 <p:sld xmlns:a="http://schemas.openxmlformats.org/drawingml/2006/main" xmlns:r="http://schemas.openxmlformats.org/officeDocument/2006/relationships" xmlns:p="http://schemas.openxmlformats.org/presentationml/2006/main">
   <p:cSld>
     <p:spTree>
@@ -10689,7 +9952,7 @@
           <p:cNvPr id="2" name="Título 1">
             <a:extLst>
               <a:ext uri="{FF2B5EF4-FFF2-40B4-BE49-F238E27FC236}">
-                <a16:creationId xmlns:a16="http://schemas.microsoft.com/office/drawing/2014/main" id="{6F990B24-B6E3-F93B-60B1-B659D1A8F071}"/>
+                <a16:creationId xmlns:a16="http://schemas.microsoft.com/office/drawing/2014/main" id="{B030202A-434E-C143-E16A-301CE0C409B3}"/>
               </a:ext>
             </a:extLst>
           </p:cNvPr>
@@ -10707,7 +9970,7 @@
           <a:p>
             <a:r>
               <a:rPr lang="pt-BR"/>
-              <a:t>Considere um problema</a:t>
+              <a:t>Exemplo prático</a:t>
             </a:r>
           </a:p>
         </p:txBody>
@@ -10717,7 +9980,7 @@
           <p:cNvPr id="3" name="Espaço Reservado para Conteúdo 2">
             <a:extLst>
               <a:ext uri="{FF2B5EF4-FFF2-40B4-BE49-F238E27FC236}">
-                <a16:creationId xmlns:a16="http://schemas.microsoft.com/office/drawing/2014/main" id="{156BC2B4-B492-2C97-B95A-4FE075A4AECF}"/>
+                <a16:creationId xmlns:a16="http://schemas.microsoft.com/office/drawing/2014/main" id="{90FBAB7E-6A0D-72F8-4557-CF94C58774EF}"/>
               </a:ext>
             </a:extLst>
           </p:cNvPr>
@@ -10728,60 +9991,401 @@
             <p:ph idx="1"/>
           </p:nvPr>
         </p:nvSpPr>
-        <p:spPr/>
+        <p:spPr>
+          <a:xfrm>
+            <a:off x="2589212" y="2133600"/>
+            <a:ext cx="8915400" cy="4217237"/>
+          </a:xfrm>
+        </p:spPr>
         <p:txBody>
           <a:bodyPr vert="horz" lIns="91440" tIns="45720" rIns="91440" bIns="45720" rtlCol="0" anchor="t">
-            <a:normAutofit lnSpcReduction="10000"/>
+            <a:normAutofit fontScale="85000" lnSpcReduction="10000"/>
           </a:bodyPr>
           <a:lstStyle/>
           <a:p>
-            <a:pPr marL="0" indent="0">
-              <a:buNone/>
-            </a:pPr>
-            <a:r>
-              <a:rPr lang="pt-BR" sz="2800" dirty="0">
-                <a:ea typeface="+mn-lt"/>
-                <a:cs typeface="+mn-lt"/>
-              </a:rPr>
-              <a:t>Um erro crítico é descoberto no código principal enquanto se está trabalhando em uma nova versão de um software, tornando necessário voltar ao arquivo principal sem perder o que se está trabalhando e fazer as alterações sem risco de danificar ainda mais o código, </a:t>
-            </a:r>
-            <a:r>
-              <a:rPr lang="pt-BR" sz="2800">
-                <a:ea typeface="+mn-lt"/>
-                <a:cs typeface="+mn-lt"/>
-              </a:rPr>
-              <a:t>isso é</a:t>
-            </a:r>
-            <a:r>
-              <a:rPr lang="pt-BR" sz="2800" dirty="0">
-                <a:ea typeface="+mn-lt"/>
-                <a:cs typeface="+mn-lt"/>
-              </a:rPr>
-              <a:t> possível? </a:t>
-            </a:r>
-          </a:p>
-          <a:p>
-            <a:pPr marL="0" indent="0">
-              <a:buNone/>
-            </a:pPr>
-            <a:endParaRPr lang="pt-BR" sz="2800" dirty="0"/>
-          </a:p>
-          <a:p>
-            <a:pPr marL="0" indent="0">
-              <a:buNone/>
-            </a:pPr>
-            <a:r>
-              <a:rPr lang="pt-BR" sz="2000"/>
-              <a:t>Primeiro, vamos entender a ferramenta que iremos utilizar para resolver o problema.</a:t>
-            </a:r>
+            <a:pPr>
+              <a:buNone/>
+            </a:pPr>
+            <a:r>
+              <a:rPr lang="pt-BR" sz="2600" dirty="0"/>
+              <a:t>3. Criar uma nova </a:t>
+            </a:r>
+            <a:r>
+              <a:rPr lang="pt-BR" sz="2600" err="1"/>
+              <a:t>branch</a:t>
+            </a:r>
+            <a:r>
+              <a:rPr lang="pt-BR" sz="2600" dirty="0"/>
+              <a:t> para corrigir o erro</a:t>
+            </a:r>
+            <a:endParaRPr lang="en-US" sz="2600"/>
+          </a:p>
+          <a:p>
+            <a:pPr>
+              <a:buNone/>
+            </a:pPr>
+            <a:r>
+              <a:rPr lang="pt-BR" sz="1900" b="1" err="1">
+                <a:solidFill>
+                  <a:srgbClr val="FFC000"/>
+                </a:solidFill>
+                <a:latin typeface="Consolas"/>
+              </a:rPr>
+              <a:t>git</a:t>
+            </a:r>
+            <a:r>
+              <a:rPr lang="pt-BR" sz="1900" b="1" dirty="0">
+                <a:solidFill>
+                  <a:srgbClr val="FFC000"/>
+                </a:solidFill>
+                <a:latin typeface="Consolas"/>
+              </a:rPr>
+              <a:t> checkout -b </a:t>
+            </a:r>
+            <a:r>
+              <a:rPr lang="pt-BR" sz="1900" b="1" err="1">
+                <a:solidFill>
+                  <a:srgbClr val="FFC000"/>
+                </a:solidFill>
+                <a:latin typeface="Consolas"/>
+              </a:rPr>
+              <a:t>hotfix</a:t>
+            </a:r>
+            <a:r>
+              <a:rPr lang="pt-BR" sz="1900" b="1" dirty="0">
+                <a:solidFill>
+                  <a:srgbClr val="FFC000"/>
+                </a:solidFill>
+                <a:latin typeface="Consolas"/>
+              </a:rPr>
+              <a:t>-erro-</a:t>
+            </a:r>
+            <a:r>
+              <a:rPr lang="pt-BR" sz="1900" b="1" err="1">
+                <a:solidFill>
+                  <a:srgbClr val="FFC000"/>
+                </a:solidFill>
+                <a:latin typeface="Consolas"/>
+              </a:rPr>
+              <a:t>critico</a:t>
+            </a:r>
+            <a:r>
+              <a:rPr lang="pt-BR" sz="1900" b="1" dirty="0">
+                <a:solidFill>
+                  <a:srgbClr val="FFC000"/>
+                </a:solidFill>
+                <a:latin typeface="Consolas"/>
+              </a:rPr>
+              <a:t>:</a:t>
+            </a:r>
+            <a:r>
+              <a:rPr lang="pt-BR" sz="1900" b="1" dirty="0"/>
+              <a:t> </a:t>
+            </a:r>
+            <a:r>
+              <a:rPr lang="pt-BR" sz="1900" dirty="0"/>
+              <a:t>Cria e já muda para uma nova </a:t>
+            </a:r>
+            <a:r>
+              <a:rPr lang="pt-BR" sz="1900" err="1"/>
+              <a:t>branch</a:t>
+            </a:r>
+            <a:r>
+              <a:rPr lang="pt-BR" sz="1900" dirty="0"/>
+              <a:t>. Isso isola a correção sem afetar o código principal diretamente.</a:t>
+            </a:r>
+            <a:endParaRPr lang="pt-BR" sz="1900"/>
+          </a:p>
+          <a:p>
+            <a:pPr>
+              <a:buNone/>
+            </a:pPr>
             <a:endParaRPr lang="pt-BR" sz="2000" dirty="0"/>
+          </a:p>
+          <a:p>
+            <a:pPr>
+              <a:buNone/>
+            </a:pPr>
+            <a:r>
+              <a:rPr lang="pt-BR" sz="2600"/>
+              <a:t>4. Corrigir o erro e salvar</a:t>
+            </a:r>
+            <a:endParaRPr lang="en-US" sz="2600"/>
+          </a:p>
+          <a:p>
+            <a:pPr>
+              <a:buNone/>
+            </a:pPr>
+            <a:r>
+              <a:rPr lang="pt-BR" sz="1900" b="1" err="1">
+                <a:solidFill>
+                  <a:srgbClr val="FFC000"/>
+                </a:solidFill>
+                <a:latin typeface="Consolas"/>
+              </a:rPr>
+              <a:t>git</a:t>
+            </a:r>
+            <a:r>
+              <a:rPr lang="pt-BR" sz="1900" b="1" dirty="0">
+                <a:solidFill>
+                  <a:srgbClr val="FFC000"/>
+                </a:solidFill>
+                <a:latin typeface="Consolas"/>
+              </a:rPr>
+              <a:t> </a:t>
+            </a:r>
+            <a:r>
+              <a:rPr lang="pt-BR" sz="1900" b="1" err="1">
+                <a:solidFill>
+                  <a:srgbClr val="FFC000"/>
+                </a:solidFill>
+                <a:latin typeface="Consolas"/>
+              </a:rPr>
+              <a:t>add</a:t>
+            </a:r>
+            <a:r>
+              <a:rPr lang="pt-BR" sz="1900" b="1" dirty="0">
+                <a:solidFill>
+                  <a:srgbClr val="FFC000"/>
+                </a:solidFill>
+                <a:latin typeface="Consolas"/>
+              </a:rPr>
+              <a:t>:</a:t>
+            </a:r>
+            <a:r>
+              <a:rPr lang="pt-BR" sz="1900" dirty="0">
+                <a:latin typeface="Century Gothic"/>
+              </a:rPr>
+              <a:t> prepara as alterações para </a:t>
+            </a:r>
+            <a:r>
+              <a:rPr lang="pt-BR" sz="1900" err="1">
+                <a:latin typeface="Century Gothic"/>
+              </a:rPr>
+              <a:t>commit</a:t>
+            </a:r>
+            <a:r>
+              <a:rPr lang="pt-BR" sz="1900" dirty="0">
+                <a:latin typeface="Century Gothic"/>
+              </a:rPr>
+              <a:t> </a:t>
+            </a:r>
+          </a:p>
+          <a:p>
+            <a:pPr>
+              <a:buNone/>
+            </a:pPr>
+            <a:r>
+              <a:rPr lang="pt-BR" sz="1900" b="1" err="1">
+                <a:solidFill>
+                  <a:srgbClr val="FFC000"/>
+                </a:solidFill>
+                <a:latin typeface="Consolas"/>
+              </a:rPr>
+              <a:t>git</a:t>
+            </a:r>
+            <a:r>
+              <a:rPr lang="pt-BR" sz="1900" b="1" dirty="0">
+                <a:solidFill>
+                  <a:srgbClr val="FFC000"/>
+                </a:solidFill>
+                <a:latin typeface="Consolas"/>
+              </a:rPr>
+              <a:t> </a:t>
+            </a:r>
+            <a:r>
+              <a:rPr lang="pt-BR" sz="1900" b="1" err="1">
+                <a:solidFill>
+                  <a:srgbClr val="FFC000"/>
+                </a:solidFill>
+                <a:latin typeface="Consolas"/>
+              </a:rPr>
+              <a:t>commit</a:t>
+            </a:r>
+            <a:r>
+              <a:rPr lang="pt-BR" sz="1900" b="1" dirty="0">
+                <a:solidFill>
+                  <a:srgbClr val="FFC000"/>
+                </a:solidFill>
+                <a:latin typeface="Consolas"/>
+              </a:rPr>
+              <a:t> -m "Corrige erro crítico</a:t>
+            </a:r>
+            <a:r>
+              <a:rPr lang="pt-BR" sz="1900" dirty="0">
+                <a:latin typeface="Century Gothic"/>
+              </a:rPr>
+              <a:t>": salva a correção no histórico </a:t>
+            </a:r>
+          </a:p>
+          <a:p>
+            <a:pPr indent="0">
+              <a:buNone/>
+            </a:pPr>
+            <a:endParaRPr lang="en-US" sz="3400" dirty="0"/>
+          </a:p>
+          <a:p>
+            <a:pPr>
+              <a:buNone/>
+            </a:pPr>
+            <a:r>
+              <a:rPr lang="pt-BR" sz="2600" dirty="0"/>
+              <a:t>5. Aplicar a correção na </a:t>
+            </a:r>
+            <a:r>
+              <a:rPr lang="pt-BR" sz="2600" err="1"/>
+              <a:t>branch</a:t>
+            </a:r>
+            <a:r>
+              <a:rPr lang="pt-BR" sz="2600" dirty="0"/>
+              <a:t> principal</a:t>
+            </a:r>
+            <a:endParaRPr lang="en-US" sz="2600" dirty="0"/>
+          </a:p>
+          <a:p>
+            <a:pPr>
+              <a:buNone/>
+            </a:pPr>
+            <a:r>
+              <a:rPr lang="pt-BR" sz="1900" b="1" err="1">
+                <a:solidFill>
+                  <a:srgbClr val="FFC000"/>
+                </a:solidFill>
+                <a:latin typeface="Consolas"/>
+              </a:rPr>
+              <a:t>git</a:t>
+            </a:r>
+            <a:r>
+              <a:rPr lang="pt-BR" sz="1900" b="1" dirty="0">
+                <a:solidFill>
+                  <a:srgbClr val="FFC000"/>
+                </a:solidFill>
+                <a:latin typeface="Consolas"/>
+              </a:rPr>
+              <a:t> checkout </a:t>
+            </a:r>
+            <a:r>
+              <a:rPr lang="pt-BR" sz="1900" b="1" err="1">
+                <a:solidFill>
+                  <a:srgbClr val="FFC000"/>
+                </a:solidFill>
+                <a:latin typeface="Consolas"/>
+              </a:rPr>
+              <a:t>main</a:t>
+            </a:r>
+            <a:r>
+              <a:rPr lang="pt-BR" sz="1900" b="1" dirty="0">
+                <a:solidFill>
+                  <a:srgbClr val="FFC000"/>
+                </a:solidFill>
+                <a:latin typeface="Consolas"/>
+              </a:rPr>
+              <a:t>:</a:t>
+            </a:r>
+            <a:r>
+              <a:rPr lang="pt-BR" sz="1900" dirty="0"/>
+              <a:t> Volta para a </a:t>
+            </a:r>
+            <a:r>
+              <a:rPr lang="pt-BR" sz="1900" err="1"/>
+              <a:t>branch</a:t>
+            </a:r>
+            <a:r>
+              <a:rPr lang="pt-BR" sz="1900" dirty="0"/>
+              <a:t> principal</a:t>
+            </a:r>
+            <a:endParaRPr lang="en-US" sz="1900"/>
+          </a:p>
+          <a:p>
+            <a:pPr>
+              <a:buNone/>
+            </a:pPr>
+            <a:r>
+              <a:rPr lang="pt-BR" sz="1900" b="1" err="1">
+                <a:solidFill>
+                  <a:srgbClr val="FFC000"/>
+                </a:solidFill>
+                <a:latin typeface="Consolas"/>
+              </a:rPr>
+              <a:t>git</a:t>
+            </a:r>
+            <a:r>
+              <a:rPr lang="pt-BR" sz="1900" b="1" dirty="0">
+                <a:solidFill>
+                  <a:srgbClr val="FFC000"/>
+                </a:solidFill>
+                <a:latin typeface="Consolas"/>
+              </a:rPr>
+              <a:t> merge </a:t>
+            </a:r>
+            <a:r>
+              <a:rPr lang="pt-BR" sz="1900" b="1" err="1">
+                <a:solidFill>
+                  <a:srgbClr val="FFC000"/>
+                </a:solidFill>
+                <a:latin typeface="Consolas"/>
+              </a:rPr>
+              <a:t>hotfix</a:t>
+            </a:r>
+            <a:r>
+              <a:rPr lang="pt-BR" sz="1900" b="1" dirty="0">
+                <a:solidFill>
+                  <a:srgbClr val="FFC000"/>
+                </a:solidFill>
+                <a:latin typeface="Consolas"/>
+              </a:rPr>
+              <a:t>-erro-</a:t>
+            </a:r>
+            <a:r>
+              <a:rPr lang="pt-BR" sz="1900" b="1" err="1">
+                <a:solidFill>
+                  <a:srgbClr val="FFC000"/>
+                </a:solidFill>
+                <a:latin typeface="Consolas"/>
+              </a:rPr>
+              <a:t>critico</a:t>
+            </a:r>
+            <a:r>
+              <a:rPr lang="pt-BR" sz="1900" b="1" dirty="0">
+                <a:solidFill>
+                  <a:srgbClr val="FFC000"/>
+                </a:solidFill>
+                <a:latin typeface="Consolas"/>
+              </a:rPr>
+              <a:t>:</a:t>
+            </a:r>
+            <a:r>
+              <a:rPr lang="pt-BR" sz="1900" dirty="0"/>
+              <a:t> Junta (</a:t>
+            </a:r>
+            <a:r>
+              <a:rPr lang="pt-BR" sz="1900" i="1" dirty="0"/>
+              <a:t>merge</a:t>
+            </a:r>
+            <a:r>
+              <a:rPr lang="pt-BR" sz="1900" dirty="0"/>
+              <a:t>) a correção feita na </a:t>
+            </a:r>
+            <a:r>
+              <a:rPr lang="pt-BR" sz="1900" err="1"/>
+              <a:t>branch</a:t>
+            </a:r>
+            <a:r>
+              <a:rPr lang="pt-BR" sz="1900" dirty="0"/>
+              <a:t> de </a:t>
+            </a:r>
+            <a:r>
+              <a:rPr lang="pt-BR" sz="1900" err="1"/>
+              <a:t>hotfix</a:t>
+            </a:r>
+            <a:endParaRPr lang="pt-BR" sz="1900"/>
           </a:p>
         </p:txBody>
       </p:sp>
     </p:spTree>
     <p:extLst>
       <p:ext uri="{BB962C8B-B14F-4D97-AF65-F5344CB8AC3E}">
-        <p14:creationId xmlns:p14="http://schemas.microsoft.com/office/powerpoint/2010/main" val="965797971"/>
+        <p14:creationId xmlns:p14="http://schemas.microsoft.com/office/powerpoint/2010/main" val="2278136201"/>
       </p:ext>
     </p:extLst>
   </p:cSld>
@@ -10791,271 +10395,7 @@
 </p:sld>
 </file>
 
-<file path=ppt/slides/slide20.xml><?xml version="1.0" encoding="utf-8"?>
-<p:sld xmlns:a="http://schemas.openxmlformats.org/drawingml/2006/main" xmlns:r="http://schemas.openxmlformats.org/officeDocument/2006/relationships" xmlns:p="http://schemas.openxmlformats.org/presentationml/2006/main">
-  <p:cSld>
-    <p:spTree>
-      <p:nvGrpSpPr>
-        <p:cNvPr id="1" name="">
-          <a:extLst>
-            <a:ext uri="{FF2B5EF4-FFF2-40B4-BE49-F238E27FC236}">
-              <a16:creationId xmlns:a16="http://schemas.microsoft.com/office/drawing/2014/main" id="{D4AB3DED-282F-9AE8-8184-7C3541E9A401}"/>
-            </a:ext>
-          </a:extLst>
-        </p:cNvPr>
-        <p:cNvGrpSpPr/>
-        <p:nvPr/>
-      </p:nvGrpSpPr>
-      <p:grpSpPr>
-        <a:xfrm>
-          <a:off x="0" y="0"/>
-          <a:ext cx="0" cy="0"/>
-          <a:chOff x="0" y="0"/>
-          <a:chExt cx="0" cy="0"/>
-        </a:xfrm>
-      </p:grpSpPr>
-      <p:sp>
-        <p:nvSpPr>
-          <p:cNvPr id="2" name="Título 1">
-            <a:extLst>
-              <a:ext uri="{FF2B5EF4-FFF2-40B4-BE49-F238E27FC236}">
-                <a16:creationId xmlns:a16="http://schemas.microsoft.com/office/drawing/2014/main" id="{B2AA66D1-0471-8680-DC3E-D4C15A05F06E}"/>
-              </a:ext>
-            </a:extLst>
-          </p:cNvPr>
-          <p:cNvSpPr>
-            <a:spLocks noGrp="1"/>
-          </p:cNvSpPr>
-          <p:nvPr>
-            <p:ph type="title"/>
-          </p:nvPr>
-        </p:nvSpPr>
-        <p:spPr/>
-        <p:txBody>
-          <a:bodyPr/>
-          <a:lstStyle/>
-          <a:p>
-            <a:r>
-              <a:rPr lang="pt-BR"/>
-              <a:t>Outros exemplos</a:t>
-            </a:r>
-          </a:p>
-        </p:txBody>
-      </p:sp>
-      <p:sp>
-        <p:nvSpPr>
-          <p:cNvPr id="3" name="Espaço Reservado para Conteúdo 2">
-            <a:extLst>
-              <a:ext uri="{FF2B5EF4-FFF2-40B4-BE49-F238E27FC236}">
-                <a16:creationId xmlns:a16="http://schemas.microsoft.com/office/drawing/2014/main" id="{7EB1AFBF-06F4-0533-47CC-523645976AD7}"/>
-              </a:ext>
-            </a:extLst>
-          </p:cNvPr>
-          <p:cNvSpPr>
-            <a:spLocks noGrp="1"/>
-          </p:cNvSpPr>
-          <p:nvPr>
-            <p:ph idx="1"/>
-          </p:nvPr>
-        </p:nvSpPr>
-        <p:spPr/>
-        <p:txBody>
-          <a:bodyPr vert="horz" lIns="91440" tIns="45720" rIns="91440" bIns="45720" rtlCol="0" anchor="t">
-            <a:normAutofit lnSpcReduction="10000"/>
-          </a:bodyPr>
-          <a:lstStyle/>
-          <a:p>
-            <a:pPr marL="0">
-              <a:buNone/>
-            </a:pPr>
-            <a:r>
-              <a:rPr lang="pt-BR" sz="2400"/>
-              <a:t>4. Resetar arquivo sem perder alterações</a:t>
-            </a:r>
-            <a:endParaRPr lang="pt-BR" sz="2400" dirty="0"/>
-          </a:p>
-          <a:p>
-            <a:pPr marL="0">
-              <a:buNone/>
-            </a:pPr>
-            <a:r>
-              <a:rPr lang="pt-BR" sz="1600" dirty="0"/>
-              <a:t>Quando se vê que a </a:t>
-            </a:r>
-            <a:r>
-              <a:rPr lang="pt-BR" sz="1600" dirty="0" err="1"/>
-              <a:t>idéia</a:t>
-            </a:r>
-            <a:r>
-              <a:rPr lang="pt-BR" sz="1600" dirty="0"/>
-              <a:t> testada em um ramo</a:t>
-            </a:r>
-            <a:r>
-              <a:rPr lang="pt-BR" sz="1600" i="1" dirty="0"/>
-              <a:t> não dará frutos imediatos, é as vezes necessário </a:t>
-            </a:r>
-            <a:r>
-              <a:rPr lang="pt-BR" sz="1600" i="1" dirty="0" err="1"/>
-              <a:t>momentariamente</a:t>
-            </a:r>
-            <a:r>
-              <a:rPr lang="pt-BR" sz="1600" i="1" dirty="0"/>
-              <a:t> guardar aquele ramo e voltar ao trabalho principal.</a:t>
-            </a:r>
-          </a:p>
-          <a:p>
-            <a:pPr marL="0">
-              <a:buNone/>
-            </a:pPr>
-            <a:endParaRPr lang="pt-BR" sz="1600" dirty="0"/>
-          </a:p>
-          <a:p>
-            <a:pPr marL="0">
-              <a:buNone/>
-            </a:pPr>
-            <a:r>
-              <a:rPr lang="pt-BR"/>
-              <a:t>Opção segura para guardar alterações</a:t>
-            </a:r>
-          </a:p>
-          <a:p>
-            <a:pPr marL="0">
-              <a:buNone/>
-            </a:pPr>
-            <a:r>
-              <a:rPr lang="pt-BR" sz="1600" dirty="0" err="1">
-                <a:latin typeface="Century Gothic"/>
-              </a:rPr>
-              <a:t>git</a:t>
-            </a:r>
-            <a:r>
-              <a:rPr lang="pt-BR" sz="1600" dirty="0">
-                <a:latin typeface="Century Gothic"/>
-              </a:rPr>
-              <a:t> </a:t>
-            </a:r>
-            <a:r>
-              <a:rPr lang="pt-BR" sz="1600" dirty="0" err="1">
-                <a:latin typeface="Century Gothic"/>
-              </a:rPr>
-              <a:t>stash</a:t>
-            </a:r>
-            <a:r>
-              <a:rPr lang="pt-BR" sz="1600" dirty="0">
-                <a:ea typeface="+mn-lt"/>
-                <a:cs typeface="+mn-lt"/>
-              </a:rPr>
-              <a:t>: Salva temporariamente todas as suas alterações (como se colocasse numa gaveta).</a:t>
-            </a:r>
-            <a:endParaRPr lang="pt-BR" sz="1600"/>
-          </a:p>
-          <a:p>
-            <a:pPr marL="0">
-              <a:buNone/>
-            </a:pPr>
-            <a:endParaRPr lang="pt-BR" sz="1600" dirty="0"/>
-          </a:p>
-          <a:p>
-            <a:pPr marL="0">
-              <a:buNone/>
-            </a:pPr>
-            <a:r>
-              <a:rPr lang="pt-BR" sz="1900"/>
-              <a:t>Restaurar o arquivo ao estado original</a:t>
-            </a:r>
-            <a:endParaRPr lang="pt-BR" sz="1900" dirty="0"/>
-          </a:p>
-          <a:p>
-            <a:pPr marL="0">
-              <a:buNone/>
-            </a:pPr>
-            <a:r>
-              <a:rPr lang="pt-BR" sz="1600" dirty="0" err="1">
-                <a:latin typeface="Century Gothic"/>
-              </a:rPr>
-              <a:t>git</a:t>
-            </a:r>
-            <a:r>
-              <a:rPr lang="pt-BR" sz="1600" dirty="0">
-                <a:latin typeface="Century Gothic"/>
-              </a:rPr>
-              <a:t> checkout </a:t>
-            </a:r>
-            <a:r>
-              <a:rPr lang="pt-BR" sz="1600" dirty="0" err="1">
-                <a:latin typeface="Century Gothic"/>
-              </a:rPr>
-              <a:t>main</a:t>
-            </a:r>
-            <a:r>
-              <a:rPr lang="pt-BR" sz="1600" dirty="0">
-                <a:latin typeface="Century Gothic"/>
-              </a:rPr>
-              <a:t> -- arquivo.txt</a:t>
-            </a:r>
-            <a:r>
-              <a:rPr lang="pt-BR" sz="1600" dirty="0">
-                <a:ea typeface="+mn-lt"/>
-                <a:cs typeface="+mn-lt"/>
-              </a:rPr>
-              <a:t>: Pega a versão do arquivo da </a:t>
-            </a:r>
-            <a:r>
-              <a:rPr lang="pt-BR" sz="1600" dirty="0" err="1">
-                <a:ea typeface="+mn-lt"/>
-                <a:cs typeface="+mn-lt"/>
-              </a:rPr>
-              <a:t>branch</a:t>
-            </a:r>
-            <a:r>
-              <a:rPr lang="pt-BR" sz="1600" dirty="0">
-                <a:ea typeface="+mn-lt"/>
-                <a:cs typeface="+mn-lt"/>
-              </a:rPr>
-              <a:t> principal e substitui a atual.</a:t>
-            </a:r>
-            <a:endParaRPr lang="pt-BR" sz="1600"/>
-          </a:p>
-          <a:p>
-            <a:pPr marL="0" indent="0">
-              <a:buNone/>
-            </a:pPr>
-            <a:endParaRPr lang="pt-BR" sz="2600" dirty="0"/>
-          </a:p>
-          <a:p>
-            <a:pPr>
-              <a:buNone/>
-            </a:pPr>
-            <a:endParaRPr lang="pt-BR" sz="2400" dirty="0"/>
-          </a:p>
-          <a:p>
-            <a:pPr marL="0" indent="0">
-              <a:buNone/>
-            </a:pPr>
-            <a:endParaRPr lang="pt-BR" sz="2400" dirty="0"/>
-          </a:p>
-          <a:p>
-            <a:pPr marL="0" indent="0">
-              <a:buNone/>
-            </a:pPr>
-            <a:endParaRPr lang="pt-BR" dirty="0"/>
-          </a:p>
-        </p:txBody>
-      </p:sp>
-    </p:spTree>
-    <p:extLst>
-      <p:ext uri="{BB962C8B-B14F-4D97-AF65-F5344CB8AC3E}">
-        <p14:creationId xmlns:p14="http://schemas.microsoft.com/office/powerpoint/2010/main" val="1726710847"/>
-      </p:ext>
-    </p:extLst>
-  </p:cSld>
-  <p:clrMapOvr>
-    <a:masterClrMapping/>
-  </p:clrMapOvr>
-</p:sld>
-</file>
-
-<file path=ppt/slides/slide21.xml><?xml version="1.0" encoding="utf-8"?>
+<file path=ppt/slides/slide19.xml><?xml version="1.0" encoding="utf-8"?>
 <p:sld xmlns:a="http://schemas.openxmlformats.org/drawingml/2006/main" xmlns:r="http://schemas.openxmlformats.org/officeDocument/2006/relationships" xmlns:p="http://schemas.openxmlformats.org/presentationml/2006/main">
   <p:cSld>
     <p:spTree>
@@ -11077,7 +10417,7 @@
           <p:cNvPr id="2" name="Título 1">
             <a:extLst>
               <a:ext uri="{FF2B5EF4-FFF2-40B4-BE49-F238E27FC236}">
-                <a16:creationId xmlns:a16="http://schemas.microsoft.com/office/drawing/2014/main" id="{89A7389B-2E4B-7951-1EC9-8555E82157E0}"/>
+                <a16:creationId xmlns:a16="http://schemas.microsoft.com/office/drawing/2014/main" id="{EBA43D66-D1A5-D712-35D2-EC7476137982}"/>
               </a:ext>
             </a:extLst>
           </p:cNvPr>
@@ -11095,7 +10435,7 @@
           <a:p>
             <a:r>
               <a:rPr lang="pt-BR"/>
-              <a:t>Referências</a:t>
+              <a:t>Exemplo prático</a:t>
             </a:r>
           </a:p>
         </p:txBody>
@@ -11105,7 +10445,7 @@
           <p:cNvPr id="3" name="Espaço Reservado para Conteúdo 2">
             <a:extLst>
               <a:ext uri="{FF2B5EF4-FFF2-40B4-BE49-F238E27FC236}">
-                <a16:creationId xmlns:a16="http://schemas.microsoft.com/office/drawing/2014/main" id="{82797003-23D1-FE35-C4E9-8219AD89CC72}"/>
+                <a16:creationId xmlns:a16="http://schemas.microsoft.com/office/drawing/2014/main" id="{68AE4F73-8AE1-B869-AD7A-6EA2A99A1AA0}"/>
               </a:ext>
             </a:extLst>
           </p:cNvPr>
@@ -11123,97 +10463,238 @@
           </a:bodyPr>
           <a:lstStyle/>
           <a:p>
+            <a:pPr indent="0">
+              <a:buNone/>
+            </a:pPr>
+            <a:endParaRPr lang="en-US" sz="800" dirty="0"/>
+          </a:p>
+          <a:p>
+            <a:pPr marL="0" indent="0">
+              <a:buNone/>
+            </a:pPr>
+            <a:endParaRPr lang="pt-BR" sz="800" dirty="0"/>
+          </a:p>
+          <a:p>
             <a:pPr>
-              <a:buFont typeface=""/>
-              <a:buChar char="•"/>
+              <a:buNone/>
             </a:pPr>
             <a:r>
               <a:rPr lang="pt-BR" dirty="0"/>
-              <a:t>FLEURY, Cláudio A. </a:t>
-            </a:r>
-            <a:r>
-              <a:rPr lang="pt-BR" i="1" dirty="0" err="1"/>
-              <a:t>Git</a:t>
-            </a:r>
-            <a:r>
-              <a:rPr lang="pt-BR" i="1" dirty="0"/>
-              <a:t> – Olhando sob o capô</a:t>
+              <a:t>6.(Opcional) Apagar a </a:t>
+            </a:r>
+            <a:r>
+              <a:rPr lang="pt-BR" dirty="0" err="1"/>
+              <a:t>branch</a:t>
             </a:r>
             <a:r>
               <a:rPr lang="pt-BR" dirty="0"/>
-              <a:t>. </a:t>
-            </a:r>
+              <a:t> de correção</a:t>
+            </a:r>
+            <a:endParaRPr lang="en-US"/>
           </a:p>
           <a:p>
             <a:pPr>
-              <a:buFont typeface=""/>
-              <a:buChar char="•"/>
-            </a:pPr>
+              <a:buNone/>
+            </a:pPr>
+            <a:r>
+              <a:rPr lang="pt-BR" sz="1600" b="1" dirty="0" err="1">
+                <a:solidFill>
+                  <a:srgbClr val="FFC000"/>
+                </a:solidFill>
+                <a:latin typeface="Consolas"/>
+              </a:rPr>
+              <a:t>git</a:t>
+            </a:r>
+            <a:r>
+              <a:rPr lang="pt-BR" sz="1600" b="1" dirty="0">
+                <a:solidFill>
+                  <a:srgbClr val="FFC000"/>
+                </a:solidFill>
+                <a:latin typeface="Consolas"/>
+              </a:rPr>
+              <a:t> </a:t>
+            </a:r>
+            <a:r>
+              <a:rPr lang="pt-BR" sz="1600" b="1" dirty="0" err="1">
+                <a:solidFill>
+                  <a:srgbClr val="FFC000"/>
+                </a:solidFill>
+                <a:latin typeface="Consolas"/>
+              </a:rPr>
+              <a:t>branch</a:t>
+            </a:r>
+            <a:r>
+              <a:rPr lang="pt-BR" sz="1600" b="1" dirty="0">
+                <a:solidFill>
+                  <a:srgbClr val="FFC000"/>
+                </a:solidFill>
+                <a:latin typeface="Consolas"/>
+              </a:rPr>
+              <a:t> -d </a:t>
+            </a:r>
+            <a:r>
+              <a:rPr lang="pt-BR" sz="1600" b="1" dirty="0" err="1">
+                <a:solidFill>
+                  <a:srgbClr val="FFC000"/>
+                </a:solidFill>
+                <a:latin typeface="Consolas"/>
+              </a:rPr>
+              <a:t>hotfix</a:t>
+            </a:r>
+            <a:r>
+              <a:rPr lang="pt-BR" sz="1600" b="1" dirty="0">
+                <a:solidFill>
+                  <a:srgbClr val="FFC000"/>
+                </a:solidFill>
+                <a:latin typeface="Consolas"/>
+              </a:rPr>
+              <a:t>-erro-</a:t>
+            </a:r>
+            <a:r>
+              <a:rPr lang="pt-BR" sz="1600" b="1" dirty="0" err="1">
+                <a:solidFill>
+                  <a:srgbClr val="FFC000"/>
+                </a:solidFill>
+                <a:latin typeface="Consolas"/>
+              </a:rPr>
+              <a:t>critico</a:t>
+            </a:r>
+            <a:r>
+              <a:rPr lang="pt-BR" sz="1600" dirty="0">
+                <a:latin typeface="Century Gothic"/>
+              </a:rPr>
+              <a:t>: Remove</a:t>
+            </a:r>
+            <a:r>
+              <a:rPr lang="pt-BR" sz="1600" dirty="0"/>
+              <a:t> a </a:t>
+            </a:r>
+            <a:r>
+              <a:rPr lang="pt-BR" sz="1600" dirty="0" err="1"/>
+              <a:t>branch</a:t>
+            </a:r>
+            <a:r>
+              <a:rPr lang="pt-BR" sz="1600" dirty="0"/>
+              <a:t> temporária após o uso.</a:t>
+            </a:r>
+            <a:br>
+              <a:rPr lang="en-US" sz="1600" dirty="0"/>
+            </a:br>
+            <a:endParaRPr lang="en-US" sz="1600">
+              <a:latin typeface="Century Gothic"/>
+              <a:ea typeface="Calibri"/>
+              <a:cs typeface="Calibri"/>
+            </a:endParaRPr>
+          </a:p>
+          <a:p>
+            <a:pPr>
+              <a:buNone/>
+            </a:pPr>
+            <a:r>
+              <a:rPr lang="pt-BR" sz="1600" dirty="0"/>
+              <a:t> </a:t>
+            </a:r>
             <a:r>
               <a:rPr lang="pt-BR"/>
-              <a:t>FLEURY, Cláudio A. </a:t>
-            </a:r>
-            <a:r>
-              <a:rPr lang="pt-BR" i="1"/>
-              <a:t>Git.pdf</a:t>
-            </a:r>
-            <a:r>
-              <a:rPr lang="pt-BR"/>
-              <a:t>. </a:t>
-            </a:r>
+              <a:t>7. Voltar ao que você estava fazendo antes</a:t>
+            </a:r>
+            <a:endParaRPr lang="en-US"/>
           </a:p>
           <a:p>
             <a:pPr>
-              <a:buFont typeface=""/>
-              <a:buChar char="•"/>
-            </a:pPr>
-            <a:r>
-              <a:rPr lang="pt-BR" dirty="0"/>
-              <a:t>HOSTINGER. </a:t>
-            </a:r>
-            <a:r>
-              <a:rPr lang="pt-BR" i="1" dirty="0"/>
-              <a:t>Comandos </a:t>
-            </a:r>
-            <a:r>
-              <a:rPr lang="pt-BR" i="1" dirty="0" err="1"/>
-              <a:t>Git</a:t>
-            </a:r>
-            <a:r>
-              <a:rPr lang="pt-BR" dirty="0"/>
-              <a:t>. Disponível em: https://www.hostinger.com/</a:t>
-            </a:r>
-            <a:r>
-              <a:rPr lang="pt-BR" dirty="0" err="1"/>
-              <a:t>br</a:t>
-            </a:r>
-            <a:r>
-              <a:rPr lang="pt-BR" dirty="0"/>
-              <a:t>/tutoriais/comandos. </a:t>
-            </a:r>
-            <a:endParaRPr lang="pt-BR" b="1" dirty="0"/>
+              <a:buNone/>
+            </a:pPr>
+            <a:r>
+              <a:rPr lang="pt-BR" sz="1600" b="1" dirty="0" err="1">
+                <a:solidFill>
+                  <a:srgbClr val="FFC000"/>
+                </a:solidFill>
+                <a:latin typeface="Consolas"/>
+              </a:rPr>
+              <a:t>git</a:t>
+            </a:r>
+            <a:r>
+              <a:rPr lang="pt-BR" sz="1600" b="1" dirty="0">
+                <a:solidFill>
+                  <a:srgbClr val="FFC000"/>
+                </a:solidFill>
+                <a:latin typeface="Consolas"/>
+              </a:rPr>
+              <a:t> checkout sua-</a:t>
+            </a:r>
+            <a:r>
+              <a:rPr lang="pt-BR" sz="1600" b="1" dirty="0" err="1">
+                <a:solidFill>
+                  <a:srgbClr val="FFC000"/>
+                </a:solidFill>
+                <a:latin typeface="Consolas"/>
+              </a:rPr>
+              <a:t>branch</a:t>
+            </a:r>
+            <a:r>
+              <a:rPr lang="pt-BR" sz="1600" dirty="0">
+                <a:latin typeface="Century Gothic"/>
+              </a:rPr>
+              <a:t>: Retorna para sua </a:t>
+            </a:r>
+            <a:r>
+              <a:rPr lang="pt-BR" sz="1600" dirty="0" err="1">
+                <a:latin typeface="Century Gothic"/>
+              </a:rPr>
+              <a:t>branch</a:t>
+            </a:r>
+            <a:r>
+              <a:rPr lang="pt-BR" sz="1600" dirty="0">
+                <a:latin typeface="Century Gothic"/>
+              </a:rPr>
+              <a:t> de desenvolvimento </a:t>
+            </a:r>
           </a:p>
           <a:p>
             <a:pPr>
-              <a:buFont typeface=""/>
-              <a:buChar char="•"/>
-            </a:pPr>
-            <a:r>
-              <a:rPr lang="pt-BR"/>
-              <a:t>Acesso em: 27 abr. 2026</a:t>
-            </a:r>
-          </a:p>
-          <a:p>
-            <a:pPr>
-              <a:buFont typeface=""/>
-              <a:buChar char="•"/>
-            </a:pPr>
-            <a:r>
-              <a:rPr lang="pt-BR">
-                <a:ea typeface="+mn-lt"/>
-                <a:cs typeface="+mn-lt"/>
-              </a:rPr>
-              <a:t>Apoio de ferramentas de IA: ChatGPT e Gemini.</a:t>
+              <a:buNone/>
+            </a:pPr>
+            <a:r>
+              <a:rPr lang="pt-BR" sz="1600" b="1" dirty="0" err="1">
+                <a:solidFill>
+                  <a:srgbClr val="FFC000"/>
+                </a:solidFill>
+                <a:latin typeface="Consolas"/>
+              </a:rPr>
+              <a:t>git</a:t>
+            </a:r>
+            <a:r>
+              <a:rPr lang="pt-BR" sz="1600" b="1" dirty="0">
+                <a:solidFill>
+                  <a:srgbClr val="FFC000"/>
+                </a:solidFill>
+                <a:latin typeface="Consolas"/>
+              </a:rPr>
+              <a:t> </a:t>
+            </a:r>
+            <a:r>
+              <a:rPr lang="pt-BR" sz="1600" b="1" dirty="0" err="1">
+                <a:solidFill>
+                  <a:srgbClr val="FFC000"/>
+                </a:solidFill>
+                <a:latin typeface="Consolas"/>
+              </a:rPr>
+              <a:t>stash</a:t>
+            </a:r>
+            <a:r>
+              <a:rPr lang="pt-BR" sz="1600" b="1" dirty="0">
+                <a:solidFill>
+                  <a:srgbClr val="FFC000"/>
+                </a:solidFill>
+                <a:latin typeface="Consolas"/>
+              </a:rPr>
+              <a:t> pop</a:t>
+            </a:r>
+            <a:r>
+              <a:rPr lang="pt-BR" sz="1600" dirty="0">
+                <a:latin typeface="Century Gothic"/>
+              </a:rPr>
+              <a:t>: recupera o que você estava fazendo antes </a:t>
             </a:r>
             <a:endParaRPr lang="pt-BR" dirty="0"/>
           </a:p>
@@ -11222,7 +10703,7 @@
     </p:spTree>
     <p:extLst>
       <p:ext uri="{BB962C8B-B14F-4D97-AF65-F5344CB8AC3E}">
-        <p14:creationId xmlns:p14="http://schemas.microsoft.com/office/powerpoint/2010/main" val="4100629014"/>
+        <p14:creationId xmlns:p14="http://schemas.microsoft.com/office/powerpoint/2010/main" val="2842962354"/>
       </p:ext>
     </p:extLst>
   </p:cSld>
@@ -11232,7 +10713,7 @@
 </p:sld>
 </file>
 
-<file path=ppt/slides/slide3.xml><?xml version="1.0" encoding="utf-8"?>
+<file path=ppt/slides/slide2.xml><?xml version="1.0" encoding="utf-8"?>
 <p:sld xmlns:a="http://schemas.openxmlformats.org/drawingml/2006/main" xmlns:r="http://schemas.openxmlformats.org/officeDocument/2006/relationships" xmlns:p="http://schemas.openxmlformats.org/presentationml/2006/main" show="0">
   <p:cSld>
     <p:spTree>
@@ -11529,6 +11010,697 @@
 </p:sld>
 </file>
 
+<file path=ppt/slides/slide20.xml><?xml version="1.0" encoding="utf-8"?>
+<p:sld xmlns:a="http://schemas.openxmlformats.org/drawingml/2006/main" xmlns:r="http://schemas.openxmlformats.org/officeDocument/2006/relationships" xmlns:p="http://schemas.openxmlformats.org/presentationml/2006/main">
+  <p:cSld>
+    <p:spTree>
+      <p:nvGrpSpPr>
+        <p:cNvPr id="1" name=""/>
+        <p:cNvGrpSpPr/>
+        <p:nvPr/>
+      </p:nvGrpSpPr>
+      <p:grpSpPr>
+        <a:xfrm>
+          <a:off x="0" y="0"/>
+          <a:ext cx="0" cy="0"/>
+          <a:chOff x="0" y="0"/>
+          <a:chExt cx="0" cy="0"/>
+        </a:xfrm>
+      </p:grpSpPr>
+      <p:sp>
+        <p:nvSpPr>
+          <p:cNvPr id="2" name="Título 1">
+            <a:extLst>
+              <a:ext uri="{FF2B5EF4-FFF2-40B4-BE49-F238E27FC236}">
+                <a16:creationId xmlns:a16="http://schemas.microsoft.com/office/drawing/2014/main" id="{DA848BF1-DF79-8CDA-8CAA-FFFA69DB126C}"/>
+              </a:ext>
+            </a:extLst>
+          </p:cNvPr>
+          <p:cNvSpPr>
+            <a:spLocks noGrp="1"/>
+          </p:cNvSpPr>
+          <p:nvPr>
+            <p:ph type="title"/>
+          </p:nvPr>
+        </p:nvSpPr>
+        <p:spPr/>
+        <p:txBody>
+          <a:bodyPr/>
+          <a:lstStyle/>
+          <a:p>
+            <a:r>
+              <a:rPr lang="pt-BR"/>
+              <a:t>O que foi feito</a:t>
+            </a:r>
+            <a:endParaRPr lang="pt-BR" dirty="0"/>
+          </a:p>
+        </p:txBody>
+      </p:sp>
+      <p:sp>
+        <p:nvSpPr>
+          <p:cNvPr id="3" name="Espaço Reservado para Conteúdo 2">
+            <a:extLst>
+              <a:ext uri="{FF2B5EF4-FFF2-40B4-BE49-F238E27FC236}">
+                <a16:creationId xmlns:a16="http://schemas.microsoft.com/office/drawing/2014/main" id="{3203C497-A4EB-D0E5-3824-5AFF03903956}"/>
+              </a:ext>
+            </a:extLst>
+          </p:cNvPr>
+          <p:cNvSpPr>
+            <a:spLocks noGrp="1"/>
+          </p:cNvSpPr>
+          <p:nvPr>
+            <p:ph idx="1"/>
+          </p:nvPr>
+        </p:nvSpPr>
+        <p:spPr/>
+        <p:txBody>
+          <a:bodyPr vert="horz" lIns="91440" tIns="45720" rIns="91440" bIns="45720" rtlCol="0" anchor="t">
+            <a:normAutofit lnSpcReduction="10000"/>
+          </a:bodyPr>
+          <a:lstStyle/>
+          <a:p>
+            <a:pPr indent="0">
+              <a:buNone/>
+            </a:pPr>
+            <a:endParaRPr lang="en-US" dirty="0"/>
+          </a:p>
+          <a:p>
+            <a:pPr>
+              <a:buNone/>
+            </a:pPr>
+            <a:r>
+              <a:rPr lang="pt-BR"/>
+              <a:t>Você:</a:t>
+            </a:r>
+            <a:endParaRPr lang="pt-BR" dirty="0"/>
+          </a:p>
+          <a:p>
+            <a:pPr>
+              <a:buNone/>
+            </a:pPr>
+            <a:endParaRPr lang="pt-BR" dirty="0"/>
+          </a:p>
+          <a:p>
+            <a:pPr>
+              <a:buAutoNum type="arabicParenR"/>
+            </a:pPr>
+            <a:r>
+              <a:rPr lang="pt-BR" dirty="0"/>
+              <a:t>Guardou o trabalho atual (</a:t>
+            </a:r>
+            <a:r>
+              <a:rPr lang="pt-BR" i="1" dirty="0" err="1"/>
+              <a:t>stash</a:t>
+            </a:r>
+            <a:r>
+              <a:rPr lang="pt-BR" dirty="0"/>
+              <a:t>) </a:t>
+            </a:r>
+            <a:endParaRPr lang="en-US" dirty="0"/>
+          </a:p>
+          <a:p>
+            <a:pPr>
+              <a:buAutoNum type="arabicParenR"/>
+            </a:pPr>
+            <a:r>
+              <a:rPr lang="pt-BR" dirty="0"/>
+              <a:t>Foi para a ramifi</a:t>
+            </a:r>
+            <a:r>
+              <a:rPr lang="pt-BR"/>
+              <a:t>cação principal</a:t>
+            </a:r>
+            <a:r>
+              <a:rPr lang="pt-BR" dirty="0"/>
+              <a:t> </a:t>
+            </a:r>
+          </a:p>
+          <a:p>
+            <a:pPr>
+              <a:buAutoNum type="arabicParenR"/>
+            </a:pPr>
+            <a:r>
+              <a:rPr lang="pt-BR" dirty="0"/>
+              <a:t>Criou uma </a:t>
+            </a:r>
+            <a:r>
+              <a:rPr lang="pt-BR" i="1" dirty="0" err="1"/>
+              <a:t>branch</a:t>
+            </a:r>
+            <a:r>
+              <a:rPr lang="pt-BR" dirty="0"/>
+              <a:t> de correção </a:t>
+            </a:r>
+            <a:endParaRPr lang="en-US" dirty="0"/>
+          </a:p>
+          <a:p>
+            <a:pPr>
+              <a:buAutoNum type="arabicParenR"/>
+            </a:pPr>
+            <a:r>
+              <a:rPr lang="pt-BR" dirty="0"/>
+              <a:t>Fez a correção e fez um </a:t>
+            </a:r>
+            <a:r>
+              <a:rPr lang="pt-BR" i="1" dirty="0" err="1"/>
+              <a:t>commit</a:t>
+            </a:r>
+            <a:r>
+              <a:rPr lang="pt-BR" i="1" dirty="0"/>
+              <a:t> </a:t>
+            </a:r>
+            <a:endParaRPr lang="en-US" i="1" dirty="0"/>
+          </a:p>
+          <a:p>
+            <a:pPr>
+              <a:buAutoNum type="arabicParenR"/>
+            </a:pPr>
+            <a:r>
+              <a:rPr lang="pt-BR" dirty="0"/>
+              <a:t>Integrou </a:t>
+            </a:r>
+            <a:r>
+              <a:rPr lang="pt-BR"/>
+              <a:t>no arquivo principal</a:t>
+            </a:r>
+            <a:r>
+              <a:rPr lang="pt-BR" dirty="0"/>
+              <a:t> (</a:t>
+            </a:r>
+            <a:r>
+              <a:rPr lang="pt-BR" i="1" dirty="0"/>
+              <a:t>merge</a:t>
+            </a:r>
+            <a:r>
+              <a:rPr lang="pt-BR" dirty="0"/>
+              <a:t>) </a:t>
+            </a:r>
+          </a:p>
+          <a:p>
+            <a:pPr>
+              <a:buAutoNum type="arabicParenR"/>
+            </a:pPr>
+            <a:r>
+              <a:rPr lang="pt-BR"/>
+              <a:t>Excluiu a ramificação de correção do erro</a:t>
+            </a:r>
+            <a:endParaRPr lang="pt-BR" dirty="0"/>
+          </a:p>
+          <a:p>
+            <a:pPr>
+              <a:buAutoNum type="arabicParenR"/>
+            </a:pPr>
+            <a:r>
+              <a:rPr lang="pt-BR"/>
+              <a:t>Voltou ao seu trabalho original</a:t>
+            </a:r>
+          </a:p>
+        </p:txBody>
+      </p:sp>
+    </p:spTree>
+    <p:extLst>
+      <p:ext uri="{BB962C8B-B14F-4D97-AF65-F5344CB8AC3E}">
+        <p14:creationId xmlns:p14="http://schemas.microsoft.com/office/powerpoint/2010/main" val="718378982"/>
+      </p:ext>
+    </p:extLst>
+  </p:cSld>
+  <p:clrMapOvr>
+    <a:masterClrMapping/>
+  </p:clrMapOvr>
+</p:sld>
+</file>
+
+<file path=ppt/slides/slide21.xml><?xml version="1.0" encoding="utf-8"?>
+<p:sld xmlns:a="http://schemas.openxmlformats.org/drawingml/2006/main" xmlns:r="http://schemas.openxmlformats.org/officeDocument/2006/relationships" xmlns:p="http://schemas.openxmlformats.org/presentationml/2006/main">
+  <p:cSld>
+    <p:spTree>
+      <p:nvGrpSpPr>
+        <p:cNvPr id="1" name=""/>
+        <p:cNvGrpSpPr/>
+        <p:nvPr/>
+      </p:nvGrpSpPr>
+      <p:grpSpPr>
+        <a:xfrm>
+          <a:off x="0" y="0"/>
+          <a:ext cx="0" cy="0"/>
+          <a:chOff x="0" y="0"/>
+          <a:chExt cx="0" cy="0"/>
+        </a:xfrm>
+      </p:grpSpPr>
+      <p:sp>
+        <p:nvSpPr>
+          <p:cNvPr id="2" name="Título 1">
+            <a:extLst>
+              <a:ext uri="{FF2B5EF4-FFF2-40B4-BE49-F238E27FC236}">
+                <a16:creationId xmlns:a16="http://schemas.microsoft.com/office/drawing/2014/main" id="{89A7389B-2E4B-7951-1EC9-8555E82157E0}"/>
+              </a:ext>
+            </a:extLst>
+          </p:cNvPr>
+          <p:cNvSpPr>
+            <a:spLocks noGrp="1"/>
+          </p:cNvSpPr>
+          <p:nvPr>
+            <p:ph type="title"/>
+          </p:nvPr>
+        </p:nvSpPr>
+        <p:spPr/>
+        <p:txBody>
+          <a:bodyPr/>
+          <a:lstStyle/>
+          <a:p>
+            <a:r>
+              <a:rPr lang="pt-BR"/>
+              <a:t>Referências</a:t>
+            </a:r>
+          </a:p>
+        </p:txBody>
+      </p:sp>
+      <p:sp>
+        <p:nvSpPr>
+          <p:cNvPr id="3" name="Espaço Reservado para Conteúdo 2">
+            <a:extLst>
+              <a:ext uri="{FF2B5EF4-FFF2-40B4-BE49-F238E27FC236}">
+                <a16:creationId xmlns:a16="http://schemas.microsoft.com/office/drawing/2014/main" id="{82797003-23D1-FE35-C4E9-8219AD89CC72}"/>
+              </a:ext>
+            </a:extLst>
+          </p:cNvPr>
+          <p:cNvSpPr>
+            <a:spLocks noGrp="1"/>
+          </p:cNvSpPr>
+          <p:nvPr>
+            <p:ph idx="1"/>
+          </p:nvPr>
+        </p:nvSpPr>
+        <p:spPr/>
+        <p:txBody>
+          <a:bodyPr vert="horz" lIns="91440" tIns="45720" rIns="91440" bIns="45720" rtlCol="0" anchor="t">
+            <a:normAutofit/>
+          </a:bodyPr>
+          <a:lstStyle/>
+          <a:p>
+            <a:pPr>
+              <a:buFont typeface=""/>
+              <a:buChar char="•"/>
+            </a:pPr>
+            <a:r>
+              <a:rPr lang="pt-BR" dirty="0"/>
+              <a:t>FLEURY, Cláudio A.; "</a:t>
+            </a:r>
+            <a:r>
+              <a:rPr lang="pt-BR" i="1" dirty="0"/>
+              <a:t>Git – Olhando sob o capô"; 2026; disponível em: </a:t>
+            </a:r>
+            <a:r>
+              <a:rPr lang="pt-BR" dirty="0">
+                <a:ea typeface="+mn-lt"/>
+                <a:cs typeface="+mn-lt"/>
+                <a:hlinkClick r:id="rId2"/>
+              </a:rPr>
+              <a:t>https://github.com/kaw19/prjens_ifg_gyn_26/</a:t>
+            </a:r>
+            <a:r>
+              <a:rPr lang="pt-BR" dirty="0" err="1">
+                <a:ea typeface="+mn-lt"/>
+                <a:cs typeface="+mn-lt"/>
+                <a:hlinkClick r:id="rId2"/>
+              </a:rPr>
+              <a:t>tree</a:t>
+            </a:r>
+            <a:r>
+              <a:rPr lang="pt-BR" dirty="0">
+                <a:ea typeface="+mn-lt"/>
+                <a:cs typeface="+mn-lt"/>
+                <a:hlinkClick r:id="rId2"/>
+              </a:rPr>
+              <a:t>/</a:t>
+            </a:r>
+            <a:r>
+              <a:rPr lang="pt-BR" dirty="0" err="1">
+                <a:ea typeface="+mn-lt"/>
+                <a:cs typeface="+mn-lt"/>
+                <a:hlinkClick r:id="rId2"/>
+              </a:rPr>
+              <a:t>main</a:t>
+            </a:r>
+            <a:r>
+              <a:rPr lang="pt-BR" dirty="0">
+                <a:ea typeface="+mn-lt"/>
+                <a:cs typeface="+mn-lt"/>
+                <a:hlinkClick r:id="rId2"/>
+              </a:rPr>
+              <a:t>/</a:t>
+            </a:r>
+            <a:r>
+              <a:rPr lang="pt-BR" dirty="0" err="1">
+                <a:ea typeface="+mn-lt"/>
+                <a:cs typeface="+mn-lt"/>
+                <a:hlinkClick r:id="rId2"/>
+              </a:rPr>
+              <a:t>mat_did</a:t>
+            </a:r>
+            <a:r>
+              <a:rPr lang="pt-BR" dirty="0"/>
+              <a:t>; acesso em 26/04/2026. </a:t>
+            </a:r>
+          </a:p>
+          <a:p>
+            <a:pPr>
+              <a:buFont typeface=""/>
+              <a:buChar char="•"/>
+            </a:pPr>
+            <a:r>
+              <a:rPr lang="pt-BR" dirty="0"/>
+              <a:t>FLEURY, Cláudio A.; "</a:t>
+            </a:r>
+            <a:r>
+              <a:rPr lang="pt-BR" i="1" dirty="0"/>
+              <a:t>Git</a:t>
+            </a:r>
+            <a:r>
+              <a:rPr lang="pt-BR" dirty="0"/>
+              <a:t> "(formato pdf); 2026; disponível em: </a:t>
+            </a:r>
+            <a:r>
+              <a:rPr lang="pt-BR" dirty="0">
+                <a:ea typeface="+mn-lt"/>
+                <a:cs typeface="+mn-lt"/>
+                <a:hlinkClick r:id="rId2"/>
+              </a:rPr>
+              <a:t>https://github.com/kaw19/prjens_ifg_gyn_26/</a:t>
+            </a:r>
+            <a:r>
+              <a:rPr lang="pt-BR" dirty="0" err="1">
+                <a:ea typeface="+mn-lt"/>
+                <a:cs typeface="+mn-lt"/>
+                <a:hlinkClick r:id="rId2"/>
+              </a:rPr>
+              <a:t>tree</a:t>
+            </a:r>
+            <a:r>
+              <a:rPr lang="pt-BR" dirty="0">
+                <a:ea typeface="+mn-lt"/>
+                <a:cs typeface="+mn-lt"/>
+                <a:hlinkClick r:id="rId2"/>
+              </a:rPr>
+              <a:t>/</a:t>
+            </a:r>
+            <a:r>
+              <a:rPr lang="pt-BR" dirty="0" err="1">
+                <a:ea typeface="+mn-lt"/>
+                <a:cs typeface="+mn-lt"/>
+                <a:hlinkClick r:id="rId2"/>
+              </a:rPr>
+              <a:t>main</a:t>
+            </a:r>
+            <a:r>
+              <a:rPr lang="pt-BR" dirty="0">
+                <a:ea typeface="+mn-lt"/>
+                <a:cs typeface="+mn-lt"/>
+                <a:hlinkClick r:id="rId2"/>
+              </a:rPr>
+              <a:t>/</a:t>
+            </a:r>
+            <a:r>
+              <a:rPr lang="pt-BR" dirty="0" err="1">
+                <a:ea typeface="+mn-lt"/>
+                <a:cs typeface="+mn-lt"/>
+                <a:hlinkClick r:id="rId2"/>
+              </a:rPr>
+              <a:t>mat_did</a:t>
+            </a:r>
+            <a:r>
+              <a:rPr lang="pt-BR" dirty="0">
+                <a:ea typeface="+mn-lt"/>
+                <a:cs typeface="+mn-lt"/>
+              </a:rPr>
+              <a:t>; acesso </a:t>
+            </a:r>
+            <a:r>
+              <a:rPr lang="pt-BR">
+                <a:ea typeface="+mn-lt"/>
+                <a:cs typeface="+mn-lt"/>
+              </a:rPr>
+              <a:t>em 26/04/2026.</a:t>
+            </a:r>
+            <a:endParaRPr lang="pt-BR"/>
+          </a:p>
+          <a:p>
+            <a:pPr>
+              <a:buFont typeface=""/>
+              <a:buChar char="•"/>
+            </a:pPr>
+            <a:r>
+              <a:rPr lang="pt-BR" dirty="0"/>
+              <a:t>HOSTINGER (site); "</a:t>
+            </a:r>
+            <a:r>
+              <a:rPr lang="pt-BR" i="1" dirty="0"/>
+              <a:t>Comandos </a:t>
+            </a:r>
+            <a:r>
+              <a:rPr lang="pt-BR" i="1" err="1"/>
+              <a:t>Git</a:t>
+            </a:r>
+            <a:r>
+              <a:rPr lang="pt-BR" i="1" dirty="0"/>
+              <a:t>"; d</a:t>
+            </a:r>
+            <a:r>
+              <a:rPr lang="pt-BR" dirty="0"/>
+              <a:t>isponível em: </a:t>
+            </a:r>
+            <a:r>
+              <a:rPr lang="pt-BR" dirty="0">
+                <a:hlinkClick r:id="rId3"/>
+              </a:rPr>
+              <a:t>https://www.hostinger.com/</a:t>
+            </a:r>
+            <a:r>
+              <a:rPr lang="pt-BR" dirty="0" err="1">
+                <a:hlinkClick r:id="rId3"/>
+              </a:rPr>
+              <a:t>br</a:t>
+            </a:r>
+            <a:r>
+              <a:rPr lang="pt-BR" dirty="0">
+                <a:hlinkClick r:id="rId3"/>
+              </a:rPr>
+              <a:t>/tutoriais/comandos</a:t>
+            </a:r>
+            <a:r>
+              <a:rPr lang="pt-BR"/>
+              <a:t>; acesso em 27/04/2026.</a:t>
+            </a:r>
+            <a:endParaRPr lang="pt-BR" b="1" dirty="0"/>
+          </a:p>
+          <a:p>
+            <a:pPr>
+              <a:buFont typeface=""/>
+              <a:buChar char="•"/>
+            </a:pPr>
+            <a:r>
+              <a:rPr lang="pt-BR">
+                <a:ea typeface="+mn-lt"/>
+                <a:cs typeface="+mn-lt"/>
+              </a:rPr>
+              <a:t>Apoio de ferramentas de IA: ChatGPT e Gemini.</a:t>
+            </a:r>
+            <a:endParaRPr lang="pt-BR" dirty="0"/>
+          </a:p>
+        </p:txBody>
+      </p:sp>
+    </p:spTree>
+    <p:extLst>
+      <p:ext uri="{BB962C8B-B14F-4D97-AF65-F5344CB8AC3E}">
+        <p14:creationId xmlns:p14="http://schemas.microsoft.com/office/powerpoint/2010/main" val="4100629014"/>
+      </p:ext>
+    </p:extLst>
+  </p:cSld>
+  <p:clrMapOvr>
+    <a:masterClrMapping/>
+  </p:clrMapOvr>
+</p:sld>
+</file>
+
+<file path=ppt/slides/slide3.xml><?xml version="1.0" encoding="utf-8"?>
+<p:sld xmlns:a="http://schemas.openxmlformats.org/drawingml/2006/main" xmlns:r="http://schemas.openxmlformats.org/officeDocument/2006/relationships" xmlns:p="http://schemas.openxmlformats.org/presentationml/2006/main" show="0">
+  <p:cSld>
+    <p:spTree>
+      <p:nvGrpSpPr>
+        <p:cNvPr id="1" name=""/>
+        <p:cNvGrpSpPr/>
+        <p:nvPr/>
+      </p:nvGrpSpPr>
+      <p:grpSpPr>
+        <a:xfrm>
+          <a:off x="0" y="0"/>
+          <a:ext cx="0" cy="0"/>
+          <a:chOff x="0" y="0"/>
+          <a:chExt cx="0" cy="0"/>
+        </a:xfrm>
+      </p:grpSpPr>
+      <p:sp>
+        <p:nvSpPr>
+          <p:cNvPr id="2" name="Título 1">
+            <a:extLst>
+              <a:ext uri="{FF2B5EF4-FFF2-40B4-BE49-F238E27FC236}">
+                <a16:creationId xmlns:a16="http://schemas.microsoft.com/office/drawing/2014/main" id="{09029A89-48FF-E6ED-E0DC-583FEE4BEC4B}"/>
+              </a:ext>
+            </a:extLst>
+          </p:cNvPr>
+          <p:cNvSpPr>
+            <a:spLocks noGrp="1"/>
+          </p:cNvSpPr>
+          <p:nvPr>
+            <p:ph type="title"/>
+          </p:nvPr>
+        </p:nvSpPr>
+        <p:spPr/>
+        <p:txBody>
+          <a:bodyPr/>
+          <a:lstStyle/>
+          <a:p>
+            <a:r>
+              <a:rPr lang="pt-BR"/>
+              <a:t>O que é o GIT</a:t>
+            </a:r>
+          </a:p>
+        </p:txBody>
+      </p:sp>
+      <p:sp>
+        <p:nvSpPr>
+          <p:cNvPr id="3" name="Espaço Reservado para Conteúdo 2">
+            <a:extLst>
+              <a:ext uri="{FF2B5EF4-FFF2-40B4-BE49-F238E27FC236}">
+                <a16:creationId xmlns:a16="http://schemas.microsoft.com/office/drawing/2014/main" id="{F7560150-C333-D688-DB75-44043867B31D}"/>
+              </a:ext>
+            </a:extLst>
+          </p:cNvPr>
+          <p:cNvSpPr>
+            <a:spLocks noGrp="1"/>
+          </p:cNvSpPr>
+          <p:nvPr>
+            <p:ph idx="1"/>
+          </p:nvPr>
+        </p:nvSpPr>
+        <p:spPr/>
+        <p:txBody>
+          <a:bodyPr vert="horz" lIns="91440" tIns="45720" rIns="91440" bIns="45720" rtlCol="0" anchor="t">
+            <a:normAutofit/>
+          </a:bodyPr>
+          <a:lstStyle/>
+          <a:p>
+            <a:pPr marL="0" indent="0">
+              <a:buNone/>
+            </a:pPr>
+            <a:r>
+              <a:rPr lang="pt-BR" dirty="0">
+                <a:ea typeface="+mn-lt"/>
+                <a:cs typeface="+mn-lt"/>
+              </a:rPr>
+              <a:t>-O </a:t>
+            </a:r>
+            <a:r>
+              <a:rPr lang="pt-BR" i="1" dirty="0" err="1">
+                <a:ea typeface="+mn-lt"/>
+                <a:cs typeface="+mn-lt"/>
+              </a:rPr>
+              <a:t>Git</a:t>
+            </a:r>
+            <a:r>
+              <a:rPr lang="pt-BR" i="1" dirty="0">
+                <a:ea typeface="+mn-lt"/>
+                <a:cs typeface="+mn-lt"/>
+              </a:rPr>
+              <a:t> </a:t>
+            </a:r>
+            <a:r>
+              <a:rPr lang="pt-BR" dirty="0">
+                <a:ea typeface="+mn-lt"/>
+                <a:cs typeface="+mn-lt"/>
+              </a:rPr>
+              <a:t>é um sistema de controle de versão de ampla distribuição. Sendo muito utilizado no desenvolvimento de </a:t>
+            </a:r>
+            <a:r>
+              <a:rPr lang="pt-BR" i="1" dirty="0">
+                <a:ea typeface="+mn-lt"/>
+                <a:cs typeface="+mn-lt"/>
+              </a:rPr>
+              <a:t>softwares, especialmente quando se está trabalhando com equipes grandes e há uma necessidade de comunicar e compartilhar os arqui</a:t>
+            </a:r>
+            <a:r>
+              <a:rPr lang="pt-BR" i="1" dirty="0"/>
+              <a:t>vos </a:t>
+            </a:r>
+            <a:r>
+              <a:rPr lang="pt-BR" i="1" dirty="0">
+                <a:ea typeface="+mn-lt"/>
+                <a:cs typeface="+mn-lt"/>
+              </a:rPr>
+              <a:t>entre os elementos dessa equipe.</a:t>
+            </a:r>
+            <a:endParaRPr lang="pt-BR" dirty="0"/>
+          </a:p>
+          <a:p>
+            <a:pPr marL="0" indent="0">
+              <a:buNone/>
+            </a:pPr>
+            <a:endParaRPr lang="pt-BR"/>
+          </a:p>
+          <a:p>
+            <a:pPr marL="0" indent="0">
+              <a:buNone/>
+            </a:pPr>
+            <a:r>
+              <a:rPr lang="pt-BR" dirty="0"/>
+              <a:t>Ele funciona como um repositório de "fotos" que são tiradas dos arquivos no momento que são armazenadas no repositório e essas fotos </a:t>
+            </a:r>
+            <a:r>
+              <a:rPr lang="pt-BR"/>
+              <a:t>também podem ser comparadas com a última versão do arquivo para se identificar todas as alterações feitas na </a:t>
+            </a:r>
+            <a:r>
+              <a:rPr lang="pt-BR" err="1"/>
+              <a:t>nov</a:t>
+            </a:r>
+            <a:r>
+              <a:rPr lang="pt-BR"/>
+              <a:t>a versão.</a:t>
+            </a:r>
+          </a:p>
+          <a:p>
+            <a:pPr marL="0" indent="0">
+              <a:buNone/>
+            </a:pPr>
+            <a:endParaRPr lang="pt-BR" i="1" dirty="0"/>
+          </a:p>
+          <a:p>
+            <a:pPr marL="0" indent="0">
+              <a:buNone/>
+            </a:pPr>
+            <a:endParaRPr lang="pt-BR" dirty="0"/>
+          </a:p>
+          <a:p>
+            <a:pPr marL="0" indent="0">
+              <a:buNone/>
+            </a:pPr>
+            <a:endParaRPr lang="pt-BR" dirty="0"/>
+          </a:p>
+        </p:txBody>
+      </p:sp>
+    </p:spTree>
+    <p:extLst>
+      <p:ext uri="{BB962C8B-B14F-4D97-AF65-F5344CB8AC3E}">
+        <p14:creationId xmlns:p14="http://schemas.microsoft.com/office/powerpoint/2010/main" val="2800583250"/>
+      </p:ext>
+    </p:extLst>
+  </p:cSld>
+  <p:clrMapOvr>
+    <a:masterClrMapping/>
+  </p:clrMapOvr>
+</p:sld>
+</file>
+
 <file path=ppt/slides/slide4.xml><?xml version="1.0" encoding="utf-8"?>
 <p:sld xmlns:a="http://schemas.openxmlformats.org/drawingml/2006/main" xmlns:r="http://schemas.openxmlformats.org/officeDocument/2006/relationships" xmlns:p="http://schemas.openxmlformats.org/presentationml/2006/main" show="0">
   <p:cSld>
@@ -11551,7 +11723,7 @@
           <p:cNvPr id="2" name="Título 1">
             <a:extLst>
               <a:ext uri="{FF2B5EF4-FFF2-40B4-BE49-F238E27FC236}">
-                <a16:creationId xmlns:a16="http://schemas.microsoft.com/office/drawing/2014/main" id="{09029A89-48FF-E6ED-E0DC-583FEE4BEC4B}"/>
+                <a16:creationId xmlns:a16="http://schemas.microsoft.com/office/drawing/2014/main" id="{E9EA9D71-CD0F-AF69-E074-25A1BDAD2CF2}"/>
               </a:ext>
             </a:extLst>
           </p:cNvPr>
@@ -11568,8 +11740,12 @@
           <a:lstStyle/>
           <a:p>
             <a:r>
+              <a:rPr lang="pt-BR" err="1"/>
+              <a:t>Propó</a:t>
+            </a:r>
+            <a:r>
               <a:rPr lang="pt-BR"/>
-              <a:t>O que é o GIT</a:t>
+              <a:t>sito de desenvolvimento</a:t>
             </a:r>
           </a:p>
         </p:txBody>
@@ -11579,7 +11755,7 @@
           <p:cNvPr id="3" name="Espaço Reservado para Conteúdo 2">
             <a:extLst>
               <a:ext uri="{FF2B5EF4-FFF2-40B4-BE49-F238E27FC236}">
-                <a16:creationId xmlns:a16="http://schemas.microsoft.com/office/drawing/2014/main" id="{F7560150-C333-D688-DB75-44043867B31D}"/>
+                <a16:creationId xmlns:a16="http://schemas.microsoft.com/office/drawing/2014/main" id="{A0C6E499-3BB6-5112-2A22-89ECCD837B2F}"/>
               </a:ext>
             </a:extLst>
           </p:cNvPr>
@@ -11590,10 +11766,15 @@
             <p:ph idx="1"/>
           </p:nvPr>
         </p:nvSpPr>
-        <p:spPr/>
+        <p:spPr>
+          <a:xfrm>
+            <a:off x="2589212" y="2133600"/>
+            <a:ext cx="8915400" cy="4101211"/>
+          </a:xfrm>
+        </p:spPr>
         <p:txBody>
           <a:bodyPr vert="horz" lIns="91440" tIns="45720" rIns="91440" bIns="45720" rtlCol="0" anchor="t">
-            <a:normAutofit/>
+            <a:normAutofit fontScale="92500" lnSpcReduction="10000"/>
           </a:bodyPr>
           <a:lstStyle/>
           <a:p>
@@ -11601,50 +11782,8 @@
               <a:buNone/>
             </a:pPr>
             <a:r>
-              <a:rPr lang="pt-BR" dirty="0">
-                <a:ea typeface="+mn-lt"/>
-                <a:cs typeface="+mn-lt"/>
-              </a:rPr>
-              <a:t>-O </a:t>
-            </a:r>
-            <a:r>
-              <a:rPr lang="pt-BR" i="1" dirty="0" err="1">
-                <a:ea typeface="+mn-lt"/>
-                <a:cs typeface="+mn-lt"/>
-              </a:rPr>
-              <a:t>Git</a:t>
-            </a:r>
-            <a:r>
-              <a:rPr lang="pt-BR" i="1" dirty="0">
-                <a:ea typeface="+mn-lt"/>
-                <a:cs typeface="+mn-lt"/>
-              </a:rPr>
-              <a:t> </a:t>
-            </a:r>
-            <a:r>
-              <a:rPr lang="pt-BR" dirty="0">
-                <a:ea typeface="+mn-lt"/>
-                <a:cs typeface="+mn-lt"/>
-              </a:rPr>
-              <a:t>é um sistema de controle de versão de ampla distribuição. Sendo muito utilizado no desenvolvimento de </a:t>
-            </a:r>
-            <a:r>
-              <a:rPr lang="pt-BR" i="1" dirty="0">
-                <a:ea typeface="+mn-lt"/>
-                <a:cs typeface="+mn-lt"/>
-              </a:rPr>
-              <a:t>softwares, especialmente quando se está trabalhando com equipes grandes e há uma necessidade de comunicar e compartilhar os arqui</a:t>
-            </a:r>
-            <a:r>
-              <a:rPr lang="pt-BR" i="1" dirty="0"/>
-              <a:t>vos </a:t>
-            </a:r>
-            <a:r>
-              <a:rPr lang="pt-BR" i="1" dirty="0">
-                <a:ea typeface="+mn-lt"/>
-                <a:cs typeface="+mn-lt"/>
-              </a:rPr>
-              <a:t>entre os elementos dessa equipe.</a:t>
+              <a:rPr lang="pt-BR"/>
+              <a:t>Ele surgiu em 2005, criado por Linus Torvalds, para atender às necessidades do desenvolvimento do Linux.</a:t>
             </a:r>
             <a:endParaRPr lang="pt-BR" dirty="0"/>
           </a:p>
@@ -11652,6 +11791,50 @@
             <a:pPr marL="0" indent="0">
               <a:buNone/>
             </a:pPr>
+            <a:endParaRPr lang="pt-BR" dirty="0"/>
+          </a:p>
+          <a:p>
+            <a:pPr marL="0" indent="0">
+              <a:buNone/>
+            </a:pPr>
+            <a:r>
+              <a:rPr lang="pt-BR" dirty="0"/>
+              <a:t>Quando o desenvolvedor abriu o código para possibilitar que outros usuários o ajudassem no desenvolvimento. Ele se viu necessitando de uma plataforma para gerenciar o enorme </a:t>
+            </a:r>
+            <a:r>
+              <a:rPr lang="pt-BR" err="1"/>
+              <a:t>flu</a:t>
+            </a:r>
+            <a:r>
+              <a:rPr lang="pt-BR"/>
+              <a:t>xo de versões e atualizações recebidas.</a:t>
+            </a:r>
+            <a:endParaRPr lang="pt-BR" dirty="0"/>
+          </a:p>
+          <a:p>
+            <a:pPr marL="0" indent="0">
+              <a:buNone/>
+            </a:pPr>
+            <a:endParaRPr lang="pt-BR" dirty="0"/>
+          </a:p>
+          <a:p>
+            <a:pPr marL="0" indent="0">
+              <a:buNone/>
+            </a:pPr>
+            <a:r>
+              <a:rPr lang="pt-BR" dirty="0"/>
+              <a:t>Apesar de existir ferramentas do tipo naquela época, elas eram pagas, às tornando inviáveis para as centenas e eventualmente milhares de </a:t>
+            </a:r>
+            <a:r>
+              <a:rPr lang="pt-BR"/>
+              <a:t>contribuidores no projeto.</a:t>
+            </a:r>
+            <a:endParaRPr lang="pt-BR" dirty="0"/>
+          </a:p>
+          <a:p>
+            <a:pPr marL="0" indent="0">
+              <a:buNone/>
+            </a:pPr>
             <a:endParaRPr lang="pt-BR"/>
           </a:p>
           <a:p>
@@ -11660,31 +11843,12 @@
             </a:pPr>
             <a:r>
               <a:rPr lang="pt-BR" dirty="0"/>
-              <a:t>Ele funciona como um repositório de "fotos" que são tiradas dos arquivos no momento que são armazenadas no repositório e essas fotos </a:t>
+              <a:t>Por isso o GIT foi desenvolvido em paralelo com o sistema operacional que ele estava </a:t>
             </a:r>
             <a:r>
               <a:rPr lang="pt-BR"/>
-              <a:t>também podem ser comparadas com a última versão do arquivo para se identificar todas as alterações feitas na </a:t>
-            </a:r>
-            <a:r>
-              <a:rPr lang="pt-BR" err="1"/>
-              <a:t>nov</a:t>
-            </a:r>
-            <a:r>
-              <a:rPr lang="pt-BR"/>
-              <a:t>a versão.</a:t>
-            </a:r>
-          </a:p>
-          <a:p>
-            <a:pPr marL="0" indent="0">
-              <a:buNone/>
-            </a:pPr>
-            <a:endParaRPr lang="pt-BR" i="1" dirty="0"/>
-          </a:p>
-          <a:p>
-            <a:pPr marL="0" indent="0">
-              <a:buNone/>
-            </a:pPr>
+              <a:t>desenvolvendo para auxiliar em sua produção.</a:t>
+            </a:r>
             <a:endParaRPr lang="pt-BR" dirty="0"/>
           </a:p>
           <a:p>
@@ -11698,7 +11862,7 @@
     </p:spTree>
     <p:extLst>
       <p:ext uri="{BB962C8B-B14F-4D97-AF65-F5344CB8AC3E}">
-        <p14:creationId xmlns:p14="http://schemas.microsoft.com/office/powerpoint/2010/main" val="2800583250"/>
+        <p14:creationId xmlns:p14="http://schemas.microsoft.com/office/powerpoint/2010/main" val="517092610"/>
       </p:ext>
     </p:extLst>
   </p:cSld>
@@ -11730,7 +11894,7 @@
           <p:cNvPr id="2" name="Título 1">
             <a:extLst>
               <a:ext uri="{FF2B5EF4-FFF2-40B4-BE49-F238E27FC236}">
-                <a16:creationId xmlns:a16="http://schemas.microsoft.com/office/drawing/2014/main" id="{E9EA9D71-CD0F-AF69-E074-25A1BDAD2CF2}"/>
+                <a16:creationId xmlns:a16="http://schemas.microsoft.com/office/drawing/2014/main" id="{C76E859C-0A29-65CA-8A3C-0DA5852D74F3}"/>
               </a:ext>
             </a:extLst>
           </p:cNvPr>
@@ -11747,12 +11911,8 @@
           <a:lstStyle/>
           <a:p>
             <a:r>
-              <a:rPr lang="pt-BR" err="1"/>
-              <a:t>Propó</a:t>
-            </a:r>
-            <a:r>
               <a:rPr lang="pt-BR"/>
-              <a:t>sito de desenvolvimento</a:t>
+              <a:t>Componentes Importantes</a:t>
             </a:r>
           </a:p>
         </p:txBody>
@@ -11762,7 +11922,7 @@
           <p:cNvPr id="3" name="Espaço Reservado para Conteúdo 2">
             <a:extLst>
               <a:ext uri="{FF2B5EF4-FFF2-40B4-BE49-F238E27FC236}">
-                <a16:creationId xmlns:a16="http://schemas.microsoft.com/office/drawing/2014/main" id="{A0C6E499-3BB6-5112-2A22-89ECCD837B2F}"/>
+                <a16:creationId xmlns:a16="http://schemas.microsoft.com/office/drawing/2014/main" id="{19822322-40D6-2E76-0123-2C30DF9BFC06}"/>
               </a:ext>
             </a:extLst>
           </p:cNvPr>
@@ -11773,15 +11933,10 @@
             <p:ph idx="1"/>
           </p:nvPr>
         </p:nvSpPr>
-        <p:spPr>
-          <a:xfrm>
-            <a:off x="2589212" y="2133600"/>
-            <a:ext cx="8915400" cy="4101211"/>
-          </a:xfrm>
-        </p:spPr>
+        <p:spPr/>
         <p:txBody>
           <a:bodyPr vert="horz" lIns="91440" tIns="45720" rIns="91440" bIns="45720" rtlCol="0" anchor="t">
-            <a:normAutofit fontScale="92500" lnSpcReduction="10000"/>
+            <a:normAutofit lnSpcReduction="10000"/>
           </a:bodyPr>
           <a:lstStyle/>
           <a:p>
@@ -11789,8 +11944,45 @@
               <a:buNone/>
             </a:pPr>
             <a:r>
-              <a:rPr lang="pt-BR"/>
-              <a:t>Ele surgiu em 2005, criado por Linus Torvalds, para atender às necessidades do desenvolvimento do Linux.</a:t>
+              <a:rPr lang="pt-BR" i="1" dirty="0" err="1"/>
+              <a:t>Working</a:t>
+            </a:r>
+            <a:r>
+              <a:rPr lang="pt-BR" i="1" dirty="0"/>
+              <a:t> </a:t>
+            </a:r>
+            <a:r>
+              <a:rPr lang="pt-BR" i="1" dirty="0" err="1"/>
+              <a:t>Directory</a:t>
+            </a:r>
+            <a:r>
+              <a:rPr lang="pt-BR" i="1" dirty="0"/>
+              <a:t> </a:t>
+            </a:r>
+            <a:r>
+              <a:rPr lang="pt-BR" dirty="0"/>
+              <a:t>(Diretório de Trabalho):</a:t>
+            </a:r>
+            <a:r>
+              <a:rPr lang="pt-BR" dirty="0">
+                <a:ea typeface="+mn-lt"/>
+                <a:cs typeface="+mn-lt"/>
+              </a:rPr>
+              <a:t> É onde você edita os arquivos normalmente no seu computador. Aqui ficam as versões atuais dos arquivos, podendo estar modificadas, mas ainda não registradas no histórico do </a:t>
+            </a:r>
+            <a:r>
+              <a:rPr lang="pt-BR" dirty="0" err="1">
+                <a:ea typeface="+mn-lt"/>
+                <a:cs typeface="+mn-lt"/>
+              </a:rPr>
+              <a:t>Git</a:t>
+            </a:r>
+            <a:r>
+              <a:rPr lang="pt-BR" dirty="0">
+                <a:ea typeface="+mn-lt"/>
+                <a:cs typeface="+mn-lt"/>
+              </a:rPr>
+              <a:t>.</a:t>
             </a:r>
             <a:endParaRPr lang="pt-BR" dirty="0"/>
           </a:p>
@@ -11805,57 +11997,120 @@
               <a:buNone/>
             </a:pPr>
             <a:r>
+              <a:rPr lang="pt-BR" i="1" dirty="0" err="1"/>
+              <a:t>Staging</a:t>
+            </a:r>
+            <a:r>
+              <a:rPr lang="pt-BR" i="1" dirty="0"/>
+              <a:t> Area </a:t>
+            </a:r>
+            <a:r>
               <a:rPr lang="pt-BR" dirty="0"/>
-              <a:t>Quando o desenvolvedor abriu o código para possibilitar que outros usuários o ajudassem no desenvolvimento. Ele se viu necessitando de uma plataforma para gerenciar o enorme </a:t>
-            </a:r>
-            <a:r>
-              <a:rPr lang="pt-BR" err="1"/>
-              <a:t>flu</a:t>
-            </a:r>
-            <a:r>
-              <a:rPr lang="pt-BR"/>
-              <a:t>xo de versões e atualizações recebidas.</a:t>
-            </a:r>
+              <a:t>(Área de Preparação): </a:t>
+            </a:r>
+            <a:r>
+              <a:rPr lang="pt-BR" dirty="0">
+                <a:ea typeface="+mn-lt"/>
+                <a:cs typeface="+mn-lt"/>
+              </a:rPr>
+              <a:t>É uma área intermediária onde você escolhe quais alterações irão para o próximo </a:t>
+            </a:r>
+            <a:r>
+              <a:rPr lang="pt-BR" i="1" dirty="0" err="1">
+                <a:ea typeface="+mn-lt"/>
+                <a:cs typeface="+mn-lt"/>
+              </a:rPr>
+              <a:t>commit</a:t>
+            </a:r>
+            <a:r>
+              <a:rPr lang="pt-BR" dirty="0">
+                <a:ea typeface="+mn-lt"/>
+                <a:cs typeface="+mn-lt"/>
+              </a:rPr>
+              <a:t>. Uma analogia que pode se fazer é com o camarim, que é um local reservado onde os artistas se preparam antes de entrarem no palco.</a:t>
+            </a:r>
+          </a:p>
+          <a:p>
+            <a:pPr marL="0" indent="0">
+              <a:buNone/>
+            </a:pPr>
             <a:endParaRPr lang="pt-BR" dirty="0"/>
           </a:p>
           <a:p>
             <a:pPr marL="0" indent="0">
               <a:buNone/>
             </a:pPr>
-            <a:endParaRPr lang="pt-BR" dirty="0"/>
+            <a:r>
+              <a:rPr lang="pt-BR" i="1" dirty="0" err="1"/>
+              <a:t>Repository</a:t>
+            </a:r>
+            <a:r>
+              <a:rPr lang="pt-BR" i="1" dirty="0"/>
+              <a:t> </a:t>
+            </a:r>
+            <a:r>
+              <a:rPr lang="pt-BR" dirty="0"/>
+              <a:t>(Repositório):</a:t>
+            </a:r>
+            <a:r>
+              <a:rPr lang="pt-BR" dirty="0">
+                <a:ea typeface="+mn-lt"/>
+                <a:cs typeface="+mn-lt"/>
+              </a:rPr>
+              <a:t>É onde o </a:t>
+            </a:r>
+            <a:r>
+              <a:rPr lang="pt-BR" dirty="0" err="1">
+                <a:ea typeface="+mn-lt"/>
+                <a:cs typeface="+mn-lt"/>
+              </a:rPr>
+              <a:t>Git</a:t>
+            </a:r>
+            <a:r>
+              <a:rPr lang="pt-BR" dirty="0">
+                <a:ea typeface="+mn-lt"/>
+                <a:cs typeface="+mn-lt"/>
+              </a:rPr>
+              <a:t> armazena de fato o histórico dos </a:t>
+            </a:r>
+            <a:r>
+              <a:rPr lang="pt-BR" i="1" dirty="0" err="1">
+                <a:ea typeface="+mn-lt"/>
+                <a:cs typeface="+mn-lt"/>
+              </a:rPr>
+              <a:t>commits</a:t>
+            </a:r>
+            <a:r>
+              <a:rPr lang="pt-BR" dirty="0">
+                <a:ea typeface="+mn-lt"/>
+                <a:cs typeface="+mn-lt"/>
+              </a:rPr>
+              <a:t>. Fica dentro da pasta oculta </a:t>
+            </a:r>
+            <a:r>
+              <a:rPr lang="pt-BR" dirty="0">
+                <a:latin typeface="Consolas"/>
+              </a:rPr>
+              <a:t>.</a:t>
+            </a:r>
+            <a:r>
+              <a:rPr lang="pt-BR" dirty="0" err="1">
+                <a:latin typeface="Consolas"/>
+              </a:rPr>
+              <a:t>git</a:t>
+            </a:r>
+            <a:r>
+              <a:rPr lang="pt-BR" dirty="0">
+                <a:ea typeface="+mn-lt"/>
+                <a:cs typeface="+mn-lt"/>
+              </a:rPr>
+              <a:t> e contém todos os snapshots, versões e informações do projeto.</a:t>
+            </a:r>
           </a:p>
           <a:p>
             <a:pPr marL="0" indent="0">
               <a:buNone/>
             </a:pPr>
-            <a:r>
-              <a:rPr lang="pt-BR" dirty="0"/>
-              <a:t>Apesar de existir ferramentas do tipo naquela época, elas eram pagas, às tornando inviáveis para as centenas e eventualmente milhares de </a:t>
-            </a:r>
-            <a:r>
-              <a:rPr lang="pt-BR"/>
-              <a:t>contribuidores no projeto.</a:t>
-            </a:r>
-            <a:endParaRPr lang="pt-BR" dirty="0"/>
-          </a:p>
-          <a:p>
-            <a:pPr marL="0" indent="0">
-              <a:buNone/>
-            </a:pPr>
-            <a:endParaRPr lang="pt-BR"/>
-          </a:p>
-          <a:p>
-            <a:pPr marL="0" indent="0">
-              <a:buNone/>
-            </a:pPr>
-            <a:r>
-              <a:rPr lang="pt-BR" dirty="0"/>
-              <a:t>Por isso o GIT foi desenvolvido em paralelo com o sistema operacional que ele estava </a:t>
-            </a:r>
-            <a:r>
-              <a:rPr lang="pt-BR"/>
-              <a:t>desenvolvendo para auxiliar em sua produção.</a:t>
-            </a:r>
             <a:endParaRPr lang="pt-BR" dirty="0"/>
           </a:p>
           <a:p>
@@ -11869,7 +12124,7 @@
     </p:spTree>
     <p:extLst>
       <p:ext uri="{BB962C8B-B14F-4D97-AF65-F5344CB8AC3E}">
-        <p14:creationId xmlns:p14="http://schemas.microsoft.com/office/powerpoint/2010/main" val="517092610"/>
+        <p14:creationId xmlns:p14="http://schemas.microsoft.com/office/powerpoint/2010/main" val="2634420429"/>
       </p:ext>
     </p:extLst>
   </p:cSld>
@@ -11901,7 +12156,7 @@
           <p:cNvPr id="2" name="Título 1">
             <a:extLst>
               <a:ext uri="{FF2B5EF4-FFF2-40B4-BE49-F238E27FC236}">
-                <a16:creationId xmlns:a16="http://schemas.microsoft.com/office/drawing/2014/main" id="{C76E859C-0A29-65CA-8A3C-0DA5852D74F3}"/>
+                <a16:creationId xmlns:a16="http://schemas.microsoft.com/office/drawing/2014/main" id="{02DA1E4E-B849-23B1-4D6B-CF389155A83C}"/>
               </a:ext>
             </a:extLst>
           </p:cNvPr>
@@ -11914,13 +12169,20 @@
         </p:nvSpPr>
         <p:spPr/>
         <p:txBody>
-          <a:bodyPr/>
+          <a:bodyPr>
+            <a:normAutofit/>
+          </a:bodyPr>
           <a:lstStyle/>
           <a:p>
             <a:r>
+              <a:rPr lang="pt-BR" dirty="0"/>
+              <a:t>Vantagens</a:t>
+            </a:r>
+            <a:r>
               <a:rPr lang="pt-BR"/>
-              <a:t>Componentes Importantes</a:t>
-            </a:r>
+              <a:t> e Desvantagens</a:t>
+            </a:r>
+            <a:endParaRPr lang="pt-BR" dirty="0"/>
           </a:p>
         </p:txBody>
       </p:sp>
@@ -11929,7 +12191,7 @@
           <p:cNvPr id="3" name="Espaço Reservado para Conteúdo 2">
             <a:extLst>
               <a:ext uri="{FF2B5EF4-FFF2-40B4-BE49-F238E27FC236}">
-                <a16:creationId xmlns:a16="http://schemas.microsoft.com/office/drawing/2014/main" id="{19822322-40D6-2E76-0123-2C30DF9BFC06}"/>
+                <a16:creationId xmlns:a16="http://schemas.microsoft.com/office/drawing/2014/main" id="{8D545DB1-369D-E0FB-3295-31A6FB0698A6}"/>
               </a:ext>
             </a:extLst>
           </p:cNvPr>
@@ -11943,195 +12205,167 @@
         <p:spPr/>
         <p:txBody>
           <a:bodyPr vert="horz" lIns="91440" tIns="45720" rIns="91440" bIns="45720" rtlCol="0" anchor="t">
-            <a:normAutofit lnSpcReduction="10000"/>
+            <a:normAutofit fontScale="85000" lnSpcReduction="20000"/>
           </a:bodyPr>
           <a:lstStyle/>
           <a:p>
             <a:pPr marL="0" indent="0">
               <a:buNone/>
             </a:pPr>
-            <a:r>
-              <a:rPr lang="pt-BR" i="1" dirty="0" err="1"/>
-              <a:t>Working</a:t>
-            </a:r>
-            <a:r>
-              <a:rPr lang="pt-BR" i="1" dirty="0"/>
-              <a:t> </a:t>
-            </a:r>
-            <a:r>
-              <a:rPr lang="pt-BR" i="1" dirty="0" err="1"/>
-              <a:t>Directory</a:t>
-            </a:r>
-            <a:r>
-              <a:rPr lang="pt-BR" i="1" dirty="0"/>
-              <a:t> </a:t>
-            </a:r>
-            <a:r>
-              <a:rPr lang="pt-BR" dirty="0"/>
-              <a:t>(Diretório de Trabalho):</a:t>
-            </a:r>
             <a:r>
               <a:rPr lang="pt-BR" dirty="0">
                 <a:ea typeface="+mn-lt"/>
                 <a:cs typeface="+mn-lt"/>
               </a:rPr>
-              <a:t> É onde você edita os arquivos normalmente no seu computador. Aqui ficam as versões atuais dos arquivos, podendo estar modificadas, mas ainda não registradas no histórico do </a:t>
-            </a:r>
-            <a:r>
-              <a:rPr lang="pt-BR" dirty="0" err="1">
+              <a:t>As princip</a:t>
+            </a:r>
+            <a:r>
+              <a:rPr lang="pt-BR">
                 <a:ea typeface="+mn-lt"/>
                 <a:cs typeface="+mn-lt"/>
               </a:rPr>
-              <a:t>Git</a:t>
-            </a:r>
+              <a:t>ais vantagens são:</a:t>
+            </a:r>
+            <a:endParaRPr lang="pt-BR" dirty="0">
+              <a:ea typeface="+mn-lt"/>
+              <a:cs typeface="+mn-lt"/>
+            </a:endParaRPr>
+          </a:p>
+          <a:p>
+            <a:pPr marL="0" indent="0">
+              <a:buNone/>
+            </a:pPr>
+            <a:endParaRPr lang="pt-BR" dirty="0">
+              <a:ea typeface="+mn-lt"/>
+              <a:cs typeface="+mn-lt"/>
+            </a:endParaRPr>
+          </a:p>
+          <a:p>
+            <a:pPr>
+              <a:buAutoNum type="romanUcPeriod"/>
+            </a:pPr>
             <a:r>
               <a:rPr lang="pt-BR" dirty="0">
                 <a:ea typeface="+mn-lt"/>
                 <a:cs typeface="+mn-lt"/>
               </a:rPr>
-              <a:t>.</a:t>
+              <a:t>Controle </a:t>
+            </a:r>
+            <a:r>
+              <a:rPr lang="pt-BR">
+                <a:ea typeface="+mn-lt"/>
+                <a:cs typeface="+mn-lt"/>
+              </a:rPr>
+              <a:t>de mudanças no código preciso.</a:t>
             </a:r>
             <a:endParaRPr lang="pt-BR" dirty="0"/>
           </a:p>
           <a:p>
-            <a:pPr marL="0" indent="0">
-              <a:buNone/>
-            </a:pPr>
-            <a:endParaRPr lang="pt-BR" dirty="0"/>
-          </a:p>
-          <a:p>
-            <a:pPr marL="0" indent="0">
-              <a:buNone/>
-            </a:pPr>
-            <a:r>
-              <a:rPr lang="pt-BR" i="1" dirty="0" err="1"/>
-              <a:t>Staging</a:t>
-            </a:r>
-            <a:r>
-              <a:rPr lang="pt-BR" i="1" dirty="0"/>
-              <a:t> Area </a:t>
-            </a:r>
-            <a:r>
-              <a:rPr lang="pt-BR" dirty="0"/>
-              <a:t>(Área de Preparação): </a:t>
-            </a:r>
+            <a:pPr>
+              <a:buAutoNum type="romanUcPeriod"/>
+            </a:pPr>
+            <a:endParaRPr lang="pt-BR" dirty="0">
+              <a:ea typeface="+mn-lt"/>
+              <a:cs typeface="+mn-lt"/>
+            </a:endParaRPr>
+          </a:p>
+          <a:p>
+            <a:pPr>
+              <a:buAutoNum type="romanUcPeriod"/>
+            </a:pPr>
             <a:r>
               <a:rPr lang="pt-BR" dirty="0">
                 <a:ea typeface="+mn-lt"/>
                 <a:cs typeface="+mn-lt"/>
               </a:rPr>
-              <a:t>É uma área intermediária onde você escolhe quais alterações irão para o próximo </a:t>
-            </a:r>
-            <a:r>
-              <a:rPr lang="pt-BR" i="1" dirty="0" err="1">
+              <a:t>Permissão</a:t>
+            </a:r>
+            <a:r>
+              <a:rPr lang="pt-BR">
                 <a:ea typeface="+mn-lt"/>
                 <a:cs typeface="+mn-lt"/>
               </a:rPr>
-              <a:t>commit</a:t>
-            </a:r>
-            <a:r>
-              <a:rPr lang="pt-BR" dirty="0">
+              <a:t> do trabalho colaborativo simultâneo.</a:t>
+            </a:r>
+            <a:endParaRPr lang="pt-BR" dirty="0"/>
+          </a:p>
+          <a:p>
+            <a:pPr>
+              <a:buAutoNum type="romanUcPeriod"/>
+            </a:pPr>
+            <a:endParaRPr lang="pt-BR" dirty="0">
+              <a:ea typeface="+mn-lt"/>
+              <a:cs typeface="+mn-lt"/>
+            </a:endParaRPr>
+          </a:p>
+          <a:p>
+            <a:pPr>
+              <a:buAutoNum type="romanUcPeriod"/>
+            </a:pPr>
+            <a:r>
+              <a:rPr lang="pt-BR">
                 <a:ea typeface="+mn-lt"/>
                 <a:cs typeface="+mn-lt"/>
               </a:rPr>
-              <a:t>. Uma analogia que pode se fazer é com o camarim, que é um local reservado onde os artistas se preparam antes de entrarem no palco.</a:t>
-            </a:r>
-          </a:p>
-          <a:p>
-            <a:pPr marL="0" indent="0">
-              <a:buNone/>
-            </a:pPr>
-            <a:endParaRPr lang="pt-BR" dirty="0"/>
-          </a:p>
-          <a:p>
-            <a:pPr marL="0" indent="0">
-              <a:buNone/>
-            </a:pPr>
-            <a:r>
-              <a:rPr lang="pt-BR" i="1" dirty="0" err="1"/>
-              <a:t>Repository</a:t>
-            </a:r>
-            <a:r>
-              <a:rPr lang="pt-BR" i="1" dirty="0"/>
-              <a:t> </a:t>
-            </a:r>
-            <a:r>
-              <a:rPr lang="pt-BR" dirty="0"/>
-              <a:t>(Repositório):</a:t>
-            </a:r>
-            <a:r>
-              <a:rPr lang="pt-BR" dirty="0">
+              <a:t>Garantia da integridade e rastreabilidade das alterações.</a:t>
+            </a:r>
+            <a:endParaRPr lang="pt-BR"/>
+          </a:p>
+          <a:p>
+            <a:pPr>
+              <a:buAutoNum type="romanUcPeriod"/>
+            </a:pPr>
+            <a:endParaRPr lang="pt-BR" dirty="0">
+              <a:ea typeface="+mn-lt"/>
+              <a:cs typeface="+mn-lt"/>
+            </a:endParaRPr>
+          </a:p>
+          <a:p>
+            <a:pPr>
+              <a:buAutoNum type="romanUcPeriod"/>
+            </a:pPr>
+            <a:r>
+              <a:rPr lang="pt-BR">
                 <a:ea typeface="+mn-lt"/>
                 <a:cs typeface="+mn-lt"/>
               </a:rPr>
-              <a:t>É onde o </a:t>
-            </a:r>
-            <a:r>
-              <a:rPr lang="pt-BR" dirty="0" err="1">
-                <a:ea typeface="+mn-lt"/>
-                <a:cs typeface="+mn-lt"/>
-              </a:rPr>
-              <a:t>Git</a:t>
-            </a:r>
-            <a:r>
-              <a:rPr lang="pt-BR" dirty="0">
-                <a:ea typeface="+mn-lt"/>
-                <a:cs typeface="+mn-lt"/>
-              </a:rPr>
-              <a:t> armazena de fato o histórico dos </a:t>
-            </a:r>
-            <a:r>
-              <a:rPr lang="pt-BR" i="1" dirty="0" err="1">
-                <a:ea typeface="+mn-lt"/>
-                <a:cs typeface="+mn-lt"/>
-              </a:rPr>
-              <a:t>commits</a:t>
-            </a:r>
-            <a:r>
-              <a:rPr lang="pt-BR" dirty="0">
-                <a:ea typeface="+mn-lt"/>
-                <a:cs typeface="+mn-lt"/>
-              </a:rPr>
-              <a:t>. Fica dentro da pasta oculta </a:t>
-            </a:r>
-            <a:r>
-              <a:rPr lang="pt-BR" dirty="0">
-                <a:latin typeface="Consolas"/>
-              </a:rPr>
-              <a:t>.</a:t>
-            </a:r>
-            <a:r>
-              <a:rPr lang="pt-BR" dirty="0" err="1">
-                <a:latin typeface="Consolas"/>
-              </a:rPr>
-              <a:t>git</a:t>
-            </a:r>
-            <a:r>
-              <a:rPr lang="pt-BR" dirty="0">
-                <a:ea typeface="+mn-lt"/>
-                <a:cs typeface="+mn-lt"/>
-              </a:rPr>
-              <a:t> e contém todos os snapshots, versões e informações do projeto.</a:t>
-            </a:r>
-          </a:p>
-          <a:p>
-            <a:pPr marL="0" indent="0">
-              <a:buNone/>
+              <a:t>Oferta de alto desempenho, mesmo em projetos grandes.</a:t>
+            </a:r>
+            <a:endParaRPr lang="pt-BR"/>
+          </a:p>
+          <a:p>
+            <a:pPr>
+              <a:buAutoNum type="romanUcPeriod"/>
             </a:pPr>
             <a:endParaRPr lang="pt-BR" dirty="0"/>
           </a:p>
           <a:p>
-            <a:pPr marL="0" indent="0">
-              <a:buNone/>
-            </a:pPr>
-            <a:endParaRPr lang="pt-BR" dirty="0"/>
+            <a:pPr>
+              <a:buAutoNum type="romanUcPeriod"/>
+            </a:pPr>
+            <a:r>
+              <a:rPr lang="pt-BR" dirty="0"/>
+              <a:t>Ser </a:t>
+            </a:r>
+            <a:r>
+              <a:rPr lang="pt-BR" i="1" dirty="0"/>
+              <a:t>Open </a:t>
+            </a:r>
+            <a:r>
+              <a:rPr lang="pt-BR" i="1" dirty="0" err="1"/>
+              <a:t>Source</a:t>
+            </a:r>
+            <a:r>
+              <a:rPr lang="pt-BR" i="1" dirty="0"/>
+              <a:t> (Código Aberto), permitindo a fácil e gratuita aquisição dessa ferramenta.</a:t>
+            </a:r>
           </a:p>
         </p:txBody>
       </p:sp>
     </p:spTree>
     <p:extLst>
       <p:ext uri="{BB962C8B-B14F-4D97-AF65-F5344CB8AC3E}">
-        <p14:creationId xmlns:p14="http://schemas.microsoft.com/office/powerpoint/2010/main" val="2634420429"/>
+        <p14:creationId xmlns:p14="http://schemas.microsoft.com/office/powerpoint/2010/main" val="2071012585"/>
       </p:ext>
     </p:extLst>
   </p:cSld>
@@ -12163,7 +12397,7 @@
           <p:cNvPr id="2" name="Título 1">
             <a:extLst>
               <a:ext uri="{FF2B5EF4-FFF2-40B4-BE49-F238E27FC236}">
-                <a16:creationId xmlns:a16="http://schemas.microsoft.com/office/drawing/2014/main" id="{02DA1E4E-B849-23B1-4D6B-CF389155A83C}"/>
+                <a16:creationId xmlns:a16="http://schemas.microsoft.com/office/drawing/2014/main" id="{8A9517D2-ECCC-7F60-46DA-806CFAB69437}"/>
               </a:ext>
             </a:extLst>
           </p:cNvPr>
@@ -12176,20 +12410,13 @@
         </p:nvSpPr>
         <p:spPr/>
         <p:txBody>
-          <a:bodyPr>
-            <a:normAutofit/>
-          </a:bodyPr>
+          <a:bodyPr/>
           <a:lstStyle/>
           <a:p>
             <a:r>
-              <a:rPr lang="pt-BR" dirty="0"/>
-              <a:t>Vantagens</a:t>
-            </a:r>
-            <a:r>
               <a:rPr lang="pt-BR"/>
-              <a:t> e Desvantagens</a:t>
-            </a:r>
-            <a:endParaRPr lang="pt-BR" dirty="0"/>
+              <a:t>Vantagens e Desvantagens</a:t>
+            </a:r>
           </a:p>
         </p:txBody>
       </p:sp>
@@ -12198,7 +12425,7 @@
           <p:cNvPr id="3" name="Espaço Reservado para Conteúdo 2">
             <a:extLst>
               <a:ext uri="{FF2B5EF4-FFF2-40B4-BE49-F238E27FC236}">
-                <a16:creationId xmlns:a16="http://schemas.microsoft.com/office/drawing/2014/main" id="{8D545DB1-369D-E0FB-3295-31A6FB0698A6}"/>
+                <a16:creationId xmlns:a16="http://schemas.microsoft.com/office/drawing/2014/main" id="{C9972ADF-8959-A268-2C01-F3F01BDB9B2A}"/>
               </a:ext>
             </a:extLst>
           </p:cNvPr>
@@ -12212,7 +12439,7 @@
         <p:spPr/>
         <p:txBody>
           <a:bodyPr vert="horz" lIns="91440" tIns="45720" rIns="91440" bIns="45720" rtlCol="0" anchor="t">
-            <a:normAutofit fontScale="85000" lnSpcReduction="20000"/>
+            <a:normAutofit/>
           </a:bodyPr>
           <a:lstStyle/>
           <a:p>
@@ -12220,159 +12447,124 @@
               <a:buNone/>
             </a:pPr>
             <a:r>
-              <a:rPr lang="pt-BR" dirty="0">
-                <a:ea typeface="+mn-lt"/>
-                <a:cs typeface="+mn-lt"/>
-              </a:rPr>
-              <a:t>As princip</a:t>
-            </a:r>
-            <a:r>
-              <a:rPr lang="pt-BR">
-                <a:ea typeface="+mn-lt"/>
-                <a:cs typeface="+mn-lt"/>
-              </a:rPr>
-              <a:t>ais vantagens são:</a:t>
-            </a:r>
-            <a:endParaRPr lang="pt-BR" dirty="0">
-              <a:ea typeface="+mn-lt"/>
-              <a:cs typeface="+mn-lt"/>
-            </a:endParaRPr>
+              <a:rPr lang="pt-BR"/>
+              <a:t>As desvantagens são:</a:t>
+            </a:r>
           </a:p>
           <a:p>
             <a:pPr marL="0" indent="0">
               <a:buNone/>
             </a:pPr>
-            <a:endParaRPr lang="pt-BR" dirty="0">
-              <a:ea typeface="+mn-lt"/>
-              <a:cs typeface="+mn-lt"/>
-            </a:endParaRPr>
+            <a:endParaRPr lang="pt-BR" dirty="0"/>
           </a:p>
           <a:p>
             <a:pPr>
               <a:buAutoNum type="romanUcPeriod"/>
             </a:pPr>
             <a:r>
-              <a:rPr lang="pt-BR" dirty="0">
-                <a:ea typeface="+mn-lt"/>
-                <a:cs typeface="+mn-lt"/>
-              </a:rPr>
-              <a:t>Controle </a:t>
-            </a:r>
-            <a:r>
-              <a:rPr lang="pt-BR">
-                <a:ea typeface="+mn-lt"/>
-                <a:cs typeface="+mn-lt"/>
-              </a:rPr>
-              <a:t>de mudanças no código preciso.</a:t>
-            </a:r>
-            <a:endParaRPr lang="pt-BR" dirty="0"/>
+              <a:rPr lang="pt-BR" dirty="0"/>
+              <a:t>Difícil aprendizado por usar de vários conceitos que podem ser confusos para um iniciante como: </a:t>
+            </a:r>
+            <a:r>
+              <a:rPr lang="pt-BR" i="1" dirty="0"/>
+              <a:t>Branch, Merge, </a:t>
+            </a:r>
+            <a:r>
+              <a:rPr lang="pt-BR" i="1" dirty="0" err="1"/>
+              <a:t>Commit</a:t>
+            </a:r>
+            <a:r>
+              <a:rPr lang="pt-BR" i="1" dirty="0"/>
+              <a:t>, reset...</a:t>
+            </a:r>
           </a:p>
           <a:p>
             <a:pPr>
               <a:buAutoNum type="romanUcPeriod"/>
             </a:pPr>
-            <a:endParaRPr lang="pt-BR" dirty="0">
-              <a:ea typeface="+mn-lt"/>
-              <a:cs typeface="+mn-lt"/>
-            </a:endParaRPr>
+            <a:endParaRPr lang="pt-BR" i="1" dirty="0"/>
           </a:p>
           <a:p>
             <a:pPr>
               <a:buAutoNum type="romanUcPeriod"/>
             </a:pPr>
             <a:r>
-              <a:rPr lang="pt-BR" dirty="0">
-                <a:ea typeface="+mn-lt"/>
-                <a:cs typeface="+mn-lt"/>
-              </a:rPr>
-              <a:t>Permissão</a:t>
-            </a:r>
-            <a:r>
-              <a:rPr lang="pt-BR">
-                <a:ea typeface="+mn-lt"/>
-                <a:cs typeface="+mn-lt"/>
-              </a:rPr>
-              <a:t> do trabalho colaborativo simultâneo.</a:t>
-            </a:r>
-            <a:endParaRPr lang="pt-BR" dirty="0"/>
+              <a:rPr lang="pt-BR" i="1" dirty="0"/>
+              <a:t>Exige um grande conhecimento técnico devido </a:t>
+            </a:r>
+            <a:r>
+              <a:rPr lang="pt-BR" i="1"/>
+              <a:t>ao uso de</a:t>
+            </a:r>
+            <a:r>
+              <a:rPr lang="pt-BR" i="1" dirty="0"/>
+              <a:t> linhas de comando. </a:t>
+            </a:r>
           </a:p>
           <a:p>
             <a:pPr>
               <a:buAutoNum type="romanUcPeriod"/>
             </a:pPr>
-            <a:endParaRPr lang="pt-BR" dirty="0">
-              <a:ea typeface="+mn-lt"/>
-              <a:cs typeface="+mn-lt"/>
-            </a:endParaRPr>
+            <a:endParaRPr lang="pt-BR" i="1" dirty="0"/>
           </a:p>
           <a:p>
             <a:pPr>
               <a:buAutoNum type="romanUcPeriod"/>
             </a:pPr>
             <a:r>
-              <a:rPr lang="pt-BR">
-                <a:ea typeface="+mn-lt"/>
-                <a:cs typeface="+mn-lt"/>
-              </a:rPr>
-              <a:t>Garantia da integridade e rastreabilidade das alterações.</a:t>
-            </a:r>
-            <a:endParaRPr lang="pt-BR"/>
+              <a:rPr lang="pt-BR" i="1"/>
+              <a:t>Não lida bem com arquivos muito grandes, como vídeos, por ter sido projetado para trabalhar com código-fonte.</a:t>
+            </a:r>
+            <a:endParaRPr lang="pt-BR" i="1" dirty="0"/>
           </a:p>
           <a:p>
             <a:pPr>
               <a:buAutoNum type="romanUcPeriod"/>
             </a:pPr>
-            <a:endParaRPr lang="pt-BR" dirty="0">
-              <a:ea typeface="+mn-lt"/>
-              <a:cs typeface="+mn-lt"/>
-            </a:endParaRPr>
+            <a:endParaRPr lang="pt-BR" i="1" dirty="0"/>
           </a:p>
           <a:p>
             <a:pPr>
               <a:buAutoNum type="romanUcPeriod"/>
             </a:pPr>
-            <a:r>
-              <a:rPr lang="pt-BR">
-                <a:ea typeface="+mn-lt"/>
-                <a:cs typeface="+mn-lt"/>
-              </a:rPr>
-              <a:t>Oferta de alto desempenho, mesmo em projetos grandes.</a:t>
-            </a:r>
-            <a:endParaRPr lang="pt-BR"/>
-          </a:p>
-          <a:p>
-            <a:pPr>
-              <a:buAutoNum type="romanUcPeriod"/>
+            <a:endParaRPr lang="pt-BR" i="1" dirty="0"/>
+          </a:p>
+          <a:p>
+            <a:pPr marL="0" indent="0">
+              <a:buNone/>
+            </a:pPr>
+            <a:endParaRPr lang="pt-BR" i="1" dirty="0"/>
+          </a:p>
+          <a:p>
+            <a:pPr marL="0" indent="0">
+              <a:buNone/>
+            </a:pPr>
+            <a:endParaRPr lang="pt-BR" i="1" dirty="0"/>
+          </a:p>
+          <a:p>
+            <a:pPr marL="0" indent="0">
+              <a:buNone/>
+            </a:pPr>
+            <a:endParaRPr lang="pt-BR" i="1" dirty="0"/>
+          </a:p>
+          <a:p>
+            <a:pPr marL="0" indent="0">
+              <a:buNone/>
             </a:pPr>
             <a:endParaRPr lang="pt-BR" dirty="0"/>
           </a:p>
           <a:p>
-            <a:pPr>
-              <a:buAutoNum type="romanUcPeriod"/>
-            </a:pPr>
-            <a:r>
-              <a:rPr lang="pt-BR" dirty="0"/>
-              <a:t>Ser </a:t>
-            </a:r>
-            <a:r>
-              <a:rPr lang="pt-BR" i="1" dirty="0"/>
-              <a:t>Open </a:t>
-            </a:r>
-            <a:r>
-              <a:rPr lang="pt-BR" i="1" dirty="0" err="1"/>
-              <a:t>Source</a:t>
-            </a:r>
-            <a:r>
-              <a:rPr lang="pt-BR" i="1" dirty="0"/>
-              <a:t> (Código Aberto), permitindo a fácil e gratuita aquisição dessa ferramenta.</a:t>
-            </a:r>
+            <a:pPr marL="0" indent="0">
+              <a:buNone/>
+            </a:pPr>
+            <a:endParaRPr lang="pt-BR" dirty="0"/>
           </a:p>
         </p:txBody>
       </p:sp>
     </p:spTree>
     <p:extLst>
       <p:ext uri="{BB962C8B-B14F-4D97-AF65-F5344CB8AC3E}">
-        <p14:creationId xmlns:p14="http://schemas.microsoft.com/office/powerpoint/2010/main" val="2071012585"/>
+        <p14:creationId xmlns:p14="http://schemas.microsoft.com/office/powerpoint/2010/main" val="2801146745"/>
       </p:ext>
     </p:extLst>
   </p:cSld>
@@ -12404,7 +12596,7 @@
           <p:cNvPr id="2" name="Título 1">
             <a:extLst>
               <a:ext uri="{FF2B5EF4-FFF2-40B4-BE49-F238E27FC236}">
-                <a16:creationId xmlns:a16="http://schemas.microsoft.com/office/drawing/2014/main" id="{8A9517D2-ECCC-7F60-46DA-806CFAB69437}"/>
+                <a16:creationId xmlns:a16="http://schemas.microsoft.com/office/drawing/2014/main" id="{D9FDA2E7-7FC8-81F9-CC6E-797FDA5C7CA8}"/>
               </a:ext>
             </a:extLst>
           </p:cNvPr>
@@ -12422,7 +12614,11 @@
           <a:p>
             <a:r>
               <a:rPr lang="pt-BR"/>
-              <a:t>Vantagens e Desvantagens</a:t>
+              <a:t>Alguns comandos</a:t>
+            </a:r>
+            <a:r>
+              <a:rPr lang="pt-BR" dirty="0"/>
+              <a:t> </a:t>
             </a:r>
           </a:p>
         </p:txBody>
@@ -12432,7 +12628,7 @@
           <p:cNvPr id="3" name="Espaço Reservado para Conteúdo 2">
             <a:extLst>
               <a:ext uri="{FF2B5EF4-FFF2-40B4-BE49-F238E27FC236}">
-                <a16:creationId xmlns:a16="http://schemas.microsoft.com/office/drawing/2014/main" id="{C9972ADF-8959-A268-2C01-F3F01BDB9B2A}"/>
+                <a16:creationId xmlns:a16="http://schemas.microsoft.com/office/drawing/2014/main" id="{07B71593-3AED-1F1C-5EE5-408A18F05ED8}"/>
               </a:ext>
             </a:extLst>
           </p:cNvPr>
@@ -12443,122 +12639,493 @@
             <p:ph idx="1"/>
           </p:nvPr>
         </p:nvSpPr>
-        <p:spPr/>
+        <p:spPr>
+          <a:xfrm>
+            <a:off x="2589212" y="2133600"/>
+            <a:ext cx="8915400" cy="3449539"/>
+          </a:xfrm>
+          <a:solidFill>
+            <a:schemeClr val="tx1">
+              <a:lumMod val="75000"/>
+            </a:schemeClr>
+          </a:solidFill>
+          <a:ln>
+            <a:solidFill>
+              <a:schemeClr val="bg1"/>
+            </a:solidFill>
+          </a:ln>
+        </p:spPr>
         <p:txBody>
           <a:bodyPr vert="horz" lIns="91440" tIns="45720" rIns="91440" bIns="45720" rtlCol="0" anchor="t">
             <a:normAutofit/>
           </a:bodyPr>
           <a:lstStyle/>
           <a:p>
-            <a:pPr marL="0" indent="0">
-              <a:buNone/>
-            </a:pPr>
-            <a:r>
-              <a:rPr lang="pt-BR"/>
-              <a:t>As desvantagens são:</a:t>
-            </a:r>
-          </a:p>
-          <a:p>
-            <a:pPr marL="0" indent="0">
-              <a:buNone/>
-            </a:pPr>
-            <a:endParaRPr lang="pt-BR" dirty="0"/>
-          </a:p>
-          <a:p>
             <a:pPr>
-              <a:buAutoNum type="romanUcPeriod"/>
-            </a:pPr>
-            <a:r>
-              <a:rPr lang="pt-BR" dirty="0"/>
-              <a:t>Difícil aprendizado por usar de vários conceitos que podem ser confusos para um iniciante como: </a:t>
-            </a:r>
-            <a:r>
-              <a:rPr lang="pt-BR" i="1" dirty="0"/>
-              <a:t>Branch, Merge, </a:t>
-            </a:r>
-            <a:r>
-              <a:rPr lang="pt-BR" i="1" dirty="0" err="1"/>
-              <a:t>Commit</a:t>
-            </a:r>
-            <a:r>
-              <a:rPr lang="pt-BR" i="1" dirty="0"/>
-              <a:t>, reset...</a:t>
+              <a:buFont typeface="Wingdings" charset="2"/>
+              <a:buChar char="v"/>
+            </a:pPr>
+            <a:r>
+              <a:rPr lang="pt-BR" sz="1600" b="1" dirty="0" err="1">
+                <a:solidFill>
+                  <a:srgbClr val="FFC000"/>
+                </a:solidFill>
+                <a:latin typeface="Consolas"/>
+              </a:rPr>
+              <a:t>git</a:t>
+            </a:r>
+            <a:r>
+              <a:rPr lang="pt-BR" sz="1600" b="1" dirty="0">
+                <a:solidFill>
+                  <a:srgbClr val="FFC000"/>
+                </a:solidFill>
+                <a:latin typeface="Consolas"/>
+              </a:rPr>
+              <a:t> </a:t>
+            </a:r>
+            <a:r>
+              <a:rPr lang="pt-BR" sz="1600" b="1" dirty="0" err="1">
+                <a:solidFill>
+                  <a:srgbClr val="FFC000"/>
+                </a:solidFill>
+                <a:latin typeface="Consolas"/>
+              </a:rPr>
+              <a:t>init</a:t>
+            </a:r>
+            <a:r>
+              <a:rPr lang="pt-BR" b="1" i="1" dirty="0">
+                <a:solidFill>
+                  <a:schemeClr val="bg1"/>
+                </a:solidFill>
+              </a:rPr>
+              <a:t>: </a:t>
+            </a:r>
+            <a:r>
+              <a:rPr lang="pt-BR" b="1" dirty="0">
+                <a:solidFill>
+                  <a:schemeClr val="bg1"/>
+                </a:solidFill>
+              </a:rPr>
+              <a:t>[nome do projeto] Cria um novo repositório local.</a:t>
             </a:r>
           </a:p>
           <a:p>
             <a:pPr>
-              <a:buAutoNum type="romanUcPeriod"/>
-            </a:pPr>
-            <a:endParaRPr lang="pt-BR" i="1" dirty="0"/>
+              <a:buFont typeface="Wingdings" charset="2"/>
+              <a:buChar char="v"/>
+            </a:pPr>
+            <a:r>
+              <a:rPr lang="pt-BR" sz="1600" b="1" dirty="0" err="1">
+                <a:solidFill>
+                  <a:srgbClr val="FFC000"/>
+                </a:solidFill>
+                <a:latin typeface="Consolas"/>
+              </a:rPr>
+              <a:t>git</a:t>
+            </a:r>
+            <a:r>
+              <a:rPr lang="pt-BR" sz="1600" b="1" dirty="0">
+                <a:solidFill>
+                  <a:srgbClr val="FFC000"/>
+                </a:solidFill>
+                <a:latin typeface="Consolas"/>
+              </a:rPr>
+              <a:t> clone [</a:t>
+            </a:r>
+            <a:r>
+              <a:rPr lang="pt-BR" sz="1600" b="1" dirty="0" err="1">
+                <a:solidFill>
+                  <a:srgbClr val="FFC000"/>
+                </a:solidFill>
+                <a:latin typeface="Consolas"/>
+              </a:rPr>
+              <a:t>url</a:t>
+            </a:r>
+            <a:r>
+              <a:rPr lang="pt-BR" sz="1600" b="1" dirty="0">
+                <a:solidFill>
+                  <a:srgbClr val="FFC000"/>
+                </a:solidFill>
+                <a:latin typeface="Consolas"/>
+              </a:rPr>
+              <a:t>]</a:t>
+            </a:r>
+            <a:r>
+              <a:rPr lang="pt-BR" b="1" i="1" dirty="0">
+                <a:solidFill>
+                  <a:schemeClr val="bg1"/>
+                </a:solidFill>
+              </a:rPr>
+              <a:t>: </a:t>
+            </a:r>
+            <a:r>
+              <a:rPr lang="pt-BR" b="1" dirty="0">
+                <a:solidFill>
+                  <a:schemeClr val="bg1"/>
+                </a:solidFill>
+              </a:rPr>
+              <a:t>clona de um repositório remoto para um repositório local.</a:t>
+            </a:r>
           </a:p>
           <a:p>
             <a:pPr>
-              <a:buAutoNum type="romanUcPeriod"/>
-            </a:pPr>
-            <a:r>
-              <a:rPr lang="pt-BR" i="1" dirty="0"/>
-              <a:t>Exige um grande conhecimento técnico devido </a:t>
-            </a:r>
-            <a:r>
-              <a:rPr lang="pt-BR" i="1"/>
-              <a:t>ao uso de</a:t>
-            </a:r>
-            <a:r>
-              <a:rPr lang="pt-BR" i="1" dirty="0"/>
-              <a:t> linhas de comando. </a:t>
+              <a:buFont typeface="Wingdings" charset="2"/>
+              <a:buChar char="v"/>
+            </a:pPr>
+            <a:r>
+              <a:rPr lang="pt-BR" sz="1600" b="1" dirty="0" err="1">
+                <a:solidFill>
+                  <a:srgbClr val="FFC000"/>
+                </a:solidFill>
+                <a:latin typeface="Consolas"/>
+              </a:rPr>
+              <a:t>Git</a:t>
+            </a:r>
+            <a:r>
+              <a:rPr lang="pt-BR" sz="1600" b="1" dirty="0">
+                <a:solidFill>
+                  <a:srgbClr val="FFC000"/>
+                </a:solidFill>
+                <a:latin typeface="Consolas"/>
+              </a:rPr>
+              <a:t> </a:t>
+            </a:r>
+            <a:r>
+              <a:rPr lang="pt-BR" sz="1600" b="1" dirty="0" err="1">
+                <a:solidFill>
+                  <a:srgbClr val="FFC000"/>
+                </a:solidFill>
+                <a:latin typeface="Consolas"/>
+              </a:rPr>
+              <a:t>commit</a:t>
+            </a:r>
+            <a:r>
+              <a:rPr lang="pt-BR" sz="1600" b="1" dirty="0">
+                <a:solidFill>
+                  <a:srgbClr val="FFC000"/>
+                </a:solidFill>
+                <a:latin typeface="Consolas"/>
+              </a:rPr>
+              <a:t> –m</a:t>
+            </a:r>
+            <a:r>
+              <a:rPr lang="pt-BR" b="1" dirty="0">
+                <a:solidFill>
+                  <a:schemeClr val="bg1"/>
+                </a:solidFill>
+              </a:rPr>
+              <a:t>: salva uma foto dos arquivos guardados na área de preparo no repositório local e escreve uma mensagem para o mesmo.</a:t>
             </a:r>
           </a:p>
           <a:p>
             <a:pPr>
-              <a:buAutoNum type="romanUcPeriod"/>
-            </a:pPr>
-            <a:endParaRPr lang="pt-BR" i="1" dirty="0"/>
+              <a:buFont typeface="Wingdings" charset="2"/>
+              <a:buChar char="v"/>
+            </a:pPr>
+            <a:r>
+              <a:rPr lang="pt-BR" sz="1600" b="1" dirty="0" err="1">
+                <a:solidFill>
+                  <a:srgbClr val="FFC000"/>
+                </a:solidFill>
+                <a:latin typeface="Consolas"/>
+              </a:rPr>
+              <a:t>git</a:t>
+            </a:r>
+            <a:r>
+              <a:rPr lang="pt-BR" sz="1600" b="1" dirty="0">
+                <a:solidFill>
+                  <a:srgbClr val="FFC000"/>
+                </a:solidFill>
+                <a:latin typeface="Consolas"/>
+              </a:rPr>
+              <a:t> status</a:t>
+            </a:r>
+            <a:r>
+              <a:rPr lang="pt-BR" b="1" i="1" dirty="0">
+                <a:solidFill>
+                  <a:schemeClr val="bg1"/>
+                </a:solidFill>
+              </a:rPr>
+              <a:t>:</a:t>
+            </a:r>
+            <a:r>
+              <a:rPr lang="pt-BR" b="1" dirty="0">
+                <a:solidFill>
+                  <a:schemeClr val="bg1"/>
+                </a:solidFill>
+              </a:rPr>
+              <a:t> mostra todos os arquivos que não foram salvos no repositório</a:t>
+            </a:r>
+            <a:r>
+              <a:rPr lang="pt-BR" b="1" i="1" dirty="0">
+                <a:solidFill>
+                  <a:schemeClr val="bg1"/>
+                </a:solidFill>
+              </a:rPr>
+              <a:t>.</a:t>
+            </a:r>
           </a:p>
           <a:p>
             <a:pPr>
-              <a:buAutoNum type="romanUcPeriod"/>
-            </a:pPr>
-            <a:r>
-              <a:rPr lang="pt-BR" i="1"/>
-              <a:t>Não lida bem com arquivos muito grandes, como vídeos, por ter sido projetado para trabalhar com código-fonte.</a:t>
-            </a:r>
-            <a:endParaRPr lang="pt-BR" i="1" dirty="0"/>
+              <a:buFont typeface="Wingdings" charset="2"/>
+              <a:buChar char="v"/>
+            </a:pPr>
+            <a:r>
+              <a:rPr lang="pt-BR" sz="1600" b="1" dirty="0" err="1">
+                <a:solidFill>
+                  <a:srgbClr val="FFC000"/>
+                </a:solidFill>
+                <a:latin typeface="Consolas"/>
+              </a:rPr>
+              <a:t>git</a:t>
+            </a:r>
+            <a:r>
+              <a:rPr lang="pt-BR" sz="1600" b="1" dirty="0">
+                <a:solidFill>
+                  <a:srgbClr val="FFC000"/>
+                </a:solidFill>
+                <a:latin typeface="Consolas"/>
+              </a:rPr>
+              <a:t> </a:t>
+            </a:r>
+            <a:r>
+              <a:rPr lang="pt-BR" sz="1600" b="1" dirty="0" err="1">
+                <a:solidFill>
+                  <a:srgbClr val="FFC000"/>
+                </a:solidFill>
+                <a:latin typeface="Consolas"/>
+              </a:rPr>
+              <a:t>diff</a:t>
+            </a:r>
+            <a:r>
+              <a:rPr lang="pt-BR" sz="1600" b="1" dirty="0">
+                <a:solidFill>
+                  <a:srgbClr val="FFC000"/>
+                </a:solidFill>
+                <a:latin typeface="Consolas"/>
+              </a:rPr>
+              <a:t> </a:t>
+            </a:r>
+            <a:r>
+              <a:rPr lang="pt-BR" b="1" i="1" dirty="0">
+                <a:solidFill>
+                  <a:schemeClr val="bg1"/>
+                </a:solidFill>
+              </a:rPr>
+              <a:t>: </a:t>
+            </a:r>
+            <a:r>
+              <a:rPr lang="pt-BR" b="1" dirty="0">
+                <a:solidFill>
+                  <a:schemeClr val="bg1"/>
+                </a:solidFill>
+              </a:rPr>
+              <a:t>mostra as alterações em </a:t>
+            </a:r>
+            <a:r>
+              <a:rPr lang="pt-BR" b="1" dirty="0" err="1">
+                <a:solidFill>
+                  <a:schemeClr val="bg1"/>
+                </a:solidFill>
+              </a:rPr>
+              <a:t>arqui</a:t>
+            </a:r>
+            <a:r>
+              <a:rPr lang="pt-BR" b="1" dirty="0">
+                <a:solidFill>
+                  <a:schemeClr val="bg1"/>
+                </a:solidFill>
+              </a:rPr>
+              <a:t>vos que ainda não estão na área de preparo.</a:t>
+            </a:r>
           </a:p>
           <a:p>
             <a:pPr>
-              <a:buAutoNum type="romanUcPeriod"/>
-            </a:pPr>
-            <a:endParaRPr lang="pt-BR" i="1" dirty="0"/>
+              <a:buFont typeface="Wingdings" charset="2"/>
+              <a:buChar char="v"/>
+            </a:pPr>
+            <a:r>
+              <a:rPr lang="pt-BR" sz="1600" b="1" dirty="0" err="1">
+                <a:solidFill>
+                  <a:srgbClr val="FFC000"/>
+                </a:solidFill>
+                <a:latin typeface="Consolas"/>
+              </a:rPr>
+              <a:t>git</a:t>
+            </a:r>
+            <a:r>
+              <a:rPr lang="pt-BR" sz="1600" b="1" dirty="0">
+                <a:solidFill>
+                  <a:srgbClr val="FFC000"/>
+                </a:solidFill>
+                <a:latin typeface="Consolas"/>
+              </a:rPr>
+              <a:t> </a:t>
+            </a:r>
+            <a:r>
+              <a:rPr lang="pt-BR" sz="1600" b="1" dirty="0" err="1">
+                <a:solidFill>
+                  <a:srgbClr val="FFC000"/>
+                </a:solidFill>
+                <a:latin typeface="Consolas"/>
+              </a:rPr>
+              <a:t>diff</a:t>
+            </a:r>
+            <a:r>
+              <a:rPr lang="pt-BR" sz="1600" b="1" dirty="0">
+                <a:solidFill>
+                  <a:srgbClr val="FFC000"/>
+                </a:solidFill>
+                <a:latin typeface="Consolas"/>
+              </a:rPr>
+              <a:t> –</a:t>
+            </a:r>
+            <a:r>
+              <a:rPr lang="pt-BR" sz="1600" b="1" dirty="0" err="1">
+                <a:solidFill>
+                  <a:srgbClr val="FFC000"/>
+                </a:solidFill>
+                <a:latin typeface="Consolas"/>
+              </a:rPr>
+              <a:t>cached</a:t>
+            </a:r>
+            <a:r>
+              <a:rPr lang="pt-BR" b="1" i="1" dirty="0">
+                <a:solidFill>
+                  <a:schemeClr val="bg1"/>
+                </a:solidFill>
+              </a:rPr>
+              <a:t>:</a:t>
+            </a:r>
+            <a:r>
+              <a:rPr lang="pt-BR" b="1" dirty="0">
+                <a:solidFill>
+                  <a:schemeClr val="bg1"/>
+                </a:solidFill>
+              </a:rPr>
+              <a:t> mostra as alterações em arquivos na área de preparo.</a:t>
+            </a:r>
           </a:p>
           <a:p>
             <a:pPr>
-              <a:buAutoNum type="romanUcPeriod"/>
-            </a:pPr>
-            <a:endParaRPr lang="pt-BR" i="1" dirty="0"/>
-          </a:p>
-          <a:p>
-            <a:pPr marL="0" indent="0">
-              <a:buNone/>
-            </a:pPr>
-            <a:endParaRPr lang="pt-BR" i="1" dirty="0"/>
-          </a:p>
-          <a:p>
-            <a:pPr marL="0" indent="0">
-              <a:buNone/>
-            </a:pPr>
-            <a:endParaRPr lang="pt-BR" i="1" dirty="0"/>
-          </a:p>
-          <a:p>
-            <a:pPr marL="0" indent="0">
-              <a:buNone/>
-            </a:pPr>
-            <a:endParaRPr lang="pt-BR" i="1" dirty="0"/>
-          </a:p>
-          <a:p>
-            <a:pPr marL="0" indent="0">
-              <a:buNone/>
-            </a:pPr>
-            <a:endParaRPr lang="pt-BR" dirty="0"/>
+              <a:buFont typeface="Wingdings" charset="2"/>
+              <a:buChar char="v"/>
+            </a:pPr>
+            <a:r>
+              <a:rPr lang="pt-BR" sz="1600" b="1" dirty="0" err="1">
+                <a:solidFill>
+                  <a:srgbClr val="FFC000"/>
+                </a:solidFill>
+                <a:latin typeface="Consolas"/>
+              </a:rPr>
+              <a:t>git</a:t>
+            </a:r>
+            <a:r>
+              <a:rPr lang="pt-BR" sz="1600" b="1" dirty="0">
+                <a:solidFill>
+                  <a:srgbClr val="FFC000"/>
+                </a:solidFill>
+                <a:latin typeface="Consolas"/>
+              </a:rPr>
+              <a:t> </a:t>
+            </a:r>
+            <a:r>
+              <a:rPr lang="pt-BR" sz="1600" b="1" dirty="0" err="1">
+                <a:solidFill>
+                  <a:srgbClr val="FFC000"/>
+                </a:solidFill>
+                <a:latin typeface="Consolas"/>
+              </a:rPr>
+              <a:t>diff</a:t>
+            </a:r>
+            <a:r>
+              <a:rPr lang="pt-BR" sz="1600" b="1" dirty="0">
+                <a:solidFill>
+                  <a:srgbClr val="FFC000"/>
+                </a:solidFill>
+                <a:latin typeface="Consolas"/>
+              </a:rPr>
+              <a:t> </a:t>
+            </a:r>
+            <a:r>
+              <a:rPr lang="pt-BR" sz="1600" b="1" dirty="0" err="1">
+                <a:solidFill>
+                  <a:srgbClr val="FFC000"/>
+                </a:solidFill>
+                <a:latin typeface="Consolas"/>
+              </a:rPr>
+              <a:t>commit</a:t>
+            </a:r>
+            <a:r>
+              <a:rPr lang="pt-BR" sz="1600" b="1" dirty="0">
+                <a:solidFill>
+                  <a:srgbClr val="FFC000"/>
+                </a:solidFill>
+                <a:latin typeface="Consolas"/>
+              </a:rPr>
+              <a:t>1 commit2</a:t>
+            </a:r>
+            <a:r>
+              <a:rPr lang="pt-BR" b="1" i="1" dirty="0">
+                <a:solidFill>
+                  <a:schemeClr val="bg1"/>
+                </a:solidFill>
+              </a:rPr>
+              <a:t>:</a:t>
+            </a:r>
+            <a:r>
+              <a:rPr lang="pt-BR" b="1" dirty="0">
+                <a:solidFill>
+                  <a:schemeClr val="bg1"/>
+                </a:solidFill>
+              </a:rPr>
+              <a:t> mostra a </a:t>
+            </a:r>
+            <a:r>
+              <a:rPr lang="pt-BR" b="1" dirty="0" err="1">
+                <a:solidFill>
+                  <a:schemeClr val="bg1"/>
+                </a:solidFill>
+              </a:rPr>
+              <a:t>differença</a:t>
+            </a:r>
+            <a:r>
+              <a:rPr lang="pt-BR" b="1" dirty="0">
+                <a:solidFill>
+                  <a:schemeClr val="bg1"/>
+                </a:solidFill>
+              </a:rPr>
+              <a:t> </a:t>
+            </a:r>
+            <a:r>
+              <a:rPr lang="pt-BR" b="1" dirty="0" err="1">
+                <a:solidFill>
+                  <a:schemeClr val="bg1"/>
+                </a:solidFill>
+              </a:rPr>
+              <a:t>entr</a:t>
+            </a:r>
+            <a:r>
+              <a:rPr lang="pt-BR" b="1" dirty="0">
+                <a:solidFill>
+                  <a:schemeClr val="bg1"/>
+                </a:solidFill>
+              </a:rPr>
+              <a:t>e dois </a:t>
+            </a:r>
+            <a:r>
+              <a:rPr lang="pt-BR" b="1" i="1" dirty="0" err="1">
+                <a:solidFill>
+                  <a:schemeClr val="bg1"/>
+                </a:solidFill>
+              </a:rPr>
+              <a:t>commits</a:t>
+            </a:r>
+            <a:endParaRPr lang="pt-BR" b="1" i="1">
+              <a:solidFill>
+                <a:schemeClr val="bg1"/>
+              </a:solidFill>
+            </a:endParaRPr>
           </a:p>
           <a:p>
             <a:pPr marL="0" indent="0">
@@ -12571,7 +13138,7 @@
     </p:spTree>
     <p:extLst>
       <p:ext uri="{BB962C8B-B14F-4D97-AF65-F5344CB8AC3E}">
-        <p14:creationId xmlns:p14="http://schemas.microsoft.com/office/powerpoint/2010/main" val="2801146745"/>
+        <p14:creationId xmlns:p14="http://schemas.microsoft.com/office/powerpoint/2010/main" val="845753946"/>
       </p:ext>
     </p:extLst>
   </p:cSld>
@@ -12603,7 +13170,7 @@
           <p:cNvPr id="2" name="Título 1">
             <a:extLst>
               <a:ext uri="{FF2B5EF4-FFF2-40B4-BE49-F238E27FC236}">
-                <a16:creationId xmlns:a16="http://schemas.microsoft.com/office/drawing/2014/main" id="{D9FDA2E7-7FC8-81F9-CC6E-797FDA5C7CA8}"/>
+                <a16:creationId xmlns:a16="http://schemas.microsoft.com/office/drawing/2014/main" id="{9646584F-2CC3-22FF-0F7E-DCE89C6BCCFC}"/>
               </a:ext>
             </a:extLst>
           </p:cNvPr>
@@ -12620,13 +13187,17 @@
           <a:lstStyle/>
           <a:p>
             <a:r>
-              <a:rPr lang="pt-BR"/>
-              <a:t>Alguns comandos</a:t>
-            </a:r>
-            <a:r>
-              <a:rPr lang="pt-BR" dirty="0"/>
-              <a:t> </a:t>
-            </a:r>
+              <a:rPr lang="pt-BR" sz="3600" b="0" i="0" u="none" strike="noStrike" baseline="0">
+                <a:solidFill>
+                  <a:srgbClr val="FFFFFF"/>
+                </a:solidFill>
+                <a:latin typeface="Century Gothic"/>
+                <a:ea typeface="Century Gothic"/>
+                <a:cs typeface="Century Gothic"/>
+              </a:rPr>
+              <a:t>Alguns comandos </a:t>
+            </a:r>
+            <a:endParaRPr lang="pt-BR"/>
           </a:p>
         </p:txBody>
       </p:sp>
@@ -12635,7 +13206,7 @@
           <p:cNvPr id="3" name="Espaço Reservado para Conteúdo 2">
             <a:extLst>
               <a:ext uri="{FF2B5EF4-FFF2-40B4-BE49-F238E27FC236}">
-                <a16:creationId xmlns:a16="http://schemas.microsoft.com/office/drawing/2014/main" id="{07B71593-3AED-1F1C-5EE5-408A18F05ED8}"/>
+                <a16:creationId xmlns:a16="http://schemas.microsoft.com/office/drawing/2014/main" id="{DD305F9A-3AAB-9049-CB5F-02F98746F5FC}"/>
               </a:ext>
             </a:extLst>
           </p:cNvPr>
@@ -12649,7 +13220,7 @@
         <p:spPr>
           <a:xfrm>
             <a:off x="2589212" y="2133600"/>
-            <a:ext cx="8915400" cy="3449539"/>
+            <a:ext cx="8915400" cy="3650622"/>
           </a:xfrm>
           <a:solidFill>
             <a:schemeClr val="tx1">
@@ -12664,7 +13235,7 @@
         </p:spPr>
         <p:txBody>
           <a:bodyPr vert="horz" lIns="91440" tIns="45720" rIns="91440" bIns="45720" rtlCol="0" anchor="t">
-            <a:normAutofit/>
+            <a:normAutofit lnSpcReduction="10000"/>
           </a:bodyPr>
           <a:lstStyle/>
           <a:p>
@@ -12673,44 +13244,39 @@
               <a:buChar char="v"/>
             </a:pPr>
             <a:r>
-              <a:rPr lang="pt-BR" b="1" i="1" dirty="0" err="1">
+              <a:rPr lang="pt-BR" sz="1600" b="1" dirty="0" err="1">
+                <a:solidFill>
+                  <a:srgbClr val="FFC000"/>
+                </a:solidFill>
+                <a:latin typeface="Consolas"/>
+              </a:rPr>
+              <a:t>git</a:t>
+            </a:r>
+            <a:r>
+              <a:rPr lang="pt-BR" sz="1600" b="1" dirty="0">
+                <a:solidFill>
+                  <a:srgbClr val="FFC000"/>
+                </a:solidFill>
+                <a:latin typeface="Consolas"/>
+              </a:rPr>
+              <a:t> </a:t>
+            </a:r>
+            <a:r>
+              <a:rPr lang="pt-BR" sz="1600" b="1" dirty="0" err="1">
+                <a:solidFill>
+                  <a:srgbClr val="FFC000"/>
+                </a:solidFill>
+                <a:latin typeface="Consolas"/>
+              </a:rPr>
+              <a:t>branch</a:t>
+            </a:r>
+            <a:r>
+              <a:rPr lang="pt-BR" b="1" dirty="0">
                 <a:solidFill>
                   <a:schemeClr val="bg1"/>
                 </a:solidFill>
               </a:rPr>
-              <a:t>git</a:t>
-            </a:r>
-            <a:r>
-              <a:rPr lang="pt-BR" b="1" i="1" dirty="0">
-                <a:solidFill>
-                  <a:schemeClr val="bg1"/>
-                </a:solidFill>
-              </a:rPr>
-              <a:t> </a:t>
-            </a:r>
-            <a:r>
-              <a:rPr lang="pt-BR" b="1" i="1" dirty="0" err="1">
-                <a:solidFill>
-                  <a:schemeClr val="bg1"/>
-                </a:solidFill>
-              </a:rPr>
-              <a:t>init</a:t>
-            </a:r>
-            <a:r>
-              <a:rPr lang="pt-BR" b="1" i="1" dirty="0">
-                <a:solidFill>
-                  <a:schemeClr val="bg1"/>
-                </a:solidFill>
-              </a:rPr>
-              <a:t>: </a:t>
-            </a:r>
-            <a:r>
-              <a:rPr lang="pt-BR" b="1" dirty="0">
-                <a:solidFill>
-                  <a:schemeClr val="bg1"/>
-                </a:solidFill>
-              </a:rPr>
-              <a:t>[nome do projeto] Cria um novo repositório local.</a:t>
+              <a:t>: mostra todas as ramificações locais.</a:t>
             </a:r>
           </a:p>
           <a:p>
@@ -12719,12 +13285,74 @@
               <a:buChar char="v"/>
             </a:pPr>
             <a:r>
+              <a:rPr lang="pt-BR" sz="1600" b="1" dirty="0" err="1">
+                <a:solidFill>
+                  <a:srgbClr val="FFC000"/>
+                </a:solidFill>
+                <a:latin typeface="Consolas"/>
+              </a:rPr>
+              <a:t>git</a:t>
+            </a:r>
+            <a:r>
+              <a:rPr lang="pt-BR" sz="1600" b="1" dirty="0">
+                <a:solidFill>
+                  <a:srgbClr val="FFC000"/>
+                </a:solidFill>
+                <a:latin typeface="Consolas"/>
+              </a:rPr>
+              <a:t> </a:t>
+            </a:r>
+            <a:r>
+              <a:rPr lang="pt-BR" sz="1600" b="1" dirty="0" err="1">
+                <a:solidFill>
+                  <a:srgbClr val="FFC000"/>
+                </a:solidFill>
+                <a:latin typeface="Consolas"/>
+              </a:rPr>
+              <a:t>branch</a:t>
+            </a:r>
+            <a:r>
+              <a:rPr lang="pt-BR" sz="1600" b="1" dirty="0">
+                <a:solidFill>
+                  <a:srgbClr val="FFC000"/>
+                </a:solidFill>
+                <a:latin typeface="Consolas"/>
+              </a:rPr>
+              <a:t> (</a:t>
+            </a:r>
+            <a:r>
+              <a:rPr lang="pt-BR" sz="1600" b="1" dirty="0" err="1">
+                <a:solidFill>
+                  <a:srgbClr val="FFC000"/>
+                </a:solidFill>
+                <a:latin typeface="Consolas"/>
+              </a:rPr>
+              <a:t>new_branch</a:t>
+            </a:r>
+            <a:r>
+              <a:rPr lang="pt-BR" sz="1600" b="1" dirty="0">
+                <a:solidFill>
+                  <a:srgbClr val="FFC000"/>
+                </a:solidFill>
+                <a:latin typeface="Consolas"/>
+              </a:rPr>
+              <a:t>)</a:t>
+            </a:r>
+            <a:r>
+              <a:rPr lang="pt-BR" b="1" dirty="0">
+                <a:solidFill>
+                  <a:schemeClr val="bg1"/>
+                </a:solidFill>
+              </a:rPr>
+              <a:t>: cria uma nova ramificação do projeto chamada </a:t>
+            </a:r>
+            <a:r>
               <a:rPr lang="pt-BR" b="1" i="1" dirty="0" err="1">
                 <a:solidFill>
                   <a:schemeClr val="bg1"/>
                 </a:solidFill>
               </a:rPr>
-              <a:t>git</a:t>
+              <a:t>new_branch</a:t>
             </a:r>
             <a:r>
               <a:rPr lang="pt-BR" b="1" i="1" dirty="0">
@@ -12732,31 +13360,7 @@
                   <a:schemeClr val="bg1"/>
                 </a:solidFill>
               </a:rPr>
-              <a:t> clone [</a:t>
-            </a:r>
-            <a:r>
-              <a:rPr lang="pt-BR" b="1" i="1" dirty="0" err="1">
-                <a:solidFill>
-                  <a:schemeClr val="bg1"/>
-                </a:solidFill>
-              </a:rPr>
-              <a:t>url</a:t>
-            </a:r>
-            <a:r>
-              <a:rPr lang="pt-BR" b="1" i="1" dirty="0">
-                <a:solidFill>
-                  <a:schemeClr val="bg1"/>
-                </a:solidFill>
-              </a:rPr>
-              <a:t>]: </a:t>
-            </a:r>
-            <a:r>
-              <a:rPr lang="pt-BR" b="1" dirty="0">
-                <a:solidFill>
-                  <a:schemeClr val="bg1"/>
-                </a:solidFill>
-              </a:rPr>
-              <a:t>clona de um repositório remoto para um repositório local.</a:t>
+              <a:t>.</a:t>
             </a:r>
           </a:p>
           <a:p>
@@ -12765,44 +13369,47 @@
               <a:buChar char="v"/>
             </a:pPr>
             <a:r>
-              <a:rPr lang="pt-BR" b="1" i="1" dirty="0" err="1">
+              <a:rPr lang="pt-BR" sz="1600" b="1" dirty="0" err="1">
+                <a:solidFill>
+                  <a:srgbClr val="FFC000"/>
+                </a:solidFill>
+                <a:latin typeface="Consolas"/>
+              </a:rPr>
+              <a:t>git</a:t>
+            </a:r>
+            <a:r>
+              <a:rPr lang="pt-BR" sz="1600" b="1" dirty="0">
+                <a:solidFill>
+                  <a:srgbClr val="FFC000"/>
+                </a:solidFill>
+                <a:latin typeface="Consolas"/>
+              </a:rPr>
+              <a:t> checkout </a:t>
+            </a:r>
+            <a:r>
+              <a:rPr lang="pt-BR" sz="1600" b="1" dirty="0" err="1">
+                <a:solidFill>
+                  <a:srgbClr val="FFC000"/>
+                </a:solidFill>
+                <a:latin typeface="Consolas"/>
+              </a:rPr>
+              <a:t>branch_A</a:t>
+            </a:r>
+            <a:r>
+              <a:rPr lang="pt-BR" b="1" i="1" dirty="0">
                 <a:solidFill>
                   <a:schemeClr val="bg1"/>
                 </a:solidFill>
               </a:rPr>
-              <a:t>Git</a:t>
-            </a:r>
-            <a:r>
-              <a:rPr lang="pt-BR" b="1" i="1" dirty="0">
+              <a:t>: </a:t>
+            </a:r>
+            <a:r>
+              <a:rPr lang="pt-BR" b="1" dirty="0">
                 <a:solidFill>
                   <a:schemeClr val="bg1"/>
                 </a:solidFill>
               </a:rPr>
-              <a:t> </a:t>
-            </a:r>
-            <a:r>
-              <a:rPr lang="pt-BR" b="1" i="1" dirty="0" err="1">
-                <a:solidFill>
-                  <a:schemeClr val="bg1"/>
-                </a:solidFill>
-              </a:rPr>
-              <a:t>commit</a:t>
-            </a:r>
-            <a:r>
-              <a:rPr lang="pt-BR" b="1" i="1" dirty="0">
-                <a:solidFill>
-                  <a:schemeClr val="bg1"/>
-                </a:solidFill>
-              </a:rPr>
-              <a:t> –m:</a:t>
-            </a:r>
-            <a:r>
-              <a:rPr lang="pt-BR" b="1" dirty="0">
-                <a:solidFill>
-                  <a:schemeClr val="bg1"/>
-                </a:solidFill>
-              </a:rPr>
-              <a:t> salva uma foto dos arquivos guardados na área de preparo no repositório local e escreve uma mensagem para o mesmo.</a:t>
+              <a:t>muda para uma versão diferente do projeto podendo visualizar também uma versão anterior.</a:t>
             </a:r>
           </a:p>
           <a:p>
@@ -12811,28 +13418,73 @@
               <a:buChar char="v"/>
             </a:pPr>
             <a:r>
+              <a:rPr lang="pt-BR" sz="1600" b="1" dirty="0" err="1">
+                <a:solidFill>
+                  <a:srgbClr val="FFC000"/>
+                </a:solidFill>
+                <a:latin typeface="Consolas"/>
+              </a:rPr>
+              <a:t>git</a:t>
+            </a:r>
+            <a:r>
+              <a:rPr lang="pt-BR" sz="1600" b="1" dirty="0">
+                <a:solidFill>
+                  <a:srgbClr val="FFC000"/>
+                </a:solidFill>
+                <a:latin typeface="Consolas"/>
+              </a:rPr>
+              <a:t> </a:t>
+            </a:r>
+            <a:r>
+              <a:rPr lang="pt-BR" sz="1600" b="1" dirty="0" err="1">
+                <a:solidFill>
+                  <a:srgbClr val="FFC000"/>
+                </a:solidFill>
+                <a:latin typeface="Consolas"/>
+              </a:rPr>
+              <a:t>tag</a:t>
+            </a:r>
+            <a:r>
+              <a:rPr lang="pt-BR" sz="1600" b="1" dirty="0">
+                <a:solidFill>
+                  <a:srgbClr val="FFC000"/>
+                </a:solidFill>
+                <a:latin typeface="Consolas"/>
+              </a:rPr>
+              <a:t> </a:t>
+            </a:r>
+            <a:r>
+              <a:rPr lang="pt-BR" sz="1600" b="1" dirty="0" err="1">
+                <a:solidFill>
+                  <a:srgbClr val="FFC000"/>
+                </a:solidFill>
+                <a:latin typeface="Consolas"/>
+              </a:rPr>
+              <a:t>new_tag</a:t>
+            </a:r>
+            <a:r>
+              <a:rPr lang="pt-BR" b="1" i="1" dirty="0">
+                <a:solidFill>
+                  <a:schemeClr val="bg1"/>
+                </a:solidFill>
+              </a:rPr>
+              <a:t>: </a:t>
+            </a:r>
+            <a:r>
+              <a:rPr lang="pt-BR" b="1" dirty="0">
+                <a:solidFill>
+                  <a:schemeClr val="bg1"/>
+                </a:solidFill>
+              </a:rPr>
+              <a:t>cria uma 'etiqueta' para a versão em que se está visualizando chamada </a:t>
+            </a:r>
+            <a:r>
               <a:rPr lang="pt-BR" b="1" i="1" dirty="0" err="1">
                 <a:solidFill>
                   <a:schemeClr val="bg1"/>
                 </a:solidFill>
               </a:rPr>
-              <a:t>git</a:t>
-            </a:r>
-            <a:r>
-              <a:rPr lang="pt-BR" b="1" i="1" dirty="0">
-                <a:solidFill>
-                  <a:schemeClr val="bg1"/>
-                </a:solidFill>
-              </a:rPr>
-              <a:t> status:</a:t>
-            </a:r>
-            <a:r>
-              <a:rPr lang="pt-BR" b="1" dirty="0">
-                <a:solidFill>
-                  <a:schemeClr val="bg1"/>
-                </a:solidFill>
-              </a:rPr>
-              <a:t> mostra todos os arquivos que não foram salvos no repositório</a:t>
+              <a:t>new_tag</a:t>
             </a:r>
             <a:r>
               <a:rPr lang="pt-BR" b="1" i="1" dirty="0">
@@ -12849,60 +13501,38 @@
               <a:buChar char="v"/>
             </a:pPr>
             <a:r>
-              <a:rPr lang="pt-BR" b="1" i="1" dirty="0" err="1">
+              <a:rPr lang="pt-BR" sz="1600" b="1" dirty="0" err="1">
+                <a:solidFill>
+                  <a:srgbClr val="FFC000"/>
+                </a:solidFill>
+                <a:latin typeface="Consolas"/>
+              </a:rPr>
+              <a:t>git</a:t>
+            </a:r>
+            <a:r>
+              <a:rPr lang="pt-BR" sz="1600" b="1" dirty="0">
+                <a:solidFill>
+                  <a:srgbClr val="FFC000"/>
+                </a:solidFill>
+                <a:latin typeface="Consolas"/>
+              </a:rPr>
+              <a:t> log</a:t>
+            </a:r>
+            <a:r>
+              <a:rPr lang="pt-BR" b="1" i="1" dirty="0">
                 <a:solidFill>
                   <a:schemeClr val="bg1"/>
                 </a:solidFill>
               </a:rPr>
-              <a:t>git</a:t>
-            </a:r>
-            <a:r>
-              <a:rPr lang="pt-BR" b="1" i="1" dirty="0">
+              <a:t>: </a:t>
+            </a:r>
+            <a:r>
+              <a:rPr lang="pt-BR" b="1" dirty="0">
                 <a:solidFill>
                   <a:schemeClr val="bg1"/>
                 </a:solidFill>
               </a:rPr>
-              <a:t> </a:t>
-            </a:r>
-            <a:r>
-              <a:rPr lang="pt-BR" b="1" i="1" dirty="0" err="1">
-                <a:solidFill>
-                  <a:schemeClr val="bg1"/>
-                </a:solidFill>
-              </a:rPr>
-              <a:t>diff</a:t>
-            </a:r>
-            <a:r>
-              <a:rPr lang="pt-BR" b="1" i="1" dirty="0">
-                <a:solidFill>
-                  <a:schemeClr val="bg1"/>
-                </a:solidFill>
-              </a:rPr>
-              <a:t> : </a:t>
-            </a:r>
-            <a:r>
-              <a:rPr lang="pt-BR" b="1" dirty="0">
-                <a:solidFill>
-                  <a:schemeClr val="bg1"/>
-                </a:solidFill>
-              </a:rPr>
-              <a:t>mostra as alterações em </a:t>
-            </a:r>
-            <a:r>
-              <a:rPr lang="pt-BR" b="1" dirty="0" err="1">
-                <a:solidFill>
-                  <a:schemeClr val="bg1"/>
-                </a:solidFill>
-              </a:rPr>
-              <a:t>arqui</a:t>
-            </a:r>
-            <a:r>
-              <a:rPr lang="pt-BR" b="1" dirty="0">
-                <a:solidFill>
-                  <a:schemeClr val="bg1"/>
-                </a:solidFill>
-              </a:rPr>
-              <a:t>vos que ainda não estão na área de preparo.</a:t>
+              <a:t>mostra todas as alterações feitas em um projeto.</a:t>
             </a:r>
           </a:p>
           <a:p>
@@ -12911,60 +13541,47 @@
               <a:buChar char="v"/>
             </a:pPr>
             <a:r>
-              <a:rPr lang="pt-BR" b="1" i="1" dirty="0" err="1">
+              <a:rPr lang="pt-BR" sz="1600" b="1" dirty="0" err="1">
+                <a:solidFill>
+                  <a:srgbClr val="FFC000"/>
+                </a:solidFill>
+                <a:latin typeface="Consolas"/>
+              </a:rPr>
+              <a:t>git</a:t>
+            </a:r>
+            <a:r>
+              <a:rPr lang="pt-BR" sz="1600" b="1" dirty="0">
+                <a:solidFill>
+                  <a:srgbClr val="FFC000"/>
+                </a:solidFill>
+                <a:latin typeface="Consolas"/>
+              </a:rPr>
+              <a:t> </a:t>
+            </a:r>
+            <a:r>
+              <a:rPr lang="pt-BR" sz="1600" b="1" dirty="0" err="1">
+                <a:solidFill>
+                  <a:srgbClr val="FFC000"/>
+                </a:solidFill>
+                <a:latin typeface="Consolas"/>
+              </a:rPr>
+              <a:t>add</a:t>
+            </a:r>
+            <a:r>
+              <a:rPr lang="pt-BR" b="1" i="1" dirty="0">
                 <a:solidFill>
                   <a:schemeClr val="bg1"/>
                 </a:solidFill>
               </a:rPr>
-              <a:t>git</a:t>
-            </a:r>
-            <a:r>
-              <a:rPr lang="pt-BR" b="1" i="1" dirty="0">
+              <a:t>: </a:t>
+            </a:r>
+            <a:r>
+              <a:rPr lang="pt-BR" b="1" dirty="0">
                 <a:solidFill>
                   <a:schemeClr val="bg1"/>
                 </a:solidFill>
               </a:rPr>
-              <a:t> </a:t>
-            </a:r>
-            <a:r>
-              <a:rPr lang="pt-BR" b="1" i="1" dirty="0" err="1">
-                <a:solidFill>
-                  <a:schemeClr val="bg1"/>
-                </a:solidFill>
-              </a:rPr>
-              <a:t>diff</a:t>
-            </a:r>
-            <a:r>
-              <a:rPr lang="pt-BR" b="1" i="1" dirty="0">
-                <a:solidFill>
-                  <a:schemeClr val="bg1"/>
-                </a:solidFill>
-              </a:rPr>
-              <a:t> –</a:t>
-            </a:r>
-            <a:r>
-              <a:rPr lang="pt-BR" b="1" i="1" dirty="0" err="1">
-                <a:solidFill>
-                  <a:schemeClr val="bg1"/>
-                </a:solidFill>
-              </a:rPr>
-              <a:t>cached</a:t>
-            </a:r>
-            <a:r>
-              <a:rPr lang="pt-BR" b="1" i="1" dirty="0">
-                <a:solidFill>
-                  <a:schemeClr val="bg1"/>
-                </a:solidFill>
-              </a:rPr>
-              <a:t>:</a:t>
-            </a:r>
-            <a:r>
-              <a:rPr lang="pt-BR" b="1" dirty="0">
-                <a:solidFill>
-                  <a:schemeClr val="bg1"/>
-                </a:solidFill>
-              </a:rPr>
-              <a:t> mostra as alterações em arquivos na área de preparo.</a:t>
+              <a:t>envia um arquivo para a área de preparo.</a:t>
             </a:r>
           </a:p>
           <a:p>
@@ -12973,119 +13590,52 @@
               <a:buChar char="v"/>
             </a:pPr>
             <a:r>
-              <a:rPr lang="pt-BR" b="1" i="1" dirty="0" err="1">
+              <a:rPr lang="pt-BR" sz="1600" b="1" dirty="0" err="1">
+                <a:solidFill>
+                  <a:srgbClr val="FFC000"/>
+                </a:solidFill>
+                <a:latin typeface="Consolas"/>
+              </a:rPr>
+              <a:t>git</a:t>
+            </a:r>
+            <a:r>
+              <a:rPr lang="pt-BR" sz="1600" b="1" dirty="0">
+                <a:solidFill>
+                  <a:srgbClr val="FFC000"/>
+                </a:solidFill>
+                <a:latin typeface="Consolas"/>
+              </a:rPr>
+              <a:t> reset [file]</a:t>
+            </a:r>
+            <a:r>
+              <a:rPr lang="pt-BR" b="1" i="1" dirty="0">
                 <a:solidFill>
                   <a:schemeClr val="bg1"/>
                 </a:solidFill>
               </a:rPr>
-              <a:t>git</a:t>
-            </a:r>
-            <a:r>
-              <a:rPr lang="pt-BR" b="1" i="1" dirty="0">
+              <a:t>: </a:t>
+            </a:r>
+            <a:r>
+              <a:rPr lang="pt-BR" b="1" dirty="0">
                 <a:solidFill>
                   <a:schemeClr val="bg1"/>
                 </a:solidFill>
               </a:rPr>
-              <a:t> </a:t>
-            </a:r>
-            <a:r>
-              <a:rPr lang="pt-BR" b="1" i="1" dirty="0" err="1">
-                <a:solidFill>
-                  <a:schemeClr val="bg1"/>
-                </a:solidFill>
-              </a:rPr>
-              <a:t>diff</a:t>
-            </a:r>
-            <a:r>
-              <a:rPr lang="pt-BR" b="1" i="1" dirty="0">
-                <a:solidFill>
-                  <a:schemeClr val="bg1"/>
-                </a:solidFill>
-              </a:rPr>
-              <a:t> </a:t>
-            </a:r>
-            <a:r>
-              <a:rPr lang="pt-BR" b="1" i="1" dirty="0" err="1">
-                <a:solidFill>
-                  <a:schemeClr val="bg1"/>
-                </a:solidFill>
-              </a:rPr>
-              <a:t>commit</a:t>
-            </a:r>
-            <a:r>
-              <a:rPr lang="pt-BR" b="1" i="1" dirty="0">
-                <a:solidFill>
-                  <a:schemeClr val="bg1"/>
-                </a:solidFill>
-              </a:rPr>
-              <a:t>1 commit2:</a:t>
-            </a:r>
-            <a:r>
-              <a:rPr lang="pt-BR" b="1" dirty="0">
-                <a:solidFill>
-                  <a:schemeClr val="bg1"/>
-                </a:solidFill>
-              </a:rPr>
-              <a:t> mostra a </a:t>
-            </a:r>
-            <a:r>
-              <a:rPr lang="pt-BR" b="1" dirty="0" err="1">
-                <a:solidFill>
-                  <a:schemeClr val="bg1"/>
-                </a:solidFill>
-              </a:rPr>
-              <a:t>differença</a:t>
-            </a:r>
-            <a:r>
-              <a:rPr lang="pt-BR" b="1" dirty="0">
-                <a:solidFill>
-                  <a:schemeClr val="bg1"/>
-                </a:solidFill>
-              </a:rPr>
-              <a:t> </a:t>
-            </a:r>
-            <a:r>
-              <a:rPr lang="pt-BR" b="1" dirty="0" err="1">
-                <a:solidFill>
-                  <a:schemeClr val="bg1"/>
-                </a:solidFill>
-              </a:rPr>
-              <a:t>entr</a:t>
-            </a:r>
-            <a:r>
-              <a:rPr lang="pt-BR" b="1" dirty="0">
-                <a:solidFill>
-                  <a:schemeClr val="bg1"/>
-                </a:solidFill>
-              </a:rPr>
-              <a:t>e dois </a:t>
-            </a:r>
-            <a:r>
-              <a:rPr lang="pt-BR" b="1" i="1" dirty="0" err="1">
-                <a:solidFill>
-                  <a:schemeClr val="bg1"/>
-                </a:solidFill>
-              </a:rPr>
-              <a:t>commits</a:t>
-            </a:r>
-            <a:endParaRPr lang="pt-BR" b="1" i="1">
-              <a:solidFill>
-                <a:schemeClr val="bg1"/>
-              </a:solidFill>
-            </a:endParaRPr>
+              <a:t>retira um arquivo da área de preparação retando todas as mudanças realizadas.</a:t>
+            </a:r>
           </a:p>
           <a:p>
             <a:pPr marL="0" indent="0">
               <a:buNone/>
             </a:pPr>
-            <a:endParaRPr lang="pt-BR" dirty="0"/>
+            <a:endParaRPr lang="pt-BR" i="1" dirty="0"/>
           </a:p>
         </p:txBody>
       </p:sp>
     </p:spTree>
     <p:extLst>
       <p:ext uri="{BB962C8B-B14F-4D97-AF65-F5344CB8AC3E}">
-        <p14:creationId xmlns:p14="http://schemas.microsoft.com/office/powerpoint/2010/main" val="845753946"/>
+        <p14:creationId xmlns:p14="http://schemas.microsoft.com/office/powerpoint/2010/main" val="874133215"/>
       </p:ext>
     </p:extLst>
   </p:cSld>

--- a/mat_did/Material GIT/Apresentação do GIT.pptx
+++ b/mat_did/Material GIT/Apresentação do GIT.pptx
@@ -19,15 +19,18 @@
     <p:sldId id="273" r:id="rId13"/>
     <p:sldId id="278" r:id="rId14"/>
     <p:sldId id="275" r:id="rId15"/>
-    <p:sldId id="276" r:id="rId16"/>
-    <p:sldId id="279" r:id="rId17"/>
-    <p:sldId id="277" r:id="rId18"/>
-    <p:sldId id="269" r:id="rId19"/>
-    <p:sldId id="262" r:id="rId20"/>
-    <p:sldId id="270" r:id="rId21"/>
-    <p:sldId id="271" r:id="rId22"/>
-    <p:sldId id="272" r:id="rId23"/>
-    <p:sldId id="266" r:id="rId24"/>
+    <p:sldId id="280" r:id="rId16"/>
+    <p:sldId id="276" r:id="rId17"/>
+    <p:sldId id="279" r:id="rId18"/>
+    <p:sldId id="277" r:id="rId19"/>
+    <p:sldId id="281" r:id="rId20"/>
+    <p:sldId id="269" r:id="rId21"/>
+    <p:sldId id="262" r:id="rId22"/>
+    <p:sldId id="270" r:id="rId23"/>
+    <p:sldId id="282" r:id="rId24"/>
+    <p:sldId id="271" r:id="rId25"/>
+    <p:sldId id="272" r:id="rId26"/>
+    <p:sldId id="266" r:id="rId27"/>
   </p:sldIdLst>
   <p:sldSz cx="12192000" cy="6858000"/>
   <p:notesSz cx="6858000" cy="9144000"/>
@@ -137,10 +140,8 @@
 <file path=ppt/revisionInfo.xml><?xml version="1.0" encoding="utf-8"?>
 <p1510:revInfo xmlns:a="http://schemas.openxmlformats.org/drawingml/2006/main" xmlns:r="http://schemas.openxmlformats.org/officeDocument/2006/relationships" xmlns:p1510="http://schemas.microsoft.com/office/powerpoint/2015/10/main">
   <p1510:revLst>
-    <p1510:client id="{28FAA37B-992D-4FF8-B296-436558A1F2C8}" v="225" dt="2026-04-28T16:25:58.359"/>
-    <p1510:client id="{8E7718AC-2879-46FD-AC97-422BF3633D83}" v="329" dt="2026-04-27T15:57:17.213"/>
-    <p1510:client id="{D1B7388D-7972-4DDE-8B1B-FE2F51F03BF8}" v="86" dt="2026-04-29T15:52:59.106"/>
-    <p1510:client id="{F774D46D-85C0-4673-8C61-ACC0FE538728}" v="464" dt="2026-04-28T15:33:08.594"/>
+    <p1510:client id="{3AD48853-CB9B-4BBF-8B36-080ECA4E2ED3}" v="128" dt="2026-05-04T16:44:07.339"/>
+    <p1510:client id="{8162DB99-1171-4499-BF74-1316510E3872}" v="9" dt="2026-05-04T14:26:50.117"/>
   </p1510:revLst>
 </p1510:revInfo>
 </file>
@@ -332,7 +333,7 @@
             <a:fld id="{B61BEF0D-F0BB-DE4B-95CE-6DB70DBA9567}" type="datetimeFigureOut">
               <a:rPr lang="en-US" dirty="0"/>
               <a:pPr/>
-              <a:t>4/29/2026</a:t>
+              <a:t>5/4/2026</a:t>
             </a:fld>
             <a:endParaRPr lang="en-US" dirty="0"/>
           </a:p>
@@ -671,7 +672,7 @@
             <a:fld id="{B61BEF0D-F0BB-DE4B-95CE-6DB70DBA9567}" type="datetimeFigureOut">
               <a:rPr lang="en-US" dirty="0"/>
               <a:pPr/>
-              <a:t>4/29/2026</a:t>
+              <a:t>5/4/2026</a:t>
             </a:fld>
             <a:endParaRPr lang="en-US" dirty="0"/>
           </a:p>
@@ -1073,7 +1074,7 @@
             <a:fld id="{B61BEF0D-F0BB-DE4B-95CE-6DB70DBA9567}" type="datetimeFigureOut">
               <a:rPr lang="en-US" dirty="0"/>
               <a:pPr/>
-              <a:t>4/29/2026</a:t>
+              <a:t>5/4/2026</a:t>
             </a:fld>
             <a:endParaRPr lang="en-US" dirty="0"/>
           </a:p>
@@ -1410,7 +1411,7 @@
             <a:fld id="{B61BEF0D-F0BB-DE4B-95CE-6DB70DBA9567}" type="datetimeFigureOut">
               <a:rPr lang="en-US" dirty="0"/>
               <a:pPr/>
-              <a:t>4/29/2026</a:t>
+              <a:t>5/4/2026</a:t>
             </a:fld>
             <a:endParaRPr lang="en-US" dirty="0"/>
           </a:p>
@@ -1731,7 +1732,7 @@
             <a:fld id="{B61BEF0D-F0BB-DE4B-95CE-6DB70DBA9567}" type="datetimeFigureOut">
               <a:rPr lang="en-US" dirty="0"/>
               <a:pPr/>
-              <a:t>4/29/2026</a:t>
+              <a:t>5/4/2026</a:t>
             </a:fld>
             <a:endParaRPr lang="en-US" dirty="0"/>
           </a:p>
@@ -2128,7 +2129,7 @@
             <a:fld id="{B61BEF0D-F0BB-DE4B-95CE-6DB70DBA9567}" type="datetimeFigureOut">
               <a:rPr lang="en-US" dirty="0"/>
               <a:pPr/>
-              <a:t>4/29/2026</a:t>
+              <a:t>5/4/2026</a:t>
             </a:fld>
             <a:endParaRPr lang="en-US" dirty="0"/>
           </a:p>
@@ -2385,7 +2386,7 @@
             <a:fld id="{B61BEF0D-F0BB-DE4B-95CE-6DB70DBA9567}" type="datetimeFigureOut">
               <a:rPr lang="en-US" dirty="0"/>
               <a:pPr/>
-              <a:t>4/29/2026</a:t>
+              <a:t>5/4/2026</a:t>
             </a:fld>
             <a:endParaRPr lang="en-US" dirty="0"/>
           </a:p>
@@ -2647,7 +2648,7 @@
             <a:fld id="{B61BEF0D-F0BB-DE4B-95CE-6DB70DBA9567}" type="datetimeFigureOut">
               <a:rPr lang="en-US" dirty="0"/>
               <a:pPr/>
-              <a:t>4/29/2026</a:t>
+              <a:t>5/4/2026</a:t>
             </a:fld>
             <a:endParaRPr lang="en-US" dirty="0"/>
           </a:p>
@@ -2909,7 +2910,7 @@
             <a:fld id="{B61BEF0D-F0BB-DE4B-95CE-6DB70DBA9567}" type="datetimeFigureOut">
               <a:rPr lang="en-US" dirty="0"/>
               <a:pPr/>
-              <a:t>4/29/2026</a:t>
+              <a:t>5/4/2026</a:t>
             </a:fld>
             <a:endParaRPr lang="en-US" dirty="0"/>
           </a:p>
@@ -3239,7 +3240,7 @@
             <a:fld id="{B61BEF0D-F0BB-DE4B-95CE-6DB70DBA9567}" type="datetimeFigureOut">
               <a:rPr lang="en-US" dirty="0"/>
               <a:pPr/>
-              <a:t>4/29/2026</a:t>
+              <a:t>5/4/2026</a:t>
             </a:fld>
             <a:endParaRPr lang="en-US" dirty="0"/>
           </a:p>
@@ -3561,7 +3562,7 @@
             <a:fld id="{B61BEF0D-F0BB-DE4B-95CE-6DB70DBA9567}" type="datetimeFigureOut">
               <a:rPr lang="en-US" dirty="0"/>
               <a:pPr/>
-              <a:t>4/29/2026</a:t>
+              <a:t>5/4/2026</a:t>
             </a:fld>
             <a:endParaRPr lang="en-US" dirty="0"/>
           </a:p>
@@ -4017,7 +4018,7 @@
             <a:fld id="{B61BEF0D-F0BB-DE4B-95CE-6DB70DBA9567}" type="datetimeFigureOut">
               <a:rPr lang="en-US" dirty="0"/>
               <a:pPr/>
-              <a:t>4/29/2026</a:t>
+              <a:t>5/4/2026</a:t>
             </a:fld>
             <a:endParaRPr lang="en-US" dirty="0"/>
           </a:p>
@@ -4223,7 +4224,7 @@
             <a:fld id="{B61BEF0D-F0BB-DE4B-95CE-6DB70DBA9567}" type="datetimeFigureOut">
               <a:rPr lang="en-US" dirty="0"/>
               <a:pPr/>
-              <a:t>4/29/2026</a:t>
+              <a:t>5/4/2026</a:t>
             </a:fld>
             <a:endParaRPr lang="en-US" dirty="0"/>
           </a:p>
@@ -4402,7 +4403,7 @@
             <a:fld id="{B61BEF0D-F0BB-DE4B-95CE-6DB70DBA9567}" type="datetimeFigureOut">
               <a:rPr lang="en-US" dirty="0"/>
               <a:pPr/>
-              <a:t>4/29/2026</a:t>
+              <a:t>5/4/2026</a:t>
             </a:fld>
             <a:endParaRPr lang="en-US" dirty="0"/>
           </a:p>
@@ -4735,7 +4736,7 @@
             <a:fld id="{B61BEF0D-F0BB-DE4B-95CE-6DB70DBA9567}" type="datetimeFigureOut">
               <a:rPr lang="en-US" dirty="0"/>
               <a:pPr/>
-              <a:t>4/29/2026</a:t>
+              <a:t>5/4/2026</a:t>
             </a:fld>
             <a:endParaRPr lang="en-US" dirty="0"/>
           </a:p>
@@ -5077,7 +5078,7 @@
             <a:fld id="{B61BEF0D-F0BB-DE4B-95CE-6DB70DBA9567}" type="datetimeFigureOut">
               <a:rPr lang="en-US" dirty="0"/>
               <a:pPr/>
-              <a:t>4/29/2026</a:t>
+              <a:t>5/4/2026</a:t>
             </a:fld>
             <a:endParaRPr lang="en-US" dirty="0"/>
           </a:p>
@@ -7131,7 +7132,7 @@
             <a:fld id="{B61BEF0D-F0BB-DE4B-95CE-6DB70DBA9567}" type="datetimeFigureOut">
               <a:rPr lang="en-US" dirty="0"/>
               <a:pPr/>
-              <a:t>4/29/2026</a:t>
+              <a:t>5/4/2026</a:t>
             </a:fld>
             <a:endParaRPr lang="en-US" dirty="0"/>
           </a:p>
@@ -8483,10 +8484,10 @@
       </p:sp>
       <p:pic>
         <p:nvPicPr>
-          <p:cNvPr id="4" name="Imagem 3">
+          <p:cNvPr id="4" name="Imagem 3" descr="Texto&#10;&#10;O conteúdo gerado por IA pode estar incorreto.">
             <a:extLst>
               <a:ext uri="{FF2B5EF4-FFF2-40B4-BE49-F238E27FC236}">
-                <a16:creationId xmlns:a16="http://schemas.microsoft.com/office/drawing/2014/main" id="{469914AE-A07C-79E1-B5FD-F1E9EC047C90}"/>
+                <a16:creationId xmlns:a16="http://schemas.microsoft.com/office/drawing/2014/main" id="{02A54A94-DD29-6235-A254-5A3C368A998D}"/>
               </a:ext>
             </a:extLst>
           </p:cNvPr>
@@ -8503,8 +8504,8 @@
         </p:blipFill>
         <p:spPr>
           <a:xfrm>
-            <a:off x="2589439" y="3880380"/>
-            <a:ext cx="5924550" cy="790575"/>
+            <a:off x="2593554" y="3997746"/>
+            <a:ext cx="7408843" cy="744556"/>
           </a:xfrm>
           <a:prstGeom prst="rect">
             <a:avLst/>
@@ -8667,7 +8668,7 @@
           <p:cNvPr id="4" name="Imagem 3" descr="Texto&#10;&#10;O conteúdo gerado por IA pode estar incorreto.">
             <a:extLst>
               <a:ext uri="{FF2B5EF4-FFF2-40B4-BE49-F238E27FC236}">
-                <a16:creationId xmlns:a16="http://schemas.microsoft.com/office/drawing/2014/main" id="{F7B44B2C-B4D3-4A90-398D-39436EC7273A}"/>
+                <a16:creationId xmlns:a16="http://schemas.microsoft.com/office/drawing/2014/main" id="{3EE26B01-B335-6576-678E-ED78B21D53CD}"/>
               </a:ext>
             </a:extLst>
           </p:cNvPr>
@@ -8684,8 +8685,8 @@
         </p:blipFill>
         <p:spPr>
           <a:xfrm>
-            <a:off x="2590951" y="3435048"/>
-            <a:ext cx="4763100" cy="2992408"/>
+            <a:off x="2593307" y="3424488"/>
+            <a:ext cx="7125702" cy="1853865"/>
           </a:xfrm>
           <a:prstGeom prst="rect">
             <a:avLst/>
@@ -8772,7 +8773,12 @@
             <p:ph idx="1"/>
           </p:nvPr>
         </p:nvSpPr>
-        <p:spPr/>
+        <p:spPr>
+          <a:xfrm>
+            <a:off x="2589212" y="2133600"/>
+            <a:ext cx="8915400" cy="4209115"/>
+          </a:xfrm>
+        </p:spPr>
         <p:txBody>
           <a:bodyPr vert="horz" lIns="91440" tIns="45720" rIns="91440" bIns="45720" rtlCol="0" anchor="t">
             <a:normAutofit/>
@@ -8820,7 +8826,7 @@
             <a:pPr marL="0">
               <a:buNone/>
             </a:pPr>
-            <a:endParaRPr lang="pt-BR" sz="2400" dirty="0">
+            <a:endParaRPr lang="pt-BR" dirty="0">
               <a:latin typeface="Century Gothic"/>
             </a:endParaRPr>
           </a:p>
@@ -8829,7 +8835,7 @@
               <a:buNone/>
             </a:pPr>
             <a:r>
-              <a:rPr lang="pt-BR" sz="1600" b="1" err="1">
+              <a:rPr lang="pt-BR" sz="1600" b="1" dirty="0" err="1">
                 <a:solidFill>
                   <a:srgbClr val="FFC000"/>
                 </a:solidFill>
@@ -8847,7 +8853,7 @@
               <a:t> </a:t>
             </a:r>
             <a:r>
-              <a:rPr lang="pt-BR" sz="1600" b="1" err="1">
+              <a:rPr lang="pt-BR" sz="1600" b="1" dirty="0" err="1">
                 <a:solidFill>
                   <a:srgbClr val="FFC000"/>
                 </a:solidFill>
@@ -8871,7 +8877,7 @@
               <a:t>: envia o arquivo para a </a:t>
             </a:r>
             <a:r>
-              <a:rPr lang="pt-BR" i="1" err="1">
+              <a:rPr lang="pt-BR" i="1" dirty="0" err="1">
                 <a:latin typeface="Century Gothic"/>
               </a:rPr>
               <a:t>staging</a:t>
@@ -8883,71 +8889,34 @@
               <a:t> </a:t>
             </a:r>
             <a:r>
-              <a:rPr lang="pt-BR" i="1" err="1">
+              <a:rPr lang="pt-BR" i="1" dirty="0" err="1">
                 <a:latin typeface="Century Gothic"/>
               </a:rPr>
               <a:t>area</a:t>
-            </a:r>
-            <a:r>
-              <a:rPr lang="pt-BR">
-                <a:latin typeface="Century Gothic"/>
-              </a:rPr>
-              <a:t> (área de preparo)</a:t>
-            </a:r>
-          </a:p>
-          <a:p>
-            <a:pPr marL="0">
-              <a:buNone/>
-            </a:pPr>
-            <a:endParaRPr lang="pt-BR"/>
-          </a:p>
-          <a:p>
-            <a:pPr marL="0">
-              <a:buNone/>
-            </a:pPr>
-            <a:r>
-              <a:rPr lang="pt-BR" sz="1600" b="1" dirty="0" err="1">
-                <a:solidFill>
-                  <a:srgbClr val="FFC000"/>
-                </a:solidFill>
-                <a:latin typeface="Consolas"/>
-              </a:rPr>
-              <a:t>git</a:t>
-            </a:r>
-            <a:r>
-              <a:rPr lang="pt-BR" sz="1600" b="1" dirty="0">
-                <a:solidFill>
-                  <a:srgbClr val="FFC000"/>
-                </a:solidFill>
-                <a:latin typeface="Consolas"/>
-              </a:rPr>
-              <a:t> </a:t>
-            </a:r>
-            <a:r>
-              <a:rPr lang="pt-BR" sz="1600" b="1" dirty="0" err="1">
-                <a:solidFill>
-                  <a:srgbClr val="FFC000"/>
-                </a:solidFill>
-                <a:latin typeface="Consolas"/>
-              </a:rPr>
-              <a:t>commit</a:t>
-            </a:r>
-            <a:r>
-              <a:rPr lang="pt-BR" sz="1600" b="1" dirty="0">
-                <a:solidFill>
-                  <a:srgbClr val="FFC000"/>
-                </a:solidFill>
-                <a:latin typeface="Consolas"/>
-              </a:rPr>
-              <a:t> -m "Adiciona arquivo"</a:t>
             </a:r>
             <a:r>
               <a:rPr lang="pt-BR" dirty="0">
                 <a:latin typeface="Century Gothic"/>
               </a:rPr>
-              <a:t>: salva definitivamente a alteração no histórico do projeto</a:t>
-            </a:r>
-            <a:endParaRPr lang="pt-BR" dirty="0"/>
+              <a:t> (área de preparo)</a:t>
+            </a:r>
+          </a:p>
+          <a:p>
+            <a:pPr marL="0">
+              <a:buNone/>
+            </a:pPr>
+            <a:endParaRPr lang="pt-BR"/>
+          </a:p>
+          <a:p>
+            <a:pPr marL="0">
+              <a:buNone/>
+            </a:pPr>
+            <a:endParaRPr lang="pt-BR" dirty="0">
+              <a:solidFill>
+                <a:srgbClr val="FFFFFF"/>
+              </a:solidFill>
+              <a:latin typeface="Century Gothic"/>
+            </a:endParaRPr>
           </a:p>
           <a:p>
             <a:pPr marL="0" indent="0">
@@ -8965,10 +8934,10 @@
       </p:sp>
       <p:pic>
         <p:nvPicPr>
-          <p:cNvPr id="4" name="Imagem 3">
+          <p:cNvPr id="6" name="Imagem 5" descr="Tela preta com letras brancas&#10;&#10;O conteúdo gerado por IA pode estar incorreto.">
             <a:extLst>
               <a:ext uri="{FF2B5EF4-FFF2-40B4-BE49-F238E27FC236}">
-                <a16:creationId xmlns:a16="http://schemas.microsoft.com/office/drawing/2014/main" id="{A7AD6232-4876-CE66-09DA-C82E7A853455}"/>
+                <a16:creationId xmlns:a16="http://schemas.microsoft.com/office/drawing/2014/main" id="{057FDE13-2B18-7721-543B-A30654A7CFA5}"/>
               </a:ext>
             </a:extLst>
           </p:cNvPr>
@@ -8985,38 +8954,8 @@
         </p:blipFill>
         <p:spPr>
           <a:xfrm>
-            <a:off x="2598738" y="4406900"/>
-            <a:ext cx="5953125" cy="381000"/>
-          </a:xfrm>
-          <a:prstGeom prst="rect">
-            <a:avLst/>
-          </a:prstGeom>
-        </p:spPr>
-      </p:pic>
-      <p:pic>
-        <p:nvPicPr>
-          <p:cNvPr id="5" name="Imagem 4">
-            <a:extLst>
-              <a:ext uri="{FF2B5EF4-FFF2-40B4-BE49-F238E27FC236}">
-                <a16:creationId xmlns:a16="http://schemas.microsoft.com/office/drawing/2014/main" id="{CA1EE4BB-4792-A79F-78DF-5152B584F73C}"/>
-              </a:ext>
-            </a:extLst>
-          </p:cNvPr>
-          <p:cNvPicPr>
-            <a:picLocks noChangeAspect="1"/>
-          </p:cNvPicPr>
-          <p:nvPr/>
-        </p:nvPicPr>
-        <p:blipFill>
-          <a:blip r:embed="rId3"/>
-          <a:stretch>
-            <a:fillRect/>
-          </a:stretch>
-        </p:blipFill>
-        <p:spPr>
-          <a:xfrm>
-            <a:off x="2586038" y="5478463"/>
-            <a:ext cx="6029325" cy="295275"/>
+            <a:off x="2588964" y="4346899"/>
+            <a:ext cx="6096000" cy="771525"/>
           </a:xfrm>
           <a:prstGeom prst="rect">
             <a:avLst/>
@@ -9041,6 +8980,149 @@
   <p:cSld>
     <p:spTree>
       <p:nvGrpSpPr>
+        <p:cNvPr id="1" name=""/>
+        <p:cNvGrpSpPr/>
+        <p:nvPr/>
+      </p:nvGrpSpPr>
+      <p:grpSpPr>
+        <a:xfrm>
+          <a:off x="0" y="0"/>
+          <a:ext cx="0" cy="0"/>
+          <a:chOff x="0" y="0"/>
+          <a:chExt cx="0" cy="0"/>
+        </a:xfrm>
+      </p:grpSpPr>
+      <p:sp>
+        <p:nvSpPr>
+          <p:cNvPr id="2" name="Título 1">
+            <a:extLst>
+              <a:ext uri="{FF2B5EF4-FFF2-40B4-BE49-F238E27FC236}">
+                <a16:creationId xmlns:a16="http://schemas.microsoft.com/office/drawing/2014/main" id="{6FD22263-F229-8740-77C2-C2E16C130208}"/>
+              </a:ext>
+            </a:extLst>
+          </p:cNvPr>
+          <p:cNvSpPr>
+            <a:spLocks noGrp="1"/>
+          </p:cNvSpPr>
+          <p:nvPr>
+            <p:ph type="title"/>
+          </p:nvPr>
+        </p:nvSpPr>
+        <p:spPr/>
+        <p:txBody>
+          <a:bodyPr/>
+          <a:lstStyle/>
+          <a:p>
+            <a:r>
+              <a:rPr lang="pt-BR"/>
+              <a:t>Outros exemplos</a:t>
+            </a:r>
+          </a:p>
+        </p:txBody>
+      </p:sp>
+      <p:sp>
+        <p:nvSpPr>
+          <p:cNvPr id="3" name="Espaço Reservado para Conteúdo 2">
+            <a:extLst>
+              <a:ext uri="{FF2B5EF4-FFF2-40B4-BE49-F238E27FC236}">
+                <a16:creationId xmlns:a16="http://schemas.microsoft.com/office/drawing/2014/main" id="{5291B960-3BC4-84FC-8392-3C98FE96E515}"/>
+              </a:ext>
+            </a:extLst>
+          </p:cNvPr>
+          <p:cNvSpPr>
+            <a:spLocks noGrp="1"/>
+          </p:cNvSpPr>
+          <p:nvPr>
+            <p:ph idx="1"/>
+          </p:nvPr>
+        </p:nvSpPr>
+        <p:spPr/>
+        <p:txBody>
+          <a:bodyPr vert="horz" lIns="91440" tIns="45720" rIns="91440" bIns="45720" rtlCol="0" anchor="t">
+            <a:normAutofit/>
+          </a:bodyPr>
+          <a:lstStyle/>
+          <a:p>
+            <a:pPr marL="0">
+              <a:buNone/>
+            </a:pPr>
+            <a:r>
+              <a:rPr lang="pt-BR" sz="1600" b="1" i="0" u="none" strike="noStrike" baseline="0">
+                <a:solidFill>
+                  <a:srgbClr val="FFC000"/>
+                </a:solidFill>
+                <a:latin typeface="Consolas"/>
+              </a:rPr>
+              <a:t>git commit -m "Adiciona arquivo"</a:t>
+            </a:r>
+            <a:r>
+              <a:rPr lang="pt-BR" sz="1800" b="0" i="0" u="none" strike="noStrike" baseline="0">
+                <a:solidFill>
+                  <a:srgbClr val="FFFFFF"/>
+                </a:solidFill>
+                <a:latin typeface="Century Gothic"/>
+              </a:rPr>
+              <a:t>: salva definitivamente a alteração no histórico do projeto</a:t>
+            </a:r>
+            <a:r>
+              <a:rPr lang="pt-BR" sz="1800" b="0" i="0">
+                <a:latin typeface="Century Gothic"/>
+              </a:rPr>
+              <a:t>​</a:t>
+            </a:r>
+            <a:endParaRPr lang="pt-BR" dirty="0"/>
+          </a:p>
+        </p:txBody>
+      </p:sp>
+      <p:pic>
+        <p:nvPicPr>
+          <p:cNvPr id="4" name="Imagem 3" descr="Texto&#10;&#10;O conteúdo gerado por IA pode estar incorreto.">
+            <a:extLst>
+              <a:ext uri="{FF2B5EF4-FFF2-40B4-BE49-F238E27FC236}">
+                <a16:creationId xmlns:a16="http://schemas.microsoft.com/office/drawing/2014/main" id="{B1FA08B0-CE14-EF3D-9EFC-BCA747FEFFC7}"/>
+              </a:ext>
+            </a:extLst>
+          </p:cNvPr>
+          <p:cNvPicPr>
+            <a:picLocks noChangeAspect="1"/>
+          </p:cNvPicPr>
+          <p:nvPr/>
+        </p:nvPicPr>
+        <p:blipFill>
+          <a:blip r:embed="rId2"/>
+          <a:srcRect r="-161" b="266"/>
+          <a:stretch>
+            <a:fillRect/>
+          </a:stretch>
+        </p:blipFill>
+        <p:spPr>
+          <a:xfrm>
+            <a:off x="2586324" y="2811080"/>
+            <a:ext cx="5743254" cy="3448380"/>
+          </a:xfrm>
+          <a:prstGeom prst="rect">
+            <a:avLst/>
+          </a:prstGeom>
+        </p:spPr>
+      </p:pic>
+    </p:spTree>
+    <p:extLst>
+      <p:ext uri="{BB962C8B-B14F-4D97-AF65-F5344CB8AC3E}">
+        <p14:creationId xmlns:p14="http://schemas.microsoft.com/office/powerpoint/2010/main" val="2995962445"/>
+      </p:ext>
+    </p:extLst>
+  </p:cSld>
+  <p:clrMapOvr>
+    <a:masterClrMapping/>
+  </p:clrMapOvr>
+</p:sld>
+</file>
+
+<file path=ppt/slides/slide16.xml><?xml version="1.0" encoding="utf-8"?>
+<p:sld xmlns:a="http://schemas.openxmlformats.org/drawingml/2006/main" xmlns:r="http://schemas.openxmlformats.org/officeDocument/2006/relationships" xmlns:p="http://schemas.openxmlformats.org/presentationml/2006/main">
+  <p:cSld>
+    <p:spTree>
+      <p:nvGrpSpPr>
         <p:cNvPr id="1" name="">
           <a:extLst>
             <a:ext uri="{FF2B5EF4-FFF2-40B4-BE49-F238E27FC236}">
@@ -9310,10 +9392,10 @@
       </p:sp>
       <p:pic>
         <p:nvPicPr>
-          <p:cNvPr id="4" name="Imagem 3">
+          <p:cNvPr id="6" name="Imagem 5" descr="Texto&#10;&#10;O conteúdo gerado por IA pode estar incorreto.">
             <a:extLst>
               <a:ext uri="{FF2B5EF4-FFF2-40B4-BE49-F238E27FC236}">
-                <a16:creationId xmlns:a16="http://schemas.microsoft.com/office/drawing/2014/main" id="{5023E1BB-6DD8-1252-45B5-B2D03B094A81}"/>
+                <a16:creationId xmlns:a16="http://schemas.microsoft.com/office/drawing/2014/main" id="{BCD408B6-A0E5-0590-1F2C-C2B94D65C5F6}"/>
               </a:ext>
             </a:extLst>
           </p:cNvPr>
@@ -9330,8 +9412,8 @@
         </p:blipFill>
         <p:spPr>
           <a:xfrm>
-            <a:off x="2595563" y="5049838"/>
-            <a:ext cx="7546975" cy="441325"/>
+            <a:off x="2593611" y="4985477"/>
+            <a:ext cx="5076825" cy="742950"/>
           </a:xfrm>
           <a:prstGeom prst="rect">
             <a:avLst/>
@@ -9340,10 +9422,10 @@
       </p:pic>
       <p:pic>
         <p:nvPicPr>
-          <p:cNvPr id="5" name="Imagem 4">
+          <p:cNvPr id="7" name="Imagem 6" descr="Texto&#10;&#10;O conteúdo gerado por IA pode estar incorreto.">
             <a:extLst>
               <a:ext uri="{FF2B5EF4-FFF2-40B4-BE49-F238E27FC236}">
-                <a16:creationId xmlns:a16="http://schemas.microsoft.com/office/drawing/2014/main" id="{E3161464-2FA1-6E4C-6C34-ECE35484B4D4}"/>
+                <a16:creationId xmlns:a16="http://schemas.microsoft.com/office/drawing/2014/main" id="{23408AE6-43EB-70EA-04EB-4282F1583D12}"/>
               </a:ext>
             </a:extLst>
           </p:cNvPr>
@@ -9360,8 +9442,8 @@
         </p:blipFill>
         <p:spPr>
           <a:xfrm>
-            <a:off x="2595563" y="5732463"/>
-            <a:ext cx="7546975" cy="485775"/>
+            <a:off x="2593325" y="5874686"/>
+            <a:ext cx="4838700" cy="561975"/>
           </a:xfrm>
           <a:prstGeom prst="rect">
             <a:avLst/>
@@ -9381,7 +9463,7 @@
 </p:sld>
 </file>
 
-<file path=ppt/slides/slide16.xml><?xml version="1.0" encoding="utf-8"?>
+<file path=ppt/slides/slide17.xml><?xml version="1.0" encoding="utf-8"?>
 <p:sld xmlns:a="http://schemas.openxmlformats.org/drawingml/2006/main" xmlns:r="http://schemas.openxmlformats.org/officeDocument/2006/relationships" xmlns:p="http://schemas.openxmlformats.org/presentationml/2006/main">
   <p:cSld>
     <p:spTree>
@@ -9561,10 +9643,10 @@
       </p:sp>
       <p:pic>
         <p:nvPicPr>
-          <p:cNvPr id="4" name="Imagem 3">
+          <p:cNvPr id="6" name="Imagem 5" descr="Texto&#10;&#10;O conteúdo gerado por IA pode estar incorreto.">
             <a:extLst>
               <a:ext uri="{FF2B5EF4-FFF2-40B4-BE49-F238E27FC236}">
-                <a16:creationId xmlns:a16="http://schemas.microsoft.com/office/drawing/2014/main" id="{E5E5FB07-A258-08A4-5E66-B0759E397CA9}"/>
+                <a16:creationId xmlns:a16="http://schemas.microsoft.com/office/drawing/2014/main" id="{F04B6D1E-ABA7-9475-CB0A-340B2BF555DB}"/>
               </a:ext>
             </a:extLst>
           </p:cNvPr>
@@ -9581,8 +9663,8 @@
         </p:blipFill>
         <p:spPr>
           <a:xfrm>
-            <a:off x="2592388" y="3424238"/>
-            <a:ext cx="7146925" cy="517525"/>
+            <a:off x="2589251" y="3431238"/>
+            <a:ext cx="5324245" cy="702440"/>
           </a:xfrm>
           <a:prstGeom prst="rect">
             <a:avLst/>
@@ -9591,10 +9673,10 @@
       </p:pic>
       <p:pic>
         <p:nvPicPr>
-          <p:cNvPr id="5" name="Imagem 4">
+          <p:cNvPr id="7" name="Imagem 6" descr="Texto&#10;&#10;O conteúdo gerado por IA pode estar incorreto.">
             <a:extLst>
               <a:ext uri="{FF2B5EF4-FFF2-40B4-BE49-F238E27FC236}">
-                <a16:creationId xmlns:a16="http://schemas.microsoft.com/office/drawing/2014/main" id="{D2E9688C-5CE6-3F98-9432-5311298374A5}"/>
+                <a16:creationId xmlns:a16="http://schemas.microsoft.com/office/drawing/2014/main" id="{2687AF6F-B88C-E974-0514-520D4977C2D4}"/>
               </a:ext>
             </a:extLst>
           </p:cNvPr>
@@ -9611,8 +9693,8 @@
         </p:blipFill>
         <p:spPr>
           <a:xfrm>
-            <a:off x="2593975" y="4560888"/>
-            <a:ext cx="7143750" cy="530225"/>
+            <a:off x="2585522" y="4599255"/>
+            <a:ext cx="5331704" cy="588140"/>
           </a:xfrm>
           <a:prstGeom prst="rect">
             <a:avLst/>
@@ -9632,7 +9714,7 @@
 </p:sld>
 </file>
 
-<file path=ppt/slides/slide17.xml><?xml version="1.0" encoding="utf-8"?>
+<file path=ppt/slides/slide18.xml><?xml version="1.0" encoding="utf-8"?>
 <p:sld xmlns:a="http://schemas.openxmlformats.org/drawingml/2006/main" xmlns:r="http://schemas.openxmlformats.org/officeDocument/2006/relationships" xmlns:p="http://schemas.openxmlformats.org/presentationml/2006/main">
   <p:cSld>
     <p:spTree>
@@ -9699,10 +9781,15 @@
             <p:ph idx="1"/>
           </p:nvPr>
         </p:nvSpPr>
-        <p:spPr/>
+        <p:spPr>
+          <a:xfrm>
+            <a:off x="2589212" y="1913263"/>
+            <a:ext cx="8915400" cy="4328465"/>
+          </a:xfrm>
+        </p:spPr>
         <p:txBody>
           <a:bodyPr vert="horz" lIns="91440" tIns="45720" rIns="91440" bIns="45720" rtlCol="0" anchor="t">
-            <a:normAutofit lnSpcReduction="10000"/>
+            <a:normAutofit/>
           </a:bodyPr>
           <a:lstStyle/>
           <a:p>
@@ -9801,74 +9888,7 @@
             <a:pPr marL="0">
               <a:buNone/>
             </a:pPr>
-            <a:r>
-              <a:rPr lang="pt-BR" sz="1900"/>
-              <a:t>Restaurar o arquivo ao estado original</a:t>
-            </a:r>
-            <a:endParaRPr lang="pt-BR" sz="1900" dirty="0"/>
-          </a:p>
-          <a:p>
-            <a:pPr marL="0">
-              <a:buNone/>
-            </a:pPr>
-            <a:r>
-              <a:rPr lang="pt-BR" sz="1600" b="1" dirty="0" err="1">
-                <a:solidFill>
-                  <a:srgbClr val="FFC000"/>
-                </a:solidFill>
-                <a:latin typeface="Consolas"/>
-              </a:rPr>
-              <a:t>git</a:t>
-            </a:r>
-            <a:r>
-              <a:rPr lang="pt-BR" sz="1600" b="1" dirty="0">
-                <a:solidFill>
-                  <a:srgbClr val="FFC000"/>
-                </a:solidFill>
-                <a:latin typeface="Consolas"/>
-              </a:rPr>
-              <a:t> checkout </a:t>
-            </a:r>
-            <a:r>
-              <a:rPr lang="pt-BR" sz="1600" b="1" dirty="0" err="1">
-                <a:solidFill>
-                  <a:srgbClr val="FFC000"/>
-                </a:solidFill>
-                <a:latin typeface="Consolas"/>
-              </a:rPr>
-              <a:t>main</a:t>
-            </a:r>
-            <a:r>
-              <a:rPr lang="pt-BR" sz="1600" b="1" dirty="0">
-                <a:solidFill>
-                  <a:srgbClr val="FFC000"/>
-                </a:solidFill>
-                <a:latin typeface="Consolas"/>
-              </a:rPr>
-              <a:t> -- arquivo.txt</a:t>
-            </a:r>
-            <a:r>
-              <a:rPr lang="pt-BR" sz="1600" dirty="0">
-                <a:ea typeface="+mn-lt"/>
-                <a:cs typeface="+mn-lt"/>
-              </a:rPr>
-              <a:t>: Pega a versão do arquivo da </a:t>
-            </a:r>
-            <a:r>
-              <a:rPr lang="pt-BR" sz="1600" dirty="0" err="1">
-                <a:ea typeface="+mn-lt"/>
-                <a:cs typeface="+mn-lt"/>
-              </a:rPr>
-              <a:t>branch</a:t>
-            </a:r>
-            <a:r>
-              <a:rPr lang="pt-BR" sz="1600" dirty="0">
-                <a:ea typeface="+mn-lt"/>
-                <a:cs typeface="+mn-lt"/>
-              </a:rPr>
-              <a:t> principal e substitui a atual.</a:t>
-            </a:r>
-            <a:endParaRPr lang="pt-BR" sz="1600"/>
+            <a:endParaRPr lang="pt-BR" sz="1600" dirty="0"/>
           </a:p>
           <a:p>
             <a:pPr marL="0" indent="0">
@@ -9898,10 +9918,10 @@
       </p:sp>
       <p:pic>
         <p:nvPicPr>
-          <p:cNvPr id="4" name="Imagem 3">
+          <p:cNvPr id="6" name="Imagem 5" descr="Tela preta com letras brancas&#10;&#10;O conteúdo gerado por IA pode estar incorreto.">
             <a:extLst>
               <a:ext uri="{FF2B5EF4-FFF2-40B4-BE49-F238E27FC236}">
-                <a16:creationId xmlns:a16="http://schemas.microsoft.com/office/drawing/2014/main" id="{4737B4E8-46D2-EFAE-1D29-FAEFC2E99F33}"/>
+                <a16:creationId xmlns:a16="http://schemas.microsoft.com/office/drawing/2014/main" id="{F81C0D00-EC11-C74F-052F-A67FE8CC6269}"/>
               </a:ext>
             </a:extLst>
           </p:cNvPr>
@@ -9918,38 +9938,8 @@
         </p:blipFill>
         <p:spPr>
           <a:xfrm>
-            <a:off x="2598738" y="4398963"/>
-            <a:ext cx="5419725" cy="371475"/>
-          </a:xfrm>
-          <a:prstGeom prst="rect">
-            <a:avLst/>
-          </a:prstGeom>
-        </p:spPr>
-      </p:pic>
-      <p:pic>
-        <p:nvPicPr>
-          <p:cNvPr id="5" name="Imagem 4">
-            <a:extLst>
-              <a:ext uri="{FF2B5EF4-FFF2-40B4-BE49-F238E27FC236}">
-                <a16:creationId xmlns:a16="http://schemas.microsoft.com/office/drawing/2014/main" id="{6723CECD-09DA-3CE1-E2BD-7C8E98D8D221}"/>
-              </a:ext>
-            </a:extLst>
-          </p:cNvPr>
-          <p:cNvPicPr>
-            <a:picLocks noChangeAspect="1"/>
-          </p:cNvPicPr>
-          <p:nvPr/>
-        </p:nvPicPr>
-        <p:blipFill>
-          <a:blip r:embed="rId3"/>
-          <a:stretch>
-            <a:fillRect/>
-          </a:stretch>
-        </p:blipFill>
-        <p:spPr>
-          <a:xfrm>
-            <a:off x="2601913" y="5738813"/>
-            <a:ext cx="5667375" cy="333375"/>
+            <a:off x="2592464" y="4407780"/>
+            <a:ext cx="5648325" cy="704850"/>
           </a:xfrm>
           <a:prstGeom prst="rect">
             <a:avLst/>
@@ -9960,130 +9950,6 @@
     <p:extLst>
       <p:ext uri="{BB962C8B-B14F-4D97-AF65-F5344CB8AC3E}">
         <p14:creationId xmlns:p14="http://schemas.microsoft.com/office/powerpoint/2010/main" val="1726710847"/>
-      </p:ext>
-    </p:extLst>
-  </p:cSld>
-  <p:clrMapOvr>
-    <a:masterClrMapping/>
-  </p:clrMapOvr>
-</p:sld>
-</file>
-
-<file path=ppt/slides/slide18.xml><?xml version="1.0" encoding="utf-8"?>
-<p:sld xmlns:a="http://schemas.openxmlformats.org/drawingml/2006/main" xmlns:r="http://schemas.openxmlformats.org/officeDocument/2006/relationships" xmlns:p="http://schemas.openxmlformats.org/presentationml/2006/main">
-  <p:cSld>
-    <p:spTree>
-      <p:nvGrpSpPr>
-        <p:cNvPr id="1" name=""/>
-        <p:cNvGrpSpPr/>
-        <p:nvPr/>
-      </p:nvGrpSpPr>
-      <p:grpSpPr>
-        <a:xfrm>
-          <a:off x="0" y="0"/>
-          <a:ext cx="0" cy="0"/>
-          <a:chOff x="0" y="0"/>
-          <a:chExt cx="0" cy="0"/>
-        </a:xfrm>
-      </p:grpSpPr>
-      <p:sp>
-        <p:nvSpPr>
-          <p:cNvPr id="2" name="Título 1">
-            <a:extLst>
-              <a:ext uri="{FF2B5EF4-FFF2-40B4-BE49-F238E27FC236}">
-                <a16:creationId xmlns:a16="http://schemas.microsoft.com/office/drawing/2014/main" id="{6F990B24-B6E3-F93B-60B1-B659D1A8F071}"/>
-              </a:ext>
-            </a:extLst>
-          </p:cNvPr>
-          <p:cNvSpPr>
-            <a:spLocks noGrp="1"/>
-          </p:cNvSpPr>
-          <p:nvPr>
-            <p:ph type="title"/>
-          </p:nvPr>
-        </p:nvSpPr>
-        <p:spPr/>
-        <p:txBody>
-          <a:bodyPr/>
-          <a:lstStyle/>
-          <a:p>
-            <a:r>
-              <a:rPr lang="pt-BR"/>
-              <a:t>Considere um problema</a:t>
-            </a:r>
-          </a:p>
-        </p:txBody>
-      </p:sp>
-      <p:sp>
-        <p:nvSpPr>
-          <p:cNvPr id="3" name="Espaço Reservado para Conteúdo 2">
-            <a:extLst>
-              <a:ext uri="{FF2B5EF4-FFF2-40B4-BE49-F238E27FC236}">
-                <a16:creationId xmlns:a16="http://schemas.microsoft.com/office/drawing/2014/main" id="{156BC2B4-B492-2C97-B95A-4FE075A4AECF}"/>
-              </a:ext>
-            </a:extLst>
-          </p:cNvPr>
-          <p:cNvSpPr>
-            <a:spLocks noGrp="1"/>
-          </p:cNvSpPr>
-          <p:nvPr>
-            <p:ph idx="1"/>
-          </p:nvPr>
-        </p:nvSpPr>
-        <p:spPr/>
-        <p:txBody>
-          <a:bodyPr vert="horz" lIns="91440" tIns="45720" rIns="91440" bIns="45720" rtlCol="0" anchor="t">
-            <a:normAutofit lnSpcReduction="10000"/>
-          </a:bodyPr>
-          <a:lstStyle/>
-          <a:p>
-            <a:pPr marL="0" indent="0">
-              <a:buNone/>
-            </a:pPr>
-            <a:r>
-              <a:rPr lang="pt-BR" sz="2800" dirty="0">
-                <a:ea typeface="+mn-lt"/>
-                <a:cs typeface="+mn-lt"/>
-              </a:rPr>
-              <a:t>Um erro crítico é descoberto no código principal enquanto se está trabalhando em uma nova versão de um software, tornando necessário voltar ao arquivo principal sem perder o que se está trabalhando e fazer as alterações sem risco de danificar ainda mais o código, </a:t>
-            </a:r>
-            <a:r>
-              <a:rPr lang="pt-BR" sz="2800">
-                <a:ea typeface="+mn-lt"/>
-                <a:cs typeface="+mn-lt"/>
-              </a:rPr>
-              <a:t>isso é</a:t>
-            </a:r>
-            <a:r>
-              <a:rPr lang="pt-BR" sz="2800" dirty="0">
-                <a:ea typeface="+mn-lt"/>
-                <a:cs typeface="+mn-lt"/>
-              </a:rPr>
-              <a:t> possível? </a:t>
-            </a:r>
-          </a:p>
-          <a:p>
-            <a:pPr marL="0" indent="0">
-              <a:buNone/>
-            </a:pPr>
-            <a:endParaRPr lang="pt-BR" sz="2800" dirty="0"/>
-          </a:p>
-          <a:p>
-            <a:pPr marL="0" indent="0">
-              <a:buNone/>
-            </a:pPr>
-            <a:r>
-              <a:rPr lang="pt-BR" sz="2000"/>
-              <a:t>Primeiro, vamos entender a ferramenta que iremos utilizar para resolver o problema.</a:t>
-            </a:r>
-            <a:endParaRPr lang="pt-BR" sz="2000" dirty="0"/>
-          </a:p>
-        </p:txBody>
-      </p:sp>
-    </p:spTree>
-    <p:extLst>
-      <p:ext uri="{BB962C8B-B14F-4D97-AF65-F5344CB8AC3E}">
-        <p14:creationId xmlns:p14="http://schemas.microsoft.com/office/powerpoint/2010/main" val="965797971"/>
       </p:ext>
     </p:extLst>
   </p:cSld>
@@ -10115,7 +9981,7 @@
           <p:cNvPr id="2" name="Título 1">
             <a:extLst>
               <a:ext uri="{FF2B5EF4-FFF2-40B4-BE49-F238E27FC236}">
-                <a16:creationId xmlns:a16="http://schemas.microsoft.com/office/drawing/2014/main" id="{C74898F8-305F-289F-ECED-47C00F3A435A}"/>
+                <a16:creationId xmlns:a16="http://schemas.microsoft.com/office/drawing/2014/main" id="{65899AD6-91CE-6816-9659-0EB9A8396890}"/>
               </a:ext>
             </a:extLst>
           </p:cNvPr>
@@ -10133,7 +9999,7 @@
           <a:p>
             <a:r>
               <a:rPr lang="pt-BR"/>
-              <a:t>Exemplo prático</a:t>
+              <a:t>Outros exemplos</a:t>
             </a:r>
           </a:p>
         </p:txBody>
@@ -10143,7 +10009,7 @@
           <p:cNvPr id="3" name="Espaço Reservado para Conteúdo 2">
             <a:extLst>
               <a:ext uri="{FF2B5EF4-FFF2-40B4-BE49-F238E27FC236}">
-                <a16:creationId xmlns:a16="http://schemas.microsoft.com/office/drawing/2014/main" id="{3681C089-4161-E596-39A7-053DCC55AC19}"/>
+                <a16:creationId xmlns:a16="http://schemas.microsoft.com/office/drawing/2014/main" id="{D2062FAD-3B2D-0CA5-DD27-351DA489CE39}"/>
               </a:ext>
             </a:extLst>
           </p:cNvPr>
@@ -10157,234 +10023,114 @@
         <p:spPr/>
         <p:txBody>
           <a:bodyPr vert="horz" lIns="91440" tIns="45720" rIns="91440" bIns="45720" rtlCol="0" anchor="t">
-            <a:normAutofit fontScale="92500" lnSpcReduction="10000"/>
+            <a:normAutofit/>
           </a:bodyPr>
           <a:lstStyle/>
           <a:p>
+            <a:pPr marL="0">
+              <a:buNone/>
+            </a:pPr>
+            <a:r>
+              <a:rPr lang="pt-BR" sz="1900"/>
+              <a:t>Restaurar o arquivo ao estado original</a:t>
+            </a:r>
+          </a:p>
+          <a:p>
+            <a:pPr marL="0">
+              <a:buNone/>
+            </a:pPr>
+            <a:r>
+              <a:rPr lang="pt-BR" sz="1600" b="1" dirty="0" err="1">
+                <a:solidFill>
+                  <a:srgbClr val="FFC000"/>
+                </a:solidFill>
+                <a:latin typeface="Consolas"/>
+              </a:rPr>
+              <a:t>git</a:t>
+            </a:r>
+            <a:r>
+              <a:rPr lang="pt-BR" sz="1600" b="1" dirty="0">
+                <a:solidFill>
+                  <a:srgbClr val="FFC000"/>
+                </a:solidFill>
+                <a:latin typeface="Consolas"/>
+              </a:rPr>
+              <a:t> checkout </a:t>
+            </a:r>
+            <a:r>
+              <a:rPr lang="pt-BR" sz="1600" b="1" dirty="0" err="1">
+                <a:solidFill>
+                  <a:srgbClr val="FFC000"/>
+                </a:solidFill>
+                <a:latin typeface="Consolas"/>
+              </a:rPr>
+              <a:t>main</a:t>
+            </a:r>
+            <a:r>
+              <a:rPr lang="pt-BR" sz="1600" b="1" dirty="0">
+                <a:solidFill>
+                  <a:srgbClr val="FFC000"/>
+                </a:solidFill>
+                <a:latin typeface="Consolas"/>
+              </a:rPr>
+              <a:t> -- arquivo.txt</a:t>
+            </a:r>
+            <a:r>
+              <a:rPr lang="pt-BR" sz="1600" dirty="0"/>
+              <a:t>: Pega a versão do arquivo da </a:t>
+            </a:r>
+            <a:r>
+              <a:rPr lang="pt-BR" sz="1600" dirty="0" err="1"/>
+              <a:t>branch</a:t>
+            </a:r>
+            <a:r>
+              <a:rPr lang="pt-BR" sz="1600" dirty="0"/>
+              <a:t> principal e substitui a atual.</a:t>
+            </a:r>
+          </a:p>
+          <a:p>
             <a:pPr marL="0" indent="0">
               <a:buNone/>
             </a:pPr>
-            <a:r>
-              <a:rPr lang="pt-BR" dirty="0"/>
-              <a:t>Voltando ao problema do </a:t>
-            </a:r>
-            <a:r>
-              <a:rPr lang="pt-BR"/>
-              <a:t>início</a:t>
-            </a:r>
-            <a:r>
-              <a:rPr lang="pt-BR" dirty="0"/>
-              <a:t> da apresentação:</a:t>
-            </a:r>
-          </a:p>
-          <a:p>
-            <a:pPr marL="0" indent="0">
-              <a:buNone/>
-            </a:pPr>
             <a:endParaRPr lang="pt-BR" dirty="0"/>
           </a:p>
-          <a:p>
-            <a:pPr marL="0" indent="0">
-              <a:buNone/>
-            </a:pPr>
-            <a:r>
-              <a:rPr lang="pt-BR"/>
-              <a:t>Aqui estão os passos que serão seguidos para resolver o problema:</a:t>
-            </a:r>
-          </a:p>
-          <a:p>
-            <a:pPr marL="0" indent="0">
-              <a:buNone/>
-            </a:pPr>
-            <a:endParaRPr lang="pt-BR" dirty="0"/>
-          </a:p>
-          <a:p>
-            <a:pPr marL="0" indent="0">
-              <a:buNone/>
-            </a:pPr>
-            <a:r>
-              <a:rPr lang="pt-BR" sz="1900"/>
-              <a:t>1. Salvar temporariamente o que você está fazendo</a:t>
-            </a:r>
-          </a:p>
-          <a:p>
-            <a:pPr>
-              <a:buNone/>
-            </a:pPr>
-            <a:r>
-              <a:rPr lang="pt-BR" sz="1700" b="1" dirty="0" err="1">
-                <a:solidFill>
-                  <a:srgbClr val="FFC000"/>
-                </a:solidFill>
-                <a:latin typeface="Consolas"/>
-              </a:rPr>
-              <a:t>git</a:t>
-            </a:r>
-            <a:r>
-              <a:rPr lang="pt-BR" sz="1700" b="1" dirty="0">
-                <a:solidFill>
-                  <a:srgbClr val="FFC000"/>
-                </a:solidFill>
-                <a:latin typeface="Consolas"/>
-              </a:rPr>
-              <a:t> </a:t>
-            </a:r>
-            <a:r>
-              <a:rPr lang="pt-BR" sz="1700" b="1" dirty="0" err="1">
-                <a:solidFill>
-                  <a:srgbClr val="FFC000"/>
-                </a:solidFill>
-                <a:latin typeface="Consolas"/>
-              </a:rPr>
-              <a:t>stash</a:t>
-            </a:r>
-            <a:r>
-              <a:rPr lang="pt-BR" sz="1700" dirty="0">
-                <a:ea typeface="+mn-lt"/>
-                <a:cs typeface="+mn-lt"/>
-              </a:rPr>
-              <a:t> </a:t>
-            </a:r>
-            <a:r>
-              <a:rPr lang="pt-BR" sz="1700" b="1" dirty="0">
-                <a:ea typeface="+mn-lt"/>
-                <a:cs typeface="+mn-lt"/>
-              </a:rPr>
-              <a:t>: </a:t>
-            </a:r>
-            <a:r>
-              <a:rPr lang="pt-BR" sz="1700" dirty="0">
-                <a:ea typeface="+mn-lt"/>
-                <a:cs typeface="+mn-lt"/>
-              </a:rPr>
-              <a:t>Guarda temporariamente suas alterações não </a:t>
-            </a:r>
-            <a:r>
-              <a:rPr lang="pt-BR" sz="1700" dirty="0" err="1">
-                <a:ea typeface="+mn-lt"/>
-                <a:cs typeface="+mn-lt"/>
-              </a:rPr>
-              <a:t>confirmadas  e</a:t>
-            </a:r>
-            <a:r>
-              <a:rPr lang="pt-BR" sz="1700" dirty="0">
-                <a:ea typeface="+mn-lt"/>
-                <a:cs typeface="+mn-lt"/>
-              </a:rPr>
-              <a:t> limpa o diretório de trabalho, permitindo mudar de contexto sem perder nada.</a:t>
-            </a:r>
-            <a:endParaRPr lang="pt-BR" sz="1700"/>
-          </a:p>
-          <a:p>
-            <a:pPr>
-              <a:buNone/>
-            </a:pPr>
-            <a:endParaRPr lang="pt-BR" dirty="0"/>
-          </a:p>
-          <a:p>
-            <a:pPr>
-              <a:buNone/>
-            </a:pPr>
-            <a:r>
-              <a:rPr lang="pt-BR" sz="1900" dirty="0"/>
-              <a:t>2. Voltar para a </a:t>
-            </a:r>
-            <a:r>
-              <a:rPr lang="pt-BR" sz="1900" dirty="0" err="1"/>
-              <a:t>branch</a:t>
-            </a:r>
-            <a:r>
-              <a:rPr lang="pt-BR" sz="1900" dirty="0"/>
-              <a:t> principal</a:t>
-            </a:r>
-          </a:p>
-          <a:p>
-            <a:pPr>
-              <a:buNone/>
-            </a:pPr>
-            <a:r>
-              <a:rPr lang="pt-BR" sz="1700" b="1" err="1">
-                <a:solidFill>
-                  <a:srgbClr val="FFC000"/>
-                </a:solidFill>
-                <a:latin typeface="Consolas"/>
-              </a:rPr>
-              <a:t>git</a:t>
-            </a:r>
-            <a:r>
-              <a:rPr lang="pt-BR" sz="1700" b="1" dirty="0">
-                <a:solidFill>
-                  <a:srgbClr val="FFC000"/>
-                </a:solidFill>
-                <a:latin typeface="Consolas"/>
-              </a:rPr>
-              <a:t> checkout </a:t>
-            </a:r>
-            <a:r>
-              <a:rPr lang="pt-BR" sz="1700" b="1" err="1">
-                <a:solidFill>
-                  <a:srgbClr val="FFC000"/>
-                </a:solidFill>
-                <a:latin typeface="Consolas"/>
-              </a:rPr>
-              <a:t>main</a:t>
-            </a:r>
-            <a:r>
-              <a:rPr lang="pt-BR" sz="1700" b="1" dirty="0">
-                <a:ea typeface="+mn-lt"/>
-                <a:cs typeface="+mn-lt"/>
-              </a:rPr>
-              <a:t>: </a:t>
-            </a:r>
-            <a:r>
-              <a:rPr lang="pt-BR" sz="1700" dirty="0">
-                <a:ea typeface="+mn-lt"/>
-                <a:cs typeface="+mn-lt"/>
-              </a:rPr>
-              <a:t>Muda para a </a:t>
-            </a:r>
-            <a:r>
-              <a:rPr lang="pt-BR" sz="1700" err="1">
-                <a:ea typeface="+mn-lt"/>
-                <a:cs typeface="+mn-lt"/>
-              </a:rPr>
-              <a:t>branch</a:t>
-            </a:r>
-            <a:r>
-              <a:rPr lang="pt-BR" sz="1700" dirty="0">
-                <a:ea typeface="+mn-lt"/>
-                <a:cs typeface="+mn-lt"/>
-              </a:rPr>
-              <a:t> principal do projeto, onde está o </a:t>
-            </a:r>
-            <a:r>
-              <a:rPr lang="pt-BR" sz="1700">
-                <a:ea typeface="+mn-lt"/>
-                <a:cs typeface="+mn-lt"/>
-              </a:rPr>
-              <a:t>código “oficial</a:t>
-            </a:r>
-            <a:r>
-              <a:rPr lang="pt-BR" sz="1700" dirty="0">
-                <a:ea typeface="+mn-lt"/>
-                <a:cs typeface="+mn-lt"/>
-              </a:rPr>
-              <a:t>”.</a:t>
-            </a:r>
-            <a:endParaRPr lang="pt-BR" sz="1700" dirty="0"/>
-          </a:p>
-          <a:p>
-            <a:pPr>
-              <a:buNone/>
-            </a:pPr>
-            <a:endParaRPr lang="pt-BR" dirty="0"/>
-          </a:p>
         </p:txBody>
       </p:sp>
+      <p:pic>
+        <p:nvPicPr>
+          <p:cNvPr id="4" name="Imagem 3" descr="Texto&#10;&#10;O conteúdo gerado por IA pode estar incorreto.">
+            <a:extLst>
+              <a:ext uri="{FF2B5EF4-FFF2-40B4-BE49-F238E27FC236}">
+                <a16:creationId xmlns:a16="http://schemas.microsoft.com/office/drawing/2014/main" id="{AE9488D8-A650-948F-F92A-9FD21516D7BF}"/>
+              </a:ext>
+            </a:extLst>
+          </p:cNvPr>
+          <p:cNvPicPr>
+            <a:picLocks noChangeAspect="1"/>
+          </p:cNvPicPr>
+          <p:nvPr/>
+        </p:nvPicPr>
+        <p:blipFill>
+          <a:blip r:embed="rId2"/>
+          <a:srcRect r="178" b="-1190"/>
+          <a:stretch>
+            <a:fillRect/>
+          </a:stretch>
+        </p:blipFill>
+        <p:spPr>
+          <a:xfrm>
+            <a:off x="2592234" y="3433246"/>
+            <a:ext cx="6190443" cy="946420"/>
+          </a:xfrm>
+          <a:prstGeom prst="rect">
+            <a:avLst/>
+          </a:prstGeom>
+        </p:spPr>
+      </p:pic>
     </p:spTree>
     <p:extLst>
       <p:ext uri="{BB962C8B-B14F-4D97-AF65-F5344CB8AC3E}">
-        <p14:creationId xmlns:p14="http://schemas.microsoft.com/office/powerpoint/2010/main" val="2204593060"/>
+        <p14:creationId xmlns:p14="http://schemas.microsoft.com/office/powerpoint/2010/main" val="2361390786"/>
       </p:ext>
     </p:extLst>
   </p:cSld>
@@ -10713,7 +10459,7 @@
           <p:cNvPr id="2" name="Título 1">
             <a:extLst>
               <a:ext uri="{FF2B5EF4-FFF2-40B4-BE49-F238E27FC236}">
-                <a16:creationId xmlns:a16="http://schemas.microsoft.com/office/drawing/2014/main" id="{B030202A-434E-C143-E16A-301CE0C409B3}"/>
+                <a16:creationId xmlns:a16="http://schemas.microsoft.com/office/drawing/2014/main" id="{6F990B24-B6E3-F93B-60B1-B659D1A8F071}"/>
               </a:ext>
             </a:extLst>
           </p:cNvPr>
@@ -10731,7 +10477,7 @@
           <a:p>
             <a:r>
               <a:rPr lang="pt-BR"/>
-              <a:t>Exemplo prático</a:t>
+              <a:t>Considere um problema</a:t>
             </a:r>
           </a:p>
         </p:txBody>
@@ -10741,7 +10487,7 @@
           <p:cNvPr id="3" name="Espaço Reservado para Conteúdo 2">
             <a:extLst>
               <a:ext uri="{FF2B5EF4-FFF2-40B4-BE49-F238E27FC236}">
-                <a16:creationId xmlns:a16="http://schemas.microsoft.com/office/drawing/2014/main" id="{90FBAB7E-6A0D-72F8-4557-CF94C58774EF}"/>
+                <a16:creationId xmlns:a16="http://schemas.microsoft.com/office/drawing/2014/main" id="{156BC2B4-B492-2C97-B95A-4FE075A4AECF}"/>
               </a:ext>
             </a:extLst>
           </p:cNvPr>
@@ -10752,460 +10498,60 @@
             <p:ph idx="1"/>
           </p:nvPr>
         </p:nvSpPr>
-        <p:spPr>
-          <a:xfrm>
-            <a:off x="2589212" y="1714500"/>
-            <a:ext cx="8915400" cy="4636337"/>
-          </a:xfrm>
-        </p:spPr>
+        <p:spPr/>
         <p:txBody>
           <a:bodyPr vert="horz" lIns="91440" tIns="45720" rIns="91440" bIns="45720" rtlCol="0" anchor="t">
-            <a:normAutofit/>
+            <a:normAutofit lnSpcReduction="10000"/>
           </a:bodyPr>
           <a:lstStyle/>
           <a:p>
-            <a:pPr>
-              <a:buNone/>
-            </a:pPr>
-            <a:r>
-              <a:rPr lang="pt-BR" dirty="0"/>
-              <a:t>3. Criar uma nova </a:t>
-            </a:r>
-            <a:r>
-              <a:rPr lang="pt-BR" dirty="0" err="1"/>
-              <a:t>branch</a:t>
-            </a:r>
-            <a:r>
-              <a:rPr lang="pt-BR" dirty="0"/>
-              <a:t> para corrigir o erro</a:t>
-            </a:r>
-            <a:endParaRPr lang="en-US" dirty="0"/>
-          </a:p>
-          <a:p>
-            <a:pPr marL="0">
-              <a:buNone/>
-            </a:pPr>
-            <a:r>
-              <a:rPr lang="pt-BR" sz="1600" b="1" dirty="0" err="1">
-                <a:solidFill>
-                  <a:srgbClr val="FFC000"/>
-                </a:solidFill>
-                <a:latin typeface="Consolas"/>
-              </a:rPr>
-              <a:t>git</a:t>
-            </a:r>
-            <a:r>
-              <a:rPr lang="pt-BR" sz="1600" b="1" dirty="0">
-                <a:solidFill>
-                  <a:srgbClr val="FFC000"/>
-                </a:solidFill>
-                <a:latin typeface="Consolas"/>
-              </a:rPr>
-              <a:t> checkout -b </a:t>
-            </a:r>
-            <a:r>
-              <a:rPr lang="pt-BR" sz="1600" b="1" dirty="0" err="1">
-                <a:solidFill>
-                  <a:srgbClr val="FFC000"/>
-                </a:solidFill>
-                <a:latin typeface="Consolas"/>
-              </a:rPr>
-              <a:t>hotfix</a:t>
-            </a:r>
-            <a:r>
-              <a:rPr lang="pt-BR" sz="1600" b="1" dirty="0">
-                <a:solidFill>
-                  <a:srgbClr val="FFC000"/>
-                </a:solidFill>
-                <a:latin typeface="Consolas"/>
-              </a:rPr>
-              <a:t>-erro-</a:t>
-            </a:r>
-            <a:r>
-              <a:rPr lang="pt-BR" sz="1600" b="1" dirty="0" err="1">
-                <a:solidFill>
-                  <a:srgbClr val="FFC000"/>
-                </a:solidFill>
-                <a:latin typeface="Consolas"/>
-              </a:rPr>
-              <a:t>critico</a:t>
-            </a:r>
-            <a:r>
-              <a:rPr lang="pt-BR" sz="1600" b="1" dirty="0">
-                <a:solidFill>
-                  <a:srgbClr val="FFC000"/>
-                </a:solidFill>
-                <a:latin typeface="Consolas"/>
-              </a:rPr>
-              <a:t>:</a:t>
-            </a:r>
-            <a:r>
-              <a:rPr lang="pt-BR" sz="1600" b="1" dirty="0"/>
-              <a:t> </a:t>
-            </a:r>
-            <a:r>
-              <a:rPr lang="pt-BR" sz="1600" dirty="0"/>
-              <a:t>Cria e já muda para uma nova </a:t>
-            </a:r>
-            <a:r>
-              <a:rPr lang="pt-BR" sz="1600" dirty="0" err="1"/>
-              <a:t>branch</a:t>
-            </a:r>
-            <a:r>
-              <a:rPr lang="pt-BR" sz="1600" dirty="0"/>
-              <a:t>. Isso isola a correção sem afetar o código principal diretamente.</a:t>
-            </a:r>
-          </a:p>
-          <a:p>
-            <a:pPr>
-              <a:buNone/>
-            </a:pPr>
-            <a:endParaRPr lang="pt-BR" sz="1600" dirty="0"/>
-          </a:p>
-          <a:p>
-            <a:pPr>
-              <a:buNone/>
-            </a:pPr>
-            <a:r>
-              <a:rPr lang="pt-BR"/>
-              <a:t>4. Corrigir o erro e salvar</a:t>
-            </a:r>
-            <a:endParaRPr lang="en-US" dirty="0"/>
-          </a:p>
-          <a:p>
-            <a:pPr>
-              <a:buNone/>
-            </a:pPr>
-            <a:r>
-              <a:rPr lang="pt-BR" sz="1600" b="1" dirty="0" err="1">
-                <a:solidFill>
-                  <a:srgbClr val="FFC000"/>
-                </a:solidFill>
-                <a:latin typeface="Consolas"/>
-              </a:rPr>
-              <a:t>git</a:t>
-            </a:r>
-            <a:r>
-              <a:rPr lang="pt-BR" sz="1600" b="1" dirty="0">
-                <a:solidFill>
-                  <a:srgbClr val="FFC000"/>
-                </a:solidFill>
-                <a:latin typeface="Consolas"/>
-              </a:rPr>
-              <a:t> </a:t>
-            </a:r>
-            <a:r>
-              <a:rPr lang="pt-BR" sz="1600" b="1" dirty="0" err="1">
-                <a:solidFill>
-                  <a:srgbClr val="FFC000"/>
-                </a:solidFill>
-                <a:latin typeface="Consolas"/>
-              </a:rPr>
-              <a:t>add</a:t>
-            </a:r>
-            <a:r>
-              <a:rPr lang="pt-BR" sz="1600" b="1" dirty="0">
-                <a:solidFill>
-                  <a:srgbClr val="FFC000"/>
-                </a:solidFill>
-                <a:latin typeface="Consolas"/>
-              </a:rPr>
-              <a:t>:</a:t>
-            </a:r>
-            <a:r>
-              <a:rPr lang="pt-BR" sz="1600" dirty="0">
-                <a:latin typeface="Century Gothic"/>
-              </a:rPr>
-              <a:t> prepara as alterações para </a:t>
-            </a:r>
-            <a:r>
-              <a:rPr lang="pt-BR" sz="1600" dirty="0" err="1">
-                <a:latin typeface="Century Gothic"/>
-              </a:rPr>
-              <a:t>commit</a:t>
-            </a:r>
-            <a:r>
-              <a:rPr lang="pt-BR" sz="1600" dirty="0">
-                <a:latin typeface="Century Gothic"/>
-              </a:rPr>
-              <a:t> </a:t>
-            </a:r>
-          </a:p>
-          <a:p>
-            <a:pPr>
-              <a:buNone/>
-            </a:pPr>
-            <a:r>
-              <a:rPr lang="pt-BR" sz="1600" b="1" dirty="0" err="1">
-                <a:solidFill>
-                  <a:srgbClr val="FFC000"/>
-                </a:solidFill>
-                <a:latin typeface="Consolas"/>
-              </a:rPr>
-              <a:t>git</a:t>
-            </a:r>
-            <a:r>
-              <a:rPr lang="pt-BR" sz="1600" b="1" dirty="0">
-                <a:solidFill>
-                  <a:srgbClr val="FFC000"/>
-                </a:solidFill>
-                <a:latin typeface="Consolas"/>
-              </a:rPr>
-              <a:t> </a:t>
-            </a:r>
-            <a:r>
-              <a:rPr lang="pt-BR" sz="1600" b="1" dirty="0" err="1">
-                <a:solidFill>
-                  <a:srgbClr val="FFC000"/>
-                </a:solidFill>
-                <a:latin typeface="Consolas"/>
-              </a:rPr>
-              <a:t>commit</a:t>
-            </a:r>
-            <a:r>
-              <a:rPr lang="pt-BR" sz="1600" b="1" dirty="0">
-                <a:solidFill>
-                  <a:srgbClr val="FFC000"/>
-                </a:solidFill>
-                <a:latin typeface="Consolas"/>
-              </a:rPr>
-              <a:t> -m "Corrige erro crítico</a:t>
-            </a:r>
-            <a:r>
-              <a:rPr lang="pt-BR" sz="1600" dirty="0">
-                <a:latin typeface="Century Gothic"/>
-              </a:rPr>
-              <a:t>": salva a correção no histórico </a:t>
-            </a:r>
-          </a:p>
-          <a:p>
-            <a:pPr indent="0">
-              <a:buNone/>
-            </a:pPr>
-            <a:endParaRPr lang="en-US" sz="1600" dirty="0"/>
-          </a:p>
-          <a:p>
-            <a:pPr>
-              <a:buNone/>
-            </a:pPr>
-            <a:r>
-              <a:rPr lang="pt-BR" dirty="0"/>
-              <a:t>5. Aplicar a correção na </a:t>
-            </a:r>
-            <a:r>
-              <a:rPr lang="pt-BR" dirty="0" err="1"/>
-              <a:t>branch</a:t>
-            </a:r>
-            <a:r>
-              <a:rPr lang="pt-BR" dirty="0"/>
-              <a:t> principal</a:t>
-            </a:r>
-            <a:endParaRPr lang="en-US" dirty="0"/>
-          </a:p>
-          <a:p>
-            <a:pPr>
-              <a:buNone/>
-            </a:pPr>
-            <a:r>
-              <a:rPr lang="pt-BR" sz="1600" b="1" dirty="0" err="1">
-                <a:solidFill>
-                  <a:srgbClr val="FFC000"/>
-                </a:solidFill>
-                <a:latin typeface="Consolas"/>
-              </a:rPr>
-              <a:t>git</a:t>
-            </a:r>
-            <a:r>
-              <a:rPr lang="pt-BR" sz="1600" b="1" dirty="0">
-                <a:solidFill>
-                  <a:srgbClr val="FFC000"/>
-                </a:solidFill>
-                <a:latin typeface="Consolas"/>
-              </a:rPr>
-              <a:t> checkout </a:t>
-            </a:r>
-            <a:r>
-              <a:rPr lang="pt-BR" sz="1600" b="1" dirty="0" err="1">
-                <a:solidFill>
-                  <a:srgbClr val="FFC000"/>
-                </a:solidFill>
-                <a:latin typeface="Consolas"/>
-              </a:rPr>
-              <a:t>main</a:t>
-            </a:r>
-            <a:r>
-              <a:rPr lang="pt-BR" sz="1600" b="1" dirty="0">
-                <a:solidFill>
-                  <a:srgbClr val="FFC000"/>
-                </a:solidFill>
-                <a:latin typeface="Consolas"/>
-              </a:rPr>
-              <a:t>:</a:t>
-            </a:r>
-            <a:r>
-              <a:rPr lang="pt-BR" sz="1600" dirty="0"/>
-              <a:t> Volta para a </a:t>
-            </a:r>
-            <a:r>
-              <a:rPr lang="pt-BR" sz="1600" dirty="0" err="1"/>
-              <a:t>branch</a:t>
-            </a:r>
-            <a:r>
-              <a:rPr lang="pt-BR" sz="1600" dirty="0"/>
-              <a:t> principal</a:t>
-            </a:r>
-            <a:endParaRPr lang="en-US" sz="1600" dirty="0"/>
-          </a:p>
-          <a:p>
-            <a:pPr>
-              <a:buNone/>
-            </a:pPr>
-            <a:r>
-              <a:rPr lang="pt-BR" sz="1600" b="1" dirty="0" err="1">
-                <a:solidFill>
-                  <a:srgbClr val="FFC000"/>
-                </a:solidFill>
-                <a:latin typeface="Consolas"/>
-              </a:rPr>
-              <a:t>git</a:t>
-            </a:r>
-            <a:r>
-              <a:rPr lang="pt-BR" sz="1600" b="1" dirty="0">
-                <a:solidFill>
-                  <a:srgbClr val="FFC000"/>
-                </a:solidFill>
-                <a:latin typeface="Consolas"/>
-              </a:rPr>
-              <a:t> merge </a:t>
-            </a:r>
-            <a:r>
-              <a:rPr lang="pt-BR" sz="1600" b="1" dirty="0" err="1">
-                <a:solidFill>
-                  <a:srgbClr val="FFC000"/>
-                </a:solidFill>
-                <a:latin typeface="Consolas"/>
-              </a:rPr>
-              <a:t>hotfix</a:t>
-            </a:r>
-            <a:r>
-              <a:rPr lang="pt-BR" sz="1600" b="1" dirty="0">
-                <a:solidFill>
-                  <a:srgbClr val="FFC000"/>
-                </a:solidFill>
-                <a:latin typeface="Consolas"/>
-              </a:rPr>
-              <a:t>-erro-</a:t>
-            </a:r>
-            <a:r>
-              <a:rPr lang="pt-BR" sz="1600" b="1" dirty="0" err="1">
-                <a:solidFill>
-                  <a:srgbClr val="FFC000"/>
-                </a:solidFill>
-                <a:latin typeface="Consolas"/>
-              </a:rPr>
-              <a:t>critico</a:t>
-            </a:r>
-            <a:r>
-              <a:rPr lang="pt-BR" sz="1600" b="1" dirty="0">
-                <a:solidFill>
-                  <a:srgbClr val="FFC000"/>
-                </a:solidFill>
-                <a:latin typeface="Consolas"/>
-              </a:rPr>
-              <a:t>:</a:t>
-            </a:r>
-            <a:r>
-              <a:rPr lang="pt-BR" sz="1600" dirty="0"/>
-              <a:t> Junta (</a:t>
-            </a:r>
-            <a:r>
-              <a:rPr lang="pt-BR" sz="1600" i="1" dirty="0"/>
-              <a:t>merge</a:t>
-            </a:r>
-            <a:r>
-              <a:rPr lang="pt-BR" sz="1600" dirty="0"/>
-              <a:t>) a correção feita na </a:t>
-            </a:r>
-            <a:r>
-              <a:rPr lang="pt-BR" sz="1600" dirty="0" err="1"/>
-              <a:t>branch</a:t>
-            </a:r>
-            <a:r>
-              <a:rPr lang="pt-BR" sz="1600" dirty="0"/>
-              <a:t> de </a:t>
-            </a:r>
-            <a:r>
-              <a:rPr lang="pt-BR" sz="1600" dirty="0" err="1"/>
-              <a:t>hotfix</a:t>
-            </a:r>
-            <a:endParaRPr lang="pt-BR" sz="1600" dirty="0"/>
+            <a:pPr marL="0" indent="0">
+              <a:buNone/>
+            </a:pPr>
+            <a:r>
+              <a:rPr lang="pt-BR" sz="2800" dirty="0">
+                <a:ea typeface="+mn-lt"/>
+                <a:cs typeface="+mn-lt"/>
+              </a:rPr>
+              <a:t>Um erro crítico é descoberto no código principal enquanto se está trabalhando em uma nova versão de um software, tornando necessário voltar ao arquivo principal sem perder o que se está trabalhando e fazer as alterações sem risco de danificar ainda mais o código, </a:t>
+            </a:r>
+            <a:r>
+              <a:rPr lang="pt-BR" sz="2800">
+                <a:ea typeface="+mn-lt"/>
+                <a:cs typeface="+mn-lt"/>
+              </a:rPr>
+              <a:t>isso é</a:t>
+            </a:r>
+            <a:r>
+              <a:rPr lang="pt-BR" sz="2800" dirty="0">
+                <a:ea typeface="+mn-lt"/>
+                <a:cs typeface="+mn-lt"/>
+              </a:rPr>
+              <a:t> possível? </a:t>
+            </a:r>
+          </a:p>
+          <a:p>
+            <a:pPr marL="0" indent="0">
+              <a:buNone/>
+            </a:pPr>
+            <a:endParaRPr lang="pt-BR" sz="2800" dirty="0"/>
+          </a:p>
+          <a:p>
+            <a:pPr marL="0" indent="0">
+              <a:buNone/>
+            </a:pPr>
+            <a:r>
+              <a:rPr lang="pt-BR" sz="2000"/>
+              <a:t>Primeiro, vamos entender a ferramenta que iremos utilizar para resolver o problema.</a:t>
+            </a:r>
+            <a:endParaRPr lang="pt-BR" sz="2000" dirty="0"/>
           </a:p>
         </p:txBody>
       </p:sp>
-      <p:pic>
-        <p:nvPicPr>
-          <p:cNvPr id="4" name="Imagem 3">
-            <a:extLst>
-              <a:ext uri="{FF2B5EF4-FFF2-40B4-BE49-F238E27FC236}">
-                <a16:creationId xmlns:a16="http://schemas.microsoft.com/office/drawing/2014/main" id="{6DAD216A-87BE-8598-A6F8-687228701E53}"/>
-              </a:ext>
-            </a:extLst>
-          </p:cNvPr>
-          <p:cNvPicPr>
-            <a:picLocks noChangeAspect="1"/>
-          </p:cNvPicPr>
-          <p:nvPr/>
-        </p:nvPicPr>
-        <p:blipFill>
-          <a:blip r:embed="rId2"/>
-          <a:stretch>
-            <a:fillRect/>
-          </a:stretch>
-        </p:blipFill>
-        <p:spPr>
-          <a:xfrm>
-            <a:off x="2592388" y="5803900"/>
-            <a:ext cx="7007225" cy="431800"/>
-          </a:xfrm>
-          <a:prstGeom prst="rect">
-            <a:avLst/>
-          </a:prstGeom>
-        </p:spPr>
-      </p:pic>
-      <p:pic>
-        <p:nvPicPr>
-          <p:cNvPr id="5" name="Imagem 4">
-            <a:extLst>
-              <a:ext uri="{FF2B5EF4-FFF2-40B4-BE49-F238E27FC236}">
-                <a16:creationId xmlns:a16="http://schemas.microsoft.com/office/drawing/2014/main" id="{6D6E164E-5CC0-4767-0F1B-B1056E3F76BC}"/>
-              </a:ext>
-            </a:extLst>
-          </p:cNvPr>
-          <p:cNvPicPr>
-            <a:picLocks noChangeAspect="1"/>
-          </p:cNvPicPr>
-          <p:nvPr/>
-        </p:nvPicPr>
-        <p:blipFill>
-          <a:blip r:embed="rId3"/>
-          <a:stretch>
-            <a:fillRect/>
-          </a:stretch>
-        </p:blipFill>
-        <p:spPr>
-          <a:xfrm>
-            <a:off x="2587625" y="2730500"/>
-            <a:ext cx="6546850" cy="406400"/>
-          </a:xfrm>
-          <a:prstGeom prst="rect">
-            <a:avLst/>
-          </a:prstGeom>
-        </p:spPr>
-      </p:pic>
     </p:spTree>
     <p:extLst>
       <p:ext uri="{BB962C8B-B14F-4D97-AF65-F5344CB8AC3E}">
-        <p14:creationId xmlns:p14="http://schemas.microsoft.com/office/powerpoint/2010/main" val="2278136201"/>
+        <p14:creationId xmlns:p14="http://schemas.microsoft.com/office/powerpoint/2010/main" val="965797971"/>
       </p:ext>
     </p:extLst>
   </p:cSld>
@@ -11237,7 +10583,7 @@
           <p:cNvPr id="2" name="Título 1">
             <a:extLst>
               <a:ext uri="{FF2B5EF4-FFF2-40B4-BE49-F238E27FC236}">
-                <a16:creationId xmlns:a16="http://schemas.microsoft.com/office/drawing/2014/main" id="{EBA43D66-D1A5-D712-35D2-EC7476137982}"/>
+                <a16:creationId xmlns:a16="http://schemas.microsoft.com/office/drawing/2014/main" id="{C74898F8-305F-289F-ECED-47C00F3A435A}"/>
               </a:ext>
             </a:extLst>
           </p:cNvPr>
@@ -11265,7 +10611,7 @@
           <p:cNvPr id="3" name="Espaço Reservado para Conteúdo 2">
             <a:extLst>
               <a:ext uri="{FF2B5EF4-FFF2-40B4-BE49-F238E27FC236}">
-                <a16:creationId xmlns:a16="http://schemas.microsoft.com/office/drawing/2014/main" id="{68AE4F73-8AE1-B869-AD7A-6EA2A99A1AA0}"/>
+                <a16:creationId xmlns:a16="http://schemas.microsoft.com/office/drawing/2014/main" id="{3681C089-4161-E596-39A7-053DCC55AC19}"/>
               </a:ext>
             </a:extLst>
           </p:cNvPr>
@@ -11279,45 +10625,153 @@
         <p:spPr/>
         <p:txBody>
           <a:bodyPr vert="horz" lIns="91440" tIns="45720" rIns="91440" bIns="45720" rtlCol="0" anchor="t">
-            <a:normAutofit/>
+            <a:normAutofit fontScale="92500" lnSpcReduction="10000"/>
           </a:bodyPr>
           <a:lstStyle/>
           <a:p>
-            <a:pPr indent="0">
-              <a:buNone/>
-            </a:pPr>
-            <a:endParaRPr lang="en-US" sz="800" dirty="0"/>
-          </a:p>
-          <a:p>
             <a:pPr marL="0" indent="0">
               <a:buNone/>
             </a:pPr>
-            <a:endParaRPr lang="pt-BR" sz="800" dirty="0"/>
+            <a:r>
+              <a:rPr lang="pt-BR" dirty="0"/>
+              <a:t>Voltando ao problema do </a:t>
+            </a:r>
+            <a:r>
+              <a:rPr lang="pt-BR"/>
+              <a:t>início</a:t>
+            </a:r>
+            <a:r>
+              <a:rPr lang="pt-BR" dirty="0"/>
+              <a:t> da apresentação:</a:t>
+            </a:r>
+          </a:p>
+          <a:p>
+            <a:pPr marL="0" indent="0">
+              <a:buNone/>
+            </a:pPr>
+            <a:endParaRPr lang="pt-BR" dirty="0"/>
+          </a:p>
+          <a:p>
+            <a:pPr marL="0" indent="0">
+              <a:buNone/>
+            </a:pPr>
+            <a:r>
+              <a:rPr lang="pt-BR"/>
+              <a:t>Aqui estão os passos que serão seguidos para resolver o problema:</a:t>
+            </a:r>
+          </a:p>
+          <a:p>
+            <a:pPr marL="0" indent="0">
+              <a:buNone/>
+            </a:pPr>
+            <a:endParaRPr lang="pt-BR" dirty="0"/>
+          </a:p>
+          <a:p>
+            <a:pPr marL="0" indent="0">
+              <a:buNone/>
+            </a:pPr>
+            <a:r>
+              <a:rPr lang="pt-BR" sz="1900"/>
+              <a:t>1. Salvar temporariamente o que você está fazendo</a:t>
+            </a:r>
           </a:p>
           <a:p>
             <a:pPr>
               <a:buNone/>
             </a:pPr>
             <a:r>
-              <a:rPr lang="pt-BR" dirty="0"/>
-              <a:t>6.(Opcional) Apagar a </a:t>
-            </a:r>
-            <a:r>
-              <a:rPr lang="pt-BR" dirty="0" err="1"/>
+              <a:rPr lang="pt-BR" sz="1700" b="1" dirty="0" err="1">
+                <a:solidFill>
+                  <a:srgbClr val="FFC000"/>
+                </a:solidFill>
+                <a:latin typeface="Consolas"/>
+              </a:rPr>
+              <a:t>git</a:t>
+            </a:r>
+            <a:r>
+              <a:rPr lang="pt-BR" sz="1700" b="1" dirty="0">
+                <a:solidFill>
+                  <a:srgbClr val="FFC000"/>
+                </a:solidFill>
+                <a:latin typeface="Consolas"/>
+              </a:rPr>
+              <a:t> </a:t>
+            </a:r>
+            <a:r>
+              <a:rPr lang="pt-BR" sz="1700" b="1" dirty="0" err="1">
+                <a:solidFill>
+                  <a:srgbClr val="FFC000"/>
+                </a:solidFill>
+                <a:latin typeface="Consolas"/>
+              </a:rPr>
+              <a:t>stash</a:t>
+            </a:r>
+            <a:r>
+              <a:rPr lang="pt-BR" sz="1700" dirty="0">
+                <a:ea typeface="+mn-lt"/>
+                <a:cs typeface="+mn-lt"/>
+              </a:rPr>
+              <a:t> </a:t>
+            </a:r>
+            <a:r>
+              <a:rPr lang="pt-BR" sz="1700" b="1" dirty="0">
+                <a:ea typeface="+mn-lt"/>
+                <a:cs typeface="+mn-lt"/>
+              </a:rPr>
+              <a:t>: </a:t>
+            </a:r>
+            <a:r>
+              <a:rPr lang="pt-BR" sz="1700" dirty="0">
+                <a:ea typeface="+mn-lt"/>
+                <a:cs typeface="+mn-lt"/>
+              </a:rPr>
+              <a:t>Guarda temporariamente suas alterações não </a:t>
+            </a:r>
+            <a:r>
+              <a:rPr lang="pt-BR" sz="1700" dirty="0" err="1">
+                <a:ea typeface="+mn-lt"/>
+                <a:cs typeface="+mn-lt"/>
+              </a:rPr>
+              <a:t>confirmadas  e</a:t>
+            </a:r>
+            <a:r>
+              <a:rPr lang="pt-BR" sz="1700" dirty="0">
+                <a:ea typeface="+mn-lt"/>
+                <a:cs typeface="+mn-lt"/>
+              </a:rPr>
+              <a:t> limpa o diretório de trabalho, permitindo mudar de contexto sem perder nada.</a:t>
+            </a:r>
+            <a:endParaRPr lang="pt-BR" sz="1700"/>
+          </a:p>
+          <a:p>
+            <a:pPr>
+              <a:buNone/>
+            </a:pPr>
+            <a:endParaRPr lang="pt-BR" dirty="0"/>
+          </a:p>
+          <a:p>
+            <a:pPr>
+              <a:buNone/>
+            </a:pPr>
+            <a:r>
+              <a:rPr lang="pt-BR" sz="1900" dirty="0"/>
+              <a:t>2. Voltar para a </a:t>
+            </a:r>
+            <a:r>
+              <a:rPr lang="pt-BR" sz="1900" dirty="0" err="1"/>
               <a:t>branch</a:t>
             </a:r>
             <a:r>
-              <a:rPr lang="pt-BR" dirty="0"/>
-              <a:t> de correção</a:t>
-            </a:r>
-            <a:endParaRPr lang="en-US"/>
+              <a:rPr lang="pt-BR" sz="1900" dirty="0"/>
+              <a:t> principal</a:t>
+            </a:r>
           </a:p>
           <a:p>
             <a:pPr>
               <a:buNone/>
             </a:pPr>
             <a:r>
-              <a:rPr lang="pt-BR" sz="1600" b="1" dirty="0" err="1">
+              <a:rPr lang="pt-BR" sz="1700" b="1" err="1">
                 <a:solidFill>
                   <a:srgbClr val="FFC000"/>
                 </a:solidFill>
@@ -11326,275 +10780,79 @@
               <a:t>git</a:t>
             </a:r>
             <a:r>
-              <a:rPr lang="pt-BR" sz="1600" b="1" dirty="0">
+              <a:rPr lang="pt-BR" sz="1700" b="1" dirty="0">
                 <a:solidFill>
                   <a:srgbClr val="FFC000"/>
                 </a:solidFill>
                 <a:latin typeface="Consolas"/>
               </a:rPr>
-              <a:t> </a:t>
-            </a:r>
-            <a:r>
-              <a:rPr lang="pt-BR" sz="1600" b="1" dirty="0" err="1">
+              <a:t> checkout </a:t>
+            </a:r>
+            <a:r>
+              <a:rPr lang="pt-BR" sz="1700" b="1" err="1">
                 <a:solidFill>
                   <a:srgbClr val="FFC000"/>
                 </a:solidFill>
                 <a:latin typeface="Consolas"/>
               </a:rPr>
+              <a:t>main</a:t>
+            </a:r>
+            <a:r>
+              <a:rPr lang="pt-BR" sz="1700" b="1" dirty="0">
+                <a:ea typeface="+mn-lt"/>
+                <a:cs typeface="+mn-lt"/>
+              </a:rPr>
+              <a:t>: </a:t>
+            </a:r>
+            <a:r>
+              <a:rPr lang="pt-BR" sz="1700" dirty="0">
+                <a:ea typeface="+mn-lt"/>
+                <a:cs typeface="+mn-lt"/>
+              </a:rPr>
+              <a:t>Muda para a </a:t>
+            </a:r>
+            <a:r>
+              <a:rPr lang="pt-BR" sz="1700" err="1">
+                <a:ea typeface="+mn-lt"/>
+                <a:cs typeface="+mn-lt"/>
+              </a:rPr>
               <a:t>branch</a:t>
             </a:r>
             <a:r>
-              <a:rPr lang="pt-BR" sz="1600" b="1" dirty="0">
-                <a:solidFill>
-                  <a:srgbClr val="FFC000"/>
-                </a:solidFill>
-                <a:latin typeface="Consolas"/>
-              </a:rPr>
-              <a:t> -d </a:t>
-            </a:r>
-            <a:r>
-              <a:rPr lang="pt-BR" sz="1600" b="1" dirty="0" err="1">
-                <a:solidFill>
-                  <a:srgbClr val="FFC000"/>
-                </a:solidFill>
-                <a:latin typeface="Consolas"/>
-              </a:rPr>
-              <a:t>hotfix</a:t>
-            </a:r>
-            <a:r>
-              <a:rPr lang="pt-BR" sz="1600" b="1" dirty="0">
-                <a:solidFill>
-                  <a:srgbClr val="FFC000"/>
-                </a:solidFill>
-                <a:latin typeface="Consolas"/>
-              </a:rPr>
-              <a:t>-erro-</a:t>
-            </a:r>
-            <a:r>
-              <a:rPr lang="pt-BR" sz="1600" b="1" dirty="0" err="1">
-                <a:solidFill>
-                  <a:srgbClr val="FFC000"/>
-                </a:solidFill>
-                <a:latin typeface="Consolas"/>
-              </a:rPr>
-              <a:t>critico</a:t>
-            </a:r>
-            <a:r>
-              <a:rPr lang="pt-BR" sz="1600" dirty="0">
-                <a:latin typeface="Century Gothic"/>
-              </a:rPr>
-              <a:t>: Remove</a:t>
-            </a:r>
-            <a:r>
-              <a:rPr lang="pt-BR" sz="1600" dirty="0"/>
-              <a:t> a </a:t>
-            </a:r>
-            <a:r>
-              <a:rPr lang="pt-BR" sz="1600" dirty="0" err="1"/>
-              <a:t>branch</a:t>
-            </a:r>
-            <a:r>
-              <a:rPr lang="pt-BR" sz="1600" dirty="0"/>
-              <a:t> temporária após o uso.</a:t>
-            </a:r>
-            <a:br>
-              <a:rPr lang="en-US" sz="1600" dirty="0"/>
-            </a:br>
-            <a:endParaRPr lang="pt-BR" sz="1600">
-              <a:latin typeface="Century Gothic"/>
-              <a:ea typeface="Calibri"/>
-              <a:cs typeface="Calibri"/>
-            </a:endParaRPr>
+              <a:rPr lang="pt-BR" sz="1700" dirty="0">
+                <a:ea typeface="+mn-lt"/>
+                <a:cs typeface="+mn-lt"/>
+              </a:rPr>
+              <a:t> principal do projeto, onde está o </a:t>
+            </a:r>
+            <a:r>
+              <a:rPr lang="pt-BR" sz="1700">
+                <a:ea typeface="+mn-lt"/>
+                <a:cs typeface="+mn-lt"/>
+              </a:rPr>
+              <a:t>código “oficial</a:t>
+            </a:r>
+            <a:r>
+              <a:rPr lang="pt-BR" sz="1700" dirty="0">
+                <a:ea typeface="+mn-lt"/>
+                <a:cs typeface="+mn-lt"/>
+              </a:rPr>
+              <a:t>”.</a:t>
+            </a:r>
+            <a:endParaRPr lang="pt-BR" sz="1700" dirty="0"/>
           </a:p>
           <a:p>
             <a:pPr>
               <a:buNone/>
             </a:pPr>
-            <a:endParaRPr lang="en-US" sz="1600" dirty="0"/>
-          </a:p>
-          <a:p>
-            <a:pPr>
-              <a:buNone/>
-            </a:pPr>
-            <a:r>
-              <a:rPr lang="pt-BR" sz="1600" dirty="0"/>
-              <a:t> </a:t>
-            </a:r>
-            <a:r>
-              <a:rPr lang="pt-BR"/>
-              <a:t>7. Voltar ao que você estava fazendo antes</a:t>
-            </a:r>
-            <a:endParaRPr lang="en-US"/>
-          </a:p>
-          <a:p>
-            <a:pPr>
-              <a:buNone/>
-            </a:pPr>
-            <a:r>
-              <a:rPr lang="pt-BR" sz="1600" b="1" dirty="0" err="1">
-                <a:solidFill>
-                  <a:srgbClr val="FFC000"/>
-                </a:solidFill>
-                <a:latin typeface="Consolas"/>
-              </a:rPr>
-              <a:t>git</a:t>
-            </a:r>
-            <a:r>
-              <a:rPr lang="pt-BR" sz="1600" b="1" dirty="0">
-                <a:solidFill>
-                  <a:srgbClr val="FFC000"/>
-                </a:solidFill>
-                <a:latin typeface="Consolas"/>
-              </a:rPr>
-              <a:t> checkout sua-</a:t>
-            </a:r>
-            <a:r>
-              <a:rPr lang="pt-BR" sz="1600" b="1" dirty="0" err="1">
-                <a:solidFill>
-                  <a:srgbClr val="FFC000"/>
-                </a:solidFill>
-                <a:latin typeface="Consolas"/>
-              </a:rPr>
-              <a:t>branch</a:t>
-            </a:r>
-            <a:r>
-              <a:rPr lang="pt-BR" sz="1600" dirty="0">
-                <a:latin typeface="Century Gothic"/>
-              </a:rPr>
-              <a:t>: Retorna para sua </a:t>
-            </a:r>
-            <a:r>
-              <a:rPr lang="pt-BR" sz="1600" dirty="0" err="1">
-                <a:latin typeface="Century Gothic"/>
-              </a:rPr>
-              <a:t>branch</a:t>
-            </a:r>
-            <a:r>
-              <a:rPr lang="pt-BR" sz="1600" dirty="0">
-                <a:latin typeface="Century Gothic"/>
-              </a:rPr>
-              <a:t> de desenvolvimento </a:t>
-            </a:r>
-          </a:p>
-          <a:p>
-            <a:pPr>
-              <a:buNone/>
-            </a:pPr>
-            <a:r>
-              <a:rPr lang="pt-BR" sz="1600" b="1" dirty="0" err="1">
-                <a:solidFill>
-                  <a:srgbClr val="FFC000"/>
-                </a:solidFill>
-                <a:latin typeface="Consolas"/>
-              </a:rPr>
-              <a:t>git</a:t>
-            </a:r>
-            <a:r>
-              <a:rPr lang="pt-BR" sz="1600" b="1" dirty="0">
-                <a:solidFill>
-                  <a:srgbClr val="FFC000"/>
-                </a:solidFill>
-                <a:latin typeface="Consolas"/>
-              </a:rPr>
-              <a:t> </a:t>
-            </a:r>
-            <a:r>
-              <a:rPr lang="pt-BR" sz="1600" b="1" dirty="0" err="1">
-                <a:solidFill>
-                  <a:srgbClr val="FFC000"/>
-                </a:solidFill>
-                <a:latin typeface="Consolas"/>
-              </a:rPr>
-              <a:t>stash</a:t>
-            </a:r>
-            <a:r>
-              <a:rPr lang="pt-BR" sz="1600" b="1" dirty="0">
-                <a:solidFill>
-                  <a:srgbClr val="FFC000"/>
-                </a:solidFill>
-                <a:latin typeface="Consolas"/>
-              </a:rPr>
-              <a:t> pop</a:t>
-            </a:r>
-            <a:r>
-              <a:rPr lang="pt-BR" sz="1600" dirty="0">
-                <a:latin typeface="Century Gothic"/>
-              </a:rPr>
-              <a:t>: recupera o que você estava fazendo antes </a:t>
-            </a:r>
-          </a:p>
-          <a:p>
-            <a:pPr>
-              <a:buNone/>
-            </a:pPr>
-            <a:endParaRPr lang="pt-BR" sz="1600" dirty="0"/>
+            <a:endParaRPr lang="pt-BR" dirty="0"/>
           </a:p>
         </p:txBody>
       </p:sp>
-      <p:pic>
-        <p:nvPicPr>
-          <p:cNvPr id="4" name="Imagem 3">
-            <a:extLst>
-              <a:ext uri="{FF2B5EF4-FFF2-40B4-BE49-F238E27FC236}">
-                <a16:creationId xmlns:a16="http://schemas.microsoft.com/office/drawing/2014/main" id="{67262795-16FD-912E-D51B-D0F4886137A6}"/>
-              </a:ext>
-            </a:extLst>
-          </p:cNvPr>
-          <p:cNvPicPr>
-            <a:picLocks noChangeAspect="1"/>
-          </p:cNvPicPr>
-          <p:nvPr/>
-        </p:nvPicPr>
-        <p:blipFill>
-          <a:blip r:embed="rId2"/>
-          <a:stretch>
-            <a:fillRect/>
-          </a:stretch>
-        </p:blipFill>
-        <p:spPr>
-          <a:xfrm>
-            <a:off x="2589213" y="3568700"/>
-            <a:ext cx="7699375" cy="457200"/>
-          </a:xfrm>
-          <a:prstGeom prst="rect">
-            <a:avLst/>
-          </a:prstGeom>
-        </p:spPr>
-      </p:pic>
-      <p:pic>
-        <p:nvPicPr>
-          <p:cNvPr id="5" name="Imagem 4">
-            <a:extLst>
-              <a:ext uri="{FF2B5EF4-FFF2-40B4-BE49-F238E27FC236}">
-                <a16:creationId xmlns:a16="http://schemas.microsoft.com/office/drawing/2014/main" id="{83FB2147-BCBA-666A-EE9A-4EC48FE0CF54}"/>
-              </a:ext>
-            </a:extLst>
-          </p:cNvPr>
-          <p:cNvPicPr>
-            <a:picLocks noChangeAspect="1"/>
-          </p:cNvPicPr>
-          <p:nvPr/>
-        </p:nvPicPr>
-        <p:blipFill>
-          <a:blip r:embed="rId3"/>
-          <a:stretch>
-            <a:fillRect/>
-          </a:stretch>
-        </p:blipFill>
-        <p:spPr>
-          <a:xfrm>
-            <a:off x="2587625" y="5378450"/>
-            <a:ext cx="7702550" cy="520700"/>
-          </a:xfrm>
-          <a:prstGeom prst="rect">
-            <a:avLst/>
-          </a:prstGeom>
-        </p:spPr>
-      </p:pic>
     </p:spTree>
     <p:extLst>
       <p:ext uri="{BB962C8B-B14F-4D97-AF65-F5344CB8AC3E}">
-        <p14:creationId xmlns:p14="http://schemas.microsoft.com/office/powerpoint/2010/main" val="2842962354"/>
+        <p14:creationId xmlns:p14="http://schemas.microsoft.com/office/powerpoint/2010/main" val="2204593060"/>
       </p:ext>
     </p:extLst>
   </p:cSld>
@@ -11626,6 +10884,1014 @@
           <p:cNvPr id="2" name="Título 1">
             <a:extLst>
               <a:ext uri="{FF2B5EF4-FFF2-40B4-BE49-F238E27FC236}">
+                <a16:creationId xmlns:a16="http://schemas.microsoft.com/office/drawing/2014/main" id="{B030202A-434E-C143-E16A-301CE0C409B3}"/>
+              </a:ext>
+            </a:extLst>
+          </p:cNvPr>
+          <p:cNvSpPr>
+            <a:spLocks noGrp="1"/>
+          </p:cNvSpPr>
+          <p:nvPr>
+            <p:ph type="title"/>
+          </p:nvPr>
+        </p:nvSpPr>
+        <p:spPr/>
+        <p:txBody>
+          <a:bodyPr/>
+          <a:lstStyle/>
+          <a:p>
+            <a:r>
+              <a:rPr lang="pt-BR"/>
+              <a:t>Exemplo prático</a:t>
+            </a:r>
+          </a:p>
+        </p:txBody>
+      </p:sp>
+      <p:sp>
+        <p:nvSpPr>
+          <p:cNvPr id="3" name="Espaço Reservado para Conteúdo 2">
+            <a:extLst>
+              <a:ext uri="{FF2B5EF4-FFF2-40B4-BE49-F238E27FC236}">
+                <a16:creationId xmlns:a16="http://schemas.microsoft.com/office/drawing/2014/main" id="{90FBAB7E-6A0D-72F8-4557-CF94C58774EF}"/>
+              </a:ext>
+            </a:extLst>
+          </p:cNvPr>
+          <p:cNvSpPr>
+            <a:spLocks noGrp="1"/>
+          </p:cNvSpPr>
+          <p:nvPr>
+            <p:ph idx="1"/>
+          </p:nvPr>
+        </p:nvSpPr>
+        <p:spPr>
+          <a:xfrm>
+            <a:off x="2589212" y="1714500"/>
+            <a:ext cx="8905374" cy="4766679"/>
+          </a:xfrm>
+        </p:spPr>
+        <p:txBody>
+          <a:bodyPr vert="horz" lIns="91440" tIns="45720" rIns="91440" bIns="45720" rtlCol="0" anchor="t">
+            <a:normAutofit/>
+          </a:bodyPr>
+          <a:lstStyle/>
+          <a:p>
+            <a:pPr>
+              <a:buNone/>
+            </a:pPr>
+            <a:r>
+              <a:rPr lang="pt-BR" dirty="0"/>
+              <a:t>3. Criar uma nova </a:t>
+            </a:r>
+            <a:r>
+              <a:rPr lang="pt-BR" dirty="0" err="1"/>
+              <a:t>branch</a:t>
+            </a:r>
+            <a:r>
+              <a:rPr lang="pt-BR" dirty="0"/>
+              <a:t> para corrigir o erro</a:t>
+            </a:r>
+            <a:endParaRPr lang="en-US" dirty="0"/>
+          </a:p>
+          <a:p>
+            <a:pPr marL="0">
+              <a:buNone/>
+            </a:pPr>
+            <a:r>
+              <a:rPr lang="pt-BR" sz="1600" b="1" dirty="0" err="1">
+                <a:solidFill>
+                  <a:srgbClr val="FFC000"/>
+                </a:solidFill>
+                <a:latin typeface="Consolas"/>
+              </a:rPr>
+              <a:t>git</a:t>
+            </a:r>
+            <a:r>
+              <a:rPr lang="pt-BR" sz="1600" b="1" dirty="0">
+                <a:solidFill>
+                  <a:srgbClr val="FFC000"/>
+                </a:solidFill>
+                <a:latin typeface="Consolas"/>
+              </a:rPr>
+              <a:t> checkout -b </a:t>
+            </a:r>
+            <a:r>
+              <a:rPr lang="pt-BR" sz="1600" b="1" dirty="0" err="1">
+                <a:solidFill>
+                  <a:srgbClr val="FFC000"/>
+                </a:solidFill>
+                <a:latin typeface="Consolas"/>
+              </a:rPr>
+              <a:t>hotfix</a:t>
+            </a:r>
+            <a:r>
+              <a:rPr lang="pt-BR" sz="1600" b="1" dirty="0">
+                <a:solidFill>
+                  <a:srgbClr val="FFC000"/>
+                </a:solidFill>
+                <a:latin typeface="Consolas"/>
+              </a:rPr>
+              <a:t>-erro-</a:t>
+            </a:r>
+            <a:r>
+              <a:rPr lang="pt-BR" sz="1600" b="1" dirty="0" err="1">
+                <a:solidFill>
+                  <a:srgbClr val="FFC000"/>
+                </a:solidFill>
+                <a:latin typeface="Consolas"/>
+              </a:rPr>
+              <a:t>critico</a:t>
+            </a:r>
+            <a:r>
+              <a:rPr lang="pt-BR" sz="1600" b="1" dirty="0">
+                <a:solidFill>
+                  <a:srgbClr val="FFC000"/>
+                </a:solidFill>
+                <a:latin typeface="Consolas"/>
+              </a:rPr>
+              <a:t>:</a:t>
+            </a:r>
+            <a:r>
+              <a:rPr lang="pt-BR" sz="1600" b="1" dirty="0"/>
+              <a:t> </a:t>
+            </a:r>
+            <a:r>
+              <a:rPr lang="pt-BR" sz="1600" dirty="0"/>
+              <a:t>Cria e já muda para uma nova </a:t>
+            </a:r>
+            <a:r>
+              <a:rPr lang="pt-BR" sz="1600" dirty="0" err="1"/>
+              <a:t>branch</a:t>
+            </a:r>
+            <a:r>
+              <a:rPr lang="pt-BR" sz="1600" dirty="0"/>
+              <a:t>. Isso isola a correção sem afetar o código principal diretamente.</a:t>
+            </a:r>
+          </a:p>
+          <a:p>
+            <a:pPr>
+              <a:buNone/>
+            </a:pPr>
+            <a:endParaRPr lang="pt-BR" sz="1600" dirty="0"/>
+          </a:p>
+          <a:p>
+            <a:pPr>
+              <a:buNone/>
+            </a:pPr>
+            <a:endParaRPr lang="pt-BR" sz="1600" dirty="0"/>
+          </a:p>
+          <a:p>
+            <a:pPr>
+              <a:buNone/>
+            </a:pPr>
+            <a:r>
+              <a:rPr lang="pt-BR"/>
+              <a:t>4. Corrigir o erro e salvar</a:t>
+            </a:r>
+            <a:endParaRPr lang="en-US" dirty="0"/>
+          </a:p>
+          <a:p>
+            <a:pPr>
+              <a:buNone/>
+            </a:pPr>
+            <a:r>
+              <a:rPr lang="pt-BR" sz="1600" b="1" dirty="0" err="1">
+                <a:solidFill>
+                  <a:srgbClr val="FFC000"/>
+                </a:solidFill>
+                <a:latin typeface="Consolas"/>
+              </a:rPr>
+              <a:t>git</a:t>
+            </a:r>
+            <a:r>
+              <a:rPr lang="pt-BR" sz="1600" b="1" dirty="0">
+                <a:solidFill>
+                  <a:srgbClr val="FFC000"/>
+                </a:solidFill>
+                <a:latin typeface="Consolas"/>
+              </a:rPr>
+              <a:t> </a:t>
+            </a:r>
+            <a:r>
+              <a:rPr lang="pt-BR" sz="1600" b="1" dirty="0" err="1">
+                <a:solidFill>
+                  <a:srgbClr val="FFC000"/>
+                </a:solidFill>
+                <a:latin typeface="Consolas"/>
+              </a:rPr>
+              <a:t>add</a:t>
+            </a:r>
+            <a:r>
+              <a:rPr lang="pt-BR" sz="1600" b="1" dirty="0">
+                <a:solidFill>
+                  <a:srgbClr val="FFC000"/>
+                </a:solidFill>
+                <a:latin typeface="Consolas"/>
+              </a:rPr>
+              <a:t>:</a:t>
+            </a:r>
+            <a:r>
+              <a:rPr lang="pt-BR" sz="1600" dirty="0">
+                <a:latin typeface="Century Gothic"/>
+              </a:rPr>
+              <a:t> prepara as alterações para </a:t>
+            </a:r>
+            <a:r>
+              <a:rPr lang="pt-BR" sz="1600" dirty="0" err="1">
+                <a:latin typeface="Century Gothic"/>
+              </a:rPr>
+              <a:t>commit</a:t>
+            </a:r>
+            <a:r>
+              <a:rPr lang="pt-BR" sz="1600" dirty="0">
+                <a:latin typeface="Century Gothic"/>
+              </a:rPr>
+              <a:t> </a:t>
+            </a:r>
+          </a:p>
+          <a:p>
+            <a:pPr>
+              <a:buNone/>
+            </a:pPr>
+            <a:r>
+              <a:rPr lang="pt-BR" sz="1600" b="1" dirty="0" err="1">
+                <a:solidFill>
+                  <a:srgbClr val="FFC000"/>
+                </a:solidFill>
+                <a:latin typeface="Consolas"/>
+              </a:rPr>
+              <a:t>git</a:t>
+            </a:r>
+            <a:r>
+              <a:rPr lang="pt-BR" sz="1600" b="1" dirty="0">
+                <a:solidFill>
+                  <a:srgbClr val="FFC000"/>
+                </a:solidFill>
+                <a:latin typeface="Consolas"/>
+              </a:rPr>
+              <a:t> </a:t>
+            </a:r>
+            <a:r>
+              <a:rPr lang="pt-BR" sz="1600" b="1" dirty="0" err="1">
+                <a:solidFill>
+                  <a:srgbClr val="FFC000"/>
+                </a:solidFill>
+                <a:latin typeface="Consolas"/>
+              </a:rPr>
+              <a:t>commit</a:t>
+            </a:r>
+            <a:r>
+              <a:rPr lang="pt-BR" sz="1600" b="1" dirty="0">
+                <a:solidFill>
+                  <a:srgbClr val="FFC000"/>
+                </a:solidFill>
+                <a:latin typeface="Consolas"/>
+              </a:rPr>
+              <a:t> -m "Corrige erro crítico</a:t>
+            </a:r>
+            <a:r>
+              <a:rPr lang="pt-BR" sz="1600" dirty="0">
+                <a:latin typeface="Century Gothic"/>
+              </a:rPr>
+              <a:t>": salva a correção no histórico </a:t>
+            </a:r>
+          </a:p>
+          <a:p>
+            <a:pPr indent="0">
+              <a:buNone/>
+            </a:pPr>
+            <a:endParaRPr lang="en-US" sz="1600" dirty="0"/>
+          </a:p>
+          <a:p>
+            <a:pPr>
+              <a:buNone/>
+            </a:pPr>
+            <a:endParaRPr lang="pt-BR" dirty="0"/>
+          </a:p>
+        </p:txBody>
+      </p:sp>
+      <p:pic>
+        <p:nvPicPr>
+          <p:cNvPr id="6" name="Imagem 5" descr="Texto&#10;&#10;O conteúdo gerado por IA pode estar incorreto.">
+            <a:extLst>
+              <a:ext uri="{FF2B5EF4-FFF2-40B4-BE49-F238E27FC236}">
+                <a16:creationId xmlns:a16="http://schemas.microsoft.com/office/drawing/2014/main" id="{D39980C1-8926-7B59-D8FF-FE23611AA04B}"/>
+              </a:ext>
+            </a:extLst>
+          </p:cNvPr>
+          <p:cNvPicPr>
+            <a:picLocks noChangeAspect="1"/>
+          </p:cNvPicPr>
+          <p:nvPr/>
+        </p:nvPicPr>
+        <p:blipFill>
+          <a:blip r:embed="rId2"/>
+          <a:stretch>
+            <a:fillRect/>
+          </a:stretch>
+        </p:blipFill>
+        <p:spPr>
+          <a:xfrm>
+            <a:off x="2591301" y="2867276"/>
+            <a:ext cx="5124450" cy="561975"/>
+          </a:xfrm>
+          <a:prstGeom prst="rect">
+            <a:avLst/>
+          </a:prstGeom>
+        </p:spPr>
+      </p:pic>
+    </p:spTree>
+    <p:extLst>
+      <p:ext uri="{BB962C8B-B14F-4D97-AF65-F5344CB8AC3E}">
+        <p14:creationId xmlns:p14="http://schemas.microsoft.com/office/powerpoint/2010/main" val="2278136201"/>
+      </p:ext>
+    </p:extLst>
+  </p:cSld>
+  <p:clrMapOvr>
+    <a:masterClrMapping/>
+  </p:clrMapOvr>
+</p:sld>
+</file>
+
+<file path=ppt/slides/slide23.xml><?xml version="1.0" encoding="utf-8"?>
+<p:sld xmlns:a="http://schemas.openxmlformats.org/drawingml/2006/main" xmlns:r="http://schemas.openxmlformats.org/officeDocument/2006/relationships" xmlns:p="http://schemas.openxmlformats.org/presentationml/2006/main">
+  <p:cSld>
+    <p:spTree>
+      <p:nvGrpSpPr>
+        <p:cNvPr id="1" name=""/>
+        <p:cNvGrpSpPr/>
+        <p:nvPr/>
+      </p:nvGrpSpPr>
+      <p:grpSpPr>
+        <a:xfrm>
+          <a:off x="0" y="0"/>
+          <a:ext cx="0" cy="0"/>
+          <a:chOff x="0" y="0"/>
+          <a:chExt cx="0" cy="0"/>
+        </a:xfrm>
+      </p:grpSpPr>
+      <p:sp>
+        <p:nvSpPr>
+          <p:cNvPr id="2" name="Título 1">
+            <a:extLst>
+              <a:ext uri="{FF2B5EF4-FFF2-40B4-BE49-F238E27FC236}">
+                <a16:creationId xmlns:a16="http://schemas.microsoft.com/office/drawing/2014/main" id="{B2C02E43-8BD4-A130-5C1B-536765FD61A6}"/>
+              </a:ext>
+            </a:extLst>
+          </p:cNvPr>
+          <p:cNvSpPr>
+            <a:spLocks noGrp="1"/>
+          </p:cNvSpPr>
+          <p:nvPr>
+            <p:ph type="title"/>
+          </p:nvPr>
+        </p:nvSpPr>
+        <p:spPr/>
+        <p:txBody>
+          <a:bodyPr/>
+          <a:lstStyle/>
+          <a:p>
+            <a:r>
+              <a:rPr lang="pt-BR"/>
+              <a:t>Exemplo prático</a:t>
+            </a:r>
+          </a:p>
+        </p:txBody>
+      </p:sp>
+      <p:sp>
+        <p:nvSpPr>
+          <p:cNvPr id="3" name="Espaço Reservado para Conteúdo 2">
+            <a:extLst>
+              <a:ext uri="{FF2B5EF4-FFF2-40B4-BE49-F238E27FC236}">
+                <a16:creationId xmlns:a16="http://schemas.microsoft.com/office/drawing/2014/main" id="{5D97E820-7518-8F73-F70A-219E32E8C0BA}"/>
+              </a:ext>
+            </a:extLst>
+          </p:cNvPr>
+          <p:cNvSpPr>
+            <a:spLocks noGrp="1"/>
+          </p:cNvSpPr>
+          <p:nvPr>
+            <p:ph idx="1"/>
+          </p:nvPr>
+        </p:nvSpPr>
+        <p:spPr/>
+        <p:txBody>
+          <a:bodyPr vert="horz" lIns="91440" tIns="45720" rIns="91440" bIns="45720" rtlCol="0" anchor="t">
+            <a:normAutofit/>
+          </a:bodyPr>
+          <a:lstStyle/>
+          <a:p>
+            <a:pPr>
+              <a:buNone/>
+            </a:pPr>
+            <a:r>
+              <a:rPr lang="pt-BR" dirty="0"/>
+              <a:t>5. Aplicar a correção na </a:t>
+            </a:r>
+            <a:r>
+              <a:rPr lang="pt-BR" dirty="0" err="1"/>
+              <a:t>branch</a:t>
+            </a:r>
+            <a:r>
+              <a:rPr lang="pt-BR" dirty="0"/>
+              <a:t> principal</a:t>
+            </a:r>
+            <a:endParaRPr lang="en-US" dirty="0"/>
+          </a:p>
+          <a:p>
+            <a:pPr>
+              <a:buNone/>
+            </a:pPr>
+            <a:r>
+              <a:rPr lang="pt-BR" sz="1600" b="1" dirty="0" err="1">
+                <a:solidFill>
+                  <a:srgbClr val="FFC000"/>
+                </a:solidFill>
+                <a:latin typeface="Consolas"/>
+              </a:rPr>
+              <a:t>git</a:t>
+            </a:r>
+            <a:r>
+              <a:rPr lang="pt-BR" sz="1600" b="1" dirty="0">
+                <a:solidFill>
+                  <a:srgbClr val="FFC000"/>
+                </a:solidFill>
+                <a:latin typeface="Consolas"/>
+              </a:rPr>
+              <a:t> checkout </a:t>
+            </a:r>
+            <a:r>
+              <a:rPr lang="pt-BR" sz="1600" b="1" dirty="0" err="1">
+                <a:solidFill>
+                  <a:srgbClr val="FFC000"/>
+                </a:solidFill>
+                <a:latin typeface="Consolas"/>
+              </a:rPr>
+              <a:t>main</a:t>
+            </a:r>
+            <a:r>
+              <a:rPr lang="pt-BR" sz="1600" b="1" dirty="0">
+                <a:solidFill>
+                  <a:srgbClr val="FFC000"/>
+                </a:solidFill>
+                <a:latin typeface="Consolas"/>
+              </a:rPr>
+              <a:t>:</a:t>
+            </a:r>
+            <a:r>
+              <a:rPr lang="pt-BR" sz="1600" dirty="0"/>
+              <a:t> Volta para a </a:t>
+            </a:r>
+            <a:r>
+              <a:rPr lang="pt-BR" sz="1600" dirty="0" err="1"/>
+              <a:t>branch</a:t>
+            </a:r>
+            <a:r>
+              <a:rPr lang="pt-BR" sz="1600" dirty="0"/>
+              <a:t> principal</a:t>
+            </a:r>
+            <a:endParaRPr lang="en-US" sz="1600" dirty="0"/>
+          </a:p>
+          <a:p>
+            <a:pPr>
+              <a:buNone/>
+            </a:pPr>
+            <a:r>
+              <a:rPr lang="pt-BR" sz="1600" b="1" dirty="0" err="1">
+                <a:solidFill>
+                  <a:srgbClr val="FFC000"/>
+                </a:solidFill>
+                <a:latin typeface="Consolas"/>
+              </a:rPr>
+              <a:t>git</a:t>
+            </a:r>
+            <a:r>
+              <a:rPr lang="pt-BR" sz="1600" b="1" dirty="0">
+                <a:solidFill>
+                  <a:srgbClr val="FFC000"/>
+                </a:solidFill>
+                <a:latin typeface="Consolas"/>
+              </a:rPr>
+              <a:t> merge </a:t>
+            </a:r>
+            <a:r>
+              <a:rPr lang="pt-BR" sz="1600" b="1" dirty="0" err="1">
+                <a:solidFill>
+                  <a:srgbClr val="FFC000"/>
+                </a:solidFill>
+                <a:latin typeface="Consolas"/>
+              </a:rPr>
+              <a:t>hotfix</a:t>
+            </a:r>
+            <a:r>
+              <a:rPr lang="pt-BR" sz="1600" b="1" dirty="0">
+                <a:solidFill>
+                  <a:srgbClr val="FFC000"/>
+                </a:solidFill>
+                <a:latin typeface="Consolas"/>
+              </a:rPr>
+              <a:t>-erro-</a:t>
+            </a:r>
+            <a:r>
+              <a:rPr lang="pt-BR" sz="1600" b="1" dirty="0" err="1">
+                <a:solidFill>
+                  <a:srgbClr val="FFC000"/>
+                </a:solidFill>
+                <a:latin typeface="Consolas"/>
+              </a:rPr>
+              <a:t>critico</a:t>
+            </a:r>
+            <a:r>
+              <a:rPr lang="pt-BR" sz="1600" b="1" dirty="0">
+                <a:solidFill>
+                  <a:srgbClr val="FFC000"/>
+                </a:solidFill>
+                <a:latin typeface="Consolas"/>
+              </a:rPr>
+              <a:t>:</a:t>
+            </a:r>
+            <a:r>
+              <a:rPr lang="pt-BR" sz="1600" dirty="0"/>
+              <a:t> Junta (</a:t>
+            </a:r>
+            <a:r>
+              <a:rPr lang="pt-BR" sz="1600" i="1" dirty="0"/>
+              <a:t>merge</a:t>
+            </a:r>
+            <a:r>
+              <a:rPr lang="pt-BR" sz="1600" dirty="0"/>
+              <a:t>) a correção feita na </a:t>
+            </a:r>
+            <a:r>
+              <a:rPr lang="pt-BR" sz="1600" dirty="0" err="1"/>
+              <a:t>branch</a:t>
+            </a:r>
+            <a:r>
+              <a:rPr lang="pt-BR" sz="1600" dirty="0"/>
+              <a:t> de </a:t>
+            </a:r>
+            <a:r>
+              <a:rPr lang="pt-BR" sz="1600" dirty="0" err="1"/>
+              <a:t>hotfix</a:t>
+            </a:r>
+            <a:endParaRPr lang="pt-BR" dirty="0" err="1"/>
+          </a:p>
+        </p:txBody>
+      </p:sp>
+      <p:pic>
+        <p:nvPicPr>
+          <p:cNvPr id="4" name="Imagem 3" descr="Texto&#10;&#10;O conteúdo gerado por IA pode estar incorreto.">
+            <a:extLst>
+              <a:ext uri="{FF2B5EF4-FFF2-40B4-BE49-F238E27FC236}">
+                <a16:creationId xmlns:a16="http://schemas.microsoft.com/office/drawing/2014/main" id="{49411995-5F5A-E79C-9AF0-478665F29CE3}"/>
+              </a:ext>
+            </a:extLst>
+          </p:cNvPr>
+          <p:cNvPicPr>
+            <a:picLocks noChangeAspect="1"/>
+          </p:cNvPicPr>
+          <p:nvPr/>
+        </p:nvPicPr>
+        <p:blipFill>
+          <a:blip r:embed="rId2"/>
+          <a:srcRect r="204" b="-1961"/>
+          <a:stretch>
+            <a:fillRect/>
+          </a:stretch>
+        </p:blipFill>
+        <p:spPr>
+          <a:xfrm>
+            <a:off x="2591948" y="3759391"/>
+            <a:ext cx="5923910" cy="634603"/>
+          </a:xfrm>
+          <a:prstGeom prst="rect">
+            <a:avLst/>
+          </a:prstGeom>
+        </p:spPr>
+      </p:pic>
+    </p:spTree>
+    <p:extLst>
+      <p:ext uri="{BB962C8B-B14F-4D97-AF65-F5344CB8AC3E}">
+        <p14:creationId xmlns:p14="http://schemas.microsoft.com/office/powerpoint/2010/main" val="3195023494"/>
+      </p:ext>
+    </p:extLst>
+  </p:cSld>
+  <p:clrMapOvr>
+    <a:masterClrMapping/>
+  </p:clrMapOvr>
+</p:sld>
+</file>
+
+<file path=ppt/slides/slide24.xml><?xml version="1.0" encoding="utf-8"?>
+<p:sld xmlns:a="http://schemas.openxmlformats.org/drawingml/2006/main" xmlns:r="http://schemas.openxmlformats.org/officeDocument/2006/relationships" xmlns:p="http://schemas.openxmlformats.org/presentationml/2006/main">
+  <p:cSld>
+    <p:spTree>
+      <p:nvGrpSpPr>
+        <p:cNvPr id="1" name=""/>
+        <p:cNvGrpSpPr/>
+        <p:nvPr/>
+      </p:nvGrpSpPr>
+      <p:grpSpPr>
+        <a:xfrm>
+          <a:off x="0" y="0"/>
+          <a:ext cx="0" cy="0"/>
+          <a:chOff x="0" y="0"/>
+          <a:chExt cx="0" cy="0"/>
+        </a:xfrm>
+      </p:grpSpPr>
+      <p:sp>
+        <p:nvSpPr>
+          <p:cNvPr id="2" name="Título 1">
+            <a:extLst>
+              <a:ext uri="{FF2B5EF4-FFF2-40B4-BE49-F238E27FC236}">
+                <a16:creationId xmlns:a16="http://schemas.microsoft.com/office/drawing/2014/main" id="{EBA43D66-D1A5-D712-35D2-EC7476137982}"/>
+              </a:ext>
+            </a:extLst>
+          </p:cNvPr>
+          <p:cNvSpPr>
+            <a:spLocks noGrp="1"/>
+          </p:cNvSpPr>
+          <p:nvPr>
+            <p:ph type="title"/>
+          </p:nvPr>
+        </p:nvSpPr>
+        <p:spPr/>
+        <p:txBody>
+          <a:bodyPr/>
+          <a:lstStyle/>
+          <a:p>
+            <a:r>
+              <a:rPr lang="pt-BR"/>
+              <a:t>Exemplo prático</a:t>
+            </a:r>
+          </a:p>
+        </p:txBody>
+      </p:sp>
+      <p:sp>
+        <p:nvSpPr>
+          <p:cNvPr id="3" name="Espaço Reservado para Conteúdo 2">
+            <a:extLst>
+              <a:ext uri="{FF2B5EF4-FFF2-40B4-BE49-F238E27FC236}">
+                <a16:creationId xmlns:a16="http://schemas.microsoft.com/office/drawing/2014/main" id="{68AE4F73-8AE1-B869-AD7A-6EA2A99A1AA0}"/>
+              </a:ext>
+            </a:extLst>
+          </p:cNvPr>
+          <p:cNvSpPr>
+            <a:spLocks noGrp="1"/>
+          </p:cNvSpPr>
+          <p:nvPr>
+            <p:ph idx="1"/>
+          </p:nvPr>
+        </p:nvSpPr>
+        <p:spPr/>
+        <p:txBody>
+          <a:bodyPr vert="horz" lIns="91440" tIns="45720" rIns="91440" bIns="45720" rtlCol="0" anchor="t">
+            <a:normAutofit/>
+          </a:bodyPr>
+          <a:lstStyle/>
+          <a:p>
+            <a:pPr indent="0">
+              <a:buNone/>
+            </a:pPr>
+            <a:endParaRPr lang="en-US" sz="800" dirty="0"/>
+          </a:p>
+          <a:p>
+            <a:pPr>
+              <a:buNone/>
+            </a:pPr>
+            <a:r>
+              <a:rPr lang="pt-BR" dirty="0"/>
+              <a:t>6.(Opcional) Apagar a </a:t>
+            </a:r>
+            <a:r>
+              <a:rPr lang="pt-BR" dirty="0" err="1"/>
+              <a:t>branch</a:t>
+            </a:r>
+            <a:r>
+              <a:rPr lang="pt-BR" dirty="0"/>
+              <a:t> de correção</a:t>
+            </a:r>
+            <a:endParaRPr lang="en-US"/>
+          </a:p>
+          <a:p>
+            <a:pPr>
+              <a:buNone/>
+            </a:pPr>
+            <a:r>
+              <a:rPr lang="pt-BR" sz="1600" b="1" err="1">
+                <a:solidFill>
+                  <a:srgbClr val="FFC000"/>
+                </a:solidFill>
+                <a:latin typeface="Consolas"/>
+              </a:rPr>
+              <a:t>git</a:t>
+            </a:r>
+            <a:r>
+              <a:rPr lang="pt-BR" sz="1600" b="1" dirty="0">
+                <a:solidFill>
+                  <a:srgbClr val="FFC000"/>
+                </a:solidFill>
+                <a:latin typeface="Consolas"/>
+              </a:rPr>
+              <a:t> </a:t>
+            </a:r>
+            <a:r>
+              <a:rPr lang="pt-BR" sz="1600" b="1" err="1">
+                <a:solidFill>
+                  <a:srgbClr val="FFC000"/>
+                </a:solidFill>
+                <a:latin typeface="Consolas"/>
+              </a:rPr>
+              <a:t>branch</a:t>
+            </a:r>
+            <a:r>
+              <a:rPr lang="pt-BR" sz="1600" b="1" dirty="0">
+                <a:solidFill>
+                  <a:srgbClr val="FFC000"/>
+                </a:solidFill>
+                <a:latin typeface="Consolas"/>
+              </a:rPr>
+              <a:t> -d </a:t>
+            </a:r>
+            <a:r>
+              <a:rPr lang="pt-BR" sz="1600" b="1" err="1">
+                <a:solidFill>
+                  <a:srgbClr val="FFC000"/>
+                </a:solidFill>
+                <a:latin typeface="Consolas"/>
+              </a:rPr>
+              <a:t>hotfix</a:t>
+            </a:r>
+            <a:r>
+              <a:rPr lang="pt-BR" sz="1600" b="1" dirty="0">
+                <a:solidFill>
+                  <a:srgbClr val="FFC000"/>
+                </a:solidFill>
+                <a:latin typeface="Consolas"/>
+              </a:rPr>
+              <a:t>-erro-</a:t>
+            </a:r>
+            <a:r>
+              <a:rPr lang="pt-BR" sz="1600" b="1" err="1">
+                <a:solidFill>
+                  <a:srgbClr val="FFC000"/>
+                </a:solidFill>
+                <a:latin typeface="Consolas"/>
+              </a:rPr>
+              <a:t>critico</a:t>
+            </a:r>
+            <a:r>
+              <a:rPr lang="pt-BR" sz="1600" dirty="0">
+                <a:latin typeface="Century Gothic"/>
+              </a:rPr>
+              <a:t>: Remove</a:t>
+            </a:r>
+            <a:r>
+              <a:rPr lang="pt-BR" sz="1600" dirty="0"/>
+              <a:t> a </a:t>
+            </a:r>
+            <a:r>
+              <a:rPr lang="pt-BR" sz="1600" err="1"/>
+              <a:t>branch</a:t>
+            </a:r>
+            <a:r>
+              <a:rPr lang="pt-BR" sz="1600"/>
+              <a:t> temporária após o uso.</a:t>
+            </a:r>
+            <a:br>
+              <a:rPr lang="en-US" sz="1600" dirty="0"/>
+            </a:br>
+            <a:endParaRPr lang="pt-BR" sz="1600">
+              <a:latin typeface="Century Gothic"/>
+              <a:ea typeface="Calibri"/>
+              <a:cs typeface="Calibri"/>
+            </a:endParaRPr>
+          </a:p>
+          <a:p>
+            <a:pPr>
+              <a:buNone/>
+            </a:pPr>
+            <a:endParaRPr lang="en-US" sz="1600" dirty="0"/>
+          </a:p>
+          <a:p>
+            <a:pPr>
+              <a:buNone/>
+            </a:pPr>
+            <a:endParaRPr lang="en-US" sz="1600" dirty="0"/>
+          </a:p>
+          <a:p>
+            <a:pPr>
+              <a:buNone/>
+            </a:pPr>
+            <a:r>
+              <a:rPr lang="pt-BR" sz="1600" dirty="0"/>
+              <a:t> </a:t>
+            </a:r>
+            <a:r>
+              <a:rPr lang="pt-BR"/>
+              <a:t>7. Voltar ao que você estava fazendo antes</a:t>
+            </a:r>
+            <a:endParaRPr lang="en-US"/>
+          </a:p>
+          <a:p>
+            <a:pPr>
+              <a:buNone/>
+            </a:pPr>
+            <a:r>
+              <a:rPr lang="pt-BR" sz="1600" b="1" dirty="0" err="1">
+                <a:solidFill>
+                  <a:srgbClr val="FFC000"/>
+                </a:solidFill>
+                <a:latin typeface="Consolas"/>
+              </a:rPr>
+              <a:t>git</a:t>
+            </a:r>
+            <a:r>
+              <a:rPr lang="pt-BR" sz="1600" b="1" dirty="0">
+                <a:solidFill>
+                  <a:srgbClr val="FFC000"/>
+                </a:solidFill>
+                <a:latin typeface="Consolas"/>
+              </a:rPr>
+              <a:t> checkout sua-</a:t>
+            </a:r>
+            <a:r>
+              <a:rPr lang="pt-BR" sz="1600" b="1" dirty="0" err="1">
+                <a:solidFill>
+                  <a:srgbClr val="FFC000"/>
+                </a:solidFill>
+                <a:latin typeface="Consolas"/>
+              </a:rPr>
+              <a:t>branch</a:t>
+            </a:r>
+            <a:r>
+              <a:rPr lang="pt-BR" sz="1600" dirty="0">
+                <a:latin typeface="Century Gothic"/>
+              </a:rPr>
+              <a:t>: Retorna para sua </a:t>
+            </a:r>
+            <a:r>
+              <a:rPr lang="pt-BR" sz="1600" dirty="0" err="1">
+                <a:latin typeface="Century Gothic"/>
+              </a:rPr>
+              <a:t>branch</a:t>
+            </a:r>
+            <a:r>
+              <a:rPr lang="pt-BR" sz="1600" dirty="0">
+                <a:latin typeface="Century Gothic"/>
+              </a:rPr>
+              <a:t> de desenvolvimento </a:t>
+            </a:r>
+          </a:p>
+          <a:p>
+            <a:pPr>
+              <a:buNone/>
+            </a:pPr>
+            <a:r>
+              <a:rPr lang="pt-BR" sz="1600" b="1" dirty="0" err="1">
+                <a:solidFill>
+                  <a:srgbClr val="FFC000"/>
+                </a:solidFill>
+                <a:latin typeface="Consolas"/>
+              </a:rPr>
+              <a:t>git</a:t>
+            </a:r>
+            <a:r>
+              <a:rPr lang="pt-BR" sz="1600" b="1" dirty="0">
+                <a:solidFill>
+                  <a:srgbClr val="FFC000"/>
+                </a:solidFill>
+                <a:latin typeface="Consolas"/>
+              </a:rPr>
+              <a:t> </a:t>
+            </a:r>
+            <a:r>
+              <a:rPr lang="pt-BR" sz="1600" b="1" dirty="0" err="1">
+                <a:solidFill>
+                  <a:srgbClr val="FFC000"/>
+                </a:solidFill>
+                <a:latin typeface="Consolas"/>
+              </a:rPr>
+              <a:t>stash</a:t>
+            </a:r>
+            <a:r>
+              <a:rPr lang="pt-BR" sz="1600" b="1" dirty="0">
+                <a:solidFill>
+                  <a:srgbClr val="FFC000"/>
+                </a:solidFill>
+                <a:latin typeface="Consolas"/>
+              </a:rPr>
+              <a:t> pop</a:t>
+            </a:r>
+            <a:r>
+              <a:rPr lang="pt-BR" sz="1600" dirty="0">
+                <a:latin typeface="Century Gothic"/>
+              </a:rPr>
+              <a:t>: recupera o que você estava fazendo antes </a:t>
+            </a:r>
+          </a:p>
+          <a:p>
+            <a:pPr>
+              <a:buNone/>
+            </a:pPr>
+            <a:endParaRPr lang="pt-BR" sz="1600" dirty="0"/>
+          </a:p>
+        </p:txBody>
+      </p:sp>
+      <p:pic>
+        <p:nvPicPr>
+          <p:cNvPr id="6" name="Imagem 5" descr="Texto&#10;&#10;O conteúdo gerado por IA pode estar incorreto.">
+            <a:extLst>
+              <a:ext uri="{FF2B5EF4-FFF2-40B4-BE49-F238E27FC236}">
+                <a16:creationId xmlns:a16="http://schemas.microsoft.com/office/drawing/2014/main" id="{450108F9-4873-56A1-A26F-F53D1B4AC01A}"/>
+              </a:ext>
+            </a:extLst>
+          </p:cNvPr>
+          <p:cNvPicPr>
+            <a:picLocks noChangeAspect="1"/>
+          </p:cNvPicPr>
+          <p:nvPr/>
+        </p:nvPicPr>
+        <p:blipFill>
+          <a:blip r:embed="rId2"/>
+          <a:stretch>
+            <a:fillRect/>
+          </a:stretch>
+        </p:blipFill>
+        <p:spPr>
+          <a:xfrm>
+            <a:off x="2588795" y="3332246"/>
+            <a:ext cx="6382752" cy="684797"/>
+          </a:xfrm>
+          <a:prstGeom prst="rect">
+            <a:avLst/>
+          </a:prstGeom>
+        </p:spPr>
+      </p:pic>
+      <p:pic>
+        <p:nvPicPr>
+          <p:cNvPr id="7" name="Imagem 6">
+            <a:extLst>
+              <a:ext uri="{FF2B5EF4-FFF2-40B4-BE49-F238E27FC236}">
+                <a16:creationId xmlns:a16="http://schemas.microsoft.com/office/drawing/2014/main" id="{71813440-C077-B5A4-908E-377CED545BFD}"/>
+              </a:ext>
+            </a:extLst>
+          </p:cNvPr>
+          <p:cNvPicPr>
+            <a:picLocks noChangeAspect="1"/>
+          </p:cNvPicPr>
+          <p:nvPr/>
+        </p:nvPicPr>
+        <p:blipFill>
+          <a:blip r:embed="rId3"/>
+          <a:stretch>
+            <a:fillRect/>
+          </a:stretch>
+        </p:blipFill>
+        <p:spPr>
+          <a:xfrm>
+            <a:off x="2597317" y="5475121"/>
+            <a:ext cx="5643813" cy="680285"/>
+          </a:xfrm>
+          <a:prstGeom prst="rect">
+            <a:avLst/>
+          </a:prstGeom>
+        </p:spPr>
+      </p:pic>
+    </p:spTree>
+    <p:extLst>
+      <p:ext uri="{BB962C8B-B14F-4D97-AF65-F5344CB8AC3E}">
+        <p14:creationId xmlns:p14="http://schemas.microsoft.com/office/powerpoint/2010/main" val="2842962354"/>
+      </p:ext>
+    </p:extLst>
+  </p:cSld>
+  <p:clrMapOvr>
+    <a:masterClrMapping/>
+  </p:clrMapOvr>
+</p:sld>
+</file>
+
+<file path=ppt/slides/slide25.xml><?xml version="1.0" encoding="utf-8"?>
+<p:sld xmlns:a="http://schemas.openxmlformats.org/drawingml/2006/main" xmlns:r="http://schemas.openxmlformats.org/officeDocument/2006/relationships" xmlns:p="http://schemas.openxmlformats.org/presentationml/2006/main">
+  <p:cSld>
+    <p:spTree>
+      <p:nvGrpSpPr>
+        <p:cNvPr id="1" name=""/>
+        <p:cNvGrpSpPr/>
+        <p:nvPr/>
+      </p:nvGrpSpPr>
+      <p:grpSpPr>
+        <a:xfrm>
+          <a:off x="0" y="0"/>
+          <a:ext cx="0" cy="0"/>
+          <a:chOff x="0" y="0"/>
+          <a:chExt cx="0" cy="0"/>
+        </a:xfrm>
+      </p:grpSpPr>
+      <p:sp>
+        <p:nvSpPr>
+          <p:cNvPr id="2" name="Título 1">
+            <a:extLst>
+              <a:ext uri="{FF2B5EF4-FFF2-40B4-BE49-F238E27FC236}">
                 <a16:creationId xmlns:a16="http://schemas.microsoft.com/office/drawing/2014/main" id="{DA848BF1-DF79-8CDA-8CAA-FFFA69DB126C}"/>
               </a:ext>
             </a:extLst>
@@ -11824,7 +12090,7 @@
 </p:sld>
 </file>
 
-<file path=ppt/slides/slide23.xml><?xml version="1.0" encoding="utf-8"?>
+<file path=ppt/slides/slide26.xml><?xml version="1.0" encoding="utf-8"?>
 <p:sld xmlns:a="http://schemas.openxmlformats.org/drawingml/2006/main" xmlns:r="http://schemas.openxmlformats.org/officeDocument/2006/relationships" xmlns:p="http://schemas.openxmlformats.org/presentationml/2006/main">
   <p:cSld>
     <p:spTree>
